--- a/fixtures/real-world/worldbank-cpf-concept-note-fr.pptx
+++ b/fixtures/real-world/worldbank-cpf-concept-note-fr.pptx
@@ -584,7 +584,7 @@
                 <a:ea typeface="+mn-ea"/>
                 <a:cs typeface="Arial" panose="020B0604020202020204" pitchFamily="34" charset="0"/>
               </a:rPr>
-              <a:t>Poverty rates and total number of poor </a:t>
+              <a:t>FR: Poverty rates and total number of poor </a:t>
             </a:r>
           </a:p>
         </c:rich>
@@ -4884,7 +4884,7 @@
                 </a:pPr>
                 <a:r>
                   <a:rPr lang="en-US"/>
-                  <a:t>Taxa de Pobreza (%)</a:t>
+                  <a:t>FR: Taxa de Pobreza (%)</a:t>
                 </a:r>
               </a:p>
             </c:rich>
@@ -4982,7 +4982,7 @@
                 </a:pPr>
                 <a:r>
                   <a:rPr lang="en-US" dirty="0" err="1"/>
-                  <a:t>Número</a:t>
+                  <a:t>FR: Número</a:t>
                 </a:r>
                 <a:r>
                   <a:rPr lang="en-US" dirty="0"/>
@@ -4990,7 +4990,7 @@
                 </a:r>
                 <a:r>
                   <a:rPr lang="en-US" dirty="0" err="1"/>
-                  <a:t>pobres</a:t>
+                  <a:t>FR: pobres</a:t>
                 </a:r>
                 <a:r>
                   <a:rPr lang="en-US" dirty="0"/>
@@ -5325,7 +5325,7 @@
                 </a:solidFill>
                 <a:latin typeface="+mj-lt"/>
               </a:rPr>
-              <a:t>Funding</a:t>
+              <a:t>FR: Funding</a:t>
             </a:r>
             <a:r>
               <a:rPr lang="en-US" sz="1000" b="1" baseline="0" dirty="0">
@@ -5343,7 +5343,7 @@
                 </a:solidFill>
                 <a:latin typeface="+mj-lt"/>
               </a:rPr>
-              <a:t>objectives</a:t>
+              <a:t>FR: objectives</a:t>
             </a:r>
             <a:r>
               <a:rPr lang="en-US" sz="1000" b="1" baseline="0" dirty="0">
@@ -5361,8 +5361,27 @@
                 </a:solidFill>
                 <a:latin typeface="+mj-lt"/>
               </a:rPr>
-              <a:t>in the FY17-21 CPF period (% of total commitments)
-</a:t>
+              <a:t>FR: in the FY17-21 CPF period (% of total commitments)</a:t>
+            </a:r>
+            <a:br/>
+            <a:r>
+              <a:rPr lang="en-US" sz="1000" b="1" dirty="0">
+                <a:solidFill>
+                  <a:schemeClr val="tx1"/>
+                </a:solidFill>
+                <a:latin typeface="+mj-lt"/>
+              </a:rPr>
+              <a:t/>
+            </a:r>
+            <a:br/>
+            <a:r>
+              <a:rPr lang="en-US" sz="1000" b="1" dirty="0">
+                <a:solidFill>
+                  <a:schemeClr val="tx1"/>
+                </a:solidFill>
+                <a:latin typeface="+mj-lt"/>
+              </a:rPr>
+              <a:t/>
             </a:r>
             <a:r>
               <a:rPr lang="pt-BR" sz="1000" b="0" dirty="0">
@@ -5680,8 +5699,17 @@
                     </a:pPr>
                     <a:r>
                       <a:rPr lang="en-US"/>
-                      <a:t>1: Improved economic management, 6.6%
-</a:t>
+                      <a:t>FR: 1: Improved economic management, 6.6%</a:t>
+                    </a:r>
+                    <a:br/>
+                    <a:r>
+                      <a:rPr lang="en-US"/>
+                      <a:t/>
+                    </a:r>
+                    <a:br/>
+                    <a:r>
+                      <a:rPr lang="en-US"/>
+                      <a:t/>
                     </a:r>
                     <a:endParaRPr lang="en-US" baseline="0"/>
                   </a:p>
@@ -5756,8 +5784,17 @@
                     </a:pPr>
                     <a:r>
                       <a:rPr lang="en-US"/>
-                      <a:t>2: Increase in Agricultural Growth, 30.2%
-</a:t>
+                      <a:t>FR: 2: Increase in Agricultural Growth, 30.2%</a:t>
+                    </a:r>
+                    <a:br/>
+                    <a:r>
+                      <a:rPr lang="en-US"/>
+                      <a:t/>
+                    </a:r>
+                    <a:br/>
+                    <a:r>
+                      <a:rPr lang="en-US"/>
+                      <a:t/>
                     </a:r>
                     <a:endParaRPr lang="en-US" baseline="0"/>
                   </a:p>
@@ -5832,8 +5869,17 @@
                     </a:pPr>
                     <a:r>
                       <a:rPr lang="en-US"/>
-                      <a:t>3: Improving the Business Environment for Job Creation, 3.5%
-</a:t>
+                      <a:t>FR: 3: Improving the Business Environment for Job Creation, 3.5%</a:t>
+                    </a:r>
+                    <a:br/>
+                    <a:r>
+                      <a:rPr lang="en-US"/>
+                      <a:t/>
+                    </a:r>
+                    <a:br/>
+                    <a:r>
+                      <a:rPr lang="en-US"/>
+                      <a:t/>
                     </a:r>
                     <a:endParaRPr lang="en-US" baseline="0"/>
                   </a:p>
@@ -5908,8 +5954,17 @@
                     </a:pPr>
                     <a:r>
                       <a:rPr lang="en-US"/>
-                      <a:t>4: Expand access and improve electricity reliability, 8.0%
-</a:t>
+                      <a:t>FR: 4: Expand access and improve electricity reliability, 8.0%</a:t>
+                    </a:r>
+                    <a:br/>
+                    <a:r>
+                      <a:rPr lang="en-US"/>
+                      <a:t/>
+                    </a:r>
+                    <a:br/>
+                    <a:r>
+                      <a:rPr lang="en-US"/>
+                      <a:t/>
                     </a:r>
                     <a:endParaRPr lang="en-US" baseline="0"/>
                   </a:p>
@@ -5984,8 +6039,17 @@
                     </a:pPr>
                     <a:r>
                       <a:rPr lang="en-US"/>
-                      <a:t>5: Improve the Skills Base, 13.8%
-</a:t>
+                      <a:t>FR: 5: Improve the Skills Base, 13.8%</a:t>
+                    </a:r>
+                    <a:br/>
+                    <a:r>
+                      <a:rPr lang="en-US"/>
+                      <a:t/>
+                    </a:r>
+                    <a:br/>
+                    <a:r>
+                      <a:rPr lang="en-US"/>
+                      <a:t/>
                     </a:r>
                     <a:endParaRPr lang="en-US" baseline="0"/>
                   </a:p>
@@ -6060,8 +6124,17 @@
                     </a:pPr>
                     <a:r>
                       <a:rPr lang="en-US"/>
-                      <a:t>6: Improving the provision of the Health Service, 2.8%
-</a:t>
+                      <a:t>FR: 6: Improving the provision of the Health Service, 2.8%</a:t>
+                    </a:r>
+                    <a:br/>
+                    <a:r>
+                      <a:rPr lang="en-US"/>
+                      <a:t/>
+                    </a:r>
+                    <a:br/>
+                    <a:r>
+                      <a:rPr lang="en-US"/>
+                      <a:t/>
                     </a:r>
                     <a:endParaRPr lang="en-US" baseline="0"/>
                   </a:p>
@@ -6136,8 +6209,17 @@
                     </a:pPr>
                     <a:r>
                       <a:rPr lang="en-US"/>
-                      <a:t>7: Improving access to water and sanitation, 6.6%
-</a:t>
+                      <a:t>FR: 7: Improving access to water and sanitation, 6.6%</a:t>
+                    </a:r>
+                    <a:br/>
+                    <a:r>
+                      <a:rPr lang="en-US"/>
+                      <a:t/>
+                    </a:r>
+                    <a:br/>
+                    <a:r>
+                      <a:rPr lang="en-US"/>
+                      <a:t/>
                     </a:r>
                     <a:endParaRPr lang="en-US" baseline="0"/>
                   </a:p>
@@ -6212,8 +6294,17 @@
                     </a:pPr>
                     <a:r>
                       <a:rPr lang="en-US"/>
-                      <a:t>8: Support for Recovery and Resilience, 21.1%
-</a:t>
+                      <a:t>FR: 8: Support for Recovery and Resilience, 21.1%</a:t>
+                    </a:r>
+                    <a:br/>
+                    <a:r>
+                      <a:rPr lang="en-US"/>
+                      <a:t/>
+                    </a:r>
+                    <a:br/>
+                    <a:r>
+                      <a:rPr lang="en-US"/>
+                      <a:t/>
                     </a:r>
                     <a:endParaRPr lang="en-US" baseline="0"/>
                   </a:p>
@@ -6288,8 +6379,17 @@
                     </a:pPr>
                     <a:r>
                       <a:rPr lang="en-US" dirty="0"/>
-                      <a:t>9: Promoting Inclusive Urbanization and Decentralization7.5%
-</a:t>
+                      <a:t>FR: 9: Promoting Inclusive Urbanization and Decentralization7.5%</a:t>
+                    </a:r>
+                    <a:br/>
+                    <a:r>
+                      <a:rPr lang="en-US" dirty="0"/>
+                      <a:t/>
+                    </a:r>
+                    <a:br/>
+                    <a:r>
+                      <a:rPr lang="en-US" dirty="0"/>
+                      <a:t/>
                     </a:r>
                     <a:endParaRPr lang="en-US" baseline="0" dirty="0"/>
                   </a:p>
@@ -6540,12 +6640,21 @@
                   <a:schemeClr val="tx1"/>
                 </a:solidFill>
               </a:rPr>
-              <a:t>% of total undisbursed funds</a:t>
+              <a:t>FR: % of total undisbursed funds</a:t>
             </a:r>
             <a:r>
               <a:rPr lang="en-US" dirty="0"/>
-              <a:t>*
-</a:t>
+              <a:t>*</a:t>
+            </a:r>
+            <a:br/>
+            <a:r>
+              <a:rPr lang="en-US" dirty="0"/>
+              <a:t/>
+            </a:r>
+            <a:br/>
+            <a:r>
+              <a:rPr lang="en-US" dirty="0"/>
+              <a:t/>
             </a:r>
           </a:p>
         </c:rich>
@@ -6896,7 +7005,7 @@
             </a:pPr>
             <a:r>
               <a:rPr lang="en-US" b="1" dirty="0"/>
-              <a:t>Nominal GDP per Capita (1998 - 2021) </a:t>
+              <a:t>FR: Nominal GDP per Capita (1998 - 2021) </a:t>
             </a:r>
           </a:p>
         </c:rich>
@@ -7250,7 +7359,7 @@
                 </a:pPr>
                 <a:r>
                   <a:rPr lang="en-US"/>
-                  <a:t>USD</a:t>
+                  <a:t>FR: USD</a:t>
                 </a:r>
               </a:p>
             </c:rich>
@@ -7394,7 +7503,7 @@
             </a:pPr>
             <a:r>
               <a:rPr lang="en-US" sz="1000" b="1" dirty="0"/>
-              <a:t>Ghana</a:t>
+              <a:t>FR: Ghana</a:t>
             </a:r>
           </a:p>
         </c:rich>
@@ -9250,7 +9359,7 @@
             </a:pPr>
             <a:r>
               <a:rPr lang="en-US" sz="1000" b="1" dirty="0"/>
-              <a:t>Mozambique</a:t>
+              <a:t>FR: Mozambique</a:t>
             </a:r>
           </a:p>
         </c:rich>
@@ -10206,7 +10315,7 @@
             </a:pPr>
             <a:r>
               <a:rPr lang="pt-PT" b="1" dirty="0"/>
-              <a:t>Crescimento Real do PIB (billion de Meticais )</a:t>
+              <a:t>FR: Crescimento Real do PIB (billion de Meticais )</a:t>
             </a:r>
           </a:p>
         </c:rich>
@@ -11100,8 +11209,17 @@
             </a:pPr>
             <a:r>
               <a:rPr lang="en-US" sz="1000" b="1"/>
-              <a:t>Total Public Debt Stock (% GDP)
-</a:t>
+              <a:t>FR: Total Public Debt Stock (% GDP)</a:t>
+            </a:r>
+            <a:br/>
+            <a:r>
+              <a:rPr lang="en-US" sz="1000" b="1"/>
+              <a:t/>
+            </a:r>
+            <a:br/>
+            <a:r>
+              <a:rPr lang="en-US" sz="1000" b="1"/>
+              <a:t/>
             </a:r>
           </a:p>
         </c:rich>
@@ -11537,8 +11655,17 @@
             </a:pPr>
             <a:r>
               <a:rPr lang="en-US" sz="1050" b="1"/>
-              <a:t>Annual GDP Growth
-</a:t>
+              <a:t>FR: Annual GDP Growth</a:t>
+            </a:r>
+            <a:br/>
+            <a:r>
+              <a:rPr lang="en-US" sz="1050" b="1"/>
+              <a:t/>
+            </a:r>
+            <a:br/>
+            <a:r>
+              <a:rPr lang="en-US" sz="1050" b="1"/>
+              <a:t/>
             </a:r>
           </a:p>
         </c:rich>
@@ -14347,8 +14474,17 @@
             </a:pPr>
             <a:r>
               <a:rPr lang="pt-BR" sz="1200" dirty="0"/>
-              <a:t>Annual GDP Growth - Projected
-</a:t>
+              <a:t>FR: Annual GDP Growth - Projected</a:t>
+            </a:r>
+            <a:br/>
+            <a:r>
+              <a:rPr lang="pt-BR" sz="1200" dirty="0"/>
+              <a:t/>
+            </a:r>
+            <a:br/>
+            <a:r>
+              <a:rPr lang="pt-BR" sz="1200" dirty="0"/>
+              <a:t/>
             </a:r>
             <a:endParaRPr lang="en-US" sz="1200" dirty="0"/>
           </a:p>
@@ -26875,7 +27011,31 @@
                 <a:ea typeface="+mn-ea"/>
                 <a:cs typeface="+mn-cs"/>
               </a:rPr>
-              <a:t>Allocation finale </a:t>
+              <a:t>Allocation finale</a:t>
+            </a:r>
+            <a:br/>
+            <a:r>
+              <a:rPr lang="pt-BR" sz="1000" cap="all" dirty="0">
+                <a:solidFill>
+                  <a:schemeClr val="tx1"/>
+                </a:solidFill>
+                <a:latin typeface="+mj-lt"/>
+                <a:ea typeface="+mn-ea"/>
+                <a:cs typeface="+mn-cs"/>
+              </a:rPr>
+              <a:t/>
+            </a:r>
+            <a:br/>
+            <a:r>
+              <a:rPr lang="pt-BR" sz="1000" cap="all" dirty="0">
+                <a:solidFill>
+                  <a:schemeClr val="tx1"/>
+                </a:solidFill>
+                <a:latin typeface="+mj-lt"/>
+                <a:ea typeface="+mn-ea"/>
+                <a:cs typeface="+mn-cs"/>
+              </a:rPr>
+              <a:t/>
             </a:r>
             <a:endParaRPr lang="en-US" sz="1000" cap="all" dirty="0">
               <a:solidFill>
@@ -27042,7 +27202,17 @@
           <a:p>
             <a:r>
               <a:rPr lang="en-US" sz="2400" dirty="0"/>
-              <a:t>CPP EF2017-2021 : Résultats  </a:t>
+              <a:t>CPP EF2017-2021 : Résultats </a:t>
+            </a:r>
+            <a:br/>
+            <a:r>
+              <a:rPr lang="en-US" sz="2400" dirty="0"/>
+              <a:t/>
+            </a:r>
+            <a:br/>
+            <a:r>
+              <a:rPr lang="en-US" sz="2400" dirty="0"/>
+              <a:t/>
             </a:r>
             <a:endParaRPr lang="en-US" sz="2400" b="0" i="1" dirty="0"/>
           </a:p>
@@ -30022,7 +30192,17 @@
           <a:p>
             <a:r>
               <a:rPr lang="en-US" sz="2400" dirty="0"/>
-              <a:t>CPP EF2017-2021 : Leçons apprises </a:t>
+              <a:t>CPP EF2017-2021 : Leçons apprises</a:t>
+            </a:r>
+            <a:br/>
+            <a:r>
+              <a:rPr lang="en-US" sz="2400" dirty="0"/>
+              <a:t/>
+            </a:r>
+            <a:br/>
+            <a:r>
+              <a:rPr lang="en-US" sz="2400" dirty="0"/>
+              <a:t/>
             </a:r>
             <a:endParaRPr lang="pt" sz="2400" b="0" i="1" u="none" strike="noStrike" dirty="0">
               <a:highlight>
@@ -30423,7 +30603,17 @@
             <a:pPr algn="ctr"/>
             <a:r>
               <a:rPr lang="en-US" sz="4000" dirty="0"/>
-              <a:t>Structure de la présentation </a:t>
+              <a:t>Structure de la présentation</a:t>
+            </a:r>
+            <a:br/>
+            <a:r>
+              <a:rPr lang="en-US" sz="4000" dirty="0"/>
+              <a:t/>
+            </a:r>
+            <a:br/>
+            <a:r>
+              <a:rPr lang="en-US" sz="4000" dirty="0"/>
+              <a:t/>
             </a:r>
             <a:endParaRPr lang="pt" sz="4000" b="0" i="1" u="none" strike="noStrike" dirty="0">
               <a:highlight>
@@ -30485,7 +30675,29 @@
                   </a:schemeClr>
                 </a:solidFill>
               </a:rPr>
-              <a:t>Vision du Groupe de la Banque mondiale sur les principaux défis stratégiques du pays    Principaux enseignements du CPF précédent (2017-2021</a:t>
+              <a:t>Vision du Groupe de la Banque mondiale sur les principaux défis stratégiques du pays   </a:t>
+            </a:r>
+            <a:br/>
+            <a:r>
+              <a:rPr lang="en-US" sz="3200" b="1" dirty="0">
+                <a:solidFill>
+                  <a:schemeClr val="bg2">
+                    <a:lumMod val="90000"/>
+                  </a:schemeClr>
+                </a:solidFill>
+              </a:rPr>
+              <a:t>Principaux enseignements du CPF précédent (2017-2021</a:t>
+            </a:r>
+            <a:br/>
+            <a:r>
+              <a:rPr lang="en-US" sz="3200" b="1" dirty="0">
+                <a:solidFill>
+                  <a:schemeClr val="bg2">
+                    <a:lumMod val="90000"/>
+                  </a:schemeClr>
+                </a:solidFill>
+              </a:rPr>
+              <a:t/>
             </a:r>
             <a:r>
               <a:rPr lang="pt-BR" sz="3200" b="1" i="0" u="none" strike="noStrike" dirty="0">
@@ -31600,7 +31812,25 @@
                   <a:srgbClr val="2F5597"/>
                 </a:solidFill>
               </a:rPr>
-              <a:t>Programme gouvernemental et stratégie à moyen terme (1-2) </a:t>
+              <a:t>Programme gouvernemental et stratégie à moyen terme (1-2)</a:t>
+            </a:r>
+            <a:br/>
+            <a:r>
+              <a:rPr lang="en-US" sz="2400" b="1" dirty="0">
+                <a:solidFill>
+                  <a:srgbClr val="2F5597"/>
+                </a:solidFill>
+              </a:rPr>
+              <a:t/>
+            </a:r>
+            <a:br/>
+            <a:r>
+              <a:rPr lang="en-US" sz="2400" b="1" dirty="0">
+                <a:solidFill>
+                  <a:srgbClr val="2F5597"/>
+                </a:solidFill>
+              </a:rPr>
+              <a:t/>
             </a:r>
             <a:endParaRPr lang="pt" sz="2400" b="1" i="0" u="none" strike="noStrike" dirty="0">
               <a:solidFill>
@@ -32352,7 +32582,19 @@
                 <a:ea typeface="Times New Roman" panose="02020603050405020304" pitchFamily="18" charset="0"/>
                 <a:cs typeface="Times New Roman" panose="02020603050405020304" pitchFamily="18" charset="0"/>
               </a:rPr>
-              <a:t>OHN 1 : Des institutions plus inclusives </a:t>
+              <a:t>OHN 1 : Des institutions plus inclusives</a:t>
+            </a:r>
+            <a:br/>
+            <a:r>
+              <a:rPr lang="en-US" b="1" dirty="0">
+                <a:solidFill>
+                  <a:srgbClr val="FFFFFF"/>
+                </a:solidFill>
+                <a:latin typeface="Calibri" panose="020F0502020204030204" pitchFamily="34" charset="0"/>
+                <a:ea typeface="Times New Roman" panose="02020603050405020304" pitchFamily="18" charset="0"/>
+                <a:cs typeface="Times New Roman" panose="02020603050405020304" pitchFamily="18" charset="0"/>
+              </a:rPr>
+              <a:t/>
             </a:r>
             <a:r>
               <a:rPr lang="pt-BR" b="1" dirty="0">
@@ -32539,7 +32781,19 @@
                 <a:ea typeface="Times New Roman" panose="02020603050405020304" pitchFamily="18" charset="0"/>
                 <a:cs typeface="Times New Roman" panose="02020603050405020304" pitchFamily="18" charset="0"/>
               </a:rPr>
-              <a:t>Améliorer la gestion économique pour une création d'emplois durable et résiliente, une meilleure capacité de dépense et un risque souverain réduit </a:t>
+              <a:t>Améliorer la gestion économique pour une création d'emplois durable et résiliente, une meilleure capacité de dépense et un risque souverain réduit</a:t>
+            </a:r>
+            <a:br/>
+            <a:r>
+              <a:rPr lang="en-US" sz="1400" b="1" dirty="0">
+                <a:solidFill>
+                  <a:srgbClr val="FFFFFF"/>
+                </a:solidFill>
+                <a:latin typeface="Calibri" panose="020F0502020204030204" pitchFamily="34" charset="0"/>
+                <a:ea typeface="Times New Roman" panose="02020603050405020304" pitchFamily="18" charset="0"/>
+                <a:cs typeface="Times New Roman" panose="02020603050405020304" pitchFamily="18" charset="0"/>
+              </a:rPr>
+              <a:t/>
             </a:r>
             <a:r>
               <a:rPr lang="pt-BR" sz="1400" b="1" dirty="0">
@@ -32661,7 +32915,19 @@
                   <a:ea typeface="Times New Roman" panose="02020603050405020304" pitchFamily="18" charset="0"/>
                   <a:cs typeface="Times New Roman" panose="02020603050405020304" pitchFamily="18" charset="0"/>
                 </a:rPr>
-                <a:t>Promouvoir la croissance de la productivité dans des industries à forte intensité de main-d'œuvre sélectionnées </a:t>
+                <a:t>Promouvoir la croissance de la productivité dans des industries à forte intensité de main-d'œuvre sélectionnées</a:t>
+              </a:r>
+              <a:br/>
+              <a:r>
+                <a:rPr lang="en-US" sz="1400" b="1" dirty="0">
+                  <a:solidFill>
+                    <a:srgbClr val="FFFFFF"/>
+                  </a:solidFill>
+                  <a:latin typeface="Calibri" panose="020F0502020204030204" pitchFamily="34" charset="0"/>
+                  <a:ea typeface="Times New Roman" panose="02020603050405020304" pitchFamily="18" charset="0"/>
+                  <a:cs typeface="Times New Roman" panose="02020603050405020304" pitchFamily="18" charset="0"/>
+                </a:rPr>
+                <a:t/>
               </a:r>
               <a:r>
                 <a:rPr lang="pt-BR" sz="1400" dirty="0">
@@ -32807,7 +33073,19 @@
                   <a:ea typeface="Times New Roman" panose="02020603050405020304" pitchFamily="18" charset="0"/>
                   <a:cs typeface="Times New Roman" panose="02020603050405020304" pitchFamily="18" charset="0"/>
                 </a:rPr>
-                <a:t>Permettre une croissance durable des secteurs de ressources naturelles sélectionnés qui exploitent les avantages comparatifs régionaux et mondiaux </a:t>
+                <a:t>Permettre une croissance durable des secteurs de ressources naturelles sélectionnés qui exploitent les avantages comparatifs régionaux et mondiaux</a:t>
+              </a:r>
+              <a:br/>
+              <a:r>
+                <a:rPr lang="en-US" sz="1400" b="1" dirty="0">
+                  <a:solidFill>
+                    <a:srgbClr val="FFFFFF"/>
+                  </a:solidFill>
+                  <a:latin typeface="Calibri" panose="020F0502020204030204" pitchFamily="34" charset="0"/>
+                  <a:ea typeface="Times New Roman" panose="02020603050405020304" pitchFamily="18" charset="0"/>
+                  <a:cs typeface="Times New Roman" panose="02020603050405020304" pitchFamily="18" charset="0"/>
+                </a:rPr>
+                <a:t/>
               </a:r>
               <a:r>
                 <a:rPr lang="pt-BR" sz="1400" dirty="0">
@@ -33159,7 +33437,23 @@
                 <a:latin typeface="Arial"/>
                 <a:cs typeface="Times New Roman"/>
               </a:rPr>
-              <a:t>CPP 2023-2027 : Aspirations et objectifs </a:t>
+              <a:t>CPP 2023-2027 : Aspirations et objectifs</a:t>
+            </a:r>
+            <a:br/>
+            <a:r>
+              <a:rPr lang="en-US" b="1" dirty="0">
+                <a:latin typeface="Arial"/>
+                <a:cs typeface="Times New Roman"/>
+              </a:rPr>
+              <a:t/>
+            </a:r>
+            <a:br/>
+            <a:r>
+              <a:rPr lang="en-US" b="1" dirty="0">
+                <a:latin typeface="Arial"/>
+                <a:cs typeface="Times New Roman"/>
+              </a:rPr>
+              <a:t/>
             </a:r>
             <a:endParaRPr lang="pt" i="1" dirty="0">
               <a:highlight>
@@ -33624,7 +33918,23 @@
                 <a:latin typeface="Arial"/>
                 <a:cs typeface="Times New Roman"/>
               </a:rPr>
-              <a:t>Proposition CPP 2023-2027 : Objectifs et aspirations   </a:t>
+              <a:t>Proposition CPP 2023-2027 : Objectifs et aspirations  </a:t>
+            </a:r>
+            <a:br/>
+            <a:r>
+              <a:rPr lang="en-US" b="1" dirty="0">
+                <a:latin typeface="Arial"/>
+                <a:cs typeface="Times New Roman"/>
+              </a:rPr>
+              <a:t/>
+            </a:r>
+            <a:br/>
+            <a:r>
+              <a:rPr lang="en-US" b="1" dirty="0">
+                <a:latin typeface="Arial"/>
+                <a:cs typeface="Times New Roman"/>
+              </a:rPr>
+              <a:t/>
             </a:r>
             <a:endParaRPr lang="pt" sz="2000" i="1" dirty="0">
               <a:highlight>
@@ -33879,7 +34189,55 @@
                 <a:ea typeface="Times New Roman"/>
                 <a:cs typeface="Times New Roman"/>
               </a:rPr>
-              <a:t>Programmes GOUVERNEMENTAUX (Piliers ENDE) </a:t>
+              <a:t>Programmes GOUVERNEMENTAUX</a:t>
+            </a:r>
+            <a:br/>
+            <a:r>
+              <a:rPr lang="en-US" sz="1000" b="1">
+                <a:solidFill>
+                  <a:srgbClr val="000000"/>
+                </a:solidFill>
+                <a:latin typeface="Calibri"/>
+                <a:ea typeface="Times New Roman"/>
+                <a:cs typeface="Times New Roman"/>
+              </a:rPr>
+              <a:t>(Piliers ENDE)</a:t>
+            </a:r>
+            <a:br/>
+            <a:r>
+              <a:rPr lang="en-US" sz="1000" b="1">
+                <a:solidFill>
+                  <a:srgbClr val="000000"/>
+                </a:solidFill>
+                <a:latin typeface="Calibri"/>
+                <a:ea typeface="Times New Roman"/>
+                <a:cs typeface="Times New Roman"/>
+              </a:rPr>
+              <a:t/>
+            </a:r>
+            <a:br/>
+            <a:r>
+              <a:rPr lang="en-US" sz="1000" b="1">
+                <a:solidFill>
+                  <a:srgbClr val="000000"/>
+                </a:solidFill>
+                <a:latin typeface="Calibri"/>
+                <a:ea typeface="Times New Roman"/>
+                <a:cs typeface="Times New Roman"/>
+              </a:rPr>
+              <a:t/>
+            </a:r>
+            <a:br/>
+            <a:r>
+              <a:rPr lang="en-US" sz="1000" b="1">
+                <a:solidFill>
+                  <a:srgbClr val="000000"/>
+                </a:solidFill>
+                <a:latin typeface="Calibri"/>
+                <a:ea typeface="Times New Roman"/>
+                <a:cs typeface="Times New Roman"/>
+              </a:rPr>
+              <a:t/>
             </a:r>
             <a:endParaRPr kumimoji="0" lang="en-US" altLang="zh-CN" sz="1800" b="0" i="0" u="none" strike="noStrike" cap="none" normalizeH="0" baseline="0" dirty="0">
               <a:ln>
@@ -33949,7 +34307,43 @@
                 <a:ea typeface="Times New Roman" panose="02020603050405020304" pitchFamily="18" charset="0"/>
                 <a:cs typeface="Times New Roman" panose="02020603050405020304" pitchFamily="18" charset="0"/>
               </a:rPr>
-              <a:t>  Transformation sociale </a:t>
+              <a:t> </a:t>
+            </a:r>
+            <a:br/>
+            <a:r>
+              <a:rPr lang="en-US" altLang="zh-CN" sz="900" b="1" dirty="0">
+                <a:latin typeface="Calibri" panose="020F0502020204030204" pitchFamily="34" charset="0"/>
+                <a:ea typeface="Times New Roman" panose="02020603050405020304" pitchFamily="18" charset="0"/>
+                <a:cs typeface="Times New Roman" panose="02020603050405020304" pitchFamily="18" charset="0"/>
+              </a:rPr>
+              <a:t>Transformation sociale</a:t>
+            </a:r>
+            <a:br/>
+            <a:r>
+              <a:rPr lang="en-US" altLang="zh-CN" sz="900" b="1" dirty="0">
+                <a:latin typeface="Calibri" panose="020F0502020204030204" pitchFamily="34" charset="0"/>
+                <a:ea typeface="Times New Roman" panose="02020603050405020304" pitchFamily="18" charset="0"/>
+                <a:cs typeface="Times New Roman" panose="02020603050405020304" pitchFamily="18" charset="0"/>
+              </a:rPr>
+              <a:t/>
+            </a:r>
+            <a:br/>
+            <a:r>
+              <a:rPr lang="en-US" altLang="zh-CN" sz="900" b="1" dirty="0">
+                <a:latin typeface="Calibri" panose="020F0502020204030204" pitchFamily="34" charset="0"/>
+                <a:ea typeface="Times New Roman" panose="02020603050405020304" pitchFamily="18" charset="0"/>
+                <a:cs typeface="Times New Roman" panose="02020603050405020304" pitchFamily="18" charset="0"/>
+              </a:rPr>
+              <a:t/>
+            </a:r>
+            <a:br/>
+            <a:r>
+              <a:rPr lang="en-US" altLang="zh-CN" sz="900" b="1" dirty="0">
+                <a:latin typeface="Calibri" panose="020F0502020204030204" pitchFamily="34" charset="0"/>
+                <a:ea typeface="Times New Roman" panose="02020603050405020304" pitchFamily="18" charset="0"/>
+                <a:cs typeface="Times New Roman" panose="02020603050405020304" pitchFamily="18" charset="0"/>
+              </a:rPr>
+              <a:t/>
             </a:r>
             <a:endParaRPr kumimoji="0" lang="en-US" altLang="zh-CN" sz="1800" b="0" i="0" u="none" strike="noStrike" cap="none" normalizeH="0" baseline="0" dirty="0">
               <a:ln>
@@ -34019,7 +34413,43 @@
                 <a:ea typeface="Times New Roman" panose="02020603050405020304" pitchFamily="18" charset="0"/>
                 <a:cs typeface="Times New Roman" panose="02020603050405020304" pitchFamily="18" charset="0"/>
               </a:rPr>
-              <a:t> Transformation économique </a:t>
+              <a:t/>
+            </a:r>
+            <a:br/>
+            <a:r>
+              <a:rPr lang="en-US" altLang="zh-CN" sz="900" b="1" dirty="0">
+                <a:latin typeface="Calibri" pitchFamily="34" charset="0"/>
+                <a:ea typeface="Times New Roman" panose="02020603050405020304" pitchFamily="18" charset="0"/>
+                <a:cs typeface="Times New Roman" panose="02020603050405020304" pitchFamily="18" charset="0"/>
+              </a:rPr>
+              <a:t>Transformation économique</a:t>
+            </a:r>
+            <a:br/>
+            <a:r>
+              <a:rPr lang="en-US" altLang="zh-CN" sz="900" b="1" dirty="0">
+                <a:latin typeface="Calibri" pitchFamily="34" charset="0"/>
+                <a:ea typeface="Times New Roman" panose="02020603050405020304" pitchFamily="18" charset="0"/>
+                <a:cs typeface="Times New Roman" panose="02020603050405020304" pitchFamily="18" charset="0"/>
+              </a:rPr>
+              <a:t/>
+            </a:r>
+            <a:br/>
+            <a:r>
+              <a:rPr lang="en-US" altLang="zh-CN" sz="900" b="1" dirty="0">
+                <a:latin typeface="Calibri" pitchFamily="34" charset="0"/>
+                <a:ea typeface="Times New Roman" panose="02020603050405020304" pitchFamily="18" charset="0"/>
+                <a:cs typeface="Times New Roman" panose="02020603050405020304" pitchFamily="18" charset="0"/>
+              </a:rPr>
+              <a:t/>
+            </a:r>
+            <a:br/>
+            <a:r>
+              <a:rPr lang="en-US" altLang="zh-CN" sz="900" b="1" dirty="0">
+                <a:latin typeface="Calibri" pitchFamily="34" charset="0"/>
+                <a:ea typeface="Times New Roman" panose="02020603050405020304" pitchFamily="18" charset="0"/>
+                <a:cs typeface="Times New Roman" panose="02020603050405020304" pitchFamily="18" charset="0"/>
+              </a:rPr>
+              <a:t/>
             </a:r>
             <a:endParaRPr kumimoji="0" lang="en-US" altLang="zh-CN" sz="1800" b="0" i="0" u="none" strike="noStrike" cap="none" normalizeH="0" baseline="0" dirty="0">
               <a:ln>
@@ -34089,7 +34519,43 @@
                 <a:ea typeface="Times New Roman" panose="02020603050405020304" pitchFamily="18" charset="0"/>
                 <a:cs typeface="Times New Roman" panose="02020603050405020304" pitchFamily="18" charset="0"/>
               </a:rPr>
-              <a:t> Gouvernance </a:t>
+              <a:t/>
+            </a:r>
+            <a:br/>
+            <a:r>
+              <a:rPr lang="en-US" altLang="zh-CN" sz="900" b="1" dirty="0">
+                <a:latin typeface="Calibri" panose="020F0502020204030204" pitchFamily="34" charset="0"/>
+                <a:ea typeface="Times New Roman" panose="02020603050405020304" pitchFamily="18" charset="0"/>
+                <a:cs typeface="Times New Roman" panose="02020603050405020304" pitchFamily="18" charset="0"/>
+              </a:rPr>
+              <a:t>Gouvernance</a:t>
+            </a:r>
+            <a:br/>
+            <a:r>
+              <a:rPr lang="en-US" altLang="zh-CN" sz="900" b="1" dirty="0">
+                <a:latin typeface="Calibri" panose="020F0502020204030204" pitchFamily="34" charset="0"/>
+                <a:ea typeface="Times New Roman" panose="02020603050405020304" pitchFamily="18" charset="0"/>
+                <a:cs typeface="Times New Roman" panose="02020603050405020304" pitchFamily="18" charset="0"/>
+              </a:rPr>
+              <a:t/>
+            </a:r>
+            <a:br/>
+            <a:r>
+              <a:rPr lang="en-US" altLang="zh-CN" sz="900" b="1" dirty="0">
+                <a:latin typeface="Calibri" panose="020F0502020204030204" pitchFamily="34" charset="0"/>
+                <a:ea typeface="Times New Roman" panose="02020603050405020304" pitchFamily="18" charset="0"/>
+                <a:cs typeface="Times New Roman" panose="02020603050405020304" pitchFamily="18" charset="0"/>
+              </a:rPr>
+              <a:t/>
+            </a:r>
+            <a:br/>
+            <a:r>
+              <a:rPr lang="en-US" altLang="zh-CN" sz="900" b="1" dirty="0">
+                <a:latin typeface="Calibri" panose="020F0502020204030204" pitchFamily="34" charset="0"/>
+                <a:ea typeface="Times New Roman" panose="02020603050405020304" pitchFamily="18" charset="0"/>
+                <a:cs typeface="Times New Roman" panose="02020603050405020304" pitchFamily="18" charset="0"/>
+              </a:rPr>
+              <a:t/>
             </a:r>
             <a:endParaRPr kumimoji="0" lang="en-US" altLang="zh-CN" sz="1800" b="0" i="0" u="none" strike="noStrike" cap="none" normalizeH="0" baseline="0" dirty="0">
               <a:ln>
@@ -34162,7 +34628,31 @@
                 <a:ea typeface="Times New Roman"/>
                 <a:cs typeface="Times New Roman"/>
               </a:rPr>
-              <a:t> Environnement/Ressources naturelles (économie circulaire) </a:t>
+              <a:t> Environnement/Ressources naturelles (économie circulaire)</a:t>
+            </a:r>
+            <a:br/>
+            <a:r>
+              <a:rPr lang="en-US" sz="900" b="1" dirty="0">
+                <a:solidFill>
+                  <a:srgbClr val="000000"/>
+                </a:solidFill>
+                <a:latin typeface="Calibri"/>
+                <a:ea typeface="Times New Roman"/>
+                <a:cs typeface="Times New Roman"/>
+              </a:rPr>
+              <a:t/>
+            </a:r>
+            <a:br/>
+            <a:r>
+              <a:rPr lang="en-US" sz="900" b="1" dirty="0">
+                <a:solidFill>
+                  <a:srgbClr val="000000"/>
+                </a:solidFill>
+                <a:latin typeface="Calibri"/>
+                <a:ea typeface="Times New Roman"/>
+                <a:cs typeface="Times New Roman"/>
+              </a:rPr>
+              <a:t/>
             </a:r>
             <a:endParaRPr kumimoji="0" lang="en-US" altLang="zh-CN" sz="1800" b="0" i="0" u="none" strike="noStrike" cap="none" normalizeH="0" baseline="0" dirty="0">
               <a:ln>
@@ -34405,7 +34895,31 @@
                 <a:ea typeface="Times New Roman"/>
                 <a:cs typeface="Times New Roman"/>
               </a:rPr>
-              <a:t>OBJECTIFS DE HAUT NIVEAU (OHN) </a:t>
+              <a:t>OBJECTIFS DE HAUT NIVEAU (OHN)</a:t>
+            </a:r>
+            <a:br/>
+            <a:r>
+              <a:rPr lang="en-US" sz="1000" b="1" dirty="0">
+                <a:solidFill>
+                  <a:srgbClr val="000000"/>
+                </a:solidFill>
+                <a:latin typeface="Calibri"/>
+                <a:ea typeface="Times New Roman"/>
+                <a:cs typeface="Times New Roman"/>
+              </a:rPr>
+              <a:t/>
+            </a:r>
+            <a:br/>
+            <a:r>
+              <a:rPr lang="en-US" sz="1000" b="1" dirty="0">
+                <a:solidFill>
+                  <a:srgbClr val="000000"/>
+                </a:solidFill>
+                <a:latin typeface="Calibri"/>
+                <a:ea typeface="Times New Roman"/>
+                <a:cs typeface="Times New Roman"/>
+              </a:rPr>
+              <a:t/>
             </a:r>
             <a:endParaRPr kumimoji="0" lang="en-US" altLang="zh-CN" sz="1800" b="0" i="0" u="none" strike="noStrike" cap="none" normalizeH="0" baseline="0" dirty="0">
               <a:ln>
@@ -34507,7 +35021,31 @@
                 <a:ea typeface="Times New Roman"/>
                 <a:cs typeface="Times New Roman"/>
               </a:rPr>
-              <a:t>OHN 2 : Augmentation de la création d'emplois inclusifs </a:t>
+              <a:t>OHN 2 : Augmentation de la création d'emplois inclusifs</a:t>
+            </a:r>
+            <a:br/>
+            <a:r>
+              <a:rPr lang="en-US" sz="900" dirty="0">
+                <a:solidFill>
+                  <a:srgbClr val="000000"/>
+                </a:solidFill>
+                <a:latin typeface="Calibri"/>
+                <a:ea typeface="Times New Roman"/>
+                <a:cs typeface="Times New Roman"/>
+              </a:rPr>
+              <a:t/>
+            </a:r>
+            <a:br/>
+            <a:r>
+              <a:rPr lang="en-US" sz="900" dirty="0">
+                <a:solidFill>
+                  <a:srgbClr val="000000"/>
+                </a:solidFill>
+                <a:latin typeface="Calibri"/>
+                <a:ea typeface="Times New Roman"/>
+                <a:cs typeface="Times New Roman"/>
+              </a:rPr>
+              <a:t/>
             </a:r>
             <a:endParaRPr kumimoji="0" lang="en-US" altLang="zh-CN" sz="900" b="0" i="1" u="none" strike="noStrike" cap="none" normalizeH="0" baseline="0" dirty="0">
               <a:ln>
@@ -34609,7 +35147,31 @@
                 <a:ea typeface="Times New Roman"/>
                 <a:cs typeface="Times New Roman"/>
               </a:rPr>
-              <a:t>OHN3 : Améliorer le capital humain et l'autonomisation des femmes </a:t>
+              <a:t>OHN3 : Améliorer le capital humain et l'autonomisation des femmes</a:t>
+            </a:r>
+            <a:br/>
+            <a:r>
+              <a:rPr lang="en-US" sz="900" dirty="0">
+                <a:solidFill>
+                  <a:srgbClr val="000000"/>
+                </a:solidFill>
+                <a:latin typeface="Calibri"/>
+                <a:ea typeface="Times New Roman"/>
+                <a:cs typeface="Times New Roman"/>
+              </a:rPr>
+              <a:t/>
+            </a:r>
+            <a:br/>
+            <a:r>
+              <a:rPr lang="en-US" sz="900" dirty="0">
+                <a:solidFill>
+                  <a:srgbClr val="000000"/>
+                </a:solidFill>
+                <a:latin typeface="Calibri"/>
+                <a:ea typeface="Times New Roman"/>
+                <a:cs typeface="Times New Roman"/>
+              </a:rPr>
+              <a:t/>
             </a:r>
             <a:endParaRPr kumimoji="0" lang="en-US" altLang="zh-CN" sz="900" b="0" i="1" u="none" strike="noStrike" cap="none" normalizeH="0" baseline="0" dirty="0">
               <a:ln>
@@ -34764,7 +35326,31 @@
                 <a:ea typeface="Times New Roman"/>
                 <a:cs typeface="Times New Roman"/>
               </a:rPr>
-              <a:t>OHN 1 : Institutions inclusives </a:t>
+              <a:t>OHN 1 : Institutions inclusives</a:t>
+            </a:r>
+            <a:br/>
+            <a:r>
+              <a:rPr lang="en-US" sz="900" dirty="0">
+                <a:solidFill>
+                  <a:srgbClr val="000000"/>
+                </a:solidFill>
+                <a:latin typeface="Calibri"/>
+                <a:ea typeface="Times New Roman"/>
+                <a:cs typeface="Times New Roman"/>
+              </a:rPr>
+              <a:t/>
+            </a:r>
+            <a:br/>
+            <a:r>
+              <a:rPr lang="en-US" sz="900" dirty="0">
+                <a:solidFill>
+                  <a:srgbClr val="000000"/>
+                </a:solidFill>
+                <a:latin typeface="Calibri"/>
+                <a:ea typeface="Times New Roman"/>
+                <a:cs typeface="Times New Roman"/>
+              </a:rPr>
+              <a:t/>
             </a:r>
             <a:endParaRPr kumimoji="0" lang="en-US" altLang="zh-CN" sz="900" b="0" i="1" u="none" strike="noStrike" cap="none" normalizeH="0" baseline="0" dirty="0">
               <a:ln>
@@ -34974,7 +35560,31 @@
                 <a:ea typeface="Times New Roman"/>
                 <a:cs typeface="Times New Roman"/>
               </a:rPr>
-              <a:t>Un processus de décentralisation lent, déséquilibré et sous-financé rend difficile la délégation de pouvoirs aux gouvernements locaux. </a:t>
+              <a:t>Un processus de décentralisation lent, déséquilibré et sous-financé rend difficile la délégation de pouvoirs aux gouvernements locaux.</a:t>
+            </a:r>
+            <a:br/>
+            <a:r>
+              <a:rPr lang="en-US" sz="900" dirty="0">
+                <a:solidFill>
+                  <a:srgbClr val="000000"/>
+                </a:solidFill>
+                <a:latin typeface="Calibri"/>
+                <a:ea typeface="Times New Roman"/>
+                <a:cs typeface="Times New Roman"/>
+              </a:rPr>
+              <a:t/>
+            </a:r>
+            <a:br/>
+            <a:r>
+              <a:rPr lang="en-US" sz="900" dirty="0">
+                <a:solidFill>
+                  <a:srgbClr val="000000"/>
+                </a:solidFill>
+                <a:latin typeface="Calibri"/>
+                <a:ea typeface="Times New Roman"/>
+                <a:cs typeface="Times New Roman"/>
+              </a:rPr>
+              <a:t/>
             </a:r>
             <a:endParaRPr kumimoji="0" lang="en-US" altLang="zh-CN" sz="1800" b="0" i="0" u="none" strike="noStrike" cap="none" normalizeH="0" baseline="0" dirty="0">
               <a:ln>
@@ -35047,7 +35657,79 @@
                 <a:ea typeface="Times New Roman"/>
                 <a:cs typeface="Times New Roman"/>
               </a:rPr>
-              <a:t>1. Améliorer la gestion économique pour la création d'emplois durables et résilients, une meilleure capacité d'exécution et un risque souverain réduit 2. Renforcer l'efficacité du secteur public pour une prestation de services inclusive, transparente, plus durable, résiliente et équitable  3. Renforcer la coordination, les politiques et les capacités pour une meilleure préparation et réponse aux catastrophes naturelles, aux sinistres et aux autres chocs multidimensionnels </a:t>
+              <a:t>1. Améliorer la gestion économique pour la création d'emplois durables et résilients, une meilleure capacité d'exécution et un risque souverain réduit</a:t>
+            </a:r>
+            <a:br/>
+            <a:r>
+              <a:rPr lang="en-US" sz="900" dirty="0">
+                <a:solidFill>
+                  <a:srgbClr val="000000"/>
+                </a:solidFill>
+                <a:latin typeface="Calibri"/>
+                <a:ea typeface="Times New Roman"/>
+                <a:cs typeface="Times New Roman"/>
+              </a:rPr>
+              <a:t>2. Renforcer l'efficacité du secteur public pour une prestation de services inclusive, transparente, plus durable, résiliente et équitable </a:t>
+            </a:r>
+            <a:br/>
+            <a:r>
+              <a:rPr lang="en-US" sz="900" dirty="0">
+                <a:solidFill>
+                  <a:srgbClr val="000000"/>
+                </a:solidFill>
+                <a:latin typeface="Calibri"/>
+                <a:ea typeface="Times New Roman"/>
+                <a:cs typeface="Times New Roman"/>
+              </a:rPr>
+              <a:t>3. Renforcer la coordination, les politiques et les capacités pour une meilleure préparation et réponse aux catastrophes naturelles, aux sinistres et aux autres chocs multidimensionnels</a:t>
+            </a:r>
+            <a:br/>
+            <a:r>
+              <a:rPr lang="en-US" sz="900" dirty="0">
+                <a:solidFill>
+                  <a:srgbClr val="000000"/>
+                </a:solidFill>
+                <a:latin typeface="Calibri"/>
+                <a:ea typeface="Times New Roman"/>
+                <a:cs typeface="Times New Roman"/>
+              </a:rPr>
+              <a:t/>
+            </a:r>
+            <a:br/>
+            <a:r>
+              <a:rPr lang="en-US" sz="900" dirty="0">
+                <a:solidFill>
+                  <a:srgbClr val="000000"/>
+                </a:solidFill>
+                <a:latin typeface="Calibri"/>
+                <a:ea typeface="Times New Roman"/>
+                <a:cs typeface="Times New Roman"/>
+              </a:rPr>
+              <a:t/>
+            </a:r>
+            <a:br/>
+            <a:r>
+              <a:rPr lang="en-US" sz="900" dirty="0">
+                <a:solidFill>
+                  <a:srgbClr val="000000"/>
+                </a:solidFill>
+                <a:latin typeface="Calibri"/>
+                <a:ea typeface="Times New Roman"/>
+                <a:cs typeface="Times New Roman"/>
+              </a:rPr>
+              <a:t/>
+            </a:r>
+            <a:br/>
+            <a:r>
+              <a:rPr lang="en-US" sz="900" dirty="0">
+                <a:solidFill>
+                  <a:srgbClr val="000000"/>
+                </a:solidFill>
+                <a:latin typeface="Calibri"/>
+                <a:ea typeface="Times New Roman"/>
+                <a:cs typeface="Times New Roman"/>
+              </a:rPr>
+              <a:t/>
             </a:r>
             <a:endParaRPr kumimoji="0" lang="en-US" altLang="zh-CN" sz="1800" b="0" i="0" u="none" strike="noStrike" cap="none" normalizeH="0" baseline="0" dirty="0">
               <a:ln>
@@ -35120,7 +35802,79 @@
                 <a:ea typeface="Times New Roman"/>
                 <a:cs typeface="Times New Roman"/>
               </a:rPr>
-              <a:t>7. Améliorer durablement les principaux résultats en matière de santé et d'éducation 8. Accroître l'efficience des dépenses et la couverture effective des services sociaux intégrés et durables 9. Améliorer l'accès aux services pour prévenir les grossesses chez les adolescentes et promouvoir la participation des femmes  </a:t>
+              <a:t>7. Améliorer durablement les principaux résultats en matière de santé et d'éducation</a:t>
+            </a:r>
+            <a:br/>
+            <a:r>
+              <a:rPr lang="en-US" sz="900" dirty="0">
+                <a:solidFill>
+                  <a:srgbClr val="000000"/>
+                </a:solidFill>
+                <a:latin typeface="Calibri"/>
+                <a:ea typeface="Times New Roman"/>
+                <a:cs typeface="Times New Roman"/>
+              </a:rPr>
+              <a:t>8. Accroître l'efficience des dépenses et la couverture effective des services sociaux intégrés et durables</a:t>
+            </a:r>
+            <a:br/>
+            <a:r>
+              <a:rPr lang="en-US" sz="900" dirty="0">
+                <a:solidFill>
+                  <a:srgbClr val="000000"/>
+                </a:solidFill>
+                <a:latin typeface="Calibri"/>
+                <a:ea typeface="Times New Roman"/>
+                <a:cs typeface="Times New Roman"/>
+              </a:rPr>
+              <a:t>9. Améliorer l'accès aux services pour prévenir les grossesses chez les adolescentes et promouvoir la participation des femmes </a:t>
+            </a:r>
+            <a:br/>
+            <a:r>
+              <a:rPr lang="en-US" sz="900" dirty="0">
+                <a:solidFill>
+                  <a:srgbClr val="000000"/>
+                </a:solidFill>
+                <a:latin typeface="Calibri"/>
+                <a:ea typeface="Times New Roman"/>
+                <a:cs typeface="Times New Roman"/>
+              </a:rPr>
+              <a:t/>
+            </a:r>
+            <a:br/>
+            <a:r>
+              <a:rPr lang="en-US" sz="900" dirty="0">
+                <a:solidFill>
+                  <a:srgbClr val="000000"/>
+                </a:solidFill>
+                <a:latin typeface="Calibri"/>
+                <a:ea typeface="Times New Roman"/>
+                <a:cs typeface="Times New Roman"/>
+              </a:rPr>
+              <a:t/>
+            </a:r>
+            <a:br/>
+            <a:r>
+              <a:rPr lang="en-US" sz="900" dirty="0">
+                <a:solidFill>
+                  <a:srgbClr val="000000"/>
+                </a:solidFill>
+                <a:latin typeface="Calibri"/>
+                <a:ea typeface="Times New Roman"/>
+                <a:cs typeface="Times New Roman"/>
+              </a:rPr>
+              <a:t/>
+            </a:r>
+            <a:br/>
+            <a:r>
+              <a:rPr lang="en-US" sz="900" dirty="0">
+                <a:solidFill>
+                  <a:srgbClr val="000000"/>
+                </a:solidFill>
+                <a:latin typeface="Calibri"/>
+                <a:ea typeface="Times New Roman"/>
+                <a:cs typeface="Times New Roman"/>
+              </a:rPr>
+              <a:t/>
             </a:r>
             <a:endParaRPr kumimoji="0" lang="en-US" altLang="zh-CN" sz="1800" b="0" i="0" u="none" strike="noStrike" cap="none" normalizeH="0" baseline="0" dirty="0">
               <a:ln>
@@ -35277,7 +36031,79 @@
                 <a:ea typeface="Times New Roman"/>
                 <a:cs typeface="Times New Roman"/>
               </a:rPr>
-              <a:t>4. Permettre une croissance durable des secteurs de ressources naturelles sélectionnés en exploitant les avantages comparatifs régionaux et mondiaux 5. Promouvoir la croissance de la productivité dans des industries à forte intensité de main-d'œuvre sélectionnées  6. Étendre des services accessibles, fiables et résilients au climat pour améliorer l'accès des plus défavorisés, renforcer l'urbanisation durable et l'agglomération économique </a:t>
+              <a:t>4. Permettre une croissance durable des secteurs de ressources naturelles sélectionnés en exploitant les avantages comparatifs régionaux et mondiaux</a:t>
+            </a:r>
+            <a:br/>
+            <a:r>
+              <a:rPr lang="en-US" sz="900" dirty="0">
+                <a:solidFill>
+                  <a:srgbClr val="000000"/>
+                </a:solidFill>
+                <a:latin typeface="Calibri"/>
+                <a:ea typeface="Times New Roman"/>
+                <a:cs typeface="Times New Roman"/>
+              </a:rPr>
+              <a:t>5. Promouvoir la croissance de la productivité dans des industries à forte intensité de main-d'œuvre sélectionnées </a:t>
+            </a:r>
+            <a:br/>
+            <a:r>
+              <a:rPr lang="en-US" sz="900" dirty="0">
+                <a:solidFill>
+                  <a:srgbClr val="000000"/>
+                </a:solidFill>
+                <a:latin typeface="Calibri"/>
+                <a:ea typeface="Times New Roman"/>
+                <a:cs typeface="Times New Roman"/>
+              </a:rPr>
+              <a:t>6. Étendre des services accessibles, fiables et résilients au climat pour améliorer l'accès des plus défavorisés, renforcer l'urbanisation durable et l'agglomération économique</a:t>
+            </a:r>
+            <a:br/>
+            <a:r>
+              <a:rPr lang="en-US" sz="900" dirty="0">
+                <a:solidFill>
+                  <a:srgbClr val="000000"/>
+                </a:solidFill>
+                <a:latin typeface="Calibri"/>
+                <a:ea typeface="Times New Roman"/>
+                <a:cs typeface="Times New Roman"/>
+              </a:rPr>
+              <a:t/>
+            </a:r>
+            <a:br/>
+            <a:r>
+              <a:rPr lang="en-US" sz="900" dirty="0">
+                <a:solidFill>
+                  <a:srgbClr val="000000"/>
+                </a:solidFill>
+                <a:latin typeface="Calibri"/>
+                <a:ea typeface="Times New Roman"/>
+                <a:cs typeface="Times New Roman"/>
+              </a:rPr>
+              <a:t/>
+            </a:r>
+            <a:br/>
+            <a:r>
+              <a:rPr lang="en-US" sz="900" dirty="0">
+                <a:solidFill>
+                  <a:srgbClr val="000000"/>
+                </a:solidFill>
+                <a:latin typeface="Calibri"/>
+                <a:ea typeface="Times New Roman"/>
+                <a:cs typeface="Times New Roman"/>
+              </a:rPr>
+              <a:t/>
+            </a:r>
+            <a:br/>
+            <a:r>
+              <a:rPr lang="en-US" sz="900" dirty="0">
+                <a:solidFill>
+                  <a:srgbClr val="000000"/>
+                </a:solidFill>
+                <a:latin typeface="Calibri"/>
+                <a:ea typeface="Times New Roman"/>
+                <a:cs typeface="Times New Roman"/>
+              </a:rPr>
+              <a:t/>
             </a:r>
             <a:endParaRPr kumimoji="0" lang="en-US" altLang="zh-CN" sz="1800" b="0" i="0" u="none" strike="noStrike" cap="none" normalizeH="0" baseline="0" dirty="0">
               <a:ln>
@@ -35465,7 +36291,31 @@
                 <a:ea typeface="Times New Roman"/>
                 <a:cs typeface="Times New Roman"/>
               </a:rPr>
-              <a:t>Les conditions de formation, de réglementation et les marchés essentiels à la croissance, la diversification et la création d'emplois du secteur privé sont sous-développés. </a:t>
+              <a:t>Les conditions de formation, de réglementation et les marchés essentiels à la croissance, la diversification et la création d'emplois du secteur privé sont sous-développés.</a:t>
+            </a:r>
+            <a:br/>
+            <a:r>
+              <a:rPr lang="en-US" sz="900" dirty="0">
+                <a:solidFill>
+                  <a:srgbClr val="000000"/>
+                </a:solidFill>
+                <a:latin typeface="Calibri"/>
+                <a:ea typeface="Times New Roman"/>
+                <a:cs typeface="Times New Roman"/>
+              </a:rPr>
+              <a:t/>
+            </a:r>
+            <a:br/>
+            <a:r>
+              <a:rPr lang="en-US" sz="900" dirty="0">
+                <a:solidFill>
+                  <a:srgbClr val="000000"/>
+                </a:solidFill>
+                <a:latin typeface="Calibri"/>
+                <a:ea typeface="Times New Roman"/>
+                <a:cs typeface="Times New Roman"/>
+              </a:rPr>
+              <a:t/>
             </a:r>
             <a:endParaRPr kumimoji="0" lang="en-US" altLang="zh-CN" sz="1800" b="0" i="0" u="none" strike="noStrike" cap="none" normalizeH="0" baseline="0" dirty="0">
               <a:ln>
@@ -36824,7 +37674,17 @@
             </a:br>
             <a:r>
               <a:rPr lang="en-US" sz="2400" dirty="0"/>
-              <a:t>Mise en œuvre du CPP 2023-2027 : Priorisation </a:t>
+              <a:t>Mise en œuvre du CPP 2023-2027 : Priorisation</a:t>
+            </a:r>
+            <a:br/>
+            <a:r>
+              <a:rPr lang="en-US" sz="2400" dirty="0"/>
+              <a:t/>
+            </a:r>
+            <a:br/>
+            <a:r>
+              <a:rPr lang="en-US" sz="2400" dirty="0"/>
+              <a:t/>
             </a:r>
             <a:endParaRPr lang="pt" sz="2400" b="0" i="1" u="none" strike="noStrike" dirty="0">
               <a:highlight>
@@ -37141,7 +38001,17 @@
             <a:pPr algn="ctr"/>
             <a:r>
               <a:rPr lang="en-US" sz="2400" dirty="0"/>
-              <a:t>Mise en œuvre du CPP 2023-2027 : Priorisation </a:t>
+              <a:t>Mise en œuvre du CPP 2023-2027 : Priorisation</a:t>
+            </a:r>
+            <a:br/>
+            <a:r>
+              <a:rPr lang="en-US" sz="2400" dirty="0"/>
+              <a:t/>
+            </a:r>
+            <a:br/>
+            <a:r>
+              <a:rPr lang="en-US" sz="2400" dirty="0"/>
+              <a:t/>
             </a:r>
             <a:endParaRPr lang="pt" sz="2400" b="1" i="0" u="none" strike="noStrike" dirty="0">
               <a:highlight>
@@ -37942,7 +38812,17 @@
             <a:pPr algn="ctr"/>
             <a:r>
               <a:rPr lang="en-US" sz="2400" dirty="0"/>
-              <a:t>Ressources potentiellement disponibles  </a:t>
+              <a:t>Ressources potentiellement disponibles </a:t>
+            </a:r>
+            <a:br/>
+            <a:r>
+              <a:rPr lang="en-US" sz="2400" dirty="0"/>
+              <a:t/>
+            </a:r>
+            <a:br/>
+            <a:r>
+              <a:rPr lang="en-US" sz="2400" dirty="0"/>
+              <a:t/>
             </a:r>
           </a:p>
         </p:txBody>
@@ -38125,7 +39005,17 @@
             <a:pPr algn="ctr"/>
             <a:r>
               <a:rPr lang="en-US" dirty="0"/>
-              <a:t>OHN 1 : Des institutions plus inclusives </a:t>
+              <a:t>OHN 1 : Des institutions plus inclusives</a:t>
+            </a:r>
+            <a:br/>
+            <a:r>
+              <a:rPr lang="en-US" dirty="0"/>
+              <a:t/>
+            </a:r>
+            <a:br/>
+            <a:r>
+              <a:rPr lang="en-US" dirty="0"/>
+              <a:t/>
             </a:r>
             <a:endParaRPr lang="pt-BR" dirty="0"/>
           </a:p>
@@ -38721,7 +39611,39 @@
                 <a:latin typeface="+mn-lt"/>
                 <a:cs typeface="Calibri" panose="020F0502020204030204" pitchFamily="34" charset="0"/>
               </a:rPr>
-              <a:t>Renforcer la durabilité des investissements dans les secteurs du gaz naturel et des mines en traitant les externalités négatives du secteur et en exploitant les retombées positives Augmentation de la productivité agricole  Renforcement de la gestion des ressources naturelles et libération des investissements privés dans le secteur vert, notamment l'écotourisme, la pêche et la foresterie</a:t>
+              <a:t>Renforcer la durabilité des investissements dans les secteurs du gaz naturel et des mines en traitant les externalités négatives du secteur et en exploitant les retombées positives</a:t>
+            </a:r>
+            <a:br/>
+            <a:r>
+              <a:rPr lang="en-US" sz="1600" dirty="0">
+                <a:latin typeface="+mn-lt"/>
+                <a:cs typeface="Calibri" panose="020F0502020204030204" pitchFamily="34" charset="0"/>
+              </a:rPr>
+              <a:t>Augmentation de la productivité agricole </a:t>
+            </a:r>
+            <a:br/>
+            <a:r>
+              <a:rPr lang="en-US" sz="1600" dirty="0">
+                <a:latin typeface="+mn-lt"/>
+                <a:cs typeface="Calibri" panose="020F0502020204030204" pitchFamily="34" charset="0"/>
+              </a:rPr>
+              <a:t>Renforcement de la gestion des ressources naturelles et libération des investissements privés dans le secteur vert, notamment l'écotourisme, la pêche et la foresterie</a:t>
+            </a:r>
+            <a:br/>
+            <a:r>
+              <a:rPr lang="en-US" sz="1600" dirty="0">
+                <a:latin typeface="+mn-lt"/>
+                <a:cs typeface="Calibri" panose="020F0502020204030204" pitchFamily="34" charset="0"/>
+              </a:rPr>
+              <a:t/>
+            </a:r>
+            <a:br/>
+            <a:r>
+              <a:rPr lang="en-US" sz="1600" dirty="0">
+                <a:latin typeface="+mn-lt"/>
+                <a:cs typeface="Calibri" panose="020F0502020204030204" pitchFamily="34" charset="0"/>
+              </a:rPr>
+              <a:t/>
             </a:r>
             <a:endParaRPr lang="en-US" sz="1600" b="1" dirty="0">
               <a:solidFill>
@@ -38855,7 +39777,85 @@
                 <a:latin typeface="+mn-lt"/>
                 <a:cs typeface="Calibri" panose="020F0502020204030204" pitchFamily="34" charset="0"/>
               </a:rPr>
-              <a:t> Objectif 6 : Développer des services abordables, fiables et résilients au climat pour améliorer l'accès des populations pauvres et favoriser une urbanisation durable et une agglomération économique.  </a:t>
+              <a:t/>
+            </a:r>
+            <a:br/>
+            <a:r>
+              <a:rPr lang="en-US" sz="1600" b="1" dirty="0">
+                <a:solidFill>
+                  <a:schemeClr val="accent1">
+                    <a:lumMod val="75000"/>
+                  </a:schemeClr>
+                </a:solidFill>
+                <a:latin typeface="+mn-lt"/>
+                <a:cs typeface="Calibri" panose="020F0502020204030204" pitchFamily="34" charset="0"/>
+              </a:rPr>
+              <a:t>Alors que le portefeuille existant continue de financer des investissements dans les infrastructures en milieu rural, les nouvelles activités mettront l'accent sur les investissements dans les infrastructures susceptibles de soutenir la croissance, notamment dans les domaines de l'économie numérique et des routes. </a:t>
+            </a:r>
+            <a:br/>
+            <a:r>
+              <a:rPr lang="en-US" sz="1600" b="1" dirty="0">
+                <a:solidFill>
+                  <a:schemeClr val="accent1">
+                    <a:lumMod val="75000"/>
+                  </a:schemeClr>
+                </a:solidFill>
+                <a:latin typeface="+mn-lt"/>
+                <a:cs typeface="Calibri" panose="020F0502020204030204" pitchFamily="34" charset="0"/>
+              </a:rPr>
+              <a:t/>
+            </a:r>
+            <a:br/>
+            <a:r>
+              <a:rPr lang="en-US" sz="1600" b="1" dirty="0">
+                <a:solidFill>
+                  <a:schemeClr val="accent1">
+                    <a:lumMod val="75000"/>
+                  </a:schemeClr>
+                </a:solidFill>
+                <a:latin typeface="+mn-lt"/>
+                <a:cs typeface="Calibri" panose="020F0502020204030204" pitchFamily="34" charset="0"/>
+              </a:rPr>
+              <a:t/>
+            </a:r>
+            <a:br/>
+            <a:r>
+              <a:rPr lang="en-US" sz="1600" b="1" dirty="0">
+                <a:solidFill>
+                  <a:schemeClr val="accent1">
+                    <a:lumMod val="75000"/>
+                  </a:schemeClr>
+                </a:solidFill>
+                <a:latin typeface="+mn-lt"/>
+                <a:cs typeface="Calibri" panose="020F0502020204030204" pitchFamily="34" charset="0"/>
+              </a:rPr>
+              <a:t/>
+            </a:r>
+            <a:br/>
+            <a:r>
+              <a:rPr lang="en-US" sz="1600" b="1" dirty="0">
+                <a:solidFill>
+                  <a:schemeClr val="accent1">
+                    <a:lumMod val="75000"/>
+                  </a:schemeClr>
+                </a:solidFill>
+                <a:latin typeface="+mn-lt"/>
+                <a:cs typeface="Calibri" panose="020F0502020204030204" pitchFamily="34" charset="0"/>
+              </a:rPr>
+              <a:t/>
+            </a:r>
+            <a:br/>
+            <a:r>
+              <a:rPr lang="en-US" sz="1600" b="1" dirty="0">
+                <a:solidFill>
+                  <a:schemeClr val="accent1">
+                    <a:lumMod val="75000"/>
+                  </a:schemeClr>
+                </a:solidFill>
+                <a:latin typeface="+mn-lt"/>
+                <a:cs typeface="Calibri" panose="020F0502020204030204" pitchFamily="34" charset="0"/>
+              </a:rPr>
+              <a:t/>
             </a:r>
             <a:r>
               <a:rPr lang="en-US" sz="1600" dirty="0">
@@ -38865,7 +39865,8 @@
                 <a:latin typeface="+mn-lt"/>
                 <a:cs typeface="Calibri" panose="020F0502020204030204" pitchFamily="34" charset="0"/>
               </a:rPr>
-              <a:t>Alors que le portefeuille existant continue de financer des investissements dans les infrastructures en milieu rural, les nouvelles activités mettront l'accent sur les investissements dans les infrastructures susceptibles de soutenir la croissance, notamment dans les domaines de l'économie numérique et des routes.  </a:t>
+              <a:t>While the existing portfolio continues to finance infrastructure investments in rural areas, new activities will emphasize infrastructure investments that can support growth, including in the areas of the digital economy and roads. 
+</a:t>
             </a:r>
           </a:p>
           <a:p>
@@ -39148,15 +40149,9 @@
                 <a:latin typeface="+mn-lt"/>
                 <a:cs typeface="Calibri" panose="020F0502020204030204" pitchFamily="34" charset="0"/>
               </a:rPr>
-              <a:t>Objectif 8 : Accroître l'efficience des dépenses et la couverture effective des services sociaux intégrés.  </a:t>
-            </a:r>
-            <a:r>
-              <a:rPr lang="en-US" sz="1600" dirty="0">
-                <a:latin typeface="+mn-lt"/>
-                <a:cs typeface="Calibri" panose="020F0502020204030204" pitchFamily="34" charset="0"/>
-              </a:rPr>
-              <a:t>La prochaine Commission de Sécurité Sociale renforcera le ciblage des programmes de Protection Sociale pour améliorer le rapport coût-efficacité, notamment en encourageant la consolidation des politiques sociales, en garantissant des mécanismes de graduation et des liens avec l'emploi et la participation à la population active, et en soutenant une stratégie nationale de protection sociale sensible aux chocs.  L'objectif principal est de créer une structure budgétairement durable pour l'intégration des politiques sociales en faveur de l'accumulation de capital humain et de la réduction de la pauvreté extrême, tout en autonomisant les femmes et en garantissant la résilience aux chocs</a:t>
-            </a:r>
+              <a:t>Objectif 8 : Accroître l'efficience des dépenses et la couverture effective des services sociaux intégrés. </a:t>
+            </a:r>
+            <a:br/>
             <a:r>
               <a:rPr lang="en-US" sz="1600" b="1" dirty="0">
                 <a:solidFill>
@@ -39167,28 +40162,141 @@
                 <a:latin typeface="+mn-lt"/>
                 <a:cs typeface="Calibri" panose="020F0502020204030204" pitchFamily="34" charset="0"/>
               </a:rPr>
-              <a:t> Objectif 9 : Améliorer l'accès aux services pour prévenir les grossesses précoces et promouvoir la participation économique des femmes. </a:t>
+              <a:t>La prochaine Commission de Sécurité Sociale renforcera le ciblage des programmes de Protection Sociale pour améliorer le rapport coût-efficacité, notamment en encourageant la consolidation des politiques sociales, en garantissant des mécanismes de graduation et des liens avec l'emploi et la participation à la population active, et en soutenant une stratégie nationale de protection sociale sensible aux chocs. </a:t>
+            </a:r>
+            <a:br/>
+            <a:r>
+              <a:rPr lang="en-US" sz="1600" b="1" dirty="0">
+                <a:solidFill>
+                  <a:schemeClr val="accent1">
+                    <a:lumMod val="75000"/>
+                  </a:schemeClr>
+                </a:solidFill>
+                <a:latin typeface="+mn-lt"/>
+                <a:cs typeface="Calibri" panose="020F0502020204030204" pitchFamily="34" charset="0"/>
+              </a:rPr>
+              <a:t/>
+            </a:r>
+            <a:br/>
+            <a:r>
+              <a:rPr lang="en-US" sz="1600" b="1" dirty="0">
+                <a:solidFill>
+                  <a:schemeClr val="accent1">
+                    <a:lumMod val="75000"/>
+                  </a:schemeClr>
+                </a:solidFill>
+                <a:latin typeface="+mn-lt"/>
+                <a:cs typeface="Calibri" panose="020F0502020204030204" pitchFamily="34" charset="0"/>
+              </a:rPr>
+              <a:t>Le Mozambique affiche le quatrième taux de fécondité adolescente le plus élevé et le dixième taux de mariage d'enfants le plus élevé au monde, et ces taux augmentent au lieu de diminuer, contribuant à la faiblesse des compétences et de la productivité des femmes sur le marché du </a:t>
+            </a:r>
+            <a:br/>
+            <a:r>
+              <a:rPr lang="en-US" sz="1600" b="1" dirty="0">
+                <a:solidFill>
+                  <a:schemeClr val="accent1">
+                    <a:lumMod val="75000"/>
+                  </a:schemeClr>
+                </a:solidFill>
+                <a:latin typeface="+mn-lt"/>
+                <a:cs typeface="Calibri" panose="020F0502020204030204" pitchFamily="34" charset="0"/>
+              </a:rPr>
+              <a:t>travail</a:t>
+            </a:r>
+            <a:br/>
+            <a:r>
+              <a:rPr lang="en-US" sz="1600" b="1" dirty="0">
+                <a:solidFill>
+                  <a:schemeClr val="accent1">
+                    <a:lumMod val="75000"/>
+                  </a:schemeClr>
+                </a:solidFill>
+                <a:latin typeface="+mn-lt"/>
+                <a:cs typeface="Calibri" panose="020F0502020204030204" pitchFamily="34" charset="0"/>
+              </a:rPr>
+              <a:t>.</a:t>
+            </a:r>
+            <a:br/>
+            <a:r>
+              <a:rPr lang="en-US" sz="1600" b="1" dirty="0">
+                <a:solidFill>
+                  <a:schemeClr val="accent1">
+                    <a:lumMod val="75000"/>
+                  </a:schemeClr>
+                </a:solidFill>
+                <a:latin typeface="+mn-lt"/>
+                <a:cs typeface="Calibri" panose="020F0502020204030204" pitchFamily="34" charset="0"/>
+              </a:rPr>
+              <a:t/>
+            </a:r>
+            <a:br/>
+            <a:r>
+              <a:rPr lang="en-US" sz="1600" b="1" dirty="0">
+                <a:solidFill>
+                  <a:schemeClr val="accent1">
+                    <a:lumMod val="75000"/>
+                  </a:schemeClr>
+                </a:solidFill>
+                <a:latin typeface="+mn-lt"/>
+                <a:cs typeface="Calibri" panose="020F0502020204030204" pitchFamily="34" charset="0"/>
+              </a:rPr>
+              <a:t>Le CPF se concentrera sur les questions de mariage d'enfants, de grossesse précoce et de satisfaction des besoins non satisfaits en matière de planification familiale, de scolarisation des filles au lycée et de transition vers le marché du travail — entre autres. </a:t>
+            </a:r>
+            <a:br/>
+            <a:r>
+              <a:rPr lang="en-US" sz="1600" b="1" dirty="0">
+                <a:solidFill>
+                  <a:schemeClr val="accent1">
+                    <a:lumMod val="75000"/>
+                  </a:schemeClr>
+                </a:solidFill>
+                <a:latin typeface="+mn-lt"/>
+                <a:cs typeface="Calibri" panose="020F0502020204030204" pitchFamily="34" charset="0"/>
+              </a:rPr>
+              <a:t/>
             </a:r>
             <a:r>
               <a:rPr lang="en-US" sz="1600" dirty="0">
                 <a:latin typeface="+mn-lt"/>
                 <a:cs typeface="Calibri" panose="020F0502020204030204" pitchFamily="34" charset="0"/>
               </a:rPr>
-              <a:t>Le Mozambique affiche le quatrième taux de fécondité adolescente le plus élevé et le dixième taux de mariage d'enfants le plus élevé au monde, et ces taux augmentent au lieu de diminuer, contribuant à la faiblesse des compétences et de la productivité des femmes sur le marché du </a:t>
+              <a:t>The next Social Security Commission will increase the focus of Social Protection programs to improve cost-benefit ratio, including encouraging the consolidation of social policies, ensuring undergraduate mechanisms and employment ties and participation in the workforce, and supporting a national shock-sensitive social protection strategy. 
+The main objective is to create a fiscally sustainable structure for the integration of social policies for the accumulation of human capital and reduction of extreme poverty, while empowering women and ensuring resilience to shocks</a:t>
+            </a:r>
+            <a:r>
+              <a:rPr lang="en-US" sz="1600" b="1" dirty="0">
+                <a:solidFill>
+                  <a:schemeClr val="accent1">
+                    <a:lumMod val="75000"/>
+                  </a:schemeClr>
+                </a:solidFill>
+                <a:latin typeface="+mn-lt"/>
+                <a:cs typeface="Calibri" panose="020F0502020204030204" pitchFamily="34" charset="0"/>
+              </a:rPr>
+              <a:t>
+Objective 9: To improve access to services to prevent teenage pregnancy and promote women's economic participation.
+</a:t>
+            </a:r>
+            <a:r>
+              <a:rPr lang="en-US" sz="1600" dirty="0">
+                <a:latin typeface="+mn-lt"/>
+                <a:cs typeface="Calibri" panose="020F0502020204030204" pitchFamily="34" charset="0"/>
+              </a:rPr>
+              <a:t>Mozambique has the fourth highest fertility rate in adolescence and the tenth highest rate of child marriage in the world and these rates are increasing and not decreasing, contributing to women's low skills and low productivity in the </a:t>
             </a:r>
             <a:r>
               <a:rPr lang="en-US" sz="1600" dirty="0" err="1">
                 <a:latin typeface="+mn-lt"/>
                 <a:cs typeface="Calibri" panose="020F0502020204030204" pitchFamily="34" charset="0"/>
               </a:rPr>
-              <a:t>travail</a:t>
+              <a:t>labour</a:t>
             </a:r>
             <a:r>
               <a:rPr lang="en-US" sz="1600" dirty="0">
                 <a:latin typeface="+mn-lt"/>
                 <a:cs typeface="Calibri" panose="020F0502020204030204" pitchFamily="34" charset="0"/>
               </a:rPr>
-              <a:t>.</a:t>
+              <a:t> market.</a:t>
             </a:r>
             <a:r>
               <a:rPr lang="en-US" sz="1600" b="1" dirty="0">
@@ -39208,7 +40316,7 @@
                 <a:latin typeface="+mn-lt"/>
                 <a:cs typeface="Calibri" panose="020F0502020204030204" pitchFamily="34" charset="0"/>
               </a:rPr>
-              <a:t>Le CPF se concentrera sur les questions de mariage d'enfants, de grossesse précoce et de satisfaction des besoins non satisfaits en matière de planification familiale, de scolarisation des filles au lycée et de transition vers le marché du travail — entre autres. </a:t>
+              <a:t>The CPF will focus on issues of child marriage, teenage pregnancy and meeting unmet needs of family planning, girls' high school and the transition from the labor market – among others. </a:t>
             </a:r>
             <a:endParaRPr lang="pt-BR" sz="1600" dirty="0">
               <a:latin typeface="+mn-lt"/>
@@ -39517,7 +40625,17 @@
             <a:pPr algn="ctr"/>
             <a:r>
               <a:rPr lang="en-US" sz="4000" dirty="0"/>
-              <a:t>Structure de la présentation </a:t>
+              <a:t>Structure de la présentation</a:t>
+            </a:r>
+            <a:br/>
+            <a:r>
+              <a:rPr lang="en-US" sz="4000" dirty="0"/>
+              <a:t/>
+            </a:r>
+            <a:br/>
+            <a:r>
+              <a:rPr lang="en-US" sz="4000" dirty="0"/>
+              <a:t/>
             </a:r>
             <a:endParaRPr lang="pt" sz="4000" b="0" i="1" u="none" strike="noStrike" dirty="0">
               <a:highlight>
@@ -39573,7 +40691,27 @@
             </a:pPr>
             <a:r>
               <a:rPr lang="en-US" sz="3200" b="1" dirty="0"/>
-              <a:t>Vision du Groupe de la Banque mondiale sur les principaux défis stratégiques du pays    Principales leçons du CPP précédent (2017-2021) Proposition initiale pour le CPP 2023-2027</a:t>
+              <a:t>Vision du Groupe de la Banque mondiale sur les principaux défis stratégiques du pays   </a:t>
+            </a:r>
+            <a:br/>
+            <a:r>
+              <a:rPr lang="en-US" sz="3200" b="1" dirty="0"/>
+              <a:t>Principales leçons du CPP précédent (2017-2021)</a:t>
+            </a:r>
+            <a:br/>
+            <a:r>
+              <a:rPr lang="en-US" sz="3200" b="1" dirty="0"/>
+              <a:t>Proposition initiale pour le CPP 2023-2027</a:t>
+            </a:r>
+            <a:br/>
+            <a:r>
+              <a:rPr lang="en-US" sz="3200" b="1" dirty="0"/>
+              <a:t/>
+            </a:r>
+            <a:br/>
+            <a:r>
+              <a:rPr lang="en-US" sz="3200" b="1" dirty="0"/>
+              <a:t/>
             </a:r>
             <a:endParaRPr lang="pt" sz="3200" b="1" i="0" u="none" strike="noStrike" dirty="0">
               <a:highlight>
@@ -39736,7 +40874,17 @@
             <a:pPr algn="ctr"/>
             <a:r>
               <a:rPr lang="en-US" sz="4000" dirty="0"/>
-              <a:t>Structure de la présentation </a:t>
+              <a:t>Structure de la présentation</a:t>
+            </a:r>
+            <a:br/>
+            <a:r>
+              <a:rPr lang="en-US" sz="4000" dirty="0"/>
+              <a:t/>
+            </a:r>
+            <a:br/>
+            <a:r>
+              <a:rPr lang="en-US" sz="4000" dirty="0"/>
+              <a:t/>
             </a:r>
             <a:endParaRPr lang="pt" sz="4000" b="0" i="1" u="none" strike="noStrike" dirty="0">
               <a:highlight>
@@ -39792,7 +40940,27 @@
             </a:pPr>
             <a:r>
               <a:rPr lang="en-US" sz="3200" b="1" dirty="0"/>
-              <a:t>Vision du Groupe de la Banque mondiale sur les principaux défis stratégiques du pays    </a:t>
+              <a:t>Vision du Groupe de la Banque mondiale sur les principaux défis stratégiques du pays   </a:t>
+            </a:r>
+            <a:br/>
+            <a:r>
+              <a:rPr lang="en-US" sz="3200" b="1" dirty="0"/>
+              <a:t>Principaux enseignements du CPF précédent (2017-2021) </a:t>
+            </a:r>
+            <a:br/>
+            <a:r>
+              <a:rPr lang="en-US" sz="3200" b="1" dirty="0"/>
+              <a:t>Proposition initiale pour le CPF 2023-2027</a:t>
+            </a:r>
+            <a:br/>
+            <a:r>
+              <a:rPr lang="en-US" sz="3200" b="1" dirty="0"/>
+              <a:t/>
+            </a:r>
+            <a:br/>
+            <a:r>
+              <a:rPr lang="en-US" sz="3200" b="1" dirty="0"/>
+              <a:t/>
             </a:r>
             <a:r>
               <a:rPr lang="en-US" sz="3200" b="1" dirty="0">
@@ -39802,7 +40970,8 @@
                   </a:schemeClr>
                 </a:solidFill>
               </a:rPr>
-              <a:t>Principaux enseignements du CPF précédent (2017-2021)  Proposition initiale pour le CPF 2023-2027</a:t>
+              <a:t>Main lessons from the previous CPF (2017-2021) 
+Initial Proposal for CPF 2023-2027</a:t>
             </a:r>
             <a:endParaRPr lang="pt" sz="3200" b="1" i="0" u="none" strike="noStrike" dirty="0">
               <a:solidFill>
@@ -41789,7 +42958,17 @@
           <a:p>
             <a:r>
               <a:rPr lang="en-US" sz="1050" dirty="0"/>
-              <a:t>Diagnostic systématique pays (DSP) de la Banque mondiale selon les objectifs identifiés en 2016 </a:t>
+              <a:t>Diagnostic systématique pays (DSP) de la Banque mondiale selon les objectifs identifiés en 2016</a:t>
+            </a:r>
+            <a:br/>
+            <a:r>
+              <a:rPr lang="en-US" sz="1050" dirty="0"/>
+              <a:t/>
+            </a:r>
+            <a:br/>
+            <a:r>
+              <a:rPr lang="en-US" sz="1050" dirty="0"/>
+              <a:t/>
             </a:r>
             <a:endParaRPr lang="pt-BR" sz="1050" dirty="0"/>
           </a:p>
@@ -41945,7 +43124,17 @@
             <a:pPr algn="ctr"/>
             <a:r>
               <a:rPr lang="en-US" sz="4000" dirty="0"/>
-              <a:t>Structure de la présentation </a:t>
+              <a:t>Structure de la présentation</a:t>
+            </a:r>
+            <a:br/>
+            <a:r>
+              <a:rPr lang="en-US" sz="4000" dirty="0"/>
+              <a:t/>
+            </a:r>
+            <a:br/>
+            <a:r>
+              <a:rPr lang="en-US" sz="4000" dirty="0"/>
+              <a:t/>
             </a:r>
             <a:endParaRPr lang="pt" sz="4000" b="0" i="1" u="none" strike="noStrike" dirty="0">
               <a:highlight>
@@ -42007,12 +43196,20 @@
                   </a:schemeClr>
                 </a:solidFill>
               </a:rPr>
-              <a:t>Vision du Groupe de la Banque mondiale sur les principaux défis stratégiques du pays    </a:t>
-            </a:r>
-            <a:r>
-              <a:rPr lang="en-US" sz="3200" b="1" dirty="0"/>
-              <a:t>Principaux enseignements du CPF précédent (2017-2021) </a:t>
-            </a:r>
+              <a:t>Vision du Groupe de la Banque mondiale sur les principaux défis stratégiques du pays   </a:t>
+            </a:r>
+            <a:br/>
+            <a:r>
+              <a:rPr lang="en-US" sz="3200" b="1" dirty="0">
+                <a:solidFill>
+                  <a:schemeClr val="bg2">
+                    <a:lumMod val="90000"/>
+                  </a:schemeClr>
+                </a:solidFill>
+              </a:rPr>
+              <a:t>Principaux enseignements du CPF précédent (2017-2021)</a:t>
+            </a:r>
+            <a:br/>
             <a:r>
               <a:rPr lang="en-US" sz="3200" b="1" dirty="0">
                 <a:solidFill>
@@ -42022,6 +43219,43 @@
                 </a:solidFill>
               </a:rPr>
               <a:t>Proposition initiale pour le CPF 2023-2027</a:t>
+            </a:r>
+            <a:br/>
+            <a:r>
+              <a:rPr lang="en-US" sz="3200" b="1" dirty="0">
+                <a:solidFill>
+                  <a:schemeClr val="bg2">
+                    <a:lumMod val="90000"/>
+                  </a:schemeClr>
+                </a:solidFill>
+              </a:rPr>
+              <a:t/>
+            </a:r>
+            <a:br/>
+            <a:r>
+              <a:rPr lang="en-US" sz="3200" b="1" dirty="0">
+                <a:solidFill>
+                  <a:schemeClr val="bg2">
+                    <a:lumMod val="90000"/>
+                  </a:schemeClr>
+                </a:solidFill>
+              </a:rPr>
+              <a:t/>
+            </a:r>
+            <a:r>
+              <a:rPr lang="en-US" sz="3200" b="1" dirty="0"/>
+              <a:t>Main lessons from the previous CPF (2017-2021)
+</a:t>
+            </a:r>
+            <a:r>
+              <a:rPr lang="en-US" sz="3200" b="1" dirty="0">
+                <a:solidFill>
+                  <a:schemeClr val="bg2">
+                    <a:lumMod val="90000"/>
+                  </a:schemeClr>
+                </a:solidFill>
+              </a:rPr>
+              <a:t>Initial Proposal for CPF 2023-2027</a:t>
             </a:r>
             <a:endParaRPr lang="pt-BR" sz="3200" b="1" i="0" u="none" strike="noStrike" dirty="0">
               <a:solidFill>

--- a/fixtures/real-world/worldbank-cpf-concept-note-fr.pptx
+++ b/fixtures/real-world/worldbank-cpf-concept-note-fr.pptx
@@ -584,7 +584,7 @@
                 <a:ea typeface="+mn-ea"/>
                 <a:cs typeface="Arial" panose="020B0604020202020204" pitchFamily="34" charset="0"/>
               </a:rPr>
-              <a:t>FR: Poverty rates and total number of poor </a:t>
+              <a:t>Taux de pauvreté et nombre total de pauvres </a:t>
             </a:r>
           </a:p>
         </c:rich>
@@ -4884,7 +4884,7 @@
                 </a:pPr>
                 <a:r>
                   <a:rPr lang="en-US"/>
-                  <a:t>FR: Taxa de Pobreza (%)</a:t>
+                  <a:t>Taux de pauvreté (%)</a:t>
                 </a:r>
               </a:p>
             </c:rich>
@@ -4982,7 +4982,7 @@
                 </a:pPr>
                 <a:r>
                   <a:rPr lang="en-US" dirty="0" err="1"/>
-                  <a:t>FR: Número</a:t>
+                  <a:t>Nombre</a:t>
                 </a:r>
                 <a:r>
                   <a:rPr lang="en-US" dirty="0"/>
@@ -4990,7 +4990,7 @@
                 </a:r>
                 <a:r>
                   <a:rPr lang="en-US" dirty="0" err="1"/>
-                  <a:t>FR: pobres</a:t>
+                  <a:t>pauvres</a:t>
                 </a:r>
                 <a:r>
                   <a:rPr lang="en-US" dirty="0"/>
@@ -5325,7 +5325,7 @@
                 </a:solidFill>
                 <a:latin typeface="+mj-lt"/>
               </a:rPr>
-              <a:t>FR: Funding</a:t>
+              <a:t>Objectifs</a:t>
             </a:r>
             <a:r>
               <a:rPr lang="en-US" sz="1000" b="1" baseline="0" dirty="0">
@@ -5343,7 +5343,7 @@
                 </a:solidFill>
                 <a:latin typeface="+mj-lt"/>
               </a:rPr>
-              <a:t>FR: objectives</a:t>
+              <a:t>de financement</a:t>
             </a:r>
             <a:r>
               <a:rPr lang="en-US" sz="1000" b="1" baseline="0" dirty="0">
@@ -5361,27 +5361,7 @@
                 </a:solidFill>
                 <a:latin typeface="+mj-lt"/>
               </a:rPr>
-              <a:t>FR: in the FY17-21 CPF period (% of total commitments)</a:t>
-            </a:r>
-            <a:br/>
-            <a:r>
-              <a:rPr lang="en-US" sz="1000" b="1" dirty="0">
-                <a:solidFill>
-                  <a:schemeClr val="tx1"/>
-                </a:solidFill>
-                <a:latin typeface="+mj-lt"/>
-              </a:rPr>
-              <a:t/>
-            </a:r>
-            <a:br/>
-            <a:r>
-              <a:rPr lang="en-US" sz="1000" b="1" dirty="0">
-                <a:solidFill>
-                  <a:schemeClr val="tx1"/>
-                </a:solidFill>
-                <a:latin typeface="+mj-lt"/>
-              </a:rPr>
-              <a:t/>
+              <a:t>sur la période du CPF EB17-21 (% du total des engagements)</a:t>
             </a:r>
             <a:r>
               <a:rPr lang="pt-BR" sz="1000" b="0" dirty="0">
@@ -5699,17 +5679,7 @@
                     </a:pPr>
                     <a:r>
                       <a:rPr lang="en-US"/>
-                      <a:t>FR: 1: Improved economic management, 6.6%</a:t>
-                    </a:r>
-                    <a:br/>
-                    <a:r>
-                      <a:rPr lang="en-US"/>
-                      <a:t/>
-                    </a:r>
-                    <a:br/>
-                    <a:r>
-                      <a:rPr lang="en-US"/>
-                      <a:t/>
+                      <a:t>1 : Amélioration de la gestion économique, 6,6 %</a:t>
                     </a:r>
                     <a:endParaRPr lang="en-US" baseline="0"/>
                   </a:p>
@@ -5784,17 +5754,7 @@
                     </a:pPr>
                     <a:r>
                       <a:rPr lang="en-US"/>
-                      <a:t>FR: 2: Increase in Agricultural Growth, 30.2%</a:t>
-                    </a:r>
-                    <a:br/>
-                    <a:r>
-                      <a:rPr lang="en-US"/>
-                      <a:t/>
-                    </a:r>
-                    <a:br/>
-                    <a:r>
-                      <a:rPr lang="en-US"/>
-                      <a:t/>
+                      <a:t>2 : Augmentation de la croissance agricole, 30,2 %</a:t>
                     </a:r>
                     <a:endParaRPr lang="en-US" baseline="0"/>
                   </a:p>
@@ -5869,17 +5829,7 @@
                     </a:pPr>
                     <a:r>
                       <a:rPr lang="en-US"/>
-                      <a:t>FR: 3: Improving the Business Environment for Job Creation, 3.5%</a:t>
-                    </a:r>
-                    <a:br/>
-                    <a:r>
-                      <a:rPr lang="en-US"/>
-                      <a:t/>
-                    </a:r>
-                    <a:br/>
-                    <a:r>
-                      <a:rPr lang="en-US"/>
-                      <a:t/>
+                      <a:t>3 : Amélioration de l'environnement des affaires pour la création d'emplois, 3,5 %</a:t>
                     </a:r>
                     <a:endParaRPr lang="en-US" baseline="0"/>
                   </a:p>
@@ -5954,17 +5904,7 @@
                     </a:pPr>
                     <a:r>
                       <a:rPr lang="en-US"/>
-                      <a:t>FR: 4: Expand access and improve electricity reliability, 8.0%</a:t>
-                    </a:r>
-                    <a:br/>
-                    <a:r>
-                      <a:rPr lang="en-US"/>
-                      <a:t/>
-                    </a:r>
-                    <a:br/>
-                    <a:r>
-                      <a:rPr lang="en-US"/>
-                      <a:t/>
+                      <a:t>4 : Étendre l'accès et améliorer la fiabilité de l'électricité, 8,0 %</a:t>
                     </a:r>
                     <a:endParaRPr lang="en-US" baseline="0"/>
                   </a:p>
@@ -6039,17 +5979,7 @@
                     </a:pPr>
                     <a:r>
                       <a:rPr lang="en-US"/>
-                      <a:t>FR: 5: Improve the Skills Base, 13.8%</a:t>
-                    </a:r>
-                    <a:br/>
-                    <a:r>
-                      <a:rPr lang="en-US"/>
-                      <a:t/>
-                    </a:r>
-                    <a:br/>
-                    <a:r>
-                      <a:rPr lang="en-US"/>
-                      <a:t/>
+                      <a:t>5 : Améliorer la base de compétences, 13,8 %</a:t>
                     </a:r>
                     <a:endParaRPr lang="en-US" baseline="0"/>
                   </a:p>
@@ -6124,17 +6054,7 @@
                     </a:pPr>
                     <a:r>
                       <a:rPr lang="en-US"/>
-                      <a:t>FR: 6: Improving the provision of the Health Service, 2.8%</a:t>
-                    </a:r>
-                    <a:br/>
-                    <a:r>
-                      <a:rPr lang="en-US"/>
-                      <a:t/>
-                    </a:r>
-                    <a:br/>
-                    <a:r>
-                      <a:rPr lang="en-US"/>
-                      <a:t/>
+                      <a:t>6 : Améliorer la prestation du service de santé, 2,8 %</a:t>
                     </a:r>
                     <a:endParaRPr lang="en-US" baseline="0"/>
                   </a:p>
@@ -6209,17 +6129,7 @@
                     </a:pPr>
                     <a:r>
                       <a:rPr lang="en-US"/>
-                      <a:t>FR: 7: Improving access to water and sanitation, 6.6%</a:t>
-                    </a:r>
-                    <a:br/>
-                    <a:r>
-                      <a:rPr lang="en-US"/>
-                      <a:t/>
-                    </a:r>
-                    <a:br/>
-                    <a:r>
-                      <a:rPr lang="en-US"/>
-                      <a:t/>
+                      <a:t>7 : Améliorer l'accès à l'eau et à l'assainissement, 6,6 %</a:t>
                     </a:r>
                     <a:endParaRPr lang="en-US" baseline="0"/>
                   </a:p>
@@ -6294,17 +6204,7 @@
                     </a:pPr>
                     <a:r>
                       <a:rPr lang="en-US"/>
-                      <a:t>FR: 8: Support for Recovery and Resilience, 21.1%</a:t>
-                    </a:r>
-                    <a:br/>
-                    <a:r>
-                      <a:rPr lang="en-US"/>
-                      <a:t/>
-                    </a:r>
-                    <a:br/>
-                    <a:r>
-                      <a:rPr lang="en-US"/>
-                      <a:t/>
+                      <a:t>8 : Soutien au relèvement et à la résilience, 21,1 %</a:t>
                     </a:r>
                     <a:endParaRPr lang="en-US" baseline="0"/>
                   </a:p>
@@ -6379,17 +6279,7 @@
                     </a:pPr>
                     <a:r>
                       <a:rPr lang="en-US" dirty="0"/>
-                      <a:t>FR: 9: Promoting Inclusive Urbanization and Decentralization7.5%</a:t>
-                    </a:r>
-                    <a:br/>
-                    <a:r>
-                      <a:rPr lang="en-US" dirty="0"/>
-                      <a:t/>
-                    </a:r>
-                    <a:br/>
-                    <a:r>
-                      <a:rPr lang="en-US" dirty="0"/>
-                      <a:t/>
+                      <a:t>9 : Promouvoir une urbanisation et une décentralisation inclusives, 7,5 %</a:t>
                     </a:r>
                     <a:endParaRPr lang="en-US" baseline="0" dirty="0"/>
                   </a:p>
@@ -6640,21 +6530,12 @@
                   <a:schemeClr val="tx1"/>
                 </a:solidFill>
               </a:rPr>
-              <a:t>FR: % of total undisbursed funds</a:t>
+              <a:t>% du total des fonds non décaissés</a:t>
             </a:r>
             <a:r>
               <a:rPr lang="en-US" dirty="0"/>
-              <a:t>*</a:t>
-            </a:r>
-            <a:br/>
-            <a:r>
-              <a:rPr lang="en-US" dirty="0"/>
-              <a:t/>
-            </a:r>
-            <a:br/>
-            <a:r>
-              <a:rPr lang="en-US" dirty="0"/>
-              <a:t/>
+              <a:t>*
+</a:t>
             </a:r>
           </a:p>
         </c:rich>
@@ -7005,7 +6886,7 @@
             </a:pPr>
             <a:r>
               <a:rPr lang="en-US" b="1" dirty="0"/>
-              <a:t>FR: Nominal GDP per Capita (1998 - 2021) </a:t>
+              <a:t>PIB nominal par habitant (1998 - 2021) </a:t>
             </a:r>
           </a:p>
         </c:rich>
@@ -7359,7 +7240,7 @@
                 </a:pPr>
                 <a:r>
                   <a:rPr lang="en-US"/>
-                  <a:t>FR: USD</a:t>
+                  <a:t>USD</a:t>
                 </a:r>
               </a:p>
             </c:rich>
@@ -7503,7 +7384,7 @@
             </a:pPr>
             <a:r>
               <a:rPr lang="en-US" sz="1000" b="1" dirty="0"/>
-              <a:t>FR: Ghana</a:t>
+              <a:t>Ghana</a:t>
             </a:r>
           </a:p>
         </c:rich>
@@ -9359,7 +9240,7 @@
             </a:pPr>
             <a:r>
               <a:rPr lang="en-US" sz="1000" b="1" dirty="0"/>
-              <a:t>FR: Mozambique</a:t>
+              <a:t>Mozambique</a:t>
             </a:r>
           </a:p>
         </c:rich>
@@ -10315,7 +10196,7 @@
             </a:pPr>
             <a:r>
               <a:rPr lang="pt-PT" b="1" dirty="0"/>
-              <a:t>FR: Crescimento Real do PIB (billion de Meticais )</a:t>
+              <a:t>Croissance réelle du PIB (milliards de Meticais )</a:t>
             </a:r>
           </a:p>
         </c:rich>
@@ -11209,17 +11090,7 @@
             </a:pPr>
             <a:r>
               <a:rPr lang="en-US" sz="1000" b="1"/>
-              <a:t>FR: Total Public Debt Stock (% GDP)</a:t>
-            </a:r>
-            <a:br/>
-            <a:r>
-              <a:rPr lang="en-US" sz="1000" b="1"/>
-              <a:t/>
-            </a:r>
-            <a:br/>
-            <a:r>
-              <a:rPr lang="en-US" sz="1000" b="1"/>
-              <a:t/>
+              <a:t>Encours total de la dette publique (% du PIB)</a:t>
             </a:r>
           </a:p>
         </c:rich>
@@ -11655,17 +11526,7 @@
             </a:pPr>
             <a:r>
               <a:rPr lang="en-US" sz="1050" b="1"/>
-              <a:t>FR: Annual GDP Growth</a:t>
-            </a:r>
-            <a:br/>
-            <a:r>
-              <a:rPr lang="en-US" sz="1050" b="1"/>
-              <a:t/>
-            </a:r>
-            <a:br/>
-            <a:r>
-              <a:rPr lang="en-US" sz="1050" b="1"/>
-              <a:t/>
+              <a:t>Croissance annuelle du PIB</a:t>
             </a:r>
           </a:p>
         </c:rich>
@@ -14474,17 +14335,7 @@
             </a:pPr>
             <a:r>
               <a:rPr lang="pt-BR" sz="1200" dirty="0"/>
-              <a:t>FR: Annual GDP Growth - Projected</a:t>
-            </a:r>
-            <a:br/>
-            <a:r>
-              <a:rPr lang="pt-BR" sz="1200" dirty="0"/>
-              <a:t/>
-            </a:r>
-            <a:br/>
-            <a:r>
-              <a:rPr lang="pt-BR" sz="1200" dirty="0"/>
-              <a:t/>
+              <a:t>Croissance annuelle du PIB – Projection</a:t>
             </a:r>
             <a:endParaRPr lang="en-US" sz="1200" dirty="0"/>
           </a:p>
@@ -25975,170 +25826,8 @@
                 <a:latin typeface="Times New Roman" panose="02020603050405020304" pitchFamily="18" charset="0"/>
                 <a:cs typeface="Times New Roman" panose="02020603050405020304" pitchFamily="18" charset="0"/>
               </a:rPr>
-              <a:t>Groupe de la Banque mondiale (GBM) </a:t>
+              <a:t>Groupe de la Banque mondiale (GBM) Mozambique : Cadre de partenariat-pays (CPF) 2023-2027 Résumé de la note de cadrage Version publique  Maputo, mai 2022</a:t>
             </a:r>
-            <a:br>
-              <a:rPr lang="pt" sz="3600" b="1" dirty="0">
-                <a:highlight>
-                  <a:srgbClr val="000000">
-                    <a:alpha val="0"/>
-                  </a:srgbClr>
-                </a:highlight>
-                <a:latin typeface="Times New Roman" panose="02020603050405020304" pitchFamily="18" charset="0"/>
-                <a:cs typeface="Times New Roman" panose="02020603050405020304" pitchFamily="18" charset="0"/>
-              </a:rPr>
-            </a:br>
-            <a:br>
-              <a:rPr lang="pt" sz="3600" b="1" dirty="0">
-                <a:highlight>
-                  <a:srgbClr val="000000">
-                    <a:alpha val="0"/>
-                  </a:srgbClr>
-                </a:highlight>
-                <a:latin typeface="Times New Roman" panose="02020603050405020304" pitchFamily="18" charset="0"/>
-                <a:cs typeface="Times New Roman" panose="02020603050405020304" pitchFamily="18" charset="0"/>
-              </a:rPr>
-            </a:br>
-            <a:r>
-              <a:rPr lang="en-US" sz="3600" b="1" dirty="0">
-                <a:highlight>
-                  <a:srgbClr val="000000">
-                    <a:alpha val="0"/>
-                  </a:srgbClr>
-                </a:highlight>
-                <a:latin typeface="Times New Roman" panose="02020603050405020304" pitchFamily="18" charset="0"/>
-                <a:cs typeface="Times New Roman" panose="02020603050405020304" pitchFamily="18" charset="0"/>
-              </a:rPr>
-              <a:t>Mozambique : Cadre de Partenariat Pays (CPF) 2023-2027 </a:t>
-            </a:r>
-            <a:br>
-              <a:rPr lang="en-US" sz="3600" b="1" dirty="0">
-                <a:highlight>
-                  <a:srgbClr val="000000">
-                    <a:alpha val="0"/>
-                  </a:srgbClr>
-                </a:highlight>
-                <a:latin typeface="Times New Roman" panose="02020603050405020304" pitchFamily="18" charset="0"/>
-                <a:cs typeface="Times New Roman" panose="02020603050405020304" pitchFamily="18" charset="0"/>
-              </a:rPr>
-            </a:br>
-            <a:br>
-              <a:rPr lang="en-US" sz="3600" b="1" dirty="0">
-                <a:highlight>
-                  <a:srgbClr val="000000">
-                    <a:alpha val="0"/>
-                  </a:srgbClr>
-                </a:highlight>
-                <a:latin typeface="Times New Roman" panose="02020603050405020304" pitchFamily="18" charset="0"/>
-                <a:cs typeface="Times New Roman" panose="02020603050405020304" pitchFamily="18" charset="0"/>
-              </a:rPr>
-            </a:br>
-            <a:r>
-              <a:rPr lang="en-US" sz="3600" b="1" dirty="0">
-                <a:highlight>
-                  <a:srgbClr val="000000">
-                    <a:alpha val="0"/>
-                  </a:srgbClr>
-                </a:highlight>
-                <a:latin typeface="Times New Roman" panose="02020603050405020304" pitchFamily="18" charset="0"/>
-                <a:cs typeface="Times New Roman" panose="02020603050405020304" pitchFamily="18" charset="0"/>
-              </a:rPr>
-              <a:t>Résumé de la Note de Concept </a:t>
-            </a:r>
-            <a:br>
-              <a:rPr lang="en-US" sz="3600" b="1" dirty="0">
-                <a:highlight>
-                  <a:srgbClr val="000000">
-                    <a:alpha val="0"/>
-                  </a:srgbClr>
-                </a:highlight>
-                <a:latin typeface="Times New Roman" panose="02020603050405020304" pitchFamily="18" charset="0"/>
-                <a:cs typeface="Times New Roman" panose="02020603050405020304" pitchFamily="18" charset="0"/>
-              </a:rPr>
-            </a:br>
-            <a:br>
-              <a:rPr lang="en-US" sz="3600" b="1" dirty="0">
-                <a:highlight>
-                  <a:srgbClr val="000000">
-                    <a:alpha val="0"/>
-                  </a:srgbClr>
-                </a:highlight>
-                <a:latin typeface="Times New Roman" panose="02020603050405020304" pitchFamily="18" charset="0"/>
-                <a:cs typeface="Times New Roman" panose="02020603050405020304" pitchFamily="18" charset="0"/>
-              </a:rPr>
-            </a:br>
-            <a:r>
-              <a:rPr lang="en-US" sz="3600" b="1" dirty="0">
-                <a:highlight>
-                  <a:srgbClr val="000000">
-                    <a:alpha val="0"/>
-                  </a:srgbClr>
-                </a:highlight>
-                <a:latin typeface="Times New Roman" panose="02020603050405020304" pitchFamily="18" charset="0"/>
-                <a:cs typeface="Times New Roman" panose="02020603050405020304" pitchFamily="18" charset="0"/>
-              </a:rPr>
-              <a:t>Version publique  </a:t>
-            </a:r>
-            <a:br>
-              <a:rPr lang="en-US" sz="3600" b="1" dirty="0">
-                <a:highlight>
-                  <a:srgbClr val="000000">
-                    <a:alpha val="0"/>
-                  </a:srgbClr>
-                </a:highlight>
-                <a:latin typeface="Times New Roman" panose="02020603050405020304" pitchFamily="18" charset="0"/>
-                <a:cs typeface="Times New Roman" panose="02020603050405020304" pitchFamily="18" charset="0"/>
-              </a:rPr>
-            </a:br>
-            <a:br>
-              <a:rPr lang="en-US" sz="3600" b="1" dirty="0">
-                <a:highlight>
-                  <a:srgbClr val="000000">
-                    <a:alpha val="0"/>
-                  </a:srgbClr>
-                </a:highlight>
-                <a:latin typeface="Times New Roman" panose="02020603050405020304" pitchFamily="18" charset="0"/>
-                <a:cs typeface="Times New Roman" panose="02020603050405020304" pitchFamily="18" charset="0"/>
-              </a:rPr>
-            </a:br>
-            <a:r>
-              <a:rPr lang="en-US" sz="3600" b="1" dirty="0">
-                <a:highlight>
-                  <a:srgbClr val="000000">
-                    <a:alpha val="0"/>
-                  </a:srgbClr>
-                </a:highlight>
-                <a:latin typeface="Times New Roman" panose="02020603050405020304" pitchFamily="18" charset="0"/>
-                <a:cs typeface="Times New Roman" panose="02020603050405020304" pitchFamily="18" charset="0"/>
-              </a:rPr>
-              <a:t>Maputo, mai 2022</a:t>
-            </a:r>
-            <a:br>
-              <a:rPr lang="en-US" sz="3600" b="1" dirty="0">
-                <a:highlight>
-                  <a:srgbClr val="000000">
-                    <a:alpha val="0"/>
-                  </a:srgbClr>
-                </a:highlight>
-                <a:latin typeface="Times New Roman" panose="02020603050405020304" pitchFamily="18" charset="0"/>
-                <a:cs typeface="Times New Roman" panose="02020603050405020304" pitchFamily="18" charset="0"/>
-              </a:rPr>
-            </a:br>
-            <a:br>
-              <a:rPr lang="pt" sz="3600" b="1" dirty="0">
-                <a:highlight>
-                  <a:srgbClr val="000000">
-                    <a:alpha val="0"/>
-                  </a:srgbClr>
-                </a:highlight>
-                <a:latin typeface="Times New Roman" panose="02020603050405020304" pitchFamily="18" charset="0"/>
-                <a:cs typeface="Times New Roman" panose="02020603050405020304" pitchFamily="18" charset="0"/>
-              </a:rPr>
-            </a:br>
-            <a:endParaRPr lang="en-US" sz="3600" b="1" dirty="0">
-              <a:latin typeface="Times New Roman" panose="02020603050405020304" pitchFamily="18" charset="0"/>
-              <a:cs typeface="Times New Roman" panose="02020603050405020304" pitchFamily="18" charset="0"/>
-            </a:endParaRPr>
           </a:p>
         </p:txBody>
       </p:sp>
@@ -26323,9 +26012,8 @@
           <a:p>
             <a:r>
               <a:rPr lang="en-US" sz="2400" dirty="0"/>
-              <a:t>CPP EF2017-2021 : Principales caractéristiques</a:t>
+              <a:t>CPF EB2017-2021 : principales caractéristiques</a:t>
             </a:r>
-            <a:endParaRPr lang="en-US" sz="2400" b="0" i="1" dirty="0"/>
           </a:p>
         </p:txBody>
       </p:sp>
@@ -26357,166 +26045,107 @@
           </a:bodyPr>
           <a:lstStyle/>
           <a:p>
-            <a:pPr marL="0" algn="just">
-              <a:spcBef>
-                <a:spcPts val="0"/>
-              </a:spcBef>
-            </a:pPr>
             <a:r>
               <a:rPr lang="en-US" dirty="0">
                 <a:latin typeface="+mn-lt"/>
               </a:rPr>
-              <a:t>Un contexte dans lequel la croissance rapide des années précédentes avait pris fin. Constat que l'impact de la croissance sur la réduction de la pauvreté avait été insuffisant.</a:t>
+              <a:t>Un contexte dans lequel la croissance rapide des années précédentes avait pris fin. La prise de conscience que l'effet de la croissance sur la réduction de la pauvreté avait été moindre que nécessaire.</a:t>
             </a:r>
           </a:p>
           <a:p>
-            <a:pPr marL="0" algn="just">
-              <a:spcBef>
-                <a:spcPts val="0"/>
-              </a:spcBef>
-            </a:pPr>
-            <a:endParaRPr lang="en-US" dirty="0">
-              <a:latin typeface="+mn-lt"/>
-            </a:endParaRPr>
-          </a:p>
-          <a:p>
-            <a:pPr marL="0" algn="just">
-              <a:spcBef>
-                <a:spcPts val="0"/>
-              </a:spcBef>
-            </a:pPr>
             <a:r>
               <a:rPr lang="en-US" dirty="0">
                 <a:latin typeface="+mn-lt"/>
               </a:rPr>
-              <a:t>Le choc de la dette cachée a réduit la confiance dans le pays, diminuant les investissements.</a:t>
+              <a:t/>
             </a:r>
           </a:p>
           <a:p>
-            <a:pPr marL="0" algn="just">
-              <a:spcBef>
-                <a:spcPts val="0"/>
-              </a:spcBef>
-            </a:pPr>
-            <a:endParaRPr lang="en-US" dirty="0">
-              <a:latin typeface="+mn-lt"/>
-            </a:endParaRPr>
-          </a:p>
-          <a:p>
-            <a:pPr marL="0" algn="just">
-              <a:spcBef>
-                <a:spcPts val="0"/>
-              </a:spcBef>
-            </a:pPr>
             <a:r>
               <a:rPr lang="en-US" dirty="0">
                 <a:latin typeface="+mn-lt"/>
               </a:rPr>
-              <a:t>Le CPF AF17-EX21 avait pour objectif global d'aider le Mozambique à «</a:t>
+              <a:t>Le choc de la dette cachée a réduit la confiance dans le pays, faisant baisser les investissements.</a:t>
             </a:r>
-            <a:r>
-              <a:rPr lang="en-US" b="1" dirty="0">
-                <a:latin typeface="+mn-lt"/>
-              </a:rPr>
-              <a:t>atteindre une croissance inclusive en favorisant l'emploi et en améliorant la productivité de manière durable</a:t>
-            </a:r>
+          </a:p>
+          <a:p>
             <a:r>
               <a:rPr lang="en-US" dirty="0">
                 <a:latin typeface="+mn-lt"/>
               </a:rPr>
-              <a:t>».</a:t>
+              <a:t/>
             </a:r>
           </a:p>
           <a:p>
-            <a:pPr marL="0" algn="just">
-              <a:spcBef>
-                <a:spcPts val="0"/>
-              </a:spcBef>
-            </a:pPr>
-            <a:endParaRPr lang="en-US" dirty="0">
-              <a:latin typeface="+mn-lt"/>
-            </a:endParaRPr>
-          </a:p>
-          <a:p>
-            <a:pPr marL="0" algn="just">
-              <a:spcBef>
-                <a:spcPts val="0"/>
-              </a:spcBef>
-            </a:pPr>
             <a:r>
               <a:rPr lang="en-US" dirty="0">
                 <a:latin typeface="+mn-lt"/>
               </a:rPr>
-              <a:t>Le programme comportait 3 axes thématiques : (i) Promouvoir une croissance diversifiée et une productivité accrue, (ii) Investir dans le capital humain, et (iii) Renforcer la durabilité et la résilience.</a:t>
+              <a:t>Le CPF EB17-EB21 avait pour objectif global d'aider le Mozambique à « parvenir à une croissance inclusive en favorisant l'emploi et en améliorant durablement la productivité ».</a:t>
             </a:r>
           </a:p>
           <a:p>
-            <a:pPr marL="0" algn="just">
-              <a:spcBef>
-                <a:spcPts val="0"/>
-              </a:spcBef>
-            </a:pPr>
-            <a:endParaRPr lang="en-US" dirty="0">
-              <a:latin typeface="+mn-lt"/>
-            </a:endParaRPr>
-          </a:p>
-          <a:p>
-            <a:pPr marL="0" algn="just">
-              <a:spcBef>
-                <a:spcPts val="0"/>
-              </a:spcBef>
-            </a:pPr>
             <a:r>
               <a:rPr lang="en-US" dirty="0">
                 <a:latin typeface="+mn-lt"/>
               </a:rPr>
-              <a:t>Le portefeuille de la Banque mondiale est passé de 1,6 milliard USD au départ à environ 2,9 milliards USD engagés sur toute la durée du CPP.</a:t>
+              <a:t/>
             </a:r>
           </a:p>
           <a:p>
-            <a:pPr marL="0" algn="just">
-              <a:spcBef>
-                <a:spcPts val="0"/>
-              </a:spcBef>
-            </a:pPr>
-            <a:endParaRPr lang="en-US" dirty="0">
-              <a:latin typeface="+mn-lt"/>
-            </a:endParaRPr>
-          </a:p>
-          <a:p>
-            <a:pPr marL="0" algn="just">
-              <a:spcBef>
-                <a:spcPts val="0"/>
-              </a:spcBef>
-            </a:pPr>
             <a:r>
               <a:rPr lang="en-US" dirty="0">
                 <a:latin typeface="+mn-lt"/>
               </a:rPr>
-              <a:t>En outre : 700 millions USD pour la prévention des conflits et de la violence (EF 2022) par le biais du</a:t>
+              <a:t>Le programme comportait 3 axes prioritaires : (i) Promouvoir une croissance diversifiée et une productivité renforcée, (ii) Investir dans le capital humain et (iii) Renforcer la durabilité et la résilience.</a:t>
             </a:r>
           </a:p>
           <a:p>
-            <a:pPr marL="0" algn="just">
-              <a:spcBef>
-                <a:spcPts val="0"/>
-              </a:spcBef>
-            </a:pPr>
-            <a:endParaRPr lang="en-US" dirty="0">
-              <a:latin typeface="+mn-lt"/>
-            </a:endParaRPr>
-          </a:p>
-          <a:p>
-            <a:pPr marL="0" algn="just">
-              <a:spcBef>
-                <a:spcPts val="0"/>
-              </a:spcBef>
-            </a:pPr>
             <a:r>
               <a:rPr lang="en-US" dirty="0">
                 <a:latin typeface="+mn-lt"/>
               </a:rPr>
-              <a:t>Les investissements de la SFI et de la MIGA dans le secteur privé se sont concentrés sur des projets transformateurs pour la création d'emplois et la réduction de la pauvreté.</a:t>
+              <a:t/>
+            </a:r>
+          </a:p>
+          <a:p>
+            <a:r>
+              <a:rPr lang="en-US" dirty="0">
+                <a:latin typeface="+mn-lt"/>
+              </a:rPr>
+              <a:t>Le portefeuille de la Banque mondiale est passé de 1,6 milliard de dollars US au départ à environ 2,9 milliards de dollars US d'engagements sur l'ensemble de la période du CPF.</a:t>
+            </a:r>
+          </a:p>
+          <a:p>
+            <a:r>
+              <a:rPr lang="en-US" dirty="0">
+                <a:latin typeface="+mn-lt"/>
+              </a:rPr>
+              <a:t/>
+            </a:r>
+          </a:p>
+          <a:p>
+            <a:r>
+              <a:rPr lang="en-US" dirty="0">
+                <a:latin typeface="+mn-lt"/>
+              </a:rPr>
+              <a:t>En outre : 700 millions de dollars US pour la prévention des conflits et de la violence (EB 2022) par l'intermédiaire de</a:t>
+            </a:r>
+          </a:p>
+          <a:p>
+            <a:r>
+              <a:rPr lang="en-US" dirty="0">
+                <a:latin typeface="+mn-lt"/>
+              </a:rPr>
+              <a:t/>
+            </a:r>
+          </a:p>
+          <a:p>
+            <a:r>
+              <a:rPr lang="en-US" dirty="0">
+                <a:latin typeface="+mn-lt"/>
+              </a:rPr>
+              <a:t>Les investissements de l'IFC et de la MIGA dans le secteur privé, axés sur des projets transformateurs de création d'emplois et de réduction de la pauvreté.</a:t>
             </a:r>
           </a:p>
         </p:txBody>
@@ -26626,9 +26255,8 @@
           <a:p>
             <a:r>
               <a:rPr lang="en-US"/>
-              <a:t>CPP 2023-2027. Version publique. Maputo, mai 2022.</a:t>
+              <a:t>CPF 2023-2027. Version publique. Maputo, mai 2022.</a:t>
             </a:r>
-            <a:endParaRPr lang="en-US" dirty="0"/>
           </a:p>
         </p:txBody>
       </p:sp>
@@ -26750,17 +26378,10 @@
           </a:bodyPr>
           <a:lstStyle/>
           <a:p>
-            <a:br>
-              <a:rPr lang="en-US" sz="2400" dirty="0"/>
-            </a:br>
-            <a:br>
-              <a:rPr lang="en-US" sz="2400" dirty="0"/>
-            </a:br>
             <a:r>
               <a:rPr lang="en-US" sz="2400" dirty="0"/>
-              <a:t>CPP EF2017-2021 : Principales caractéristiques</a:t>
+              <a:t>CPF EB2017-2021 : principales caractéristiques</a:t>
             </a:r>
-            <a:endParaRPr lang="en-US" sz="2400" b="0" i="1" dirty="0"/>
           </a:p>
         </p:txBody>
       </p:sp>
@@ -26792,134 +26413,82 @@
           </a:bodyPr>
           <a:lstStyle/>
           <a:p>
-            <a:pPr algn="just"/>
-            <a:endParaRPr lang="pt-BR" b="1" u="sng" dirty="0">
-              <a:latin typeface="+mn-lt"/>
-              <a:ea typeface="Times New Roman" panose="02020603050405020304" pitchFamily="18" charset="0"/>
-              <a:cs typeface="Times New Roman" panose="02020603050405020304" pitchFamily="18" charset="0"/>
-            </a:endParaRPr>
-          </a:p>
-          <a:p>
-            <a:pPr lvl="2" algn="just"/>
             <a:r>
               <a:rPr lang="en-US" sz="1400" b="1" dirty="0"/>
-              <a:t>Accent mis sur les régions et secteurs où se concentrent les pauvres. </a:t>
+              <a:t/>
             </a:r>
           </a:p>
           <a:p>
-            <a:pPr marL="914400" lvl="3" indent="-365760" algn="just"/>
             <a:r>
-              <a:rPr lang="en-US" sz="1300" dirty="0">
-                <a:solidFill>
-                  <a:srgbClr val="000000"/>
-                </a:solidFill>
-                <a:cs typeface="Calibri" panose="020F0502020204030204" pitchFamily="34" charset="0"/>
-              </a:rPr>
-              <a:t>Les opérations agricoles de subsistance devraient passer de 6 % dans le CPP précédent à 20 %</a:t>
+              <a:rPr lang="en-US" sz="1400" b="1" dirty="0"/>
+              <a:t>Accent mis sur les régions et les secteurs où se concentrent les pauvres. </a:t>
             </a:r>
           </a:p>
           <a:p>
-            <a:pPr marL="914400" lvl="3" indent="-365760" algn="just"/>
             <a:r>
-              <a:rPr lang="en-US" sz="1300" dirty="0">
-                <a:solidFill>
-                  <a:srgbClr val="000000"/>
-                </a:solidFill>
-                <a:cs typeface="Calibri" panose="020F0502020204030204" pitchFamily="34" charset="0"/>
-              </a:rPr>
-              <a:t>Environ 30 % du portefeuille était consacré à l'agriculture et aux zones rurales (contre 6 % dans le cycle précédent)</a:t>
+              <a:rPr lang="en-US" sz="1400" b="1" dirty="0"/>
+              <a:t>Les opérations d'agriculture de subsistance devraient passer de 6 % dans le CPF précédent à 20 %.</a:t>
             </a:r>
-            <a:endParaRPr lang="en-US" sz="1400" dirty="0"/>
-          </a:p>
-          <a:p>
-            <a:pPr lvl="2" algn="just"/>
+          </a:p>
+          <a:p>
             <a:r>
-              <a:rPr lang="en-US" sz="1400" dirty="0"/>
-              <a:t>Une grande partie des ressources a été allouée aux investissements en infrastructure, notamment dans les zones rurales et pour la reconstruction post-cyclone.</a:t>
+              <a:rPr lang="en-US" sz="1400" b="1" dirty="0"/>
+              <a:t>Environ 30 % du portefeuille a été consacré à l'agriculture et aux zones rurales (contre 6 % au cours du cycle précédent).</a:t>
             </a:r>
           </a:p>
           <a:p>
-            <a:pPr marL="914400" lvl="3" indent="-365760" algn="just"/>
             <a:r>
-              <a:rPr lang="en-US" sz="1300" dirty="0">
-                <a:solidFill>
-                  <a:srgbClr val="000000"/>
-                </a:solidFill>
-                <a:cs typeface="Calibri" panose="020F0502020204030204" pitchFamily="34" charset="0"/>
-              </a:rPr>
-              <a:t>Adoption d'une approche intégrative, regroupant les investissements en infrastructure et en protection sociale.</a:t>
+              <a:rPr lang="en-US" sz="1400" b="1" dirty="0"/>
+              <a:t>Une grande partie des ressources a été consacrée aux investissements dans les infrastructures, en particulier dans les zones rurales et la reconstruction post-cyclone.</a:t>
             </a:r>
           </a:p>
           <a:p>
-            <a:pPr marL="914400" lvl="3" indent="-365760" algn="just"/>
             <a:r>
-              <a:rPr lang="en-US" sz="1300" dirty="0">
-                <a:solidFill>
-                  <a:srgbClr val="000000"/>
-                </a:solidFill>
-                <a:cs typeface="Calibri" panose="020F0502020204030204" pitchFamily="34" charset="0"/>
-              </a:rPr>
-              <a:t>Priorisation des réponses au Cabo Delgado (EF 2022).</a:t>
+              <a:rPr lang="en-US" sz="1400" b="1" dirty="0"/>
+              <a:t>Adoption d'une approche intégrative, regroupant les investissements dans les infrastructures et la protection sociale.</a:t>
             </a:r>
           </a:p>
           <a:p>
-            <a:pPr lvl="2" algn="just"/>
             <a:r>
-              <a:rPr lang="en-US" sz="1400" dirty="0"/>
-              <a:t>Accent mis sur le renforcement des capacités de gestion macroéconomique, notamment en matière de gestion de la dette, des risques budgétaires et de l'investissement public.</a:t>
+              <a:rPr lang="en-US" sz="1400" b="1" dirty="0"/>
+              <a:t>Priorisation des réponses à Cabo Delgado (EB 2022).</a:t>
             </a:r>
           </a:p>
           <a:p>
-            <a:pPr lvl="2" algn="just"/>
             <a:r>
-              <a:rPr lang="en-US" sz="1400" dirty="0"/>
-              <a:t>Le CPP précédent a accordé une grande priorité aux études permettant une meilleure compréhension des défis du pays, telles que le Diagnostic du secteur privé national, la Note économique pays, la Revue urbaine et le Diagnostic des revenus ruraux, entre autres. </a:t>
+              <a:rPr lang="en-US" sz="1400" b="1" dirty="0"/>
+              <a:t>Accent mis sur l'amélioration de la capacité de gestion macroéconomique, en particulier la gestion de la dette, des risques budgétaires et de l'investissement public.</a:t>
             </a:r>
           </a:p>
           <a:p>
-            <a:pPr marL="914400" lvl="3" indent="-365760" algn="just"/>
             <a:r>
-              <a:rPr lang="en-US" sz="1300" dirty="0">
-                <a:solidFill>
-                  <a:srgbClr val="000000"/>
-                </a:solidFill>
-                <a:cs typeface="Calibri" panose="020F0502020204030204" pitchFamily="34" charset="0"/>
-              </a:rPr>
-              <a:t>Une étude sur les impacts du changement climatique (CCDR), une mise à jour de l'étude sur la pauvreté (Évaluation de la pauvreté) et une analyse détaillée de la question du genre (Évaluation genre) sont en cours.</a:t>
+              <a:rPr lang="en-US" sz="1400" b="1" dirty="0"/>
+              <a:t>Le CPF précédent a accordé une grande priorité aux études permettant de mieux comprendre les défis du pays, telles que le Diagnostic du secteur privé du pays, le Mémorandum économique du pays, la Revue urbaine et le Diagnostic des revenus ruraux, entre autres. </a:t>
             </a:r>
-            <a:endParaRPr lang="pt" sz="1300" dirty="0">
-              <a:solidFill>
-                <a:srgbClr val="000000"/>
-              </a:solidFill>
-              <a:cs typeface="Calibri" panose="020F0502020204030204" pitchFamily="34" charset="0"/>
-            </a:endParaRPr>
-          </a:p>
-          <a:p>
-            <a:pPr marL="0" lvl="2" indent="0" algn="just">
-              <a:buNone/>
-            </a:pPr>
-            <a:endParaRPr lang="en-US" sz="1400" dirty="0">
-              <a:solidFill>
-                <a:srgbClr val="000000"/>
-              </a:solidFill>
-              <a:ea typeface="Times New Roman" panose="02020603050405020304" pitchFamily="18" charset="0"/>
-              <a:cs typeface="Times New Roman" panose="02020603050405020304" pitchFamily="18" charset="0"/>
-            </a:endParaRPr>
-          </a:p>
-          <a:p>
-            <a:pPr lvl="2" algn="just"/>
-            <a:endParaRPr lang="en-US" sz="1400" dirty="0">
-              <a:solidFill>
-                <a:srgbClr val="000000"/>
-              </a:solidFill>
-              <a:cs typeface="Times New Roman" panose="02020603050405020304" pitchFamily="18" charset="0"/>
-            </a:endParaRPr>
-          </a:p>
-          <a:p>
-            <a:pPr algn="just"/>
-            <a:endParaRPr lang="en-US" dirty="0">
-              <a:latin typeface="+mn-lt"/>
-            </a:endParaRPr>
+          </a:p>
+          <a:p>
+            <a:r>
+              <a:rPr lang="en-US" sz="1400" b="1" dirty="0"/>
+              <a:t>Une étude sur les impacts du changement climatique (CCDR), une actualisation de l'étude sur la pauvreté (Poverty Assessment) et une analyse détaillée de la question du genre (Gender Assessment) sont en cours.</a:t>
+            </a:r>
+          </a:p>
+          <a:p>
+            <a:r>
+              <a:rPr lang="en-US" sz="1400" b="1" dirty="0"/>
+              <a:t/>
+            </a:r>
+          </a:p>
+          <a:p>
+            <a:r>
+              <a:rPr lang="en-US" sz="1400" b="1" dirty="0"/>
+              <a:t/>
+            </a:r>
+          </a:p>
+          <a:p>
+            <a:r>
+              <a:rPr lang="en-US" sz="1400" b="1" dirty="0"/>
+              <a:t/>
+            </a:r>
           </a:p>
         </p:txBody>
       </p:sp>
@@ -27011,9 +26580,11 @@
                 <a:ea typeface="+mn-ea"/>
                 <a:cs typeface="+mn-cs"/>
               </a:rPr>
-              <a:t>Allocation finale</a:t>
+              <a:t>Allocation finale
+</a:t>
             </a:r>
-            <a:br/>
+          </a:p>
+          <a:p>
             <a:r>
               <a:rPr lang="pt-BR" sz="1000" cap="all" dirty="0">
                 <a:solidFill>
@@ -27025,26 +26596,6 @@
               </a:rPr>
               <a:t/>
             </a:r>
-            <a:br/>
-            <a:r>
-              <a:rPr lang="pt-BR" sz="1000" cap="all" dirty="0">
-                <a:solidFill>
-                  <a:schemeClr val="tx1"/>
-                </a:solidFill>
-                <a:latin typeface="+mj-lt"/>
-                <a:ea typeface="+mn-ea"/>
-                <a:cs typeface="+mn-cs"/>
-              </a:rPr>
-              <a:t/>
-            </a:r>
-            <a:endParaRPr lang="en-US" sz="1000" cap="all" dirty="0">
-              <a:solidFill>
-                <a:schemeClr val="tx1"/>
-              </a:solidFill>
-              <a:latin typeface="+mj-lt"/>
-              <a:ea typeface="+mn-ea"/>
-              <a:cs typeface="+mn-cs"/>
-            </a:endParaRPr>
           </a:p>
         </p:txBody>
       </p:sp>
@@ -27076,9 +26627,8 @@
           <a:p>
             <a:r>
               <a:rPr lang="en-US"/>
-              <a:t>CPP 2023-2027. Version publique. Maputo, mai 2022.</a:t>
+              <a:t>CPF 2023-2027. Version publique. Maputo, mai 2022.</a:t>
             </a:r>
-            <a:endParaRPr lang="en-US" dirty="0"/>
           </a:p>
         </p:txBody>
       </p:sp>
@@ -27202,19 +26752,15 @@
           <a:p>
             <a:r>
               <a:rPr lang="en-US" sz="2400" dirty="0"/>
-              <a:t>CPP EF2017-2021 : Résultats </a:t>
+              <a:t>CPF EB2017-2021 : résultats 
+</a:t>
             </a:r>
-            <a:br/>
+          </a:p>
+          <a:p>
             <a:r>
               <a:rPr lang="en-US" sz="2400" dirty="0"/>
               <a:t/>
             </a:r>
-            <a:br/>
-            <a:r>
-              <a:rPr lang="en-US" sz="2400" dirty="0"/>
-              <a:t/>
-            </a:r>
-            <a:endParaRPr lang="en-US" sz="2400" b="0" i="1" dirty="0"/>
           </a:p>
         </p:txBody>
       </p:sp>
@@ -27244,9 +26790,6 @@
           <a:bodyPr/>
           <a:lstStyle/>
           <a:p>
-            <a:pPr marL="0" indent="0" algn="just">
-              <a:buNone/>
-            </a:pPr>
             <a:r>
               <a:rPr lang="en-US" sz="1400" b="0" i="0" u="none" strike="noStrike" dirty="0">
                 <a:highlight>
@@ -27256,19 +26799,10 @@
                 </a:highlight>
                 <a:latin typeface="Arial"/>
               </a:rPr>
-              <a:t>Le CPF - AF17-AF21 a été préparé et mis en œuvre dans un contexte économique difficile. Cependant, la mise en œuvre a été </a:t>
+              <a:t>Le CPF EB17-EB21 a été préparé et mis en œuvre dans un contexte économique défavorable. Sa mise en œuvre a néanmoins été modérément satisfaisante.</a:t>
             </a:r>
-            <a:r>
-              <a:rPr lang="en-US" sz="1400" b="1" i="0" u="none" strike="noStrike" dirty="0">
-                <a:highlight>
-                  <a:srgbClr val="000000">
-                    <a:alpha val="0"/>
-                  </a:srgbClr>
-                </a:highlight>
-                <a:latin typeface="Arial"/>
-              </a:rPr>
-              <a:t>modérément satisfaisante</a:t>
-            </a:r>
+          </a:p>
+          <a:p>
             <a:r>
               <a:rPr lang="en-US" sz="1400" b="0" i="0" u="none" strike="noStrike" dirty="0">
                 <a:highlight>
@@ -27278,25 +26812,8 @@
                 </a:highlight>
                 <a:latin typeface="Arial"/>
               </a:rPr>
-              <a:t>.</a:t>
+              <a:t>Le CPF a atteint à 100 % l'un de ses neuf objectifs stratégiques (SO) ; six ont été en grande partie atteints et deux « partiellement atteints ».</a:t>
             </a:r>
-          </a:p>
-          <a:p>
-            <a:pPr marL="0" indent="0" algn="just">
-              <a:buNone/>
-            </a:pPr>
-            <a:r>
-              <a:rPr lang="en-US" sz="1400" b="0" i="0" u="none" strike="noStrike" dirty="0">
-                <a:highlight>
-                  <a:srgbClr val="000000">
-                    <a:alpha val="0"/>
-                  </a:srgbClr>
-                </a:highlight>
-                <a:latin typeface="Arial"/>
-              </a:rPr>
-              <a:t>Le CPP a atteint à 100 % l'un de ses neuf Objectifs stratégiques (OS) ; six ont été « majoritairement atteints » et deux ont été « partiellement atteints ».</a:t>
-            </a:r>
-            <a:endParaRPr lang="en-US" dirty="0"/>
           </a:p>
         </p:txBody>
       </p:sp>
@@ -27576,7 +27093,7 @@
                           <a:ea typeface="Times New Roman" panose="02020603050405020304" pitchFamily="18" charset="0"/>
                           <a:cs typeface="Times New Roman" panose="02020603050405020304" pitchFamily="18" charset="0"/>
                         </a:rPr>
-                        <a:t>Focus Area 1: </a:t>
+                        <a:t>Domaine prioritaire 1 : </a:t>
                       </a:r>
                       <a:endParaRPr lang="en-US" sz="1300" dirty="0">
                         <a:effectLst/>
@@ -27821,8 +27338,20 @@
                           <a:ea typeface="Times New Roman" panose="02020603050405020304" pitchFamily="18" charset="0"/>
                           <a:cs typeface="Times New Roman" panose="02020603050405020304" pitchFamily="18" charset="0"/>
                         </a:rPr>
-                        <a:t>Mostly achieved 
-</a:t>
+                        <a:t>En grande partie atteint </a:t>
+                      </a:r>
+                      <a:br/>
+                      <a:r>
+                        <a:rPr lang="en-US" sz="1300" dirty="0">
+                          <a:solidFill>
+                            <a:srgbClr val="000000"/>
+                          </a:solidFill>
+                          <a:effectLst/>
+                          <a:latin typeface="+mn-lt"/>
+                          <a:ea typeface="Times New Roman" panose="02020603050405020304" pitchFamily="18" charset="0"/>
+                          <a:cs typeface="Times New Roman" panose="02020603050405020304" pitchFamily="18" charset="0"/>
+                        </a:rPr>
+                        <a:t/>
                       </a:r>
                       <a:endParaRPr lang="en-US" sz="1300" dirty="0">
                         <a:effectLst/>
@@ -28022,7 +27551,7 @@
                           <a:ea typeface="Times New Roman" panose="02020603050405020304" pitchFamily="18" charset="0"/>
                           <a:cs typeface="Times New Roman" panose="02020603050405020304" pitchFamily="18" charset="0"/>
                         </a:rPr>
-                        <a:t>Mostly achieved </a:t>
+                        <a:t>En grande partie atteint </a:t>
                       </a:r>
                       <a:endParaRPr lang="en-US" sz="1300" dirty="0">
                         <a:effectLst/>
@@ -28225,8 +27754,20 @@
                           <a:ea typeface="Times New Roman" panose="02020603050405020304" pitchFamily="18" charset="0"/>
                           <a:cs typeface="Times New Roman" panose="02020603050405020304" pitchFamily="18" charset="0"/>
                         </a:rPr>
-                        <a:t>Partially achieved 
-</a:t>
+                        <a:t>Partiellement atteint </a:t>
+                      </a:r>
+                      <a:br/>
+                      <a:r>
+                        <a:rPr lang="en-US" sz="1300" dirty="0">
+                          <a:solidFill>
+                            <a:srgbClr val="000000"/>
+                          </a:solidFill>
+                          <a:effectLst/>
+                          <a:latin typeface="+mn-lt"/>
+                          <a:ea typeface="Times New Roman" panose="02020603050405020304" pitchFamily="18" charset="0"/>
+                          <a:cs typeface="Times New Roman" panose="02020603050405020304" pitchFamily="18" charset="0"/>
+                        </a:rPr>
+                        <a:t/>
                       </a:r>
                       <a:endParaRPr lang="en-US" sz="1300" dirty="0">
                         <a:effectLst/>
@@ -28429,7 +27970,20 @@
                           <a:ea typeface="Times New Roman" panose="02020603050405020304" pitchFamily="18" charset="0"/>
                           <a:cs typeface="Times New Roman" panose="02020603050405020304" pitchFamily="18" charset="0"/>
                         </a:rPr>
-                        <a:t>Achieved </a:t>
+                        <a:t>Atteint </a:t>
+                      </a:r>
+                      <a:br/>
+                      <a:r>
+                        <a:rPr lang="en-US" sz="1300" kern="1200" dirty="0">
+                          <a:solidFill>
+                            <a:srgbClr val="000000"/>
+                          </a:solidFill>
+                          <a:effectLst/>
+                          <a:latin typeface="+mn-lt"/>
+                          <a:ea typeface="Times New Roman" panose="02020603050405020304" pitchFamily="18" charset="0"/>
+                          <a:cs typeface="Times New Roman" panose="02020603050405020304" pitchFamily="18" charset="0"/>
+                        </a:rPr>
+                        <a:t/>
                       </a:r>
                       <a:r>
                         <a:rPr lang="en-US" sz="1300" dirty="0">
@@ -28563,7 +28117,7 @@
                           <a:ea typeface="Times New Roman" panose="02020603050405020304" pitchFamily="18" charset="0"/>
                           <a:cs typeface="Times New Roman" panose="02020603050405020304" pitchFamily="18" charset="0"/>
                         </a:rPr>
-                        <a:t>Focus Area 2: </a:t>
+                        <a:t>Domaine prioritaire 2 : </a:t>
                       </a:r>
                       <a:endParaRPr lang="en-US" sz="1300" dirty="0">
                         <a:effectLst/>
@@ -28631,7 +28185,7 @@
                           <a:ea typeface="Times New Roman" panose="02020603050405020304" pitchFamily="18" charset="0"/>
                           <a:cs typeface="Times New Roman" panose="02020603050405020304" pitchFamily="18" charset="0"/>
                         </a:rPr>
-                        <a:t>Investing in Human Capital – Moderately Satisfactory</a:t>
+                        <a:t>Investir dans le capital humain – Modérément satisfaisant</a:t>
                       </a:r>
                       <a:endParaRPr lang="en-US" sz="1300" dirty="0">
                         <a:effectLst/>
@@ -28898,7 +28452,7 @@
                           <a:ea typeface="Times New Roman" panose="02020603050405020304" pitchFamily="18" charset="0"/>
                           <a:cs typeface="Times New Roman" panose="02020603050405020304" pitchFamily="18" charset="0"/>
                         </a:rPr>
-                        <a:t>Mostly </a:t>
+                        <a:t>En grande partie atteint</a:t>
                       </a:r>
                       <a:r>
                         <a:rPr lang="en-US" sz="1300" dirty="0" err="1">
@@ -29113,7 +28667,7 @@
                           <a:ea typeface="Times New Roman" panose="02020603050405020304" pitchFamily="18" charset="0"/>
                           <a:cs typeface="Times New Roman" panose="02020603050405020304" pitchFamily="18" charset="0"/>
                         </a:rPr>
-                        <a:t>Mostly </a:t>
+                        <a:t>En grande partie atteint</a:t>
                       </a:r>
                       <a:r>
                         <a:rPr lang="en-US" sz="1300" dirty="0" err="1">
@@ -29328,7 +28882,7 @@
                           <a:ea typeface="Times New Roman" panose="02020603050405020304" pitchFamily="18" charset="0"/>
                           <a:cs typeface="Times New Roman" panose="02020603050405020304" pitchFamily="18" charset="0"/>
                         </a:rPr>
-                        <a:t>Mostly achieved </a:t>
+                        <a:t>En grande partie atteint </a:t>
                       </a:r>
                       <a:endParaRPr lang="en-US" sz="1300" dirty="0">
                         <a:effectLst/>
@@ -29449,7 +29003,7 @@
                           <a:ea typeface="Times New Roman" panose="02020603050405020304" pitchFamily="18" charset="0"/>
                           <a:cs typeface="Times New Roman" panose="02020603050405020304" pitchFamily="18" charset="0"/>
                         </a:rPr>
-                        <a:t>Focus Area 3: </a:t>
+                        <a:t>Domaine prioritaire 3 : </a:t>
                       </a:r>
                       <a:endParaRPr lang="en-US" sz="1300" dirty="0">
                         <a:effectLst/>
@@ -29691,8 +29245,17 @@
                           <a:ea typeface="Times New Roman" panose="02020603050405020304" pitchFamily="18" charset="0"/>
                           <a:cs typeface="Times New Roman" panose="02020603050405020304" pitchFamily="18" charset="0"/>
                         </a:rPr>
-                        <a:t>Mostly achieved 
-</a:t>
+                        <a:t>En grande partie atteint </a:t>
+                      </a:r>
+                      <a:br/>
+                      <a:r>
+                        <a:rPr lang="en-US" sz="1300" dirty="0">
+                          <a:effectLst/>
+                          <a:latin typeface="+mn-lt"/>
+                          <a:ea typeface="Times New Roman" panose="02020603050405020304" pitchFamily="18" charset="0"/>
+                          <a:cs typeface="Times New Roman" panose="02020603050405020304" pitchFamily="18" charset="0"/>
+                        </a:rPr>
+                        <a:t/>
                       </a:r>
                     </a:p>
                   </a:txBody>
@@ -29904,8 +29467,20 @@
                           <a:ea typeface="Times New Roman" panose="02020603050405020304" pitchFamily="18" charset="0"/>
                           <a:cs typeface="Times New Roman" panose="02020603050405020304" pitchFamily="18" charset="0"/>
                         </a:rPr>
-                        <a:t>Partially achieved 
-</a:t>
+                        <a:t>Partiellement atteint </a:t>
+                      </a:r>
+                      <a:br/>
+                      <a:r>
+                        <a:rPr lang="en-US" sz="1300" dirty="0">
+                          <a:solidFill>
+                            <a:srgbClr val="000000"/>
+                          </a:solidFill>
+                          <a:effectLst/>
+                          <a:latin typeface="+mn-lt"/>
+                          <a:ea typeface="Times New Roman" panose="02020603050405020304" pitchFamily="18" charset="0"/>
+                          <a:cs typeface="Times New Roman" panose="02020603050405020304" pitchFamily="18" charset="0"/>
+                        </a:rPr>
+                        <a:t/>
                       </a:r>
                       <a:endParaRPr lang="en-US" sz="1300" dirty="0">
                         <a:effectLst/>
@@ -30031,14 +29606,11 @@
           </a:bodyPr>
           <a:lstStyle/>
           <a:p>
-            <a:pPr marL="0" indent="0">
-              <a:buNone/>
-            </a:pPr>
             <a:r>
               <a:rPr lang="en-US" sz="1100" i="1" dirty="0">
                 <a:latin typeface="+mj-lt"/>
               </a:rPr>
-              <a:t>La classification des objectifs suit les catégories « atteint », « majoritairement atteint », « partiellement atteint » et « non atteint », selon le niveau de réalisation des indicateurs et l'existence de preuves qualitatives.</a:t>
+              <a:t>La classification des objectifs suit les catégories « atteint », « en grande partie atteint », « partiellement atteint » et « non atteint », selon le niveau de réalisation des indicateurs et l'existence de preuves qualitatives.</a:t>
             </a:r>
           </a:p>
         </p:txBody>
@@ -30066,9 +29638,8 @@
           <a:p>
             <a:r>
               <a:rPr lang="en-US"/>
-              <a:t>CPP 2023-2027. Version publique. Maputo, mai 2022.</a:t>
+              <a:t>CPF 2023-2027. Version publique. Maputo, mai 2022.</a:t>
             </a:r>
-            <a:endParaRPr lang="en-US" dirty="0"/>
           </a:p>
         </p:txBody>
       </p:sp>
@@ -30192,26 +29763,15 @@
           <a:p>
             <a:r>
               <a:rPr lang="en-US" sz="2400" dirty="0"/>
-              <a:t>CPP EF2017-2021 : Leçons apprises</a:t>
+              <a:t>CPF EB2017-2021 : enseignements tirés
+</a:t>
             </a:r>
-            <a:br/>
+          </a:p>
+          <a:p>
             <a:r>
               <a:rPr lang="en-US" sz="2400" dirty="0"/>
               <a:t/>
             </a:r>
-            <a:br/>
-            <a:r>
-              <a:rPr lang="en-US" sz="2400" dirty="0"/>
-              <a:t/>
-            </a:r>
-            <a:endParaRPr lang="pt" sz="2400" b="0" i="1" u="none" strike="noStrike" dirty="0">
-              <a:highlight>
-                <a:srgbClr val="000000">
-                  <a:alpha val="0"/>
-                </a:srgbClr>
-              </a:highlight>
-              <a:latin typeface="Arial"/>
-            </a:endParaRPr>
           </a:p>
         </p:txBody>
       </p:sp>
@@ -30243,13 +29803,6 @@
           </a:bodyPr>
           <a:lstStyle/>
           <a:p>
-            <a:pPr marL="365760" lvl="3" indent="-342900" algn="just">
-              <a:spcBef>
-                <a:spcPts val="1200"/>
-              </a:spcBef>
-              <a:buFont typeface="+mj-lt"/>
-              <a:buAutoNum type="arabicPeriod"/>
-            </a:pPr>
             <a:r>
               <a:rPr lang="en-US" b="1" dirty="0">
                 <a:highlight>
@@ -30258,36 +29811,10 @@
                   </a:srgbClr>
                 </a:highlight>
               </a:rPr>
-              <a:t>Importance d'un alignement solide sur les objectifs du Gouvernement, </a:t>
+              <a:t>Importance d'un alignement solide sur les objectifs du gouvernement, du recours à des ressources additionnelles, de l'utilisation d'une série d'instruments de financement et d'autres dispositifs (financement supplémentaire).</a:t>
             </a:r>
-            <a:r>
-              <a:rPr lang="en-US" dirty="0">
-                <a:highlight>
-                  <a:srgbClr val="000000">
-                    <a:alpha val="0"/>
-                  </a:srgbClr>
-                </a:highlight>
-              </a:rPr>
-              <a:t>le recours à des ressources supplémentaires, l'utilisation d'une gamme d'instruments de financement et autres (financements additionnels).</a:t>
-            </a:r>
-          </a:p>
-          <a:p>
-            <a:pPr marL="365760" lvl="3" indent="0" algn="just">
-              <a:spcBef>
-                <a:spcPts val="1200"/>
-              </a:spcBef>
-              <a:buNone/>
-            </a:pPr>
-            <a:r>
-              <a:rPr lang="pt" b="1" dirty="0">
-                <a:highlight>
-                  <a:srgbClr val="000000">
-                    <a:alpha val="0"/>
-                  </a:srgbClr>
-                </a:highlight>
-              </a:rPr>
-              <a:t>	</a:t>
-            </a:r>
+          </a:p>
+          <a:p>
             <a:r>
               <a:rPr lang="en-US" b="1" dirty="0">
                 <a:highlight>
@@ -30296,160 +29823,44 @@
                   </a:srgbClr>
                 </a:highlight>
               </a:rPr>
-              <a:t>Flexibilité</a:t>
+              <a:t>	Souplesse permettant d'ajuster rapidement le programme aux réalités changeantes et aux nouvelles priorités du gouvernement.</a:t>
             </a:r>
+          </a:p>
+          <a:p>
             <a:r>
-              <a:rPr lang="en-US" dirty="0">
+              <a:rPr lang="en-US" b="1" dirty="0">
                 <a:highlight>
                   <a:srgbClr val="000000">
                     <a:alpha val="0"/>
                   </a:srgbClr>
                 </a:highlight>
               </a:rPr>
-              <a:t> pour adapter rapidement le programme aux réalités changeantes et aux nouvelles priorités gouvernementales.</a:t>
+              <a:t>Soutien continu à la réponse aux crises, à la préparation et à la prévention, comme l'illustre l'accent mis par le CPF précédent sur la reprise et la résilience – dans lequel le GBM a mobilisé son expertise technique et sa capacité de mobilisation de ressources pour accroître les capacités de réponse et investir dans la prévention. </a:t>
             </a:r>
-            <a:endParaRPr lang="pt" dirty="0">
-              <a:highlight>
-                <a:srgbClr val="000000">
-                  <a:alpha val="0"/>
-                </a:srgbClr>
-              </a:highlight>
-            </a:endParaRPr>
-          </a:p>
-          <a:p>
-            <a:pPr marL="365760" lvl="3" indent="-342900" algn="just">
-              <a:spcBef>
-                <a:spcPts val="1200"/>
-              </a:spcBef>
-              <a:buFont typeface="+mj-lt"/>
-              <a:buAutoNum type="arabicPeriod" startAt="2"/>
-            </a:pPr>
+          </a:p>
+          <a:p>
             <a:r>
-              <a:rPr lang="en-US" b="1" i="0" u="none" strike="noStrike" dirty="0">
+              <a:rPr lang="en-US" b="1" dirty="0">
                 <a:highlight>
                   <a:srgbClr val="000000">
                     <a:alpha val="0"/>
                   </a:srgbClr>
                 </a:highlight>
-                <a:latin typeface="Arial"/>
               </a:rPr>
-              <a:t>Maintien du soutien à la réponse aux crises, </a:t>
+              <a:t>Pauvreté et agriculture. Bien que le soutien à la productivité agricole et au développement rural représente jusqu'à 30 % de l'allocation financière globale de la Banque mondiale, il semble n'avoir contribué que de façon marginale à l'augmentation de la productivité agricole globale et, partant, à la réduction de la pauvreté.</a:t>
             </a:r>
+          </a:p>
+          <a:p>
             <a:r>
-              <a:rPr lang="en-US" i="0" u="none" strike="noStrike" dirty="0">
+              <a:rPr lang="en-US" b="1" dirty="0">
                 <a:highlight>
                   <a:srgbClr val="000000">
                     <a:alpha val="0"/>
                   </a:srgbClr>
                 </a:highlight>
-                <a:latin typeface="Arial"/>
               </a:rPr>
-              <a:t>à la préparation et à la prévention, mis en évidence par l'accent mis dans le CPF précédent sur la relèvement et la résilience – dans lequel le GBM a mis à profit son expertise technique et sa capacité de mobilisation des ressources pour renforcer les capacités de réponse et investir dans la prévention .</a:t>
+              <a:t>Un accent renouvelé sur le renforcement institutionnel et les réformes économiques pourrait accroître l'impact du futur CPF, ce qui impliquerait de réintroduire des opérations d'appui budgétaire combinées à une assistance technique et à des études – complétées au besoin par d'autres instruments de financement.</a:t>
             </a:r>
-            <a:r>
-              <a:rPr lang="pt" i="0" u="none" strike="noStrike" dirty="0">
-                <a:highlight>
-                  <a:srgbClr val="000000">
-                    <a:alpha val="0"/>
-                  </a:srgbClr>
-                </a:highlight>
-                <a:latin typeface="Arial"/>
-              </a:rPr>
-              <a:t> </a:t>
-            </a:r>
-          </a:p>
-          <a:p>
-            <a:pPr marL="365760" lvl="3" indent="-342900" algn="just">
-              <a:spcBef>
-                <a:spcPts val="1200"/>
-              </a:spcBef>
-              <a:buFont typeface="+mj-lt"/>
-              <a:buAutoNum type="arabicPeriod" startAt="2"/>
-            </a:pPr>
-            <a:r>
-              <a:rPr lang="en-US" b="1" i="0" u="none" strike="noStrike" dirty="0">
-                <a:highlight>
-                  <a:srgbClr val="000000">
-                    <a:alpha val="0"/>
-                  </a:srgbClr>
-                </a:highlight>
-                <a:latin typeface="Arial"/>
-              </a:rPr>
-              <a:t>Pauvreté et agriculture. </a:t>
-            </a:r>
-            <a:r>
-              <a:rPr lang="en-US" i="0" u="none" strike="noStrike" dirty="0">
-                <a:highlight>
-                  <a:srgbClr val="000000">
-                    <a:alpha val="0"/>
-                  </a:srgbClr>
-                </a:highlight>
-                <a:latin typeface="Arial"/>
-              </a:rPr>
-              <a:t>Bien que le soutien à la productivité agricole et au développement rural représente jusqu'à 30 % de l'allocation financière globale de la BM, ce soutien semble n'avoir contribué que marginalement à l'augmentation de la productivité agricole globale et, par conséquent</a:t>
-            </a:r>
-            <a:r>
-              <a:rPr lang="en-US" i="0" u="none" strike="noStrike">
-                <a:highlight>
-                  <a:srgbClr val="000000">
-                    <a:alpha val="0"/>
-                  </a:srgbClr>
-                </a:highlight>
-                <a:latin typeface="Arial"/>
-              </a:rPr>
-              <a:t>, </a:t>
-            </a:r>
-            <a:r>
-              <a:rPr lang="en-US">
-                <a:highlight>
-                  <a:srgbClr val="000000">
-                    <a:alpha val="0"/>
-                  </a:srgbClr>
-                </a:highlight>
-                <a:latin typeface="Arial"/>
-              </a:rPr>
-              <a:t>à</a:t>
-            </a:r>
-            <a:r>
-              <a:rPr lang="en-US" i="0" u="none" strike="noStrike">
-                <a:highlight>
-                  <a:srgbClr val="000000">
-                    <a:alpha val="0"/>
-                  </a:srgbClr>
-                </a:highlight>
-                <a:latin typeface="Arial"/>
-              </a:rPr>
-              <a:t> </a:t>
-            </a:r>
-            <a:r>
-              <a:rPr lang="en-US" i="0" u="none" strike="noStrike" dirty="0">
-                <a:highlight>
-                  <a:srgbClr val="000000">
-                    <a:alpha val="0"/>
-                  </a:srgbClr>
-                </a:highlight>
-                <a:latin typeface="Arial"/>
-              </a:rPr>
-              <a:t>la réduction de la pauvreté.</a:t>
-            </a:r>
-          </a:p>
-          <a:p>
-            <a:pPr marL="365760" lvl="3" indent="-342900" algn="just">
-              <a:spcBef>
-                <a:spcPts val="1200"/>
-              </a:spcBef>
-              <a:buFont typeface="+mj-lt"/>
-              <a:buAutoNum type="arabicPeriod" startAt="2"/>
-            </a:pPr>
-            <a:r>
-              <a:rPr lang="en-US" b="1" dirty="0"/>
-              <a:t>Un recentrage sur le renforcement institutionnel et les réformes économiques </a:t>
-            </a:r>
-            <a:r>
-              <a:rPr lang="en-US" dirty="0"/>
-              <a:t>pourrait accroître l'impact du futur CPF, ce qui impliquerait de réintroduire des opérations d'appui budgétaire combinées à de l'assistance technique et des études — complétées par d'autres instruments de financement si nécessaire.</a:t>
-            </a:r>
-            <a:endParaRPr lang="en-US" sz="1700" dirty="0"/>
           </a:p>
         </p:txBody>
       </p:sp>
@@ -30476,9 +29887,8 @@
           <a:p>
             <a:r>
               <a:rPr lang="en-US"/>
-              <a:t>CPP 2023-2027. Version publique. Maputo, mai 2022.</a:t>
+              <a:t>CPF 2023-2027. Version publique. Maputo, mai 2022.</a:t>
             </a:r>
-            <a:endParaRPr lang="en-US" dirty="0"/>
           </a:p>
         </p:txBody>
       </p:sp>
@@ -30600,29 +30010,17 @@
           </a:bodyPr>
           <a:lstStyle/>
           <a:p>
-            <a:pPr algn="ctr"/>
             <a:r>
               <a:rPr lang="en-US" sz="4000" dirty="0"/>
-              <a:t>Structure de la présentation</a:t>
+              <a:t>Structure de la présentation
+</a:t>
             </a:r>
-            <a:br/>
+          </a:p>
+          <a:p>
             <a:r>
               <a:rPr lang="en-US" sz="4000" dirty="0"/>
               <a:t/>
             </a:r>
-            <a:br/>
-            <a:r>
-              <a:rPr lang="en-US" sz="4000" dirty="0"/>
-              <a:t/>
-            </a:r>
-            <a:endParaRPr lang="pt" sz="4000" b="0" i="1" u="none" strike="noStrike" dirty="0">
-              <a:highlight>
-                <a:srgbClr val="000000">
-                  <a:alpha val="0"/>
-                </a:srgbClr>
-              </a:highlight>
-              <a:latin typeface="Arial"/>
-            </a:endParaRPr>
           </a:p>
         </p:txBody>
       </p:sp>
@@ -30654,19 +30052,6 @@
           </a:bodyPr>
           <a:lstStyle/>
           <a:p>
-            <a:pPr marL="1371600" lvl="3" indent="-571500">
-              <a:lnSpc>
-                <a:spcPct val="100000"/>
-              </a:lnSpc>
-              <a:spcBef>
-                <a:spcPts val="1200"/>
-              </a:spcBef>
-              <a:spcAft>
-                <a:spcPts val="1200"/>
-              </a:spcAft>
-              <a:buFont typeface="+mj-lt"/>
-              <a:buAutoNum type="romanUcPeriod"/>
-            </a:pPr>
             <a:r>
               <a:rPr lang="en-US" sz="3200" b="1" dirty="0">
                 <a:solidFill>
@@ -30675,9 +30060,11 @@
                   </a:schemeClr>
                 </a:solidFill>
               </a:rPr>
-              <a:t>Vision du Groupe de la Banque mondiale sur les principaux défis stratégiques du pays   </a:t>
+              <a:t>Vision du Groupe de la Banque mondiale sur les principaux défis stratégiques du pays   
+</a:t>
             </a:r>
-            <a:br/>
+          </a:p>
+          <a:p>
             <a:r>
               <a:rPr lang="en-US" sz="3200" b="1" dirty="0">
                 <a:solidFill>
@@ -30686,9 +30073,10 @@
                   </a:schemeClr>
                 </a:solidFill>
               </a:rPr>
-              <a:t>Principaux enseignements du CPF précédent (2017-2021</a:t>
+              <a:t>Principaux enseignements du CPF précédent (2017-2021)</a:t>
             </a:r>
-            <a:br/>
+          </a:p>
+          <a:p>
             <a:r>
               <a:rPr lang="en-US" sz="3200" b="1" dirty="0">
                 <a:solidFill>
@@ -30697,51 +30085,8 @@
                   </a:schemeClr>
                 </a:solidFill>
               </a:rPr>
-              <a:t/>
+              <a:t>Proposition initiale pour le CPF 2023-2027</a:t>
             </a:r>
-            <a:r>
-              <a:rPr lang="pt-BR" sz="3200" b="1" i="0" u="none" strike="noStrike" dirty="0">
-                <a:solidFill>
-                  <a:schemeClr val="bg2">
-                    <a:lumMod val="90000"/>
-                  </a:schemeClr>
-                </a:solidFill>
-                <a:highlight>
-                  <a:srgbClr val="000000">
-                    <a:alpha val="0"/>
-                  </a:srgbClr>
-                </a:highlight>
-                <a:latin typeface="Arial"/>
-              </a:rPr>
-              <a:t>)</a:t>
-            </a:r>
-          </a:p>
-          <a:p>
-            <a:pPr marL="1371600" lvl="3" indent="-571500">
-              <a:lnSpc>
-                <a:spcPct val="100000"/>
-              </a:lnSpc>
-              <a:spcBef>
-                <a:spcPts val="1200"/>
-              </a:spcBef>
-              <a:spcAft>
-                <a:spcPts val="1200"/>
-              </a:spcAft>
-              <a:buFont typeface="+mj-lt"/>
-              <a:buAutoNum type="romanUcPeriod"/>
-            </a:pPr>
-            <a:r>
-              <a:rPr lang="en-US" sz="3200" b="1" dirty="0"/>
-              <a:t>Proposition initiale pour le CPP 2023-2027</a:t>
-            </a:r>
-            <a:endParaRPr lang="pt" sz="3200" b="1" i="0" u="none" strike="noStrike" dirty="0">
-              <a:highlight>
-                <a:srgbClr val="000000">
-                  <a:alpha val="0"/>
-                </a:srgbClr>
-              </a:highlight>
-              <a:latin typeface="Arial"/>
-            </a:endParaRPr>
           </a:p>
         </p:txBody>
       </p:sp>
@@ -30768,9 +30113,8 @@
           <a:p>
             <a:r>
               <a:rPr lang="en-US"/>
-              <a:t>CPP 2023-2027. Version publique. Maputo, mai 2022.</a:t>
+              <a:t>CPF 2023-2027. Version publique. Maputo, mai 2022.</a:t>
             </a:r>
-            <a:endParaRPr lang="en-US" dirty="0"/>
           </a:p>
         </p:txBody>
       </p:sp>
@@ -30892,7 +30236,6 @@
           </a:bodyPr>
           <a:lstStyle/>
           <a:p>
-            <a:pPr algn="r" rtl="0"/>
             <a:r>
               <a:rPr lang="en-US" sz="2400" b="1" i="0" u="none" strike="noStrike" dirty="0">
                 <a:highlight>
@@ -30902,16 +30245,8 @@
                 </a:highlight>
                 <a:latin typeface="Arial"/>
               </a:rPr>
-              <a:t>Programme gouvernemental et stratégie à moyen terme (1-2)</a:t>
+              <a:t>Programme du gouvernement et stratégie à moyen terme (1-2)</a:t>
             </a:r>
-            <a:endParaRPr lang="pt" sz="2400" b="1" i="0" u="none" strike="noStrike" dirty="0">
-              <a:highlight>
-                <a:srgbClr val="000000">
-                  <a:alpha val="0"/>
-                </a:srgbClr>
-              </a:highlight>
-              <a:latin typeface="Arial"/>
-            </a:endParaRPr>
           </a:p>
         </p:txBody>
       </p:sp>
@@ -30943,11 +30278,6 @@
           </a:bodyPr>
           <a:lstStyle/>
           <a:p>
-            <a:pPr algn="just" rtl="0">
-              <a:lnSpc>
-                <a:spcPct val="100000"/>
-              </a:lnSpc>
-            </a:pPr>
             <a:r>
               <a:rPr lang="en-US" sz="1400" b="1" i="0" u="none" strike="noStrike" dirty="0">
                 <a:highlight>
@@ -30957,26 +30287,10 @@
                 </a:highlight>
                 <a:latin typeface="Arial"/>
               </a:rPr>
-              <a:t>Le Gouvernement du Mozambique a élaboré une Stratégie Nationale de Développement (ENDE) pour 2015-2030. </a:t>
+              <a:t>Le gouvernement du Mozambique élabore une Stratégie nationale de développement (ENDE) pour 2015-2030. Suivant le cadre défini dans cette stratégie, le gouvernement définit ensuite des plans de développement sectoriels et territoriaux ; les plans quinquennaux correspondants ; le scénario budgétaire à moyen terme et le plan social, économique et budgétaire de l'État.</a:t>
             </a:r>
-            <a:r>
-              <a:rPr lang="en-US" sz="1400" i="0" u="none" strike="noStrike" dirty="0">
-                <a:highlight>
-                  <a:srgbClr val="000000">
-                    <a:alpha val="0"/>
-                  </a:srgbClr>
-                </a:highlight>
-                <a:latin typeface="Arial"/>
-              </a:rPr>
-              <a:t>Dans le cadre défini par cette stratégie, le gouvernement définit ensuite des plans de développement sectoriels et territoriaux ; les plans quinquennaux correspondants ; le scénario fiscal à moyen terme et le plan budgétaire social, économique et de l'État.</a:t>
-            </a:r>
-          </a:p>
-          <a:p>
-            <a:pPr algn="just" rtl="0">
-              <a:lnSpc>
-                <a:spcPct val="100000"/>
-              </a:lnSpc>
-            </a:pPr>
+          </a:p>
+          <a:p>
             <a:r>
               <a:rPr lang="en-US" sz="1400" b="1" i="0" u="none" strike="noStrike" dirty="0">
                 <a:highlight>
@@ -30986,26 +30300,10 @@
                 </a:highlight>
                 <a:latin typeface="Arial"/>
               </a:rPr>
-              <a:t>END : 2022-2042. Vision : </a:t>
+              <a:t>ENDE : 2022-2042. Vision : « Élever le niveau de vie de la population par la transformation structurelle de l'économie, d'une économie primaire vers une économie industrialisée et de services ». Nouveaux axes prioritaires proposés : (i) transformation économique, (ii) transformation sociale, (iii) gouvernance et (iv) environnement et économie circulaire.</a:t>
             </a:r>
-            <a:r>
-              <a:rPr lang="en-US" sz="1400" i="0" u="none" strike="noStrike" dirty="0">
-                <a:highlight>
-                  <a:srgbClr val="000000">
-                    <a:alpha val="0"/>
-                  </a:srgbClr>
-                </a:highlight>
-                <a:latin typeface="Arial"/>
-              </a:rPr>
-              <a:t>« Améliorer le niveau de vie de la population par la transformation structurelle de l'économie, d'une économie primaire vers une économie industrialisée et de services. » Nouveaux axes prioritaires proposés : (i) transformation économique, (ii) transformation sociale, (iii) gouvernance, et (iv) environnement et économie circulaire.</a:t>
-            </a:r>
-          </a:p>
-          <a:p>
-            <a:pPr algn="just" rtl="0">
-              <a:lnSpc>
-                <a:spcPct val="100000"/>
-              </a:lnSpc>
-            </a:pPr>
+          </a:p>
+          <a:p>
             <a:r>
               <a:rPr lang="en-US" sz="1400" b="1" i="0" u="none" strike="noStrike" dirty="0">
                 <a:highlight>
@@ -31015,10 +30313,12 @@
                 </a:highlight>
                 <a:latin typeface="Arial"/>
               </a:rPr>
-              <a:t>Le Programme Quinquennal du Gouvernement (PQG) 2020-2024  </a:t>
+              <a:t>Le Programme quinquennal du gouvernement (PQG) 2020-2024 restera le principal guide des interventions et stratégies gouvernementales en 2023-24. Un nouveau PQG devrait être élaboré après les élections nationales de 2024. Le gouvernement a élaboré une Stratégie de prévention des conflits et de la violence dans le cadre du processus visant à garantir l'éligibilité à l'Allocation pour la prévention et la résilience (PRA, Prevention and Resilience Allocation) au titre de l'IDA19.</a:t>
             </a:r>
+          </a:p>
+          <a:p>
             <a:r>
-              <a:rPr lang="en-US" sz="1400" i="0" u="none" strike="noStrike" dirty="0">
+              <a:rPr lang="en-US" sz="1400" b="1" i="0" u="none" strike="noStrike" dirty="0">
                 <a:highlight>
                   <a:srgbClr val="000000">
                     <a:alpha val="0"/>
@@ -31026,69 +30326,47 @@
                 </a:highlight>
                 <a:latin typeface="Arial"/>
               </a:rPr>
-              <a:t>continuera d'être le principal guide des interventions et stratégies gouvernementales en 2023-24. Un nouveau PQG devrait être élaboré après les élections nationales de 2024. Le Gouvernement a développé une Stratégie de Prévention des Conflits et de la Violence dans le cadre du processus visant à garantir l'éligibilité à l'Allocation pour la Prévention et la Résilience (PRA, Prevention and Resilience Allocation) au titre de l'IDA19.</a:t>
+              <a:t>Le gouvernement dispose également d'une stratégie solide pour le secteur de l'énergie. La Stratégie énergétique pour la période 2015-2024 vise à : (i) accroître les infrastructures et la production d'énergie pour les marchés locaux et les exportations d'énergie (gaz et électricité) ; (ii) porter l'accès local à l'électricité de 25 % en 2015 à 62 % d'ici la fin de 2024, ce qui devrait donner une impulsion majeure au développement économique et social du pays.</a:t>
             </a:r>
           </a:p>
           <a:p>
-            <a:pPr marR="0" algn="just">
-              <a:lnSpc>
-                <a:spcPct val="100000"/>
-              </a:lnSpc>
-              <a:spcAft>
-                <a:spcPct val="0"/>
-              </a:spcAft>
-            </a:pPr>
             <a:r>
-              <a:rPr lang="en-US" b="1" dirty="0"/>
-              <a:t>Le Gouvernement dispose également d'une stratégie solide pour le secteur de l'énergie</a:t>
+              <a:rPr lang="en-US" sz="1400" b="1" i="0" u="none" strike="noStrike" dirty="0">
+                <a:highlight>
+                  <a:srgbClr val="000000">
+                    <a:alpha val="0"/>
+                  </a:srgbClr>
+                </a:highlight>
+                <a:latin typeface="Arial"/>
+              </a:rPr>
+              <a:t>Le gouvernement a approuvé la Stratégie nationale d'adaptation au changement climatique et d'atténuation de ses effets, qui fournit le cadre général d'action pour orienter la planification et le développement résilients au climat. La révision en cours de l'ENDE offre l'occasion d'intégrer le changement climatique dans votre stratégie de développement.</a:t>
             </a:r>
+          </a:p>
+          <a:p>
             <a:r>
-              <a:rPr lang="en-US" dirty="0"/>
-              <a:t>. La Stratégie Énergétique pour la période 2015-2024 vise à : (i) Accroître les infrastructures et la production d'énergie pour les marchés locaux et les exportations d'énergie (gaz et électricité). (ii) Étendre l'accès local à l'électricité de 25 % en 2015 à 62 % d'ici fin 2024, ce qui devrait constituer un moteur majeur du développement économique et social du pays.</a:t>
+              <a:rPr lang="en-US" sz="1400" b="1" i="0" u="none" strike="noStrike" dirty="0">
+                <a:highlight>
+                  <a:srgbClr val="000000">
+                    <a:alpha val="0"/>
+                  </a:srgbClr>
+                </a:highlight>
+                <a:latin typeface="Arial"/>
+              </a:rPr>
+              <a:t/>
             </a:r>
           </a:p>
           <a:p>
-            <a:pPr marR="0" algn="just">
-              <a:lnSpc>
-                <a:spcPct val="100000"/>
-              </a:lnSpc>
-              <a:spcAft>
-                <a:spcPct val="0"/>
-              </a:spcAft>
-            </a:pPr>
             <a:r>
-              <a:rPr lang="en-US" b="1" dirty="0"/>
-              <a:t>Le Gouvernement a approuvé la Stratégie Nationale d'Adaptation et d'Atténuation des Changements Climatiques</a:t>
+              <a:rPr lang="en-US" sz="1400" b="1" i="0" u="none" strike="noStrike" dirty="0">
+                <a:highlight>
+                  <a:srgbClr val="000000">
+                    <a:alpha val="0"/>
+                  </a:srgbClr>
+                </a:highlight>
+                <a:latin typeface="Arial"/>
+              </a:rPr>
+              <a:t/>
             </a:r>
-            <a:r>
-              <a:rPr lang="en-US" dirty="0"/>
-              <a:t>, qui fournit le cadre politique global pour orienter la planification et le développement résilients au climat. La révision en cours de l'ENDE crée une opportunité d'intégrer les changements climatiques dans sa stratégie de développement.</a:t>
-            </a:r>
-          </a:p>
-          <a:p>
-            <a:pPr marL="0" marR="0" algn="just">
-              <a:lnSpc>
-                <a:spcPct val="100000"/>
-              </a:lnSpc>
-              <a:spcBef>
-                <a:spcPct val="0"/>
-              </a:spcBef>
-              <a:spcAft>
-                <a:spcPct val="0"/>
-              </a:spcAft>
-            </a:pPr>
-            <a:endParaRPr lang="en-US" dirty="0">
-              <a:effectLst/>
-              <a:ea typeface="Times New Roman" panose="02020603050405020304" pitchFamily="18" charset="0"/>
-            </a:endParaRPr>
-          </a:p>
-          <a:p>
-            <a:pPr>
-              <a:lnSpc>
-                <a:spcPct val="100000"/>
-              </a:lnSpc>
-            </a:pPr>
-            <a:endParaRPr lang="en-US" dirty="0"/>
           </a:p>
         </p:txBody>
       </p:sp>
@@ -31120,7 +30398,6 @@
           </a:bodyPr>
           <a:lstStyle/>
           <a:p>
-            <a:pPr algn="ctr" rtl="0"/>
             <a:r>
               <a:rPr lang="en-US" sz="1600" b="1" i="0" u="none" strike="noStrike">
                 <a:highlight>
@@ -31133,7 +30410,6 @@
               </a:rPr>
               <a:t>Cadre de planification stratégique du Mozambique</a:t>
             </a:r>
-            <a:endParaRPr lang="en-US" sz="1600" b="1" dirty="0"/>
           </a:p>
         </p:txBody>
       </p:sp>
@@ -31160,9 +30436,8 @@
           <a:p>
             <a:r>
               <a:rPr lang="en-US"/>
-              <a:t>CPP 2023-2027. Version publique. Maputo, mai 2022.</a:t>
+              <a:t>CPF 2023-2027. Version publique. Maputo, mai 2022.</a:t>
             </a:r>
-            <a:endParaRPr lang="en-US" dirty="0"/>
           </a:p>
         </p:txBody>
       </p:sp>
@@ -31596,15 +30871,6 @@
             </a:lvl9pPr>
           </a:lstStyle>
           <a:p>
-            <a:pPr marL="0" indent="0" algn="just" rtl="0">
-              <a:lnSpc>
-                <a:spcPct val="100000"/>
-              </a:lnSpc>
-              <a:spcAft>
-                <a:spcPts val="800"/>
-              </a:spcAft>
-              <a:buNone/>
-            </a:pPr>
             <a:r>
               <a:rPr lang="en-US" sz="1400" b="1" i="0" u="none" strike="noStrike" dirty="0">
                 <a:highlight>
@@ -31614,20 +30880,12 @@
                 </a:highlight>
                 <a:latin typeface="Arial"/>
               </a:rPr>
-              <a:t>Le gouvernement a également adopté un plan ambitieux pour améliorer la gouvernance, fondé sur le Rapport de diagnostic sur la transparence, la gouvernance et la corruption dans le sillage de la crise de la dette cachée de 2016.</a:t>
+              <a:t>Le gouvernement a également adopté un plan ambitieux d'amélioration de la gouvernance fondé sur le Rapport de diagnostic sur la transparence, la gouvernance et la corruption, à la suite de la crise de la dette cachée de 2016.</a:t>
             </a:r>
           </a:p>
           <a:p>
-            <a:pPr algn="just">
-              <a:lnSpc>
-                <a:spcPct val="100000"/>
-              </a:lnSpc>
-              <a:spcAft>
-                <a:spcPts val="800"/>
-              </a:spcAft>
-            </a:pPr>
             <a:r>
-              <a:rPr lang="en-US" sz="1400" i="0" u="none" strike="noStrike" dirty="0">
+              <a:rPr lang="en-US" sz="1400" b="1" i="0" u="none" strike="noStrike" dirty="0">
                 <a:highlight>
                   <a:srgbClr val="000000">
                     <a:alpha val="0"/>
@@ -31635,20 +30893,12 @@
                 </a:highlight>
                 <a:latin typeface="Arial"/>
               </a:rPr>
-              <a:t>Les autorités ont pris plusieurs mesures pour contenir les dépenses publiques. Un solide programme de consolidation budgétaire a ramené le déficit primaire de 6 % à 2 % du PIB entre 2015 et 2018 et avait mis la dette publique sur une trajectoire descendante.</a:t>
+              <a:t>Les autorités ont pris plusieurs mesures pour contenir les dépenses publiques. Un solide programme de consolidation budgétaire a réduit le déficit primaire de 6 % à 2 % du PIB entre 2015 et 2018 et avait placé la dette publique sur une trajectoire décroissante.</a:t>
             </a:r>
           </a:p>
           <a:p>
-            <a:pPr algn="just">
-              <a:lnSpc>
-                <a:spcPct val="100000"/>
-              </a:lnSpc>
-              <a:spcAft>
-                <a:spcPts val="800"/>
-              </a:spcAft>
-            </a:pPr>
             <a:r>
-              <a:rPr lang="en-US" sz="1400" i="0" u="none" strike="noStrike" dirty="0">
+              <a:rPr lang="en-US" sz="1400" b="1" i="0" u="none" strike="noStrike" dirty="0">
                 <a:highlight>
                   <a:srgbClr val="000000">
                     <a:alpha val="0"/>
@@ -31656,20 +30906,12 @@
                 </a:highlight>
                 <a:latin typeface="Arial"/>
               </a:rPr>
-              <a:t>La supervision des entreprises publiques a été renforcée. Seul le ministère de l'Économie et des Finances peut signer des garanties au nom du gouvernement si elles se situent en dessous du plafond approuvé par le Parlement dans la loi de finances annuelle. En 2018, la gouvernance des entreprises publiques a également été renforcée par une nouvelle loi sur les entreprises publiques.</a:t>
+              <a:t>La supervision des entreprises publiques a été renforcée. Seul le ministère de l'Économie et des Finances peut signer des garanties au nom du gouvernement, à condition de rester en deçà du plafond approuvé par le Parlement dans la loi de finances annuelle. En 2018, la gouvernance des entreprises publiques a également été renforcée par une nouvelle loi sur les entreprises publiques.</a:t>
             </a:r>
           </a:p>
           <a:p>
-            <a:pPr algn="just">
-              <a:lnSpc>
-                <a:spcPct val="100000"/>
-              </a:lnSpc>
-              <a:spcAft>
-                <a:spcPts val="800"/>
-              </a:spcAft>
-            </a:pPr>
             <a:r>
-              <a:rPr lang="en-US" sz="1400" i="0" u="none" strike="noStrike" dirty="0">
+              <a:rPr lang="en-US" sz="1400" b="1" i="0" u="none" strike="noStrike" dirty="0">
                 <a:highlight>
                   <a:srgbClr val="000000">
                     <a:alpha val="0"/>
@@ -31677,20 +30919,12 @@
                 </a:highlight>
                 <a:latin typeface="Arial"/>
               </a:rPr>
-              <a:t>Des progrès substantiels ont été réalisés en matière de transparence budgétaire, avec la publication régulière de déclarations de risques budgétaires et de rapports complets sur la dette liée aux entreprises publiques et au GNL.</a:t>
+              <a:t>Des progrès substantiels ont été réalisés en matière de transparence budgétaire, avec la publication régulière de déclarations sur les risques budgétaires et de rapports complets sur la dette liée aux entreprises publiques et au GNL.</a:t>
             </a:r>
           </a:p>
           <a:p>
-            <a:pPr algn="just">
-              <a:lnSpc>
-                <a:spcPct val="100000"/>
-              </a:lnSpc>
-              <a:spcAft>
-                <a:spcPts val="800"/>
-              </a:spcAft>
-            </a:pPr>
             <a:r>
-              <a:rPr lang="en-US" sz="1400" i="0" u="none" strike="noStrike" dirty="0">
+              <a:rPr lang="en-US" sz="1400" b="1" i="0" u="none" strike="noStrike" dirty="0">
                 <a:highlight>
                   <a:srgbClr val="000000">
                     <a:alpha val="0"/>
@@ -31698,65 +30932,86 @@
                 </a:highlight>
                 <a:latin typeface="Arial"/>
               </a:rPr>
-              <a:t>En 2020, une nouvelle loi globale sur les finances publiques a été adoptée, intégrant les entreprises publiques et les gouvernements infranationaux dans le système budgétaire.</a:t>
+              <a:t>En 2020, une nouvelle loi globale sur les finances publiques a été adoptée, intégrant les entreprises publiques et les administrations infranationales dans le système budgétaire.</a:t>
             </a:r>
           </a:p>
           <a:p>
-            <a:pPr marL="0" indent="0" algn="just">
-              <a:lnSpc>
-                <a:spcPct val="110000"/>
-              </a:lnSpc>
-              <a:buNone/>
-            </a:pPr>
             <a:r>
-              <a:rPr lang="en-US" sz="1400" b="1" dirty="0"/>
-              <a:t>Des mesures de politique en matière de climat et de catastrophes ont été mises en œuvre depuis 2010</a:t>
+              <a:rPr lang="en-US" sz="1400" b="1" i="0" u="none" strike="noStrike" dirty="0">
+                <a:highlight>
+                  <a:srgbClr val="000000">
+                    <a:alpha val="0"/>
+                  </a:srgbClr>
+                </a:highlight>
+                <a:latin typeface="Arial"/>
+              </a:rPr>
+              <a:t>Des mesures de politique liées au climat et aux catastrophes sont mises en œuvre depuis 2010.</a:t>
             </a:r>
           </a:p>
           <a:p>
-            <a:pPr algn="just">
-              <a:lnSpc>
-                <a:spcPct val="110000"/>
-              </a:lnSpc>
-            </a:pPr>
             <a:r>
-              <a:rPr lang="en-US" sz="1400" dirty="0"/>
-              <a:t>Le gouvernement a approuvé la Stratégie nationale d'adaptation et d'atténuation du changement climatique, qui fournit le cadre politique général pour guider la planification et le développement résilients au climat.</a:t>
+              <a:rPr lang="en-US" sz="1400" b="1" i="0" u="none" strike="noStrike" dirty="0">
+                <a:highlight>
+                  <a:srgbClr val="000000">
+                    <a:alpha val="0"/>
+                  </a:srgbClr>
+                </a:highlight>
+                <a:latin typeface="Arial"/>
+              </a:rPr>
+              <a:t>Le gouvernement a approuvé la Stratégie nationale d'adaptation au changement climatique et d'atténuation de ses effets, qui fournit le cadre général d'action pour orienter la planification et le développement résilients au climat.</a:t>
             </a:r>
           </a:p>
           <a:p>
-            <a:pPr algn="just">
-              <a:lnSpc>
-                <a:spcPct val="110000"/>
-              </a:lnSpc>
-            </a:pPr>
             <a:r>
-              <a:rPr lang="en-US" sz="1400" dirty="0"/>
-              <a:t>Un Programme national complet de gestion des risques de catastrophe a été approuvé pour promouvoir le développement résilient du Mozambique par la prévention, la préparation, la réponse et le relèvement face aux catastrophes, ainsi que l'intégration de la Gestion des risques de catastrophe (GRD) dans les politiques publiques, les investissements et la planification du développement dans tous les secteurs.</a:t>
+              <a:rPr lang="en-US" sz="1400" b="1" i="0" u="none" strike="noStrike" dirty="0">
+                <a:highlight>
+                  <a:srgbClr val="000000">
+                    <a:alpha val="0"/>
+                  </a:srgbClr>
+                </a:highlight>
+                <a:latin typeface="Arial"/>
+              </a:rPr>
+              <a:t>Un Programme national complet de gestion des risques de catastrophe a été approuvé pour promouvoir le développement résilient du Mozambique par la prévention, la préparation, la réponse et le relèvement face aux catastrophes, ainsi que l'intégration de la gestion des risques de catastrophe (DRM) dans les finances publiques, les investissements et la planification du développement dans tous les secteurs.</a:t>
             </a:r>
           </a:p>
           <a:p>
-            <a:pPr algn="just">
-              <a:lnSpc>
-                <a:spcPct val="110000"/>
-              </a:lnSpc>
-            </a:pPr>
             <a:r>
-              <a:rPr lang="en-US" sz="1400" dirty="0"/>
-              <a:t>Une étape clé de ce programme a été la création, la capitalisation et la mise en opération d'un Fonds national de gestion des catastrophes et l'adoption et l'application de nouvelles normes de résilience climatique dans des secteurs clés (éducation, transport).</a:t>
+              <a:rPr lang="en-US" sz="1400" b="1" i="0" u="none" strike="noStrike" dirty="0">
+                <a:highlight>
+                  <a:srgbClr val="000000">
+                    <a:alpha val="0"/>
+                  </a:srgbClr>
+                </a:highlight>
+                <a:latin typeface="Arial"/>
+              </a:rPr>
+              <a:t>Une étape clé de ce programme a été la création, la capitalisation et l'opérationnalisation d'un Fonds national de gestion des catastrophes ainsi que l'adoption et l'application de nouvelles normes visant la résilience climatique dans des secteurs clés (éducation, transport).</a:t>
             </a:r>
           </a:p>
           <a:p>
-            <a:pPr marL="0" indent="0" algn="just">
-              <a:lnSpc>
-                <a:spcPct val="110000"/>
-              </a:lnSpc>
-              <a:buNone/>
-            </a:pPr>
-            <a:endParaRPr lang="en-US" sz="1400" dirty="0"/>
-          </a:p>
-          <a:p>
-            <a:endParaRPr lang="en-US" sz="1400" dirty="0"/>
+            <a:r>
+              <a:rPr lang="en-US" sz="1400" b="1" i="0" u="none" strike="noStrike" dirty="0">
+                <a:highlight>
+                  <a:srgbClr val="000000">
+                    <a:alpha val="0"/>
+                  </a:srgbClr>
+                </a:highlight>
+                <a:latin typeface="Arial"/>
+              </a:rPr>
+              <a:t/>
+            </a:r>
+          </a:p>
+          <a:p>
+            <a:r>
+              <a:rPr lang="en-US" sz="1400" b="1" i="0" u="none" strike="noStrike" dirty="0">
+                <a:highlight>
+                  <a:srgbClr val="000000">
+                    <a:alpha val="0"/>
+                  </a:srgbClr>
+                </a:highlight>
+                <a:latin typeface="Arial"/>
+              </a:rPr>
+              <a:t/>
+            </a:r>
           </a:p>
         </p:txBody>
       </p:sp>
@@ -31805,16 +31060,17 @@
             </a:lvl1pPr>
           </a:lstStyle>
           <a:p>
-            <a:pPr algn="ctr"/>
             <a:r>
               <a:rPr lang="en-US" sz="2400" b="1" dirty="0">
                 <a:solidFill>
                   <a:srgbClr val="2F5597"/>
                 </a:solidFill>
               </a:rPr>
-              <a:t>Programme gouvernemental et stratégie à moyen terme (1-2)</a:t>
+              <a:t>Programme du gouvernement et stratégie à moyen terme (1-2)
+</a:t>
             </a:r>
-            <a:br/>
+          </a:p>
+          <a:p>
             <a:r>
               <a:rPr lang="en-US" sz="2400" b="1" dirty="0">
                 <a:solidFill>
@@ -31823,27 +31079,6 @@
               </a:rPr>
               <a:t/>
             </a:r>
-            <a:br/>
-            <a:r>
-              <a:rPr lang="en-US" sz="2400" b="1" dirty="0">
-                <a:solidFill>
-                  <a:srgbClr val="2F5597"/>
-                </a:solidFill>
-              </a:rPr>
-              <a:t/>
-            </a:r>
-            <a:endParaRPr lang="pt" sz="2400" b="1" i="0" u="none" strike="noStrike" dirty="0">
-              <a:solidFill>
-                <a:srgbClr val="2F5597"/>
-              </a:solidFill>
-              <a:highlight>
-                <a:srgbClr val="000000">
-                  <a:alpha val="0"/>
-                </a:srgbClr>
-              </a:highlight>
-              <a:latin typeface="Arial"/>
-              <a:cs typeface="Arial"/>
-            </a:endParaRPr>
           </a:p>
         </p:txBody>
       </p:sp>
@@ -31875,9 +31110,8 @@
           <a:p>
             <a:r>
               <a:rPr lang="en-US"/>
-              <a:t>CPP 2023-2027. Version publique. Maputo, mai 2022.</a:t>
+              <a:t>CPF 2023-2027. Version publique. Maputo, mai 2022.</a:t>
             </a:r>
-            <a:endParaRPr lang="en-US" dirty="0"/>
           </a:p>
         </p:txBody>
       </p:sp>
@@ -32021,9 +31255,6 @@
             </a:bodyPr>
             <a:lstStyle/>
             <a:p>
-              <a:pPr lvl="0" algn="ctr">
-                <a:defRPr/>
-              </a:pPr>
               <a:r>
                 <a:rPr kumimoji="0" lang="en-US" sz="1600" b="1" i="0" u="none" strike="noStrike" kern="1200" cap="none" spc="0" normalizeH="0" baseline="0" noProof="0" dirty="0">
                   <a:ln>
@@ -32039,40 +31270,46 @@
                   <a:ea typeface="Times New Roman" panose="02020603050405020304" pitchFamily="18" charset="0"/>
                   <a:cs typeface="Times New Roman" panose="02020603050405020304" pitchFamily="18" charset="0"/>
                 </a:rPr>
-                <a:t>OHN3. Améliorer le capital humain et autonomiser les femmes</a:t>
+                <a:t>HLO3. Améliorer le capital humain et autonomiser les femmes</a:t>
               </a:r>
             </a:p>
             <a:p>
-              <a:pPr lvl="0" algn="ctr">
-                <a:defRPr/>
-              </a:pPr>
-              <a:endParaRPr lang="en-US" sz="1600" b="1" dirty="0">
-                <a:solidFill>
-                  <a:prstClr val="white"/>
-                </a:solidFill>
-                <a:latin typeface="Calibri" panose="020F0502020204030204" pitchFamily="34" charset="0"/>
-                <a:ea typeface="Times New Roman" panose="02020603050405020304" pitchFamily="18" charset="0"/>
-                <a:cs typeface="Times New Roman" panose="02020603050405020304" pitchFamily="18" charset="0"/>
-              </a:endParaRPr>
+              <a:r>
+                <a:rPr kumimoji="0" lang="en-US" sz="1600" b="1" i="0" u="none" strike="noStrike" kern="1200" cap="none" spc="0" normalizeH="0" baseline="0" noProof="0" dirty="0">
+                  <a:ln>
+                    <a:noFill/>
+                  </a:ln>
+                  <a:solidFill>
+                    <a:prstClr val="white"/>
+                  </a:solidFill>
+                  <a:effectLst/>
+                  <a:uLnTx/>
+                  <a:uFillTx/>
+                  <a:latin typeface="Calibri" panose="020F0502020204030204" pitchFamily="34" charset="0"/>
+                  <a:ea typeface="Times New Roman" panose="02020603050405020304" pitchFamily="18" charset="0"/>
+                  <a:cs typeface="Times New Roman" panose="02020603050405020304" pitchFamily="18" charset="0"/>
+                </a:rPr>
+                <a:t/>
+              </a:r>
             </a:p>
             <a:p>
-              <a:pPr lvl="0" algn="ctr">
-                <a:defRPr/>
-              </a:pPr>
-              <a:endParaRPr kumimoji="0" lang="en-US" sz="1800" b="1" i="0" u="none" strike="noStrike" kern="1200" cap="none" spc="0" normalizeH="0" baseline="0" noProof="0" dirty="0">
-                <a:ln>
-                  <a:noFill/>
-                </a:ln>
-                <a:solidFill>
-                  <a:prstClr val="white"/>
-                </a:solidFill>
-                <a:effectLst/>
-                <a:uLnTx/>
-                <a:uFillTx/>
-                <a:latin typeface="Calibri" panose="020F0502020204030204" pitchFamily="34" charset="0"/>
-                <a:ea typeface="Times New Roman" panose="02020603050405020304" pitchFamily="18" charset="0"/>
-                <a:cs typeface="Times New Roman" panose="02020603050405020304" pitchFamily="18" charset="0"/>
-              </a:endParaRPr>
+              <a:r>
+                <a:rPr kumimoji="0" lang="en-US" sz="1600" b="1" i="0" u="none" strike="noStrike" kern="1200" cap="none" spc="0" normalizeH="0" baseline="0" noProof="0" dirty="0">
+                  <a:ln>
+                    <a:noFill/>
+                  </a:ln>
+                  <a:solidFill>
+                    <a:prstClr val="white"/>
+                  </a:solidFill>
+                  <a:effectLst/>
+                  <a:uLnTx/>
+                  <a:uFillTx/>
+                  <a:latin typeface="Calibri" panose="020F0502020204030204" pitchFamily="34" charset="0"/>
+                  <a:ea typeface="Times New Roman" panose="02020603050405020304" pitchFamily="18" charset="0"/>
+                  <a:cs typeface="Times New Roman" panose="02020603050405020304" pitchFamily="18" charset="0"/>
+                </a:rPr>
+                <a:t/>
+              </a:r>
             </a:p>
           </p:txBody>
         </p:sp>
@@ -32106,9 +31343,6 @@
             </a:bodyPr>
             <a:lstStyle/>
             <a:p>
-              <a:pPr lvl="0" algn="ctr">
-                <a:defRPr/>
-              </a:pPr>
               <a:r>
                 <a:rPr lang="en-US" sz="1400" b="1" dirty="0">
                   <a:solidFill>
@@ -32122,9 +31356,6 @@
               </a:r>
             </a:p>
             <a:p>
-              <a:pPr lvl="0" algn="ctr">
-                <a:defRPr/>
-              </a:pPr>
               <a:r>
                 <a:rPr lang="en-US" sz="1400" b="1" dirty="0">
                   <a:solidFill>
@@ -32134,27 +31365,21 @@
                   <a:ea typeface="Times New Roman" panose="02020603050405020304" pitchFamily="18" charset="0"/>
                   <a:cs typeface="Times New Roman" panose="02020603050405020304" pitchFamily="18" charset="0"/>
                 </a:rPr>
-                <a:t>Améliorer l'accès aux services pour prévenir les grossesses chez les adolescentes et promouvoir la participation économique des femmes</a:t>
+                <a:t>Meilleur accès aux services de prévention des grossesses chez les adolescentes et de promotion de la participation économique des femmes</a:t>
               </a:r>
             </a:p>
             <a:p>
-              <a:pPr lvl="0" algn="ctr">
-                <a:defRPr/>
-              </a:pPr>
-              <a:endParaRPr kumimoji="0" lang="en-US" sz="1400" b="1" i="0" u="none" strike="noStrike" kern="1200" cap="none" spc="0" normalizeH="0" baseline="0" noProof="0" dirty="0">
-                <a:ln>
-                  <a:noFill/>
-                </a:ln>
-                <a:solidFill>
-                  <a:srgbClr val="FFFFFF"/>
-                </a:solidFill>
-                <a:effectLst/>
-                <a:uLnTx/>
-                <a:uFillTx/>
-                <a:latin typeface="Calibri" panose="020F0502020204030204" pitchFamily="34" charset="0"/>
-                <a:ea typeface="Times New Roman" panose="02020603050405020304" pitchFamily="18" charset="0"/>
-                <a:cs typeface="Times New Roman" panose="02020603050405020304" pitchFamily="18" charset="0"/>
-              </a:endParaRPr>
+              <a:r>
+                <a:rPr lang="en-US" sz="1400" b="1" dirty="0">
+                  <a:solidFill>
+                    <a:srgbClr val="FFFFFF"/>
+                  </a:solidFill>
+                  <a:latin typeface="Calibri" panose="020F0502020204030204" pitchFamily="34" charset="0"/>
+                  <a:ea typeface="Times New Roman" panose="02020603050405020304" pitchFamily="18" charset="0"/>
+                  <a:cs typeface="Times New Roman" panose="02020603050405020304" pitchFamily="18" charset="0"/>
+                </a:rPr>
+                <a:t/>
+              </a:r>
             </a:p>
           </p:txBody>
         </p:sp>
@@ -32188,9 +31413,6 @@
             </a:bodyPr>
             <a:lstStyle/>
             <a:p>
-              <a:pPr lvl="0" algn="ctr">
-                <a:defRPr/>
-              </a:pPr>
               <a:r>
                 <a:rPr lang="en-US" sz="1400" b="1" dirty="0">
                   <a:solidFill>
@@ -32204,22 +31426,6 @@
               </a:r>
             </a:p>
             <a:p>
-              <a:pPr lvl="0" algn="ctr">
-                <a:defRPr/>
-              </a:pPr>
-              <a:endParaRPr lang="en-US" sz="1400" b="1" dirty="0">
-                <a:solidFill>
-                  <a:srgbClr val="FFFFFF"/>
-                </a:solidFill>
-                <a:latin typeface="Calibri" panose="020F0502020204030204" pitchFamily="34" charset="0"/>
-                <a:ea typeface="Times New Roman" panose="02020603050405020304" pitchFamily="18" charset="0"/>
-                <a:cs typeface="Times New Roman" panose="02020603050405020304" pitchFamily="18" charset="0"/>
-              </a:endParaRPr>
-            </a:p>
-            <a:p>
-              <a:pPr lvl="0" algn="ctr">
-                <a:defRPr/>
-              </a:pPr>
               <a:r>
                 <a:rPr lang="en-US" sz="1400" b="1" dirty="0">
                   <a:solidFill>
@@ -32229,88 +31435,47 @@
                   <a:ea typeface="Times New Roman" panose="02020603050405020304" pitchFamily="18" charset="0"/>
                   <a:cs typeface="Times New Roman" panose="02020603050405020304" pitchFamily="18" charset="0"/>
                 </a:rPr>
-                <a:t>Accroître l'efficience et la couverture effective des services sociaux intégrés et durables</a:t>
+                <a:t/>
               </a:r>
-              <a:endParaRPr kumimoji="0" lang="en-US" sz="1400" b="1" i="0" u="none" strike="noStrike" kern="1200" cap="none" spc="0" normalizeH="0" baseline="0" noProof="0" dirty="0">
-                <a:ln>
-                  <a:noFill/>
-                </a:ln>
-                <a:solidFill>
-                  <a:srgbClr val="FFFFFF"/>
-                </a:solidFill>
-                <a:effectLst/>
-                <a:uLnTx/>
-                <a:uFillTx/>
-                <a:latin typeface="Calibri" panose="020F0502020204030204" pitchFamily="34" charset="0"/>
-                <a:ea typeface="Times New Roman" panose="02020603050405020304" pitchFamily="18" charset="0"/>
-                <a:cs typeface="Times New Roman" panose="02020603050405020304" pitchFamily="18" charset="0"/>
-              </a:endParaRPr>
             </a:p>
             <a:p>
-              <a:pPr marL="0" marR="0" lvl="0" indent="0" algn="ctr" defTabSz="914400" rtl="0" eaLnBrk="1" fontAlgn="auto" latinLnBrk="0" hangingPunct="1">
-                <a:lnSpc>
-                  <a:spcPct val="100000"/>
-                </a:lnSpc>
-                <a:spcBef>
-                  <a:spcPts val="0"/>
-                </a:spcBef>
-                <a:spcAft>
-                  <a:spcPts val="0"/>
-                </a:spcAft>
-                <a:buClrTx/>
-                <a:buSzTx/>
-                <a:buFontTx/>
-                <a:buNone/>
-                <a:tabLst/>
-                <a:defRPr/>
-              </a:pPr>
-              <a:endParaRPr kumimoji="0" lang="en-US" sz="1400" b="1" i="0" u="none" strike="noStrike" kern="1200" cap="none" spc="0" normalizeH="0" baseline="0" noProof="0" dirty="0">
-                <a:ln>
-                  <a:noFill/>
-                </a:ln>
-                <a:solidFill>
-                  <a:srgbClr val="FFFFFF"/>
-                </a:solidFill>
-                <a:effectLst/>
-                <a:uLnTx/>
-                <a:uFillTx/>
-                <a:latin typeface="Calibri" panose="020F0502020204030204" pitchFamily="34" charset="0"/>
-                <a:ea typeface="Times New Roman" panose="02020603050405020304" pitchFamily="18" charset="0"/>
-                <a:cs typeface="Times New Roman" panose="02020603050405020304" pitchFamily="18" charset="0"/>
-              </a:endParaRPr>
+              <a:r>
+                <a:rPr lang="en-US" sz="1400" b="1" dirty="0">
+                  <a:solidFill>
+                    <a:srgbClr val="FFFFFF"/>
+                  </a:solidFill>
+                  <a:latin typeface="Calibri" panose="020F0502020204030204" pitchFamily="34" charset="0"/>
+                  <a:ea typeface="Times New Roman" panose="02020603050405020304" pitchFamily="18" charset="0"/>
+                  <a:cs typeface="Times New Roman" panose="02020603050405020304" pitchFamily="18" charset="0"/>
+                </a:rPr>
+                <a:t>Accroître l'efficacité et la couverture effective des services sociaux intégrés et durables</a:t>
+              </a:r>
             </a:p>
             <a:p>
-              <a:pPr marL="0" marR="0" lvl="0" indent="0" algn="ctr" defTabSz="914400" rtl="0" eaLnBrk="1" fontAlgn="auto" latinLnBrk="0" hangingPunct="1">
-                <a:lnSpc>
-                  <a:spcPct val="100000"/>
-                </a:lnSpc>
-                <a:spcBef>
-                  <a:spcPts val="0"/>
-                </a:spcBef>
-                <a:spcAft>
-                  <a:spcPts val="0"/>
-                </a:spcAft>
-                <a:buClrTx/>
-                <a:buSzTx/>
-                <a:buFontTx/>
-                <a:buNone/>
-                <a:tabLst/>
-                <a:defRPr/>
-              </a:pPr>
-              <a:endParaRPr kumimoji="0" lang="en-US" sz="1400" b="1" i="0" u="none" strike="noStrike" kern="1200" cap="none" spc="0" normalizeH="0" baseline="0" noProof="0" dirty="0">
-                <a:ln>
-                  <a:noFill/>
-                </a:ln>
-                <a:solidFill>
-                  <a:srgbClr val="FFFFFF"/>
-                </a:solidFill>
-                <a:effectLst/>
-                <a:uLnTx/>
-                <a:uFillTx/>
-                <a:latin typeface="Calibri" panose="020F0502020204030204" pitchFamily="34" charset="0"/>
-                <a:ea typeface="Times New Roman" panose="02020603050405020304" pitchFamily="18" charset="0"/>
-                <a:cs typeface="Times New Roman" panose="02020603050405020304" pitchFamily="18" charset="0"/>
-              </a:endParaRPr>
+              <a:r>
+                <a:rPr lang="en-US" sz="1400" b="1" dirty="0">
+                  <a:solidFill>
+                    <a:srgbClr val="FFFFFF"/>
+                  </a:solidFill>
+                  <a:latin typeface="Calibri" panose="020F0502020204030204" pitchFamily="34" charset="0"/>
+                  <a:ea typeface="Times New Roman" panose="02020603050405020304" pitchFamily="18" charset="0"/>
+                  <a:cs typeface="Times New Roman" panose="02020603050405020304" pitchFamily="18" charset="0"/>
+                </a:rPr>
+                <a:t/>
+              </a:r>
+            </a:p>
+            <a:p>
+              <a:r>
+                <a:rPr lang="en-US" sz="1400" b="1" dirty="0">
+                  <a:solidFill>
+                    <a:srgbClr val="FFFFFF"/>
+                  </a:solidFill>
+                  <a:latin typeface="Calibri" panose="020F0502020204030204" pitchFamily="34" charset="0"/>
+                  <a:ea typeface="Times New Roman" panose="02020603050405020304" pitchFamily="18" charset="0"/>
+                  <a:cs typeface="Times New Roman" panose="02020603050405020304" pitchFamily="18" charset="0"/>
+                </a:rPr>
+                <a:t/>
+              </a:r>
             </a:p>
           </p:txBody>
         </p:sp>
@@ -32344,9 +31509,6 @@
             </a:bodyPr>
             <a:lstStyle/>
             <a:p>
-              <a:pPr lvl="0" algn="ctr">
-                <a:defRPr/>
-              </a:pPr>
               <a:r>
                 <a:rPr lang="en-US" sz="1400" b="1" dirty="0">
                   <a:solidFill>
@@ -32360,22 +31522,19 @@
               </a:r>
             </a:p>
             <a:p>
-              <a:pPr lvl="0" algn="ctr">
-                <a:defRPr/>
-              </a:pPr>
-              <a:endParaRPr lang="en-US" sz="1400" b="1" dirty="0">
-                <a:solidFill>
-                  <a:srgbClr val="FFFFFF"/>
-                </a:solidFill>
-                <a:latin typeface="Calibri" panose="020F0502020204030204" pitchFamily="34" charset="0"/>
-                <a:ea typeface="Times New Roman" panose="02020603050405020304" pitchFamily="18" charset="0"/>
-                <a:cs typeface="Times New Roman" panose="02020603050405020304" pitchFamily="18" charset="0"/>
-              </a:endParaRPr>
+              <a:r>
+                <a:rPr lang="en-US" sz="1400" b="1" dirty="0">
+                  <a:solidFill>
+                    <a:srgbClr val="FFFFFF"/>
+                  </a:solidFill>
+                  <a:latin typeface="Calibri" panose="020F0502020204030204" pitchFamily="34" charset="0"/>
+                  <a:ea typeface="Times New Roman" panose="02020603050405020304" pitchFamily="18" charset="0"/>
+                  <a:cs typeface="Times New Roman" panose="02020603050405020304" pitchFamily="18" charset="0"/>
+                </a:rPr>
+                <a:t/>
+              </a:r>
             </a:p>
             <a:p>
-              <a:pPr lvl="0" algn="ctr">
-                <a:defRPr/>
-              </a:pPr>
               <a:r>
                 <a:rPr lang="en-US" sz="1400" b="1" dirty="0">
                   <a:solidFill>
@@ -32387,116 +31546,39 @@
                 </a:rPr>
                 <a:t>Améliorer les principaux résultats en matière de santé et d'éducation</a:t>
               </a:r>
-              <a:endParaRPr kumimoji="0" lang="en-US" sz="1400" b="0" i="0" u="none" strike="noStrike" kern="1200" cap="none" spc="0" normalizeH="0" baseline="0" noProof="0" dirty="0">
-                <a:ln>
-                  <a:noFill/>
-                </a:ln>
-                <a:solidFill>
-                  <a:srgbClr val="FFFFFF"/>
-                </a:solidFill>
-                <a:effectLst/>
-                <a:uLnTx/>
-                <a:uFillTx/>
-                <a:latin typeface="Calibri" panose="020F0502020204030204" pitchFamily="34" charset="0"/>
-                <a:ea typeface="Times New Roman" panose="02020603050405020304" pitchFamily="18" charset="0"/>
-                <a:cs typeface="Times New Roman" panose="02020603050405020304" pitchFamily="18" charset="0"/>
-              </a:endParaRPr>
             </a:p>
             <a:p>
-              <a:pPr marL="0" marR="0" lvl="0" indent="0" algn="ctr" defTabSz="914400" rtl="0" eaLnBrk="1" fontAlgn="auto" latinLnBrk="0" hangingPunct="1">
-                <a:lnSpc>
-                  <a:spcPct val="100000"/>
-                </a:lnSpc>
-                <a:spcBef>
-                  <a:spcPts val="0"/>
-                </a:spcBef>
-                <a:spcAft>
-                  <a:spcPts val="0"/>
-                </a:spcAft>
-                <a:buClrTx/>
-                <a:buSzTx/>
-                <a:buFontTx/>
-                <a:buNone/>
-                <a:tabLst/>
-                <a:defRPr/>
-              </a:pPr>
-              <a:endParaRPr kumimoji="0" lang="en-US" sz="1400" b="0" i="0" u="none" strike="noStrike" kern="1200" cap="none" spc="0" normalizeH="0" baseline="0" noProof="0" dirty="0">
-                <a:ln>
-                  <a:noFill/>
-                </a:ln>
-                <a:solidFill>
-                  <a:srgbClr val="FFFFFF"/>
-                </a:solidFill>
-                <a:effectLst/>
-                <a:uLnTx/>
-                <a:uFillTx/>
-                <a:latin typeface="Calibri" panose="020F0502020204030204" pitchFamily="34" charset="0"/>
-                <a:ea typeface="Times New Roman" panose="02020603050405020304" pitchFamily="18" charset="0"/>
-                <a:cs typeface="Times New Roman" panose="02020603050405020304" pitchFamily="18" charset="0"/>
-              </a:endParaRPr>
-            </a:p>
-            <a:p>
-              <a:pPr marL="0" marR="0" lvl="0" indent="0" algn="ctr" defTabSz="914400" rtl="0" eaLnBrk="1" fontAlgn="auto" latinLnBrk="0" hangingPunct="1">
-                <a:lnSpc>
-                  <a:spcPct val="100000"/>
-                </a:lnSpc>
-                <a:spcBef>
-                  <a:spcPts val="0"/>
-                </a:spcBef>
-                <a:spcAft>
-                  <a:spcPts val="0"/>
-                </a:spcAft>
-                <a:buClrTx/>
-                <a:buSzTx/>
-                <a:buFontTx/>
-                <a:buNone/>
-                <a:tabLst/>
-                <a:defRPr/>
-              </a:pPr>
-              <a:endParaRPr kumimoji="0" lang="en-US" sz="1400" b="0" i="0" u="none" strike="noStrike" kern="1200" cap="none" spc="0" normalizeH="0" baseline="0" noProof="0" dirty="0">
-                <a:ln>
-                  <a:noFill/>
-                </a:ln>
-                <a:solidFill>
-                  <a:srgbClr val="FFFFFF"/>
-                </a:solidFill>
-                <a:effectLst/>
-                <a:uLnTx/>
-                <a:uFillTx/>
-                <a:latin typeface="Calibri" panose="020F0502020204030204" pitchFamily="34" charset="0"/>
-                <a:ea typeface="Times New Roman" panose="02020603050405020304" pitchFamily="18" charset="0"/>
-                <a:cs typeface="Times New Roman" panose="02020603050405020304" pitchFamily="18" charset="0"/>
-              </a:endParaRPr>
-            </a:p>
-            <a:p>
-              <a:pPr marL="0" marR="0" lvl="0" indent="0" algn="ctr" defTabSz="914400" rtl="0" eaLnBrk="1" fontAlgn="auto" latinLnBrk="0" hangingPunct="1">
-                <a:lnSpc>
-                  <a:spcPct val="100000"/>
-                </a:lnSpc>
-                <a:spcBef>
-                  <a:spcPts val="0"/>
-                </a:spcBef>
-                <a:spcAft>
-                  <a:spcPts val="0"/>
-                </a:spcAft>
-                <a:buClrTx/>
-                <a:buSzTx/>
-                <a:buFontTx/>
-                <a:buNone/>
-                <a:tabLst/>
-                <a:defRPr/>
-              </a:pPr>
               <a:r>
-                <a:rPr kumimoji="0" lang="en-US" sz="1400" b="0" i="0" u="none" strike="noStrike" kern="1200" cap="none" spc="0" normalizeH="0" baseline="0" noProof="0" dirty="0">
-                  <a:ln>
-                    <a:noFill/>
-                  </a:ln>
+                <a:rPr lang="en-US" sz="1400" b="1" dirty="0">
                   <a:solidFill>
                     <a:srgbClr val="FFFFFF"/>
                   </a:solidFill>
-                  <a:effectLst/>
-                  <a:uLnTx/>
-                  <a:uFillTx/>
+                  <a:latin typeface="Calibri" panose="020F0502020204030204" pitchFamily="34" charset="0"/>
+                  <a:ea typeface="Times New Roman" panose="02020603050405020304" pitchFamily="18" charset="0"/>
+                  <a:cs typeface="Times New Roman" panose="02020603050405020304" pitchFamily="18" charset="0"/>
+                </a:rPr>
+                <a:t/>
+              </a:r>
+            </a:p>
+            <a:p>
+              <a:r>
+                <a:rPr lang="en-US" sz="1400" b="1" dirty="0">
+                  <a:solidFill>
+                    <a:srgbClr val="FFFFFF"/>
+                  </a:solidFill>
+                  <a:latin typeface="Calibri" panose="020F0502020204030204" pitchFamily="34" charset="0"/>
+                  <a:ea typeface="Times New Roman" panose="02020603050405020304" pitchFamily="18" charset="0"/>
+                  <a:cs typeface="Times New Roman" panose="02020603050405020304" pitchFamily="18" charset="0"/>
+                </a:rPr>
+                <a:t/>
+              </a:r>
+            </a:p>
+            <a:p>
+              <a:r>
+                <a:rPr lang="en-US" sz="1400" b="1" dirty="0">
+                  <a:solidFill>
+                    <a:srgbClr val="FFFFFF"/>
+                  </a:solidFill>
                   <a:latin typeface="Calibri" panose="020F0502020204030204" pitchFamily="34" charset="0"/>
                   <a:ea typeface="Times New Roman" panose="02020603050405020304" pitchFamily="18" charset="0"/>
                   <a:cs typeface="Times New Roman" panose="02020603050405020304" pitchFamily="18" charset="0"/>
@@ -32505,37 +31587,17 @@
               </a:r>
             </a:p>
             <a:p>
-              <a:pPr marL="0" marR="0" lvl="0" indent="0" algn="ctr" defTabSz="914400" rtl="0" eaLnBrk="1" fontAlgn="auto" latinLnBrk="0" hangingPunct="1">
-                <a:lnSpc>
-                  <a:spcPct val="100000"/>
-                </a:lnSpc>
-                <a:spcBef>
-                  <a:spcPts val="0"/>
-                </a:spcBef>
-                <a:spcAft>
-                  <a:spcPts val="0"/>
-                </a:spcAft>
-                <a:buClrTx/>
-                <a:buSzTx/>
-                <a:buFontTx/>
-                <a:buNone/>
-                <a:tabLst/>
-                <a:defRPr/>
-              </a:pPr>
-              <a:endParaRPr kumimoji="0" lang="en-US" sz="1400" b="0" i="0" u="none" strike="noStrike" kern="1200" cap="none" spc="0" normalizeH="0" baseline="0" noProof="0" dirty="0">
-                <a:ln>
-                  <a:noFill/>
-                </a:ln>
-                <a:solidFill>
-                  <a:prstClr val="black"/>
-                </a:solidFill>
-                <a:effectLst/>
-                <a:uLnTx/>
-                <a:uFillTx/>
-                <a:latin typeface="Times New Roman" panose="02020603050405020304" pitchFamily="18" charset="0"/>
-                <a:ea typeface="Times New Roman" panose="02020603050405020304" pitchFamily="18" charset="0"/>
-                <a:cs typeface="+mn-cs"/>
-              </a:endParaRPr>
+              <a:r>
+                <a:rPr lang="en-US" sz="1400" b="1" dirty="0">
+                  <a:solidFill>
+                    <a:srgbClr val="FFFFFF"/>
+                  </a:solidFill>
+                  <a:latin typeface="Calibri" panose="020F0502020204030204" pitchFamily="34" charset="0"/>
+                  <a:ea typeface="Times New Roman" panose="02020603050405020304" pitchFamily="18" charset="0"/>
+                  <a:cs typeface="Times New Roman" panose="02020603050405020304" pitchFamily="18" charset="0"/>
+                </a:rPr>
+                <a:t/>
+              </a:r>
             </a:p>
           </p:txBody>
         </p:sp>
@@ -32570,9 +31632,6 @@
           </a:bodyPr>
           <a:lstStyle/>
           <a:p>
-            <a:pPr lvl="0" algn="ctr">
-              <a:defRPr/>
-            </a:pPr>
             <a:r>
               <a:rPr lang="en-US" b="1" dirty="0">
                 <a:solidFill>
@@ -32582,9 +31641,11 @@
                 <a:ea typeface="Times New Roman" panose="02020603050405020304" pitchFamily="18" charset="0"/>
                 <a:cs typeface="Times New Roman" panose="02020603050405020304" pitchFamily="18" charset="0"/>
               </a:rPr>
-              <a:t>OHN 1 : Des institutions plus inclusives</a:t>
+              <a:t>HLO 1 : Des institutions plus inclusives
+</a:t>
             </a:r>
-            <a:br/>
+          </a:p>
+          <a:p>
             <a:r>
               <a:rPr lang="en-US" b="1" dirty="0">
                 <a:solidFill>
@@ -32596,32 +31657,6 @@
               </a:rPr>
               <a:t/>
             </a:r>
-            <a:r>
-              <a:rPr lang="pt-BR" b="1" dirty="0">
-                <a:solidFill>
-                  <a:srgbClr val="FFFFFF"/>
-                </a:solidFill>
-                <a:latin typeface="Calibri" panose="020F0502020204030204" pitchFamily="34" charset="0"/>
-                <a:ea typeface="Times New Roman" panose="02020603050405020304" pitchFamily="18" charset="0"/>
-                <a:cs typeface="Times New Roman" panose="02020603050405020304" pitchFamily="18" charset="0"/>
-              </a:rPr>
-              <a:t>
-</a:t>
-            </a:r>
-            <a:endParaRPr kumimoji="0" lang="en-US" sz="1200" b="0" i="0" u="none" strike="noStrike" kern="1200" cap="none" spc="0" normalizeH="0" baseline="0" noProof="0" dirty="0">
-              <a:ln>
-                <a:noFill/>
-              </a:ln>
-              <a:solidFill>
-                <a:prstClr val="white"/>
-              </a:solidFill>
-              <a:effectLst/>
-              <a:uLnTx/>
-              <a:uFillTx/>
-              <a:latin typeface="Calibri" panose="020F0502020204030204" pitchFamily="34" charset="0"/>
-              <a:ea typeface="Times New Roman" panose="02020603050405020304" pitchFamily="18" charset="0"/>
-              <a:cs typeface="Calibri" panose="020F0502020204030204" pitchFamily="34" charset="0"/>
-            </a:endParaRPr>
           </a:p>
         </p:txBody>
       </p:sp>
@@ -32655,9 +31690,6 @@
           </a:bodyPr>
           <a:lstStyle/>
           <a:p>
-            <a:pPr lvl="0" algn="ctr">
-              <a:defRPr/>
-            </a:pPr>
             <a:r>
               <a:rPr lang="en-US" sz="1400" b="1" dirty="0">
                 <a:solidFill>
@@ -32671,9 +31703,6 @@
             </a:r>
           </a:p>
           <a:p>
-            <a:pPr lvl="0" algn="ctr">
-              <a:defRPr/>
-            </a:pPr>
             <a:r>
               <a:rPr lang="en-US" sz="1400" b="1" dirty="0">
                 <a:solidFill>
@@ -32683,13 +31712,10 @@
                 <a:ea typeface="Times New Roman" panose="02020603050405020304" pitchFamily="18" charset="0"/>
                 <a:cs typeface="Times New Roman" panose="02020603050405020304" pitchFamily="18" charset="0"/>
               </a:rPr>
-              <a:t>Accroître l'efficacité du secteur public pour une prestation de services meilleure, plus durable</a:t>
+              <a:t>Accroître l'efficacité du secteur public pour une prestation de services meilleure et plus durable</a:t>
             </a:r>
           </a:p>
           <a:p>
-            <a:pPr lvl="0" algn="ctr">
-              <a:defRPr/>
-            </a:pPr>
             <a:r>
               <a:rPr lang="en-US" sz="1400" b="1" dirty="0">
                 <a:solidFill>
@@ -32699,27 +31725,21 @@
                 <a:ea typeface="Times New Roman" panose="02020603050405020304" pitchFamily="18" charset="0"/>
                 <a:cs typeface="Times New Roman" panose="02020603050405020304" pitchFamily="18" charset="0"/>
               </a:rPr>
-              <a:t>et des politiques équitables</a:t>
+              <a:t>et des politiques plus équitables</a:t>
             </a:r>
           </a:p>
           <a:p>
-            <a:pPr lvl="0" algn="ctr">
-              <a:defRPr/>
-            </a:pPr>
-            <a:endParaRPr kumimoji="0" lang="en-US" sz="1400" b="0" i="0" u="none" strike="noStrike" kern="1200" cap="none" spc="0" normalizeH="0" baseline="0" noProof="0" dirty="0">
-              <a:ln>
-                <a:noFill/>
-              </a:ln>
-              <a:solidFill>
-                <a:srgbClr val="FFFFFF"/>
-              </a:solidFill>
-              <a:effectLst/>
-              <a:uLnTx/>
-              <a:uFillTx/>
-              <a:latin typeface="Calibri" panose="020F0502020204030204" pitchFamily="34" charset="0"/>
-              <a:ea typeface="Times New Roman" panose="02020603050405020304" pitchFamily="18" charset="0"/>
-              <a:cs typeface="Times New Roman" panose="02020603050405020304" pitchFamily="18" charset="0"/>
-            </a:endParaRPr>
+            <a:r>
+              <a:rPr lang="en-US" sz="1400" b="1" dirty="0">
+                <a:solidFill>
+                  <a:srgbClr val="FFFFFF"/>
+                </a:solidFill>
+                <a:latin typeface="Calibri" panose="020F0502020204030204" pitchFamily="34" charset="0"/>
+                <a:ea typeface="Times New Roman" panose="02020603050405020304" pitchFamily="18" charset="0"/>
+                <a:cs typeface="Times New Roman" panose="02020603050405020304" pitchFamily="18" charset="0"/>
+              </a:rPr>
+              <a:t/>
+            </a:r>
           </a:p>
         </p:txBody>
       </p:sp>
@@ -32753,9 +31773,6 @@
           </a:bodyPr>
           <a:lstStyle/>
           <a:p>
-            <a:pPr lvl="0" algn="ctr">
-              <a:defRPr/>
-            </a:pPr>
             <a:r>
               <a:rPr lang="en-US" sz="1400" b="1" dirty="0">
                 <a:solidFill>
@@ -32769,9 +31786,6 @@
             </a:r>
           </a:p>
           <a:p>
-            <a:pPr lvl="0" algn="ctr">
-              <a:defRPr/>
-            </a:pPr>
             <a:r>
               <a:rPr lang="en-US" sz="1400" b="1" dirty="0">
                 <a:solidFill>
@@ -32781,9 +31795,11 @@
                 <a:ea typeface="Times New Roman" panose="02020603050405020304" pitchFamily="18" charset="0"/>
                 <a:cs typeface="Times New Roman" panose="02020603050405020304" pitchFamily="18" charset="0"/>
               </a:rPr>
-              <a:t>Améliorer la gestion économique pour une création d'emplois durable et résiliente, une meilleure capacité de dépense et un risque souverain réduit</a:t>
+              <a:t>Améliorer la gestion économique pour une création d'emplois durable et résiliente, une meilleure capacité de dépense et un risque souverain plus faible
+</a:t>
             </a:r>
-            <a:br/>
+          </a:p>
+          <a:p>
             <a:r>
               <a:rPr lang="en-US" sz="1400" b="1" dirty="0">
                 <a:solidFill>
@@ -32795,32 +31811,6 @@
               </a:rPr>
               <a:t/>
             </a:r>
-            <a:r>
-              <a:rPr lang="pt-BR" sz="1400" b="1" dirty="0">
-                <a:solidFill>
-                  <a:srgbClr val="FFFFFF"/>
-                </a:solidFill>
-                <a:latin typeface="Calibri" panose="020F0502020204030204" pitchFamily="34" charset="0"/>
-                <a:ea typeface="Times New Roman" panose="02020603050405020304" pitchFamily="18" charset="0"/>
-                <a:cs typeface="Times New Roman" panose="02020603050405020304" pitchFamily="18" charset="0"/>
-              </a:rPr>
-              <a:t>
-</a:t>
-            </a:r>
-            <a:endParaRPr kumimoji="0" lang="en-US" sz="1400" b="0" i="0" u="none" strike="noStrike" kern="1200" cap="none" spc="0" normalizeH="0" baseline="0" noProof="0" dirty="0">
-              <a:ln>
-                <a:noFill/>
-              </a:ln>
-              <a:solidFill>
-                <a:prstClr val="black"/>
-              </a:solidFill>
-              <a:effectLst/>
-              <a:uLnTx/>
-              <a:uFillTx/>
-              <a:latin typeface="Times New Roman" panose="02020603050405020304" pitchFamily="18" charset="0"/>
-              <a:ea typeface="Times New Roman" panose="02020603050405020304" pitchFamily="18" charset="0"/>
-              <a:cs typeface="+mn-cs"/>
-            </a:endParaRPr>
           </a:p>
         </p:txBody>
       </p:sp>
@@ -32874,9 +31864,6 @@
             </a:bodyPr>
             <a:lstStyle/>
             <a:p>
-              <a:pPr lvl="0" algn="ctr">
-                <a:defRPr/>
-              </a:pPr>
               <a:r>
                 <a:rPr lang="en-US" sz="1400" b="1" dirty="0">
                   <a:solidFill>
@@ -32886,38 +31873,10 @@
                   <a:ea typeface="Times New Roman" panose="02020603050405020304" pitchFamily="18" charset="0"/>
                   <a:cs typeface="Times New Roman" panose="02020603050405020304" pitchFamily="18" charset="0"/>
                 </a:rPr>
-                <a:t>Objectif CPP 5 :</a:t>
+                <a:t>Objectif 5 du CPF :</a:t>
               </a:r>
             </a:p>
             <a:p>
-              <a:pPr lvl="0" algn="ctr">
-                <a:defRPr/>
-              </a:pPr>
-              <a:endParaRPr lang="en-US" sz="1400" b="1" dirty="0">
-                <a:solidFill>
-                  <a:srgbClr val="FFFFFF"/>
-                </a:solidFill>
-                <a:latin typeface="Calibri" panose="020F0502020204030204" pitchFamily="34" charset="0"/>
-                <a:ea typeface="Times New Roman" panose="02020603050405020304" pitchFamily="18" charset="0"/>
-                <a:cs typeface="Times New Roman" panose="02020603050405020304" pitchFamily="18" charset="0"/>
-              </a:endParaRPr>
-            </a:p>
-            <a:p>
-              <a:pPr lvl="0" algn="ctr">
-                <a:defRPr/>
-              </a:pPr>
-              <a:r>
-                <a:rPr lang="en-US" sz="1400" b="1" dirty="0">
-                  <a:solidFill>
-                    <a:srgbClr val="FFFFFF"/>
-                  </a:solidFill>
-                  <a:latin typeface="Calibri" panose="020F0502020204030204" pitchFamily="34" charset="0"/>
-                  <a:ea typeface="Times New Roman" panose="02020603050405020304" pitchFamily="18" charset="0"/>
-                  <a:cs typeface="Times New Roman" panose="02020603050405020304" pitchFamily="18" charset="0"/>
-                </a:rPr>
-                <a:t>Promouvoir la croissance de la productivité dans des industries à forte intensité de main-d'œuvre sélectionnées</a:t>
-              </a:r>
-              <a:br/>
               <a:r>
                 <a:rPr lang="en-US" sz="1400" b="1" dirty="0">
                   <a:solidFill>
@@ -32929,8 +31888,10 @@
                 </a:rPr>
                 <a:t/>
               </a:r>
+            </a:p>
+            <a:p>
               <a:r>
-                <a:rPr lang="pt-BR" sz="1400" dirty="0">
+                <a:rPr lang="en-US" sz="1400" b="1" dirty="0">
                   <a:solidFill>
                     <a:srgbClr val="FFFFFF"/>
                   </a:solidFill>
@@ -32938,80 +31899,61 @@
                   <a:ea typeface="Times New Roman" panose="02020603050405020304" pitchFamily="18" charset="0"/>
                   <a:cs typeface="Times New Roman" panose="02020603050405020304" pitchFamily="18" charset="0"/>
                 </a:rPr>
-                <a:t>
+                <a:t>Promouvoir la croissance de la productivité dans des industries à forte intensité de main-d'œuvre sélectionnées
 </a:t>
               </a:r>
             </a:p>
             <a:p>
-              <a:pPr lvl="0" algn="ctr">
-                <a:defRPr/>
-              </a:pPr>
-              <a:endParaRPr kumimoji="0" lang="pt-BR" sz="1400" i="0" u="none" strike="noStrike" kern="1200" cap="none" spc="0" normalizeH="0" baseline="0" noProof="0" dirty="0">
-                <a:ln>
-                  <a:noFill/>
-                </a:ln>
-                <a:solidFill>
-                  <a:srgbClr val="FFFFFF"/>
-                </a:solidFill>
-                <a:effectLst/>
-                <a:uLnTx/>
-                <a:uFillTx/>
-                <a:latin typeface="Calibri" panose="020F0502020204030204" pitchFamily="34" charset="0"/>
-                <a:ea typeface="Times New Roman" panose="02020603050405020304" pitchFamily="18" charset="0"/>
-                <a:cs typeface="Times New Roman" panose="02020603050405020304" pitchFamily="18" charset="0"/>
-              </a:endParaRPr>
+              <a:r>
+                <a:rPr lang="en-US" sz="1400" b="1" dirty="0">
+                  <a:solidFill>
+                    <a:srgbClr val="FFFFFF"/>
+                  </a:solidFill>
+                  <a:latin typeface="Calibri" panose="020F0502020204030204" pitchFamily="34" charset="0"/>
+                  <a:ea typeface="Times New Roman" panose="02020603050405020304" pitchFamily="18" charset="0"/>
+                  <a:cs typeface="Times New Roman" panose="02020603050405020304" pitchFamily="18" charset="0"/>
+                </a:rPr>
+                <a:t/>
+              </a:r>
             </a:p>
             <a:p>
-              <a:pPr lvl="0" algn="ctr">
-                <a:defRPr/>
-              </a:pPr>
-              <a:endParaRPr kumimoji="0" lang="en-US" sz="1400" i="0" u="none" strike="noStrike" kern="1200" cap="none" spc="0" normalizeH="0" baseline="0" noProof="0" dirty="0">
-                <a:ln>
-                  <a:noFill/>
-                </a:ln>
-                <a:solidFill>
-                  <a:srgbClr val="FFFFFF"/>
-                </a:solidFill>
-                <a:effectLst/>
-                <a:uLnTx/>
-                <a:uFillTx/>
-                <a:latin typeface="Calibri" panose="020F0502020204030204" pitchFamily="34" charset="0"/>
-                <a:ea typeface="Times New Roman" panose="02020603050405020304" pitchFamily="18" charset="0"/>
-                <a:cs typeface="Times New Roman" panose="02020603050405020304" pitchFamily="18" charset="0"/>
-              </a:endParaRPr>
+              <a:r>
+                <a:rPr lang="en-US" sz="1400" b="1" dirty="0">
+                  <a:solidFill>
+                    <a:srgbClr val="FFFFFF"/>
+                  </a:solidFill>
+                  <a:latin typeface="Calibri" panose="020F0502020204030204" pitchFamily="34" charset="0"/>
+                  <a:ea typeface="Times New Roman" panose="02020603050405020304" pitchFamily="18" charset="0"/>
+                  <a:cs typeface="Times New Roman" panose="02020603050405020304" pitchFamily="18" charset="0"/>
+                </a:rPr>
+                <a:t/>
+              </a:r>
             </a:p>
             <a:p>
-              <a:pPr marL="0" marR="0" lvl="0" indent="0" algn="ctr" defTabSz="914400" rtl="0" eaLnBrk="1" fontAlgn="auto" latinLnBrk="0" hangingPunct="1">
-                <a:lnSpc>
-                  <a:spcPct val="100000"/>
-                </a:lnSpc>
-                <a:spcBef>
-                  <a:spcPts val="0"/>
-                </a:spcBef>
-                <a:spcAft>
-                  <a:spcPts val="0"/>
-                </a:spcAft>
-                <a:buClrTx/>
-                <a:buSzTx/>
-                <a:buFontTx/>
-                <a:buNone/>
-                <a:tabLst/>
-                <a:defRPr/>
-              </a:pPr>
-              <a:endParaRPr kumimoji="0" lang="en-US" sz="1400" b="0" i="0" u="none" strike="noStrike" kern="1200" cap="none" spc="0" normalizeH="0" baseline="0" noProof="0" dirty="0">
-                <a:ln>
-                  <a:noFill/>
-                </a:ln>
-                <a:solidFill>
-                  <a:srgbClr val="FFFFFF"/>
-                </a:solidFill>
-                <a:effectLst/>
-                <a:uLnTx/>
-                <a:uFillTx/>
-                <a:latin typeface="Calibri" panose="020F0502020204030204" pitchFamily="34" charset="0"/>
-                <a:ea typeface="Times New Roman" panose="02020603050405020304" pitchFamily="18" charset="0"/>
-                <a:cs typeface="Times New Roman" panose="02020603050405020304" pitchFamily="18" charset="0"/>
-              </a:endParaRPr>
+              <a:r>
+                <a:rPr lang="en-US" sz="1400" b="1" dirty="0">
+                  <a:solidFill>
+                    <a:srgbClr val="FFFFFF"/>
+                  </a:solidFill>
+                  <a:latin typeface="Calibri" panose="020F0502020204030204" pitchFamily="34" charset="0"/>
+                  <a:ea typeface="Times New Roman" panose="02020603050405020304" pitchFamily="18" charset="0"/>
+                  <a:cs typeface="Times New Roman" panose="02020603050405020304" pitchFamily="18" charset="0"/>
+                </a:rPr>
+                <a:t/>
+              </a:r>
+            </a:p>
+            <a:p>
+              <a:r>
+                <a:rPr lang="en-US" sz="1400" b="1" dirty="0">
+                  <a:solidFill>
+                    <a:srgbClr val="FFFFFF"/>
+                  </a:solidFill>
+                  <a:latin typeface="Calibri" panose="020F0502020204030204" pitchFamily="34" charset="0"/>
+                  <a:ea typeface="Times New Roman" panose="02020603050405020304" pitchFamily="18" charset="0"/>
+                  <a:cs typeface="Times New Roman" panose="02020603050405020304" pitchFamily="18" charset="0"/>
+                </a:rPr>
+                <a:t/>
+              </a:r>
             </a:p>
           </p:txBody>
         </p:sp>
@@ -33045,9 +31987,6 @@
             </a:bodyPr>
             <a:lstStyle/>
             <a:p>
-              <a:pPr lvl="0" algn="ctr">
-                <a:defRPr/>
-              </a:pPr>
               <a:r>
                 <a:rPr lang="en-US" sz="1400" b="1" dirty="0">
                   <a:solidFill>
@@ -33061,9 +32000,6 @@
               </a:r>
             </a:p>
             <a:p>
-              <a:pPr lvl="0" algn="ctr">
-                <a:defRPr/>
-              </a:pPr>
               <a:r>
                 <a:rPr lang="en-US" sz="1400" b="1" dirty="0">
                   <a:solidFill>
@@ -33073,9 +32009,11 @@
                   <a:ea typeface="Times New Roman" panose="02020603050405020304" pitchFamily="18" charset="0"/>
                   <a:cs typeface="Times New Roman" panose="02020603050405020304" pitchFamily="18" charset="0"/>
                 </a:rPr>
-                <a:t>Permettre une croissance durable des secteurs de ressources naturelles sélectionnés qui exploitent les avantages comparatifs régionaux et mondiaux</a:t>
+                <a:t>Permettre une croissance durable de secteurs de ressources naturelles sélectionnés qui exploitent des avantages comparatifs régionaux et mondiaux
+</a:t>
               </a:r>
-              <a:br/>
+            </a:p>
+            <a:p>
               <a:r>
                 <a:rPr lang="en-US" sz="1400" b="1" dirty="0">
                   <a:solidFill>
@@ -33087,32 +32025,6 @@
                 </a:rPr>
                 <a:t/>
               </a:r>
-              <a:r>
-                <a:rPr lang="pt-BR" sz="1400" dirty="0">
-                  <a:solidFill>
-                    <a:srgbClr val="FFFFFF"/>
-                  </a:solidFill>
-                  <a:latin typeface="Calibri" panose="020F0502020204030204" pitchFamily="34" charset="0"/>
-                  <a:ea typeface="Times New Roman" panose="02020603050405020304" pitchFamily="18" charset="0"/>
-                  <a:cs typeface="Times New Roman" panose="02020603050405020304" pitchFamily="18" charset="0"/>
-                </a:rPr>
-                <a:t>
-</a:t>
-              </a:r>
-              <a:endParaRPr kumimoji="0" lang="en-US" sz="1400" i="0" u="none" strike="noStrike" kern="1200" cap="none" spc="0" normalizeH="0" baseline="0" noProof="0" dirty="0">
-                <a:ln>
-                  <a:noFill/>
-                </a:ln>
-                <a:solidFill>
-                  <a:prstClr val="white"/>
-                </a:solidFill>
-                <a:effectLst/>
-                <a:uLnTx/>
-                <a:uFillTx/>
-                <a:latin typeface="Calibri" panose="020F0502020204030204"/>
-                <a:ea typeface="Times New Roman" panose="02020603050405020304" pitchFamily="18" charset="0"/>
-                <a:cs typeface="+mn-cs"/>
-              </a:endParaRPr>
             </a:p>
           </p:txBody>
         </p:sp>
@@ -33147,9 +32059,6 @@
           </a:bodyPr>
           <a:lstStyle/>
           <a:p>
-            <a:pPr lvl="0" algn="ctr">
-              <a:defRPr/>
-            </a:pPr>
             <a:r>
               <a:rPr lang="en-US" b="1" dirty="0">
                 <a:solidFill>
@@ -33159,23 +32068,12 @@
                 <a:ea typeface="Times New Roman" panose="02020603050405020304" pitchFamily="18" charset="0"/>
                 <a:cs typeface="Times New Roman" panose="02020603050405020304" pitchFamily="18" charset="0"/>
               </a:rPr>
-              <a:t>OHN2 : Augmentation de la création d'emplois inclusifs</a:t>
+              <a:t>HLO2 : Augmentation de la création inclusive d'emplois</a:t>
             </a:r>
-            <a:endParaRPr lang="pt-BR" b="1" dirty="0">
-              <a:solidFill>
-                <a:srgbClr val="FFFFFF"/>
-              </a:solidFill>
-              <a:latin typeface="Calibri" panose="020F0502020204030204" pitchFamily="34" charset="0"/>
-              <a:ea typeface="Times New Roman" panose="02020603050405020304" pitchFamily="18" charset="0"/>
-              <a:cs typeface="Times New Roman" panose="02020603050405020304" pitchFamily="18" charset="0"/>
-            </a:endParaRPr>
-          </a:p>
-          <a:p>
-            <a:pPr lvl="0" algn="ctr">
-              <a:defRPr/>
-            </a:pPr>
+          </a:p>
+          <a:p>
             <a:r>
-              <a:rPr lang="pt-BR" b="1" dirty="0">
+              <a:rPr lang="en-US" b="1" dirty="0">
                 <a:solidFill>
                   <a:srgbClr val="FFFFFF"/>
                 </a:solidFill>
@@ -33185,39 +32083,19 @@
               </a:rPr>
               <a:t> </a:t>
             </a:r>
-            <a:endParaRPr kumimoji="0" lang="en-US" sz="1200" b="0" i="0" u="none" strike="noStrike" kern="1200" cap="none" spc="0" normalizeH="0" baseline="0" noProof="0" dirty="0">
-              <a:ln>
-                <a:noFill/>
-              </a:ln>
-              <a:solidFill>
-                <a:prstClr val="white"/>
-              </a:solidFill>
-              <a:effectLst/>
-              <a:uLnTx/>
-              <a:uFillTx/>
-              <a:latin typeface="Calibri" panose="020F0502020204030204" pitchFamily="34" charset="0"/>
-              <a:ea typeface="Times New Roman" panose="02020603050405020304" pitchFamily="18" charset="0"/>
-              <a:cs typeface="Times New Roman" panose="02020603050405020304" pitchFamily="18" charset="0"/>
-            </a:endParaRPr>
-          </a:p>
-          <a:p>
-            <a:pPr lvl="0">
-              <a:defRPr/>
-            </a:pPr>
-            <a:endParaRPr kumimoji="0" lang="en-US" sz="1200" b="0" i="0" u="none" strike="noStrike" kern="1200" cap="none" spc="0" normalizeH="0" baseline="0" noProof="0" dirty="0">
-              <a:ln>
-                <a:noFill/>
-              </a:ln>
-              <a:solidFill>
-                <a:prstClr val="white"/>
-              </a:solidFill>
-              <a:effectLst/>
-              <a:uLnTx/>
-              <a:uFillTx/>
-              <a:latin typeface="Calibri" panose="020F0502020204030204" pitchFamily="34" charset="0"/>
-              <a:ea typeface="Times New Roman" panose="02020603050405020304" pitchFamily="18" charset="0"/>
-              <a:cs typeface="Times New Roman" panose="02020603050405020304" pitchFamily="18" charset="0"/>
-            </a:endParaRPr>
+          </a:p>
+          <a:p>
+            <a:r>
+              <a:rPr lang="en-US" b="1" dirty="0">
+                <a:solidFill>
+                  <a:srgbClr val="FFFFFF"/>
+                </a:solidFill>
+                <a:latin typeface="Calibri" panose="020F0502020204030204" pitchFamily="34" charset="0"/>
+                <a:ea typeface="Times New Roman" panose="02020603050405020304" pitchFamily="18" charset="0"/>
+                <a:cs typeface="Times New Roman" panose="02020603050405020304" pitchFamily="18" charset="0"/>
+              </a:rPr>
+              <a:t/>
+            </a:r>
           </a:p>
         </p:txBody>
       </p:sp>
@@ -33251,9 +32129,6 @@
           </a:bodyPr>
           <a:lstStyle/>
           <a:p>
-            <a:pPr lvl="0" algn="ctr">
-              <a:defRPr/>
-            </a:pPr>
             <a:r>
               <a:rPr lang="en-US" sz="1400" b="1" dirty="0">
                 <a:solidFill>
@@ -33267,9 +32142,6 @@
             </a:r>
           </a:p>
           <a:p>
-            <a:pPr lvl="0" algn="ctr">
-              <a:defRPr/>
-            </a:pPr>
             <a:r>
               <a:rPr lang="en-US" sz="1400" b="1" dirty="0">
                 <a:solidFill>
@@ -33279,22 +32151,8 @@
                 <a:ea typeface="Times New Roman" panose="02020603050405020304" pitchFamily="18" charset="0"/>
                 <a:cs typeface="Times New Roman" panose="02020603050405020304" pitchFamily="18" charset="0"/>
               </a:rPr>
-              <a:t>Renforcer la coordination, les politiques et les capacités pour une meilleure préparation et réponse aux catastrophes naturelles, pandémies et autres chocs multidimensionnels</a:t>
+              <a:t>Renforcer la coordination, les politiques et les capacités pour une meilleure préparation et une meilleure réponse aux catastrophes naturelles, aux pandémies et à d'autres chocs multidimensionnels</a:t>
             </a:r>
-            <a:endParaRPr kumimoji="0" lang="en-US" sz="1400" b="0" i="0" u="none" strike="noStrike" kern="1200" cap="none" spc="0" normalizeH="0" baseline="0" noProof="0" dirty="0">
-              <a:ln>
-                <a:noFill/>
-              </a:ln>
-              <a:solidFill>
-                <a:srgbClr val="FFFFFF"/>
-              </a:solidFill>
-              <a:effectLst/>
-              <a:uLnTx/>
-              <a:uFillTx/>
-              <a:latin typeface="Calibri" panose="020F0502020204030204" pitchFamily="34" charset="0"/>
-              <a:ea typeface="Times New Roman" panose="02020603050405020304" pitchFamily="18" charset="0"/>
-              <a:cs typeface="Times New Roman" panose="02020603050405020304" pitchFamily="18" charset="0"/>
-            </a:endParaRPr>
           </a:p>
         </p:txBody>
       </p:sp>
@@ -33328,9 +32186,6 @@
           </a:bodyPr>
           <a:lstStyle/>
           <a:p>
-            <a:pPr lvl="0" algn="ctr">
-              <a:defRPr/>
-            </a:pPr>
             <a:r>
               <a:rPr lang="en-US" sz="1400" b="1" dirty="0">
                 <a:solidFill>
@@ -33344,9 +32199,6 @@
             </a:r>
           </a:p>
           <a:p>
-            <a:pPr lvl="0" algn="ctr">
-              <a:defRPr/>
-            </a:pPr>
             <a:r>
               <a:rPr lang="en-US" sz="1400" b="1" dirty="0">
                 <a:solidFill>
@@ -33356,22 +32208,8 @@
                 <a:ea typeface="Times New Roman" panose="02020603050405020304" pitchFamily="18" charset="0"/>
                 <a:cs typeface="Times New Roman" panose="02020603050405020304" pitchFamily="18" charset="0"/>
               </a:rPr>
-              <a:t>Étendre des services abordables, fiables et résilients au climat pour améliorer l'accès des plus défavorisés et accélérer l'urbanisation durable et l'agglomération économique</a:t>
+              <a:t>Étendre des services abordables, fiables et résilients au climat pour l'accès des plus défavorisés et accélérer une urbanisation durable et l'agglomération économique</a:t>
             </a:r>
-            <a:endParaRPr kumimoji="0" lang="en-US" sz="1200" i="0" u="none" strike="noStrike" kern="1200" cap="none" spc="0" normalizeH="0" baseline="0" noProof="0" dirty="0">
-              <a:ln>
-                <a:noFill/>
-              </a:ln>
-              <a:solidFill>
-                <a:prstClr val="black"/>
-              </a:solidFill>
-              <a:effectLst/>
-              <a:uLnTx/>
-              <a:uFillTx/>
-              <a:latin typeface="Times New Roman" panose="02020603050405020304" pitchFamily="18" charset="0"/>
-              <a:ea typeface="Times New Roman" panose="02020603050405020304" pitchFamily="18" charset="0"/>
-              <a:cs typeface="+mn-cs"/>
-            </a:endParaRPr>
           </a:p>
         </p:txBody>
       </p:sp>
@@ -33424,22 +32262,6 @@
             </a:lvl1pPr>
           </a:lstStyle>
           <a:p>
-            <a:pPr algn="ctr"/>
-            <a:endParaRPr lang="en-US" b="1" dirty="0">
-              <a:latin typeface="Arial"/>
-              <a:cs typeface="Times New Roman"/>
-            </a:endParaRPr>
-          </a:p>
-          <a:p>
-            <a:pPr algn="ctr"/>
-            <a:r>
-              <a:rPr lang="en-US" b="1" dirty="0">
-                <a:latin typeface="Arial"/>
-                <a:cs typeface="Times New Roman"/>
-              </a:rPr>
-              <a:t>CPP 2023-2027 : Aspirations et objectifs</a:t>
-            </a:r>
-            <a:br/>
             <a:r>
               <a:rPr lang="en-US" b="1" dirty="0">
                 <a:latin typeface="Arial"/>
@@ -33447,7 +32269,18 @@
               </a:rPr>
               <a:t/>
             </a:r>
-            <a:br/>
+          </a:p>
+          <a:p>
+            <a:r>
+              <a:rPr lang="en-US" b="1" dirty="0">
+                <a:latin typeface="Arial"/>
+                <a:cs typeface="Times New Roman"/>
+              </a:rPr>
+              <a:t>CPF 2023-2027 : aspirations et objectifs
+</a:t>
+            </a:r>
+          </a:p>
+          <a:p>
             <a:r>
               <a:rPr lang="en-US" b="1" dirty="0">
                 <a:latin typeface="Arial"/>
@@ -33455,14 +32288,6 @@
               </a:rPr>
               <a:t/>
             </a:r>
-            <a:endParaRPr lang="pt" i="1" dirty="0">
-              <a:highlight>
-                <a:srgbClr val="000000">
-                  <a:alpha val="0"/>
-                </a:srgbClr>
-              </a:highlight>
-              <a:latin typeface="Arial"/>
-            </a:endParaRPr>
           </a:p>
         </p:txBody>
       </p:sp>
@@ -33494,9 +32319,8 @@
           <a:p>
             <a:r>
               <a:rPr lang="en-US"/>
-              <a:t>CPP 2023-2027. Version publique. Maputo, mai 2022.</a:t>
+              <a:t>CPF 2023-2027. Version publique. Maputo, mai 2022.</a:t>
             </a:r>
-            <a:endParaRPr lang="en-US" dirty="0"/>
           </a:p>
         </p:txBody>
       </p:sp>
@@ -33618,241 +32442,58 @@
           </a:bodyPr>
           <a:lstStyle/>
           <a:p>
-            <a:pPr marL="342900" indent="-342900" algn="just" rtl="0">
-              <a:lnSpc>
-                <a:spcPct val="100000"/>
-              </a:lnSpc>
-              <a:spcBef>
-                <a:spcPct val="0"/>
-              </a:spcBef>
-              <a:spcAft>
-                <a:spcPts val="600"/>
-              </a:spcAft>
-              <a:buFont typeface="+mj-lt"/>
-              <a:buAutoNum type="arabicPeriod"/>
-            </a:pPr>
             <a:r>
               <a:rPr lang="en-US" sz="1600" b="0" i="0" u="none" strike="noStrike" dirty="0">
                 <a:latin typeface="Arial"/>
                 <a:cs typeface="Times New Roman"/>
               </a:rPr>
-              <a:t>Dans le prolongement des enseignements du CLR, des recommandations de la mise à jour du SCD et des objectifs gouvernementaux tels qu'exposés dans le plan quinquennal 2020-24 et la révision en cours de la stratégie nationale de développement, le CPF proposé pour l'EX2023-2027 vise à contribuer à la transition du Mozambique vers une trajectoire de croissance </a:t>
+              <a:t>Conformément aux enseignements du CLR, aux recommandations de l'actualisation du SCD et aux cibles gouvernementales définies dans le plan quinquennal 2020-24 et dans la révision en cours de la stratégie nationale de développement, le CPF proposé pour les EB2023-2027 vise à contribuer à la transition du Mozambique vers une trajectoire de croissance plus verte, plus résiliente et plus inclusive.</a:t>
             </a:r>
-            <a:r>
-              <a:rPr lang="en-US" sz="1600" b="1" i="0" u="none" strike="noStrike" dirty="0">
-                <a:latin typeface="Arial"/>
-                <a:cs typeface="Times New Roman"/>
-              </a:rPr>
-              <a:t>plus verte,</a:t>
-            </a:r>
+          </a:p>
+          <a:p>
             <a:r>
               <a:rPr lang="en-US" sz="1600" b="0" i="0" u="none" strike="noStrike" dirty="0">
                 <a:latin typeface="Arial"/>
                 <a:cs typeface="Times New Roman"/>
               </a:rPr>
-              <a:t> </a:t>
+              <a:t/>
             </a:r>
+          </a:p>
+          <a:p>
             <a:r>
-              <a:rPr lang="en-US" sz="1600" b="1" i="0" u="none" strike="noStrike" dirty="0">
+              <a:rPr lang="en-US" sz="1600" b="0" i="0" u="none" strike="noStrike" dirty="0">
                 <a:latin typeface="Arial"/>
                 <a:cs typeface="Times New Roman"/>
               </a:rPr>
-              <a:t>plus résiliente et plus inclusive.</a:t>
+              <a:t>À cette fin, le CPF soutiendra les réformes et investissements du gouvernement susceptibles de contribuer aux résultats de haut niveau suivants :</a:t>
             </a:r>
           </a:p>
           <a:p>
-            <a:pPr marL="342900" indent="-342900" algn="just" rtl="0">
-              <a:lnSpc>
-                <a:spcPct val="100000"/>
-              </a:lnSpc>
-              <a:spcBef>
-                <a:spcPct val="0"/>
-              </a:spcBef>
-              <a:spcAft>
-                <a:spcPts val="600"/>
-              </a:spcAft>
-              <a:buFont typeface="+mj-lt"/>
-              <a:buAutoNum type="arabicPeriod"/>
-            </a:pPr>
-            <a:endParaRPr lang="en-US" sz="1600" b="1" dirty="0">
-              <a:latin typeface="+mn-lt"/>
-              <a:ea typeface="Calibri" panose="020F0502020204030204" pitchFamily="34" charset="0"/>
-              <a:cs typeface="Times New Roman"/>
-            </a:endParaRPr>
-          </a:p>
-          <a:p>
-            <a:pPr marL="342900" indent="-342900" algn="just" rtl="0">
-              <a:lnSpc>
-                <a:spcPct val="100000"/>
-              </a:lnSpc>
-              <a:spcBef>
-                <a:spcPct val="0"/>
-              </a:spcBef>
-              <a:spcAft>
-                <a:spcPts val="600"/>
-              </a:spcAft>
-              <a:buFont typeface="+mj-lt"/>
-              <a:buAutoNum type="arabicPeriod"/>
-            </a:pPr>
             <a:r>
               <a:rPr lang="en-US" sz="1600" b="0" i="0" u="none" strike="noStrike" dirty="0">
-                <a:highlight>
-                  <a:srgbClr val="000000">
-                    <a:alpha val="0"/>
-                  </a:srgbClr>
-                </a:highlight>
                 <a:latin typeface="Arial"/>
-                <a:ea typeface="Calibri"/>
                 <a:cs typeface="Times New Roman"/>
               </a:rPr>
-              <a:t>À cet effet, le CPP appuiera les réformes et investissements gouvernementaux susceptibles de contribuer aux résultats de haut niveau suivants :</a:t>
+              <a:t>Résultat 1 : Des institutions plus inclusives grâce à (i) une meilleure gestion macroéconomique pour une meilleure capacité de dépense et un risque souverain plus faible ; (ii) l'accroissement de l'efficacité du secteur public ; et (iii) le renforcement de la préparation et de la réponse aux chocs multidimensionnels.</a:t>
             </a:r>
           </a:p>
           <a:p>
-            <a:pPr lvl="3" algn="just">
-              <a:lnSpc>
-                <a:spcPct val="100000"/>
-              </a:lnSpc>
-              <a:spcBef>
-                <a:spcPct val="0"/>
-              </a:spcBef>
-              <a:spcAft>
-                <a:spcPts val="600"/>
-              </a:spcAft>
-            </a:pPr>
             <a:r>
-              <a:rPr lang="en-US" sz="1600" b="1" i="0" u="none" strike="noStrike" dirty="0">
-                <a:highlight>
-                  <a:srgbClr val="000000">
-                    <a:alpha val="0"/>
-                  </a:srgbClr>
-                </a:highlight>
+              <a:rPr lang="en-US" sz="1600" b="0" i="0" u="none" strike="noStrike" dirty="0">
                 <a:latin typeface="Arial"/>
-                <a:ea typeface="Calibri"/>
                 <a:cs typeface="Times New Roman"/>
               </a:rPr>
-              <a:t>Résultat 1 : Des institutions plus inclusives grâce à </a:t>
+              <a:t>Résultat 2 : Une création d'emplois inclusive accrue (accélération du processus de transformation structurelle), ce qui requiert à son tour (i) de permettre une croissance durable dans des secteurs de ressources naturelles sélectionnés ; (ii) de promouvoir la croissance de la productivité dans des industries intensives sélectionnées ; et (iii) l'expansion des services d'infrastructure et d'urbanisation.</a:t>
             </a:r>
+          </a:p>
+          <a:p>
             <a:r>
               <a:rPr lang="en-US" sz="1600" b="0" i="0" u="none" strike="noStrike" dirty="0">
-                <a:highlight>
-                  <a:srgbClr val="000000">
-                    <a:alpha val="0"/>
-                  </a:srgbClr>
-                </a:highlight>
                 <a:latin typeface="Arial"/>
-                <a:ea typeface="Calibri"/>
                 <a:cs typeface="Times New Roman"/>
               </a:rPr>
-              <a:t>(i) une meilleure gestion macroéconomique pour améliorer les capacités de dépenses et réduire le risque souverain ; (ii) le renforcement de l'efficacité du secteur public ; et (iii) le renforcement de la préparation et de la réponse aux chocs multidimensionnels.</a:t>
+              <a:t>Résultat 3 : Améliorer l'accumulation de capital humain et l'autonomisation des femmes grâce à (i) de meilleurs résultats en santé et en éducation ; (ii) une couverture plus efficace et efficiente des services sociaux intégrés et durables ; et (iii) un meilleur accès aux services de prévention des grossesses chez les adolescentes et de promotion de la participation économique des femmes.</a:t>
             </a:r>
-          </a:p>
-          <a:p>
-            <a:pPr lvl="3" algn="just">
-              <a:lnSpc>
-                <a:spcPct val="100000"/>
-              </a:lnSpc>
-              <a:spcBef>
-                <a:spcPct val="0"/>
-              </a:spcBef>
-              <a:spcAft>
-                <a:spcPts val="600"/>
-              </a:spcAft>
-            </a:pPr>
-            <a:r>
-              <a:rPr lang="en-US" sz="1600" b="1" i="0" u="none" strike="noStrike" dirty="0">
-                <a:highlight>
-                  <a:srgbClr val="000000">
-                    <a:alpha val="0"/>
-                  </a:srgbClr>
-                </a:highlight>
-                <a:latin typeface="Arial"/>
-                <a:ea typeface="Calibri"/>
-                <a:cs typeface="Times New Roman"/>
-              </a:rPr>
-              <a:t>Résultat 2 : Augmentation de la création d'emplois inclusifs </a:t>
-            </a:r>
-            <a:r>
-              <a:rPr lang="en-US" sz="1600" b="0" i="0" u="none" strike="noStrike" dirty="0">
-                <a:highlight>
-                  <a:srgbClr val="000000">
-                    <a:alpha val="0"/>
-                  </a:srgbClr>
-                </a:highlight>
-                <a:latin typeface="Arial"/>
-                <a:ea typeface="Calibri"/>
-                <a:cs typeface="Times New Roman"/>
-              </a:rPr>
-              <a:t>(accélération du processus de transformation structurelle) qui requiert à son tour (i) de favoriser une croissance durable dans certains secteurs de ressources naturelles ; (ii) de promouvoir la croissance de la productivité dans certaines industries à forte intensité de main-d'œuvre ; et (iii) l'expansion des services d'infrastructure et d'urbanisation.</a:t>
-            </a:r>
-          </a:p>
-          <a:p>
-            <a:pPr lvl="3" algn="just">
-              <a:lnSpc>
-                <a:spcPct val="100000"/>
-              </a:lnSpc>
-              <a:spcBef>
-                <a:spcPct val="0"/>
-              </a:spcBef>
-              <a:spcAft>
-                <a:spcPts val="600"/>
-              </a:spcAft>
-            </a:pPr>
-            <a:r>
-              <a:rPr lang="en-US" sz="1600" b="1" i="0" u="none" strike="noStrike" dirty="0">
-                <a:highlight>
-                  <a:srgbClr val="000000">
-                    <a:alpha val="0"/>
-                  </a:srgbClr>
-                </a:highlight>
-                <a:latin typeface="Arial"/>
-                <a:ea typeface="Calibri"/>
-                <a:cs typeface="Times New Roman"/>
-              </a:rPr>
-              <a:t>Résultat 3 : Améliorer l'accumulation de capital humain</a:t>
-            </a:r>
-            <a:r>
-              <a:rPr lang="en-US" sz="1600" b="0" i="0" u="none" strike="noStrike" dirty="0">
-                <a:highlight>
-                  <a:srgbClr val="000000">
-                    <a:alpha val="0"/>
-                  </a:srgbClr>
-                </a:highlight>
-                <a:latin typeface="Arial"/>
-                <a:ea typeface="Calibri"/>
-                <a:cs typeface="Times New Roman"/>
-              </a:rPr>
-              <a:t> </a:t>
-            </a:r>
-            <a:r>
-              <a:rPr lang="en-US" sz="1600" b="1" i="0" u="none" strike="noStrike" dirty="0">
-                <a:highlight>
-                  <a:srgbClr val="000000">
-                    <a:alpha val="0"/>
-                  </a:srgbClr>
-                </a:highlight>
-                <a:latin typeface="Arial"/>
-                <a:ea typeface="Calibri"/>
-                <a:cs typeface="Times New Roman"/>
-              </a:rPr>
-              <a:t>et l'autonomisation des femmes grâce à </a:t>
-            </a:r>
-            <a:r>
-              <a:rPr lang="en-US" sz="1600" b="0" i="0" u="none" strike="noStrike" dirty="0">
-                <a:highlight>
-                  <a:srgbClr val="000000">
-                    <a:alpha val="0"/>
-                  </a:srgbClr>
-                </a:highlight>
-                <a:latin typeface="Arial"/>
-                <a:ea typeface="Calibri"/>
-                <a:cs typeface="Times New Roman"/>
-              </a:rPr>
-              <a:t>(i) de meilleurs résultats en matière de santé et d'éducation ; (ii) une couverture plus efficiente et efficace des services sociaux intégrés et durables ; et (iii) un meilleur accès aux services pour prévenir les grossesses précoces et promouvoir la participation économique des femmes.</a:t>
-            </a:r>
-            <a:endParaRPr lang="en-US" sz="1600" dirty="0">
-              <a:latin typeface="+mn-lt"/>
-            </a:endParaRPr>
           </a:p>
         </p:txBody>
       </p:sp>
@@ -33905,22 +32546,6 @@
             </a:lvl1pPr>
           </a:lstStyle>
           <a:p>
-            <a:pPr algn="ctr"/>
-            <a:endParaRPr lang="en-US" b="1" dirty="0">
-              <a:latin typeface="Arial"/>
-              <a:cs typeface="Times New Roman"/>
-            </a:endParaRPr>
-          </a:p>
-          <a:p>
-            <a:pPr algn="ctr"/>
-            <a:r>
-              <a:rPr lang="en-US" b="1" dirty="0">
-                <a:latin typeface="Arial"/>
-                <a:cs typeface="Times New Roman"/>
-              </a:rPr>
-              <a:t>Proposition CPP 2023-2027 : Objectifs et aspirations  </a:t>
-            </a:r>
-            <a:br/>
             <a:r>
               <a:rPr lang="en-US" b="1" dirty="0">
                 <a:latin typeface="Arial"/>
@@ -33928,7 +32553,18 @@
               </a:rPr>
               <a:t/>
             </a:r>
-            <a:br/>
+          </a:p>
+          <a:p>
+            <a:r>
+              <a:rPr lang="en-US" b="1" dirty="0">
+                <a:latin typeface="Arial"/>
+                <a:cs typeface="Times New Roman"/>
+              </a:rPr>
+              <a:t>Proposition de CPF 2023-2027 : objectifs et aspirations  
+</a:t>
+            </a:r>
+          </a:p>
+          <a:p>
             <a:r>
               <a:rPr lang="en-US" b="1" dirty="0">
                 <a:latin typeface="Arial"/>
@@ -33936,14 +32572,6 @@
               </a:rPr>
               <a:t/>
             </a:r>
-            <a:endParaRPr lang="pt" sz="2000" i="1" dirty="0">
-              <a:highlight>
-                <a:srgbClr val="000000">
-                  <a:alpha val="0"/>
-                </a:srgbClr>
-              </a:highlight>
-              <a:latin typeface="Arial"/>
-            </a:endParaRPr>
           </a:p>
         </p:txBody>
       </p:sp>
@@ -33970,9 +32598,8 @@
           <a:p>
             <a:r>
               <a:rPr lang="en-US"/>
-              <a:t>CPP 2023-2027. Version publique. Maputo, mai 2022.</a:t>
+              <a:t>CPF 2023-2027. Version publique. Maputo, mai 2022.</a:t>
             </a:r>
-            <a:endParaRPr lang="en-US" dirty="0"/>
           </a:p>
         </p:txBody>
       </p:sp>
@@ -34172,14 +32799,6 @@
           </a:bodyPr>
           <a:lstStyle/>
           <a:p>
-            <a:pPr lvl="0" algn="ctr" eaLnBrk="0" fontAlgn="base" hangingPunct="0">
-              <a:spcBef>
-                <a:spcPct val="0"/>
-              </a:spcBef>
-              <a:spcAft>
-                <a:spcPct val="0"/>
-              </a:spcAft>
-            </a:pPr>
             <a:r>
               <a:rPr lang="en-US" sz="1000" b="1">
                 <a:solidFill>
@@ -34189,9 +32808,11 @@
                 <a:ea typeface="Times New Roman"/>
                 <a:cs typeface="Times New Roman"/>
               </a:rPr>
-              <a:t>Programmes GOUVERNEMENTAUX</a:t>
+              <a:t>Programmes du GOUVERNEMENT
+</a:t>
             </a:r>
-            <a:br/>
+          </a:p>
+          <a:p>
             <a:r>
               <a:rPr lang="en-US" sz="1000" b="1">
                 <a:solidFill>
@@ -34201,9 +32822,11 @@
                 <a:ea typeface="Times New Roman"/>
                 <a:cs typeface="Times New Roman"/>
               </a:rPr>
-              <a:t>(Piliers ENDE)</a:t>
+              <a:t>(Piliers de l'ENDE)
+</a:t>
             </a:r>
-            <a:br/>
+          </a:p>
+          <a:p>
             <a:r>
               <a:rPr lang="en-US" sz="1000" b="1">
                 <a:solidFill>
@@ -34215,40 +32838,6 @@
               </a:rPr>
               <a:t/>
             </a:r>
-            <a:br/>
-            <a:r>
-              <a:rPr lang="en-US" sz="1000" b="1">
-                <a:solidFill>
-                  <a:srgbClr val="000000"/>
-                </a:solidFill>
-                <a:latin typeface="Calibri"/>
-                <a:ea typeface="Times New Roman"/>
-                <a:cs typeface="Times New Roman"/>
-              </a:rPr>
-              <a:t/>
-            </a:r>
-            <a:br/>
-            <a:r>
-              <a:rPr lang="en-US" sz="1000" b="1">
-                <a:solidFill>
-                  <a:srgbClr val="000000"/>
-                </a:solidFill>
-                <a:latin typeface="Calibri"/>
-                <a:ea typeface="Times New Roman"/>
-                <a:cs typeface="Times New Roman"/>
-              </a:rPr>
-              <a:t/>
-            </a:r>
-            <a:endParaRPr kumimoji="0" lang="en-US" altLang="zh-CN" sz="1800" b="0" i="0" u="none" strike="noStrike" cap="none" normalizeH="0" baseline="0" dirty="0">
-              <a:ln>
-                <a:noFill/>
-              </a:ln>
-              <a:solidFill>
-                <a:schemeClr val="tx1"/>
-              </a:solidFill>
-              <a:effectLst/>
-              <a:latin typeface="Arial" panose="020B0604020202020204" pitchFamily="34" charset="0"/>
-            </a:endParaRPr>
           </a:p>
         </p:txBody>
       </p:sp>
@@ -34293,32 +32882,28 @@
           </a:bodyPr>
           <a:lstStyle/>
           <a:p>
-            <a:pPr lvl="0" algn="ctr" eaLnBrk="0" fontAlgn="base" hangingPunct="0">
-              <a:spcBef>
-                <a:spcPct val="0"/>
-              </a:spcBef>
-              <a:spcAft>
-                <a:spcPct val="0"/>
-              </a:spcAft>
-            </a:pPr>
             <a:r>
               <a:rPr lang="en-US" altLang="zh-CN" sz="900" b="1" dirty="0">
                 <a:latin typeface="Calibri" panose="020F0502020204030204" pitchFamily="34" charset="0"/>
                 <a:ea typeface="Times New Roman" panose="02020603050405020304" pitchFamily="18" charset="0"/>
                 <a:cs typeface="Times New Roman" panose="02020603050405020304" pitchFamily="18" charset="0"/>
               </a:rPr>
-              <a:t> </a:t>
+              <a:t> 
+</a:t>
             </a:r>
-            <a:br/>
+          </a:p>
+          <a:p>
             <a:r>
               <a:rPr lang="en-US" altLang="zh-CN" sz="900" b="1" dirty="0">
                 <a:latin typeface="Calibri" panose="020F0502020204030204" pitchFamily="34" charset="0"/>
                 <a:ea typeface="Times New Roman" panose="02020603050405020304" pitchFamily="18" charset="0"/>
                 <a:cs typeface="Times New Roman" panose="02020603050405020304" pitchFamily="18" charset="0"/>
               </a:rPr>
-              <a:t>Transformation sociale</a:t>
+              <a:t>Transformation sociale
+</a:t>
             </a:r>
-            <a:br/>
+          </a:p>
+          <a:p>
             <a:r>
               <a:rPr lang="en-US" altLang="zh-CN" sz="900" b="1" dirty="0">
                 <a:latin typeface="Calibri" panose="020F0502020204030204" pitchFamily="34" charset="0"/>
@@ -34327,34 +32912,6 @@
               </a:rPr>
               <a:t/>
             </a:r>
-            <a:br/>
-            <a:r>
-              <a:rPr lang="en-US" altLang="zh-CN" sz="900" b="1" dirty="0">
-                <a:latin typeface="Calibri" panose="020F0502020204030204" pitchFamily="34" charset="0"/>
-                <a:ea typeface="Times New Roman" panose="02020603050405020304" pitchFamily="18" charset="0"/>
-                <a:cs typeface="Times New Roman" panose="02020603050405020304" pitchFamily="18" charset="0"/>
-              </a:rPr>
-              <a:t/>
-            </a:r>
-            <a:br/>
-            <a:r>
-              <a:rPr lang="en-US" altLang="zh-CN" sz="900" b="1" dirty="0">
-                <a:latin typeface="Calibri" panose="020F0502020204030204" pitchFamily="34" charset="0"/>
-                <a:ea typeface="Times New Roman" panose="02020603050405020304" pitchFamily="18" charset="0"/>
-                <a:cs typeface="Times New Roman" panose="02020603050405020304" pitchFamily="18" charset="0"/>
-              </a:rPr>
-              <a:t/>
-            </a:r>
-            <a:endParaRPr kumimoji="0" lang="en-US" altLang="zh-CN" sz="1800" b="0" i="0" u="none" strike="noStrike" cap="none" normalizeH="0" baseline="0" dirty="0">
-              <a:ln>
-                <a:noFill/>
-              </a:ln>
-              <a:solidFill>
-                <a:schemeClr val="tx1"/>
-              </a:solidFill>
-              <a:effectLst/>
-              <a:latin typeface="Arial" panose="020B0604020202020204" pitchFamily="34" charset="0"/>
-            </a:endParaRPr>
           </a:p>
         </p:txBody>
       </p:sp>
@@ -34399,14 +32956,28 @@
           </a:bodyPr>
           <a:lstStyle/>
           <a:p>
-            <a:pPr lvl="0" algn="ctr" eaLnBrk="0" fontAlgn="base" hangingPunct="0">
-              <a:spcBef>
-                <a:spcPct val="0"/>
-              </a:spcBef>
-              <a:spcAft>
-                <a:spcPct val="0"/>
-              </a:spcAft>
-            </a:pPr>
+            <a:r>
+              <a:rPr lang="en-US" altLang="zh-CN" sz="900" b="1" dirty="0">
+                <a:latin typeface="Calibri" pitchFamily="34" charset="0"/>
+                <a:ea typeface="Times New Roman" panose="02020603050405020304" pitchFamily="18" charset="0"/>
+                <a:cs typeface="Times New Roman" panose="02020603050405020304" pitchFamily="18" charset="0"/>
+              </a:rPr>
+              <a:t>
+</a:t>
+            </a:r>
+          </a:p>
+          <a:p>
+            <a:r>
+              <a:rPr lang="en-US" altLang="zh-CN" sz="900" b="1" dirty="0">
+                <a:latin typeface="Calibri" pitchFamily="34" charset="0"/>
+                <a:ea typeface="Times New Roman" panose="02020603050405020304" pitchFamily="18" charset="0"/>
+                <a:cs typeface="Times New Roman" panose="02020603050405020304" pitchFamily="18" charset="0"/>
+              </a:rPr>
+              <a:t>Transformation économique
+</a:t>
+            </a:r>
+          </a:p>
+          <a:p>
             <a:r>
               <a:rPr lang="en-US" altLang="zh-CN" sz="900" b="1" dirty="0">
                 <a:latin typeface="Calibri" pitchFamily="34" charset="0"/>
@@ -34415,52 +32986,6 @@
               </a:rPr>
               <a:t/>
             </a:r>
-            <a:br/>
-            <a:r>
-              <a:rPr lang="en-US" altLang="zh-CN" sz="900" b="1" dirty="0">
-                <a:latin typeface="Calibri" pitchFamily="34" charset="0"/>
-                <a:ea typeface="Times New Roman" panose="02020603050405020304" pitchFamily="18" charset="0"/>
-                <a:cs typeface="Times New Roman" panose="02020603050405020304" pitchFamily="18" charset="0"/>
-              </a:rPr>
-              <a:t>Transformation économique</a:t>
-            </a:r>
-            <a:br/>
-            <a:r>
-              <a:rPr lang="en-US" altLang="zh-CN" sz="900" b="1" dirty="0">
-                <a:latin typeface="Calibri" pitchFamily="34" charset="0"/>
-                <a:ea typeface="Times New Roman" panose="02020603050405020304" pitchFamily="18" charset="0"/>
-                <a:cs typeface="Times New Roman" panose="02020603050405020304" pitchFamily="18" charset="0"/>
-              </a:rPr>
-              <a:t/>
-            </a:r>
-            <a:br/>
-            <a:r>
-              <a:rPr lang="en-US" altLang="zh-CN" sz="900" b="1" dirty="0">
-                <a:latin typeface="Calibri" pitchFamily="34" charset="0"/>
-                <a:ea typeface="Times New Roman" panose="02020603050405020304" pitchFamily="18" charset="0"/>
-                <a:cs typeface="Times New Roman" panose="02020603050405020304" pitchFamily="18" charset="0"/>
-              </a:rPr>
-              <a:t/>
-            </a:r>
-            <a:br/>
-            <a:r>
-              <a:rPr lang="en-US" altLang="zh-CN" sz="900" b="1" dirty="0">
-                <a:latin typeface="Calibri" pitchFamily="34" charset="0"/>
-                <a:ea typeface="Times New Roman" panose="02020603050405020304" pitchFamily="18" charset="0"/>
-                <a:cs typeface="Times New Roman" panose="02020603050405020304" pitchFamily="18" charset="0"/>
-              </a:rPr>
-              <a:t/>
-            </a:r>
-            <a:endParaRPr kumimoji="0" lang="en-US" altLang="zh-CN" sz="1800" b="0" i="0" u="none" strike="noStrike" cap="none" normalizeH="0" baseline="0" dirty="0">
-              <a:ln>
-                <a:noFill/>
-              </a:ln>
-              <a:solidFill>
-                <a:schemeClr val="tx1"/>
-              </a:solidFill>
-              <a:effectLst/>
-              <a:latin typeface="Arial" panose="020B0604020202020204" pitchFamily="34" charset="0"/>
-            </a:endParaRPr>
           </a:p>
         </p:txBody>
       </p:sp>
@@ -34505,14 +33030,28 @@
           </a:bodyPr>
           <a:lstStyle/>
           <a:p>
-            <a:pPr lvl="0" algn="ctr" eaLnBrk="0" fontAlgn="base" hangingPunct="0">
-              <a:spcBef>
-                <a:spcPct val="0"/>
-              </a:spcBef>
-              <a:spcAft>
-                <a:spcPct val="0"/>
-              </a:spcAft>
-            </a:pPr>
+            <a:r>
+              <a:rPr lang="en-US" altLang="zh-CN" sz="900" b="1" dirty="0">
+                <a:latin typeface="Calibri" panose="020F0502020204030204" pitchFamily="34" charset="0"/>
+                <a:ea typeface="Times New Roman" panose="02020603050405020304" pitchFamily="18" charset="0"/>
+                <a:cs typeface="Times New Roman" panose="02020603050405020304" pitchFamily="18" charset="0"/>
+              </a:rPr>
+              <a:t>
+</a:t>
+            </a:r>
+          </a:p>
+          <a:p>
+            <a:r>
+              <a:rPr lang="en-US" altLang="zh-CN" sz="900" b="1" dirty="0">
+                <a:latin typeface="Calibri" panose="020F0502020204030204" pitchFamily="34" charset="0"/>
+                <a:ea typeface="Times New Roman" panose="02020603050405020304" pitchFamily="18" charset="0"/>
+                <a:cs typeface="Times New Roman" panose="02020603050405020304" pitchFamily="18" charset="0"/>
+              </a:rPr>
+              <a:t>Gouvernance
+</a:t>
+            </a:r>
+          </a:p>
+          <a:p>
             <a:r>
               <a:rPr lang="en-US" altLang="zh-CN" sz="900" b="1" dirty="0">
                 <a:latin typeface="Calibri" panose="020F0502020204030204" pitchFamily="34" charset="0"/>
@@ -34521,52 +33060,6 @@
               </a:rPr>
               <a:t/>
             </a:r>
-            <a:br/>
-            <a:r>
-              <a:rPr lang="en-US" altLang="zh-CN" sz="900" b="1" dirty="0">
-                <a:latin typeface="Calibri" panose="020F0502020204030204" pitchFamily="34" charset="0"/>
-                <a:ea typeface="Times New Roman" panose="02020603050405020304" pitchFamily="18" charset="0"/>
-                <a:cs typeface="Times New Roman" panose="02020603050405020304" pitchFamily="18" charset="0"/>
-              </a:rPr>
-              <a:t>Gouvernance</a:t>
-            </a:r>
-            <a:br/>
-            <a:r>
-              <a:rPr lang="en-US" altLang="zh-CN" sz="900" b="1" dirty="0">
-                <a:latin typeface="Calibri" panose="020F0502020204030204" pitchFamily="34" charset="0"/>
-                <a:ea typeface="Times New Roman" panose="02020603050405020304" pitchFamily="18" charset="0"/>
-                <a:cs typeface="Times New Roman" panose="02020603050405020304" pitchFamily="18" charset="0"/>
-              </a:rPr>
-              <a:t/>
-            </a:r>
-            <a:br/>
-            <a:r>
-              <a:rPr lang="en-US" altLang="zh-CN" sz="900" b="1" dirty="0">
-                <a:latin typeface="Calibri" panose="020F0502020204030204" pitchFamily="34" charset="0"/>
-                <a:ea typeface="Times New Roman" panose="02020603050405020304" pitchFamily="18" charset="0"/>
-                <a:cs typeface="Times New Roman" panose="02020603050405020304" pitchFamily="18" charset="0"/>
-              </a:rPr>
-              <a:t/>
-            </a:r>
-            <a:br/>
-            <a:r>
-              <a:rPr lang="en-US" altLang="zh-CN" sz="900" b="1" dirty="0">
-                <a:latin typeface="Calibri" panose="020F0502020204030204" pitchFamily="34" charset="0"/>
-                <a:ea typeface="Times New Roman" panose="02020603050405020304" pitchFamily="18" charset="0"/>
-                <a:cs typeface="Times New Roman" panose="02020603050405020304" pitchFamily="18" charset="0"/>
-              </a:rPr>
-              <a:t/>
-            </a:r>
-            <a:endParaRPr kumimoji="0" lang="en-US" altLang="zh-CN" sz="1800" b="0" i="0" u="none" strike="noStrike" cap="none" normalizeH="0" baseline="0" dirty="0">
-              <a:ln>
-                <a:noFill/>
-              </a:ln>
-              <a:solidFill>
-                <a:schemeClr val="tx1"/>
-              </a:solidFill>
-              <a:effectLst/>
-              <a:latin typeface="Arial" panose="020B0604020202020204" pitchFamily="34" charset="0"/>
-            </a:endParaRPr>
           </a:p>
         </p:txBody>
       </p:sp>
@@ -34611,14 +33104,6 @@
           </a:bodyPr>
           <a:lstStyle/>
           <a:p>
-            <a:pPr lvl="0" algn="ctr" eaLnBrk="0" fontAlgn="base" hangingPunct="0">
-              <a:spcBef>
-                <a:spcPct val="0"/>
-              </a:spcBef>
-              <a:spcAft>
-                <a:spcPct val="0"/>
-              </a:spcAft>
-            </a:pPr>
             <a:r>
               <a:rPr lang="en-US" sz="900" b="1" dirty="0">
                 <a:solidFill>
@@ -34628,9 +33113,11 @@
                 <a:ea typeface="Times New Roman"/>
                 <a:cs typeface="Times New Roman"/>
               </a:rPr>
-              <a:t> Environnement/Ressources naturelles (économie circulaire)</a:t>
+              <a:t> Environnement/Ressources naturelles (économie circulaire)
+</a:t>
             </a:r>
-            <a:br/>
+          </a:p>
+          <a:p>
             <a:r>
               <a:rPr lang="en-US" sz="900" b="1" dirty="0">
                 <a:solidFill>
@@ -34642,28 +33129,6 @@
               </a:rPr>
               <a:t/>
             </a:r>
-            <a:br/>
-            <a:r>
-              <a:rPr lang="en-US" sz="900" b="1" dirty="0">
-                <a:solidFill>
-                  <a:srgbClr val="000000"/>
-                </a:solidFill>
-                <a:latin typeface="Calibri"/>
-                <a:ea typeface="Times New Roman"/>
-                <a:cs typeface="Times New Roman"/>
-              </a:rPr>
-              <a:t/>
-            </a:r>
-            <a:endParaRPr kumimoji="0" lang="en-US" altLang="zh-CN" sz="1800" b="0" i="0" u="none" strike="noStrike" cap="none" normalizeH="0" baseline="0" dirty="0">
-              <a:ln>
-                <a:noFill/>
-              </a:ln>
-              <a:solidFill>
-                <a:schemeClr val="tx1"/>
-              </a:solidFill>
-              <a:effectLst/>
-              <a:latin typeface="Arial" panose="020B0604020202020204" pitchFamily="34" charset="0"/>
-            </a:endParaRPr>
           </a:p>
         </p:txBody>
       </p:sp>
@@ -34708,21 +33173,6 @@
           </a:bodyPr>
           <a:lstStyle/>
           <a:p>
-            <a:pPr marL="0" marR="0" lvl="0" indent="0" algn="ctr" defTabSz="914400" rtl="0" eaLnBrk="0" fontAlgn="base" latinLnBrk="0" hangingPunct="0">
-              <a:lnSpc>
-                <a:spcPct val="100000"/>
-              </a:lnSpc>
-              <a:spcBef>
-                <a:spcPct val="0"/>
-              </a:spcBef>
-              <a:spcAft>
-                <a:spcPct val="0"/>
-              </a:spcAft>
-              <a:buClrTx/>
-              <a:buSzTx/>
-              <a:buFontTx/>
-              <a:buNone/>
-            </a:pPr>
             <a:r>
               <a:rPr kumimoji="0" lang="pt" sz="900" b="1" i="0" u="none" strike="noStrike" cap="none" normalizeH="0" baseline="0" dirty="0">
                 <a:solidFill>
@@ -34737,18 +33187,8 @@
                 <a:ea typeface="Times New Roman"/>
                 <a:cs typeface="Times New Roman"/>
               </a:rPr>
-              <a:t>PRIORITÉS DE LA MISE À JOUR DU DSP DE LA BM</a:t>
+              <a:t>PRIORITÉS DE L'ACTUALISATION DU SCD DE LA BM </a:t>
             </a:r>
-            <a:endParaRPr kumimoji="0" lang="en-US" altLang="zh-CN" sz="1600" b="0" i="0" u="none" strike="noStrike" cap="none" normalizeH="0" baseline="0" dirty="0">
-              <a:ln>
-                <a:noFill/>
-              </a:ln>
-              <a:solidFill>
-                <a:schemeClr val="tx1"/>
-              </a:solidFill>
-              <a:effectLst/>
-              <a:latin typeface="Arial" panose="020B0604020202020204" pitchFamily="34" charset="0"/>
-            </a:endParaRPr>
           </a:p>
         </p:txBody>
       </p:sp>
@@ -34793,21 +33233,6 @@
           </a:bodyPr>
           <a:lstStyle/>
           <a:p>
-            <a:pPr marL="0" marR="0" lvl="0" indent="0" algn="ctr" defTabSz="914400" rtl="0" eaLnBrk="0" fontAlgn="base" latinLnBrk="0" hangingPunct="0">
-              <a:lnSpc>
-                <a:spcPct val="100000"/>
-              </a:lnSpc>
-              <a:spcBef>
-                <a:spcPct val="0"/>
-              </a:spcBef>
-              <a:spcAft>
-                <a:spcPct val="0"/>
-              </a:spcAft>
-              <a:buClrTx/>
-              <a:buSzTx/>
-              <a:buFontTx/>
-              <a:buNone/>
-            </a:pPr>
             <a:r>
               <a:rPr kumimoji="0" lang="pt" sz="1000" b="1" i="0" u="none" strike="noStrike" cap="none" normalizeH="0" baseline="0" dirty="0">
                 <a:solidFill>
@@ -34822,18 +33247,8 @@
                 <a:ea typeface="Times New Roman"/>
                 <a:cs typeface="Times New Roman"/>
               </a:rPr>
-              <a:t>OBJECTIFS DU CPP DU GBM</a:t>
+              <a:t>OBJECTIFS DU CPF DU GBM</a:t>
             </a:r>
-            <a:endParaRPr kumimoji="0" lang="en-US" altLang="zh-CN" sz="1800" b="0" i="0" u="none" strike="noStrike" cap="none" normalizeH="0" baseline="0" dirty="0">
-              <a:ln>
-                <a:noFill/>
-              </a:ln>
-              <a:solidFill>
-                <a:schemeClr val="tx1"/>
-              </a:solidFill>
-              <a:effectLst/>
-              <a:latin typeface="Arial" panose="020B0604020202020204" pitchFamily="34" charset="0"/>
-            </a:endParaRPr>
           </a:p>
         </p:txBody>
       </p:sp>
@@ -34878,14 +33293,6 @@
           </a:bodyPr>
           <a:lstStyle/>
           <a:p>
-            <a:pPr lvl="0" algn="ctr" eaLnBrk="0" fontAlgn="base" hangingPunct="0">
-              <a:spcBef>
-                <a:spcPct val="0"/>
-              </a:spcBef>
-              <a:spcAft>
-                <a:spcPct val="0"/>
-              </a:spcAft>
-            </a:pPr>
             <a:r>
               <a:rPr lang="en-US" sz="1000" b="1" dirty="0">
                 <a:solidFill>
@@ -34895,9 +33302,11 @@
                 <a:ea typeface="Times New Roman"/>
                 <a:cs typeface="Times New Roman"/>
               </a:rPr>
-              <a:t>OBJECTIFS DE HAUT NIVEAU (OHN)</a:t>
+              <a:t>OBJECTIFS DE HAUT NIVEAU (HLO)
+</a:t>
             </a:r>
-            <a:br/>
+          </a:p>
+          <a:p>
             <a:r>
               <a:rPr lang="en-US" sz="1000" b="1" dirty="0">
                 <a:solidFill>
@@ -34909,28 +33318,6 @@
               </a:rPr>
               <a:t/>
             </a:r>
-            <a:br/>
-            <a:r>
-              <a:rPr lang="en-US" sz="1000" b="1" dirty="0">
-                <a:solidFill>
-                  <a:srgbClr val="000000"/>
-                </a:solidFill>
-                <a:latin typeface="Calibri"/>
-                <a:ea typeface="Times New Roman"/>
-                <a:cs typeface="Times New Roman"/>
-              </a:rPr>
-              <a:t/>
-            </a:r>
-            <a:endParaRPr kumimoji="0" lang="en-US" altLang="zh-CN" sz="1800" b="0" i="0" u="none" strike="noStrike" cap="none" normalizeH="0" baseline="0" dirty="0">
-              <a:ln>
-                <a:noFill/>
-              </a:ln>
-              <a:solidFill>
-                <a:schemeClr val="tx1"/>
-              </a:solidFill>
-              <a:effectLst/>
-              <a:latin typeface="Arial" panose="020B0604020202020204" pitchFamily="34" charset="0"/>
-            </a:endParaRPr>
           </a:p>
         </p:txBody>
       </p:sp>
@@ -34975,55 +33362,6 @@
           </a:bodyPr>
           <a:lstStyle/>
           <a:p>
-            <a:pPr marL="0" marR="0" lvl="0" indent="0" algn="ctr" defTabSz="914400" rtl="0" eaLnBrk="0" fontAlgn="base" latinLnBrk="0" hangingPunct="0">
-              <a:lnSpc>
-                <a:spcPct val="100000"/>
-              </a:lnSpc>
-              <a:spcBef>
-                <a:spcPct val="0"/>
-              </a:spcBef>
-              <a:spcAft>
-                <a:spcPct val="0"/>
-              </a:spcAft>
-              <a:buClrTx/>
-              <a:buSzTx/>
-              <a:buFontTx/>
-              <a:buNone/>
-            </a:pPr>
-            <a:endParaRPr kumimoji="0" lang="en-US" altLang="zh-CN" sz="900" b="0" i="0" u="none" strike="noStrike" cap="none" normalizeH="0" baseline="0" dirty="0">
-              <a:ln>
-                <a:noFill/>
-              </a:ln>
-              <a:solidFill>
-                <a:schemeClr val="tx1"/>
-              </a:solidFill>
-              <a:effectLst/>
-              <a:latin typeface="Calibri" pitchFamily="34" charset="0"/>
-              <a:ea typeface="Times New Roman" panose="02020603050405020304" pitchFamily="18" charset="0"/>
-              <a:cs typeface="Times New Roman" panose="02020603050405020304" pitchFamily="18" charset="0"/>
-            </a:endParaRPr>
-          </a:p>
-          <a:p>
-            <a:pPr lvl="0" algn="ctr" eaLnBrk="0" fontAlgn="base" hangingPunct="0">
-              <a:spcBef>
-                <a:spcPct val="0"/>
-              </a:spcBef>
-              <a:spcAft>
-                <a:spcPct val="0"/>
-              </a:spcAft>
-            </a:pPr>
-            <a:r>
-              <a:rPr lang="en-US" sz="900" dirty="0">
-                <a:solidFill>
-                  <a:srgbClr val="000000"/>
-                </a:solidFill>
-                <a:latin typeface="Calibri"/>
-                <a:ea typeface="Times New Roman"/>
-                <a:cs typeface="Times New Roman"/>
-              </a:rPr>
-              <a:t>OHN 2 : Augmentation de la création d'emplois inclusifs</a:t>
-            </a:r>
-            <a:br/>
             <a:r>
               <a:rPr lang="en-US" sz="900" dirty="0">
                 <a:solidFill>
@@ -35035,7 +33373,22 @@
               </a:rPr>
               <a:t/>
             </a:r>
-            <a:br/>
+          </a:p>
+          <a:p>
+            <a:r>
+              <a:rPr lang="en-US" sz="900" dirty="0">
+                <a:solidFill>
+                  <a:srgbClr val="000000"/>
+                </a:solidFill>
+                <a:latin typeface="Calibri"/>
+                <a:ea typeface="Times New Roman"/>
+                <a:cs typeface="Times New Roman"/>
+              </a:rPr>
+              <a:t>HLO 2 : Accroître la création inclusive d'emplois
+</a:t>
+            </a:r>
+          </a:p>
+          <a:p>
             <a:r>
               <a:rPr lang="en-US" sz="900" dirty="0">
                 <a:solidFill>
@@ -35047,45 +33400,19 @@
               </a:rPr>
               <a:t/>
             </a:r>
-            <a:endParaRPr kumimoji="0" lang="en-US" altLang="zh-CN" sz="900" b="0" i="1" u="none" strike="noStrike" cap="none" normalizeH="0" baseline="0" dirty="0">
-              <a:ln>
-                <a:noFill/>
-              </a:ln>
-              <a:solidFill>
-                <a:schemeClr val="tx1"/>
-              </a:solidFill>
-              <a:effectLst/>
-              <a:latin typeface="Calibri" pitchFamily="34" charset="0"/>
-              <a:ea typeface="Times New Roman" panose="02020603050405020304" pitchFamily="18" charset="0"/>
-              <a:cs typeface="Times New Roman" panose="02020603050405020304" pitchFamily="18" charset="0"/>
-            </a:endParaRPr>
-          </a:p>
-          <a:p>
-            <a:pPr marL="0" marR="0" lvl="0" indent="0" algn="ctr" defTabSz="914400" rtl="0" eaLnBrk="0" fontAlgn="base" latinLnBrk="0" hangingPunct="0">
-              <a:lnSpc>
-                <a:spcPct val="100000"/>
-              </a:lnSpc>
-              <a:spcBef>
-                <a:spcPct val="0"/>
-              </a:spcBef>
-              <a:spcAft>
-                <a:spcPct val="0"/>
-              </a:spcAft>
-              <a:buClrTx/>
-              <a:buSzTx/>
-              <a:buFontTx/>
-              <a:buNone/>
-            </a:pPr>
-            <a:endParaRPr kumimoji="0" lang="en-US" altLang="zh-CN" sz="1800" b="0" i="0" u="none" strike="noStrike" cap="none" normalizeH="0" baseline="0" dirty="0">
-              <a:ln>
-                <a:noFill/>
-              </a:ln>
-              <a:solidFill>
-                <a:schemeClr val="tx1"/>
-              </a:solidFill>
-              <a:effectLst/>
-              <a:latin typeface="Arial" panose="020B0604020202020204" pitchFamily="34" charset="0"/>
-            </a:endParaRPr>
+          </a:p>
+          <a:p>
+            <a:r>
+              <a:rPr lang="en-US" sz="900" dirty="0">
+                <a:solidFill>
+                  <a:srgbClr val="000000"/>
+                </a:solidFill>
+                <a:latin typeface="Calibri"/>
+                <a:ea typeface="Times New Roman"/>
+                <a:cs typeface="Times New Roman"/>
+              </a:rPr>
+              <a:t/>
+            </a:r>
           </a:p>
         </p:txBody>
       </p:sp>
@@ -35130,14 +33457,6 @@
           </a:bodyPr>
           <a:lstStyle/>
           <a:p>
-            <a:pPr lvl="0" algn="ctr" eaLnBrk="0" fontAlgn="base" hangingPunct="0">
-              <a:spcBef>
-                <a:spcPct val="0"/>
-              </a:spcBef>
-              <a:spcAft>
-                <a:spcPct val="0"/>
-              </a:spcAft>
-            </a:pPr>
             <a:r>
               <a:rPr lang="en-US" sz="900" dirty="0">
                 <a:solidFill>
@@ -35147,9 +33466,11 @@
                 <a:ea typeface="Times New Roman"/>
                 <a:cs typeface="Times New Roman"/>
               </a:rPr>
-              <a:t>OHN3 : Améliorer le capital humain et l'autonomisation des femmes</a:t>
+              <a:t>HLO3 : Améliorer le capital humain et l'autonomisation des femmes
+</a:t>
             </a:r>
-            <a:br/>
+          </a:p>
+          <a:p>
             <a:r>
               <a:rPr lang="en-US" sz="900" dirty="0">
                 <a:solidFill>
@@ -35161,7 +33482,8 @@
               </a:rPr>
               <a:t/>
             </a:r>
-            <a:br/>
+          </a:p>
+          <a:p>
             <a:r>
               <a:rPr lang="en-US" sz="900" dirty="0">
                 <a:solidFill>
@@ -35173,69 +33495,19 @@
               </a:rPr>
               <a:t/>
             </a:r>
-            <a:endParaRPr kumimoji="0" lang="en-US" altLang="zh-CN" sz="900" b="0" i="1" u="none" strike="noStrike" cap="none" normalizeH="0" baseline="0" dirty="0">
-              <a:ln>
-                <a:noFill/>
-              </a:ln>
-              <a:solidFill>
-                <a:schemeClr val="tx1"/>
-              </a:solidFill>
-              <a:effectLst/>
-              <a:latin typeface="Calibri" panose="020F0502020204030204" pitchFamily="34" charset="0"/>
-              <a:ea typeface="Times New Roman" panose="02020603050405020304" pitchFamily="18" charset="0"/>
-              <a:cs typeface="Times New Roman" panose="02020603050405020304" pitchFamily="18" charset="0"/>
-            </a:endParaRPr>
-          </a:p>
-          <a:p>
-            <a:pPr marL="0" marR="0" lvl="0" indent="0" algn="ctr" defTabSz="914400" rtl="0" eaLnBrk="0" fontAlgn="base" latinLnBrk="0" hangingPunct="0">
-              <a:lnSpc>
-                <a:spcPct val="100000"/>
-              </a:lnSpc>
-              <a:spcBef>
-                <a:spcPct val="0"/>
-              </a:spcBef>
-              <a:spcAft>
-                <a:spcPct val="0"/>
-              </a:spcAft>
-              <a:buClrTx/>
-              <a:buSzTx/>
-              <a:buFontTx/>
-              <a:buNone/>
-            </a:pPr>
-            <a:endParaRPr kumimoji="0" lang="en-US" altLang="zh-CN" sz="900" b="0" i="1" u="none" strike="noStrike" cap="none" normalizeH="0" baseline="0" dirty="0">
-              <a:ln>
-                <a:noFill/>
-              </a:ln>
-              <a:solidFill>
-                <a:schemeClr val="tx1"/>
-              </a:solidFill>
-              <a:effectLst/>
-              <a:latin typeface="Calibri" panose="020F0502020204030204" pitchFamily="34" charset="0"/>
-              <a:ea typeface="Times New Roman" panose="02020603050405020304" pitchFamily="18" charset="0"/>
-              <a:cs typeface="Times New Roman" panose="02020603050405020304" pitchFamily="18" charset="0"/>
-            </a:endParaRPr>
-          </a:p>
-          <a:p>
-            <a:pPr marL="0" marR="0" lvl="0" indent="0" algn="ctr" defTabSz="914400" rtl="0" eaLnBrk="0" fontAlgn="base" latinLnBrk="0" hangingPunct="0">
-              <a:lnSpc>
-                <a:spcPct val="100000"/>
-              </a:lnSpc>
-              <a:spcBef>
-                <a:spcPct val="0"/>
-              </a:spcBef>
-              <a:spcAft>
-                <a:spcPct val="0"/>
-              </a:spcAft>
-              <a:buClrTx/>
-              <a:buSzTx/>
-              <a:buFontTx/>
-              <a:buNone/>
-            </a:pPr>
-            <a:endParaRPr lang="en-US" altLang="zh-CN" sz="900" i="1" dirty="0">
-              <a:latin typeface="Calibri" pitchFamily="34" charset="0"/>
-              <a:ea typeface="Times New Roman" panose="02020603050405020304" pitchFamily="18" charset="0"/>
-              <a:cs typeface="Times New Roman" panose="02020603050405020304" pitchFamily="18" charset="0"/>
-            </a:endParaRPr>
+          </a:p>
+          <a:p>
+            <a:r>
+              <a:rPr lang="en-US" sz="900" dirty="0">
+                <a:solidFill>
+                  <a:srgbClr val="000000"/>
+                </a:solidFill>
+                <a:latin typeface="Calibri"/>
+                <a:ea typeface="Times New Roman"/>
+                <a:cs typeface="Times New Roman"/>
+              </a:rPr>
+              <a:t/>
+            </a:r>
           </a:p>
         </p:txBody>
       </p:sp>
@@ -35280,55 +33552,6 @@
           </a:bodyPr>
           <a:lstStyle/>
           <a:p>
-            <a:pPr marL="0" marR="0" lvl="0" indent="0" algn="ctr" defTabSz="914400" rtl="0" eaLnBrk="0" fontAlgn="base" latinLnBrk="0" hangingPunct="0">
-              <a:lnSpc>
-                <a:spcPct val="100000"/>
-              </a:lnSpc>
-              <a:spcBef>
-                <a:spcPct val="0"/>
-              </a:spcBef>
-              <a:spcAft>
-                <a:spcPct val="0"/>
-              </a:spcAft>
-              <a:buClrTx/>
-              <a:buSzTx/>
-              <a:buFontTx/>
-              <a:buNone/>
-            </a:pPr>
-            <a:endParaRPr kumimoji="0" lang="en-US" altLang="zh-CN" sz="900" b="0" i="0" u="none" strike="noStrike" cap="none" normalizeH="0" baseline="0" dirty="0">
-              <a:ln>
-                <a:noFill/>
-              </a:ln>
-              <a:solidFill>
-                <a:schemeClr val="tx1"/>
-              </a:solidFill>
-              <a:effectLst/>
-              <a:latin typeface="Calibri" panose="020F0502020204030204" pitchFamily="34" charset="0"/>
-              <a:ea typeface="Times New Roman" panose="02020603050405020304" pitchFamily="18" charset="0"/>
-              <a:cs typeface="Times New Roman" panose="02020603050405020304" pitchFamily="18" charset="0"/>
-            </a:endParaRPr>
-          </a:p>
-          <a:p>
-            <a:pPr lvl="0" algn="ctr" eaLnBrk="0" fontAlgn="base" hangingPunct="0">
-              <a:spcBef>
-                <a:spcPct val="0"/>
-              </a:spcBef>
-              <a:spcAft>
-                <a:spcPct val="0"/>
-              </a:spcAft>
-            </a:pPr>
-            <a:r>
-              <a:rPr lang="en-US" sz="900" dirty="0">
-                <a:solidFill>
-                  <a:srgbClr val="000000"/>
-                </a:solidFill>
-                <a:latin typeface="Calibri"/>
-                <a:ea typeface="Times New Roman"/>
-                <a:cs typeface="Times New Roman"/>
-              </a:rPr>
-              <a:t>OHN 1 : Institutions inclusives</a:t>
-            </a:r>
-            <a:br/>
             <a:r>
               <a:rPr lang="en-US" sz="900" dirty="0">
                 <a:solidFill>
@@ -35340,7 +33563,22 @@
               </a:rPr>
               <a:t/>
             </a:r>
-            <a:br/>
+          </a:p>
+          <a:p>
+            <a:r>
+              <a:rPr lang="en-US" sz="900" dirty="0">
+                <a:solidFill>
+                  <a:srgbClr val="000000"/>
+                </a:solidFill>
+                <a:latin typeface="Calibri"/>
+                <a:ea typeface="Times New Roman"/>
+                <a:cs typeface="Times New Roman"/>
+              </a:rPr>
+              <a:t>HLO 1 : Des institutions inclusives
+</a:t>
+            </a:r>
+          </a:p>
+          <a:p>
             <a:r>
               <a:rPr lang="en-US" sz="900" dirty="0">
                 <a:solidFill>
@@ -35352,38 +33590,19 @@
               </a:rPr>
               <a:t/>
             </a:r>
-            <a:endParaRPr kumimoji="0" lang="en-US" altLang="zh-CN" sz="900" b="0" i="1" u="none" strike="noStrike" cap="none" normalizeH="0" baseline="0" dirty="0">
-              <a:ln>
-                <a:noFill/>
-              </a:ln>
-              <a:solidFill>
-                <a:schemeClr val="tx1"/>
-              </a:solidFill>
-              <a:effectLst/>
-              <a:latin typeface="Calibri" panose="020F0502020204030204" pitchFamily="34" charset="0"/>
-              <a:ea typeface="Times New Roman" panose="02020603050405020304" pitchFamily="18" charset="0"/>
-              <a:cs typeface="Times New Roman" panose="02020603050405020304" pitchFamily="18" charset="0"/>
-            </a:endParaRPr>
-          </a:p>
-          <a:p>
-            <a:pPr algn="ctr" eaLnBrk="0" fontAlgn="base" hangingPunct="0">
-              <a:spcBef>
-                <a:spcPct val="0"/>
-              </a:spcBef>
-              <a:spcAft>
-                <a:spcPct val="0"/>
-              </a:spcAft>
-            </a:pPr>
-            <a:endParaRPr kumimoji="0" lang="en-US" altLang="zh-CN" sz="1800" b="0" i="0" u="none" strike="noStrike" cap="none" normalizeH="0" baseline="0" dirty="0">
-              <a:ln>
-                <a:noFill/>
-              </a:ln>
-              <a:solidFill>
-                <a:schemeClr val="tx1"/>
-              </a:solidFill>
-              <a:effectLst/>
-              <a:latin typeface="Arial" panose="020B0604020202020204" pitchFamily="34" charset="0"/>
-            </a:endParaRPr>
+          </a:p>
+          <a:p>
+            <a:r>
+              <a:rPr lang="en-US" sz="900" dirty="0">
+                <a:solidFill>
+                  <a:srgbClr val="000000"/>
+                </a:solidFill>
+                <a:latin typeface="Calibri"/>
+                <a:ea typeface="Times New Roman"/>
+                <a:cs typeface="Times New Roman"/>
+              </a:rPr>
+              <a:t/>
+            </a:r>
           </a:p>
         </p:txBody>
       </p:sp>
@@ -35428,14 +33647,6 @@
           </a:bodyPr>
           <a:lstStyle/>
           <a:p>
-            <a:pPr lvl="0" algn="ctr" eaLnBrk="0" fontAlgn="base" hangingPunct="0">
-              <a:spcBef>
-                <a:spcPct val="0"/>
-              </a:spcBef>
-              <a:spcAft>
-                <a:spcPct val="0"/>
-              </a:spcAft>
-            </a:pPr>
             <a:r>
               <a:rPr lang="en-US" sz="900" dirty="0">
                 <a:solidFill>
@@ -35445,60 +33656,21 @@
                 <a:ea typeface="Times New Roman"/>
                 <a:cs typeface="Times New Roman"/>
               </a:rPr>
-              <a:t>Un lourd fardeau de la dette, un cadre macro-budgétaire fragile et d'autres risques défavorables exposent l'économie à l'instabilité macroéconomique et érodent la confiance des investisseurs</a:t>
+              <a:t>Un fardeau de la dette élevé, un cadre macro-budgétaire fragile et d'autres risques défavorables exposent l'économie à l'instabilité macroéconomique et minent la confiance des investisseurs.</a:t>
             </a:r>
+          </a:p>
+          <a:p>
             <a:r>
-              <a:rPr kumimoji="0" lang="pt" sz="900" b="0" i="0" u="none" strike="noStrike" cap="none" normalizeH="0" baseline="0" dirty="0">
+              <a:rPr lang="en-US" sz="900" dirty="0">
                 <a:solidFill>
                   <a:srgbClr val="000000"/>
                 </a:solidFill>
-                <a:highlight>
-                  <a:srgbClr val="000000">
-                    <a:alpha val="0"/>
-                  </a:srgbClr>
-                </a:highlight>
                 <a:latin typeface="Calibri"/>
                 <a:ea typeface="Times New Roman"/>
                 <a:cs typeface="Times New Roman"/>
               </a:rPr>
-              <a:t>.</a:t>
+              <a:t/>
             </a:r>
-            <a:endParaRPr kumimoji="0" lang="en-US" altLang="zh-CN" sz="800" b="0" i="0" u="none" strike="noStrike" cap="none" normalizeH="0" baseline="0" dirty="0">
-              <a:ln>
-                <a:noFill/>
-              </a:ln>
-              <a:solidFill>
-                <a:schemeClr val="tx1"/>
-              </a:solidFill>
-              <a:effectLst/>
-            </a:endParaRPr>
-          </a:p>
-          <a:p>
-            <a:pPr marL="0" marR="0" lvl="0" indent="0" algn="ctr" defTabSz="914400" rtl="0" eaLnBrk="0" fontAlgn="base" latinLnBrk="0" hangingPunct="0">
-              <a:lnSpc>
-                <a:spcPct val="100000"/>
-              </a:lnSpc>
-              <a:spcBef>
-                <a:spcPct val="0"/>
-              </a:spcBef>
-              <a:spcAft>
-                <a:spcPct val="0"/>
-              </a:spcAft>
-              <a:buClrTx/>
-              <a:buSzTx/>
-              <a:buFontTx/>
-              <a:buNone/>
-            </a:pPr>
-            <a:endParaRPr kumimoji="0" lang="en-US" altLang="zh-CN" sz="1800" b="0" i="0" u="none" strike="noStrike" cap="none" normalizeH="0" baseline="0" dirty="0">
-              <a:ln>
-                <a:noFill/>
-              </a:ln>
-              <a:solidFill>
-                <a:schemeClr val="tx1"/>
-              </a:solidFill>
-              <a:effectLst/>
-              <a:latin typeface="Arial" panose="020B0604020202020204" pitchFamily="34" charset="0"/>
-            </a:endParaRPr>
           </a:p>
         </p:txBody>
       </p:sp>
@@ -35543,14 +33715,6 @@
           </a:bodyPr>
           <a:lstStyle/>
           <a:p>
-            <a:pPr lvl="0" algn="ctr" eaLnBrk="0" fontAlgn="base" hangingPunct="0">
-              <a:spcBef>
-                <a:spcPct val="0"/>
-              </a:spcBef>
-              <a:spcAft>
-                <a:spcPct val="0"/>
-              </a:spcAft>
-            </a:pPr>
             <a:r>
               <a:rPr lang="en-US" sz="900" dirty="0">
                 <a:solidFill>
@@ -35560,9 +33724,11 @@
                 <a:ea typeface="Times New Roman"/>
                 <a:cs typeface="Times New Roman"/>
               </a:rPr>
-              <a:t>Un processus de décentralisation lent, déséquilibré et sous-financé rend difficile la délégation de pouvoirs aux gouvernements locaux.</a:t>
+              <a:t>Un processus de décentralisation lent, déséquilibré et insuffisamment financé rend difficile la délégation de pouvoirs aux administrations locales.
+</a:t>
             </a:r>
-            <a:br/>
+          </a:p>
+          <a:p>
             <a:r>
               <a:rPr lang="en-US" sz="900" dirty="0">
                 <a:solidFill>
@@ -35574,28 +33740,6 @@
               </a:rPr>
               <a:t/>
             </a:r>
-            <a:br/>
-            <a:r>
-              <a:rPr lang="en-US" sz="900" dirty="0">
-                <a:solidFill>
-                  <a:srgbClr val="000000"/>
-                </a:solidFill>
-                <a:latin typeface="Calibri"/>
-                <a:ea typeface="Times New Roman"/>
-                <a:cs typeface="Times New Roman"/>
-              </a:rPr>
-              <a:t/>
-            </a:r>
-            <a:endParaRPr kumimoji="0" lang="en-US" altLang="zh-CN" sz="1800" b="0" i="0" u="none" strike="noStrike" cap="none" normalizeH="0" baseline="0" dirty="0">
-              <a:ln>
-                <a:noFill/>
-              </a:ln>
-              <a:solidFill>
-                <a:schemeClr val="tx1"/>
-              </a:solidFill>
-              <a:effectLst/>
-              <a:latin typeface="Arial" panose="020B0604020202020204" pitchFamily="34" charset="0"/>
-            </a:endParaRPr>
           </a:p>
         </p:txBody>
       </p:sp>
@@ -35640,14 +33784,6 @@
           </a:bodyPr>
           <a:lstStyle/>
           <a:p>
-            <a:pPr lvl="0" algn="ctr" eaLnBrk="0" fontAlgn="base" hangingPunct="0">
-              <a:spcBef>
-                <a:spcPct val="0"/>
-              </a:spcBef>
-              <a:spcAft>
-                <a:spcPct val="0"/>
-              </a:spcAft>
-            </a:pPr>
             <a:r>
               <a:rPr lang="en-US" sz="900" dirty="0">
                 <a:solidFill>
@@ -35657,9 +33793,11 @@
                 <a:ea typeface="Times New Roman"/>
                 <a:cs typeface="Times New Roman"/>
               </a:rPr>
-              <a:t>1. Améliorer la gestion économique pour la création d'emplois durables et résilients, une meilleure capacité d'exécution et un risque souverain réduit</a:t>
+              <a:t>1. Améliorer la gestion économique pour la création d'emplois durables et résilients, une meilleure capacité d'exécution et un risque souverain plus faible
+</a:t>
             </a:r>
-            <a:br/>
+          </a:p>
+          <a:p>
             <a:r>
               <a:rPr lang="en-US" sz="900" dirty="0">
                 <a:solidFill>
@@ -35669,9 +33807,11 @@
                 <a:ea typeface="Times New Roman"/>
                 <a:cs typeface="Times New Roman"/>
               </a:rPr>
-              <a:t>2. Renforcer l'efficacité du secteur public pour une prestation de services inclusive, transparente, plus durable, résiliente et équitable </a:t>
+              <a:t>2. Accroître l'efficacité du secteur public pour une prestation de services inclusive et transparente et des politiques plus durables, résilientes et équitables 
+</a:t>
             </a:r>
-            <a:br/>
+          </a:p>
+          <a:p>
             <a:r>
               <a:rPr lang="en-US" sz="900" dirty="0">
                 <a:solidFill>
@@ -35681,9 +33821,11 @@
                 <a:ea typeface="Times New Roman"/>
                 <a:cs typeface="Times New Roman"/>
               </a:rPr>
-              <a:t>3. Renforcer la coordination, les politiques et les capacités pour une meilleure préparation et réponse aux catastrophes naturelles, aux sinistres et aux autres chocs multidimensionnels</a:t>
+              <a:t>3. Renforcer la coordination, les politiques et les capacités pour une meilleure préparation et une meilleure réponse aux catastrophes naturelles, aux désastres et à d'autres chocs multidimensionnels
+</a:t>
             </a:r>
-            <a:br/>
+          </a:p>
+          <a:p>
             <a:r>
               <a:rPr lang="en-US" sz="900" dirty="0">
                 <a:solidFill>
@@ -35695,52 +33837,6 @@
               </a:rPr>
               <a:t/>
             </a:r>
-            <a:br/>
-            <a:r>
-              <a:rPr lang="en-US" sz="900" dirty="0">
-                <a:solidFill>
-                  <a:srgbClr val="000000"/>
-                </a:solidFill>
-                <a:latin typeface="Calibri"/>
-                <a:ea typeface="Times New Roman"/>
-                <a:cs typeface="Times New Roman"/>
-              </a:rPr>
-              <a:t/>
-            </a:r>
-            <a:br/>
-            <a:r>
-              <a:rPr lang="en-US" sz="900" dirty="0">
-                <a:solidFill>
-                  <a:srgbClr val="000000"/>
-                </a:solidFill>
-                <a:latin typeface="Calibri"/>
-                <a:ea typeface="Times New Roman"/>
-                <a:cs typeface="Times New Roman"/>
-              </a:rPr>
-              <a:t/>
-            </a:r>
-            <a:br/>
-            <a:r>
-              <a:rPr lang="en-US" sz="900" dirty="0">
-                <a:solidFill>
-                  <a:srgbClr val="000000"/>
-                </a:solidFill>
-                <a:latin typeface="Calibri"/>
-                <a:ea typeface="Times New Roman"/>
-                <a:cs typeface="Times New Roman"/>
-              </a:rPr>
-              <a:t/>
-            </a:r>
-            <a:endParaRPr kumimoji="0" lang="en-US" altLang="zh-CN" sz="1800" b="0" i="0" u="none" strike="noStrike" cap="none" normalizeH="0" baseline="0" dirty="0">
-              <a:ln>
-                <a:noFill/>
-              </a:ln>
-              <a:solidFill>
-                <a:schemeClr val="tx1"/>
-              </a:solidFill>
-              <a:effectLst/>
-              <a:latin typeface="Arial" panose="020B0604020202020204" pitchFamily="34" charset="0"/>
-            </a:endParaRPr>
           </a:p>
         </p:txBody>
       </p:sp>
@@ -35785,14 +33881,6 @@
           </a:bodyPr>
           <a:lstStyle/>
           <a:p>
-            <a:pPr lvl="0" algn="ctr" eaLnBrk="0" fontAlgn="base" hangingPunct="0">
-              <a:spcBef>
-                <a:spcPct val="0"/>
-              </a:spcBef>
-              <a:spcAft>
-                <a:spcPct val="0"/>
-              </a:spcAft>
-            </a:pPr>
             <a:r>
               <a:rPr lang="en-US" sz="900" dirty="0">
                 <a:solidFill>
@@ -35802,9 +33890,11 @@
                 <a:ea typeface="Times New Roman"/>
                 <a:cs typeface="Times New Roman"/>
               </a:rPr>
-              <a:t>7. Améliorer durablement les principaux résultats en matière de santé et d'éducation</a:t>
+              <a:t>7. Améliorer durablement les principaux résultats en matière de santé et d'éducation
+</a:t>
             </a:r>
-            <a:br/>
+          </a:p>
+          <a:p>
             <a:r>
               <a:rPr lang="en-US" sz="900" dirty="0">
                 <a:solidFill>
@@ -35814,9 +33904,11 @@
                 <a:ea typeface="Times New Roman"/>
                 <a:cs typeface="Times New Roman"/>
               </a:rPr>
-              <a:t>8. Accroître l'efficience des dépenses et la couverture effective des services sociaux intégrés et durables</a:t>
+              <a:t>8. Accroître l'efficacité et la couverture effective des services sociaux intégrés et durables
+</a:t>
             </a:r>
-            <a:br/>
+          </a:p>
+          <a:p>
             <a:r>
               <a:rPr lang="en-US" sz="900" dirty="0">
                 <a:solidFill>
@@ -35826,9 +33918,11 @@
                 <a:ea typeface="Times New Roman"/>
                 <a:cs typeface="Times New Roman"/>
               </a:rPr>
-              <a:t>9. Améliorer l'accès aux services pour prévenir les grossesses chez les adolescentes et promouvoir la participation des femmes </a:t>
+              <a:t>9. Améliorer l'accès aux services de prévention des grossesses chez les adolescentes et de promotion de la participation des femmes 
+</a:t>
             </a:r>
-            <a:br/>
+          </a:p>
+          <a:p>
             <a:r>
               <a:rPr lang="en-US" sz="900" dirty="0">
                 <a:solidFill>
@@ -35840,52 +33934,6 @@
               </a:rPr>
               <a:t/>
             </a:r>
-            <a:br/>
-            <a:r>
-              <a:rPr lang="en-US" sz="900" dirty="0">
-                <a:solidFill>
-                  <a:srgbClr val="000000"/>
-                </a:solidFill>
-                <a:latin typeface="Calibri"/>
-                <a:ea typeface="Times New Roman"/>
-                <a:cs typeface="Times New Roman"/>
-              </a:rPr>
-              <a:t/>
-            </a:r>
-            <a:br/>
-            <a:r>
-              <a:rPr lang="en-US" sz="900" dirty="0">
-                <a:solidFill>
-                  <a:srgbClr val="000000"/>
-                </a:solidFill>
-                <a:latin typeface="Calibri"/>
-                <a:ea typeface="Times New Roman"/>
-                <a:cs typeface="Times New Roman"/>
-              </a:rPr>
-              <a:t/>
-            </a:r>
-            <a:br/>
-            <a:r>
-              <a:rPr lang="en-US" sz="900" dirty="0">
-                <a:solidFill>
-                  <a:srgbClr val="000000"/>
-                </a:solidFill>
-                <a:latin typeface="Calibri"/>
-                <a:ea typeface="Times New Roman"/>
-                <a:cs typeface="Times New Roman"/>
-              </a:rPr>
-              <a:t/>
-            </a:r>
-            <a:endParaRPr kumimoji="0" lang="en-US" altLang="zh-CN" sz="1800" b="0" i="0" u="none" strike="noStrike" cap="none" normalizeH="0" baseline="0" dirty="0">
-              <a:ln>
-                <a:noFill/>
-              </a:ln>
-              <a:solidFill>
-                <a:schemeClr val="tx1"/>
-              </a:solidFill>
-              <a:effectLst/>
-              <a:latin typeface="Arial" panose="020B0604020202020204" pitchFamily="34" charset="0"/>
-            </a:endParaRPr>
           </a:p>
         </p:txBody>
       </p:sp>
@@ -35930,14 +33978,6 @@
           </a:bodyPr>
           <a:lstStyle/>
           <a:p>
-            <a:pPr lvl="0" algn="ctr" eaLnBrk="0" fontAlgn="base" hangingPunct="0">
-              <a:spcBef>
-                <a:spcPct val="0"/>
-              </a:spcBef>
-              <a:spcAft>
-                <a:spcPct val="0"/>
-              </a:spcAft>
-            </a:pPr>
             <a:r>
               <a:rPr lang="en-US" sz="1000" b="1" dirty="0">
                 <a:solidFill>
@@ -35947,29 +33987,8 @@
                 <a:ea typeface="Times New Roman"/>
                 <a:cs typeface="Times New Roman"/>
               </a:rPr>
-              <a:t>Les doubles objectifs de la Banque mondiale (dans le contexte de la </a:t>
+              <a:t>Les deux objectifs jumeaux de la Banque mondiale (dans le contexte de la fragilité, des conflits et de la violence)</a:t>
             </a:r>
-            <a:r>
-              <a:rPr lang="en-US" sz="1000" i="1" dirty="0">
-                <a:solidFill>
-                  <a:srgbClr val="000000"/>
-                </a:solidFill>
-                <a:latin typeface="Calibri"/>
-                <a:ea typeface="Times New Roman"/>
-                <a:cs typeface="Times New Roman"/>
-              </a:rPr>
-              <a:t>Fragilité, des Conflits et de la Violence)</a:t>
-            </a:r>
-            <a:endParaRPr kumimoji="0" lang="en-US" altLang="zh-CN" sz="1800" b="0" i="0" u="none" strike="noStrike" cap="none" normalizeH="0" baseline="0" dirty="0">
-              <a:ln>
-                <a:noFill/>
-              </a:ln>
-              <a:solidFill>
-                <a:schemeClr val="tx1"/>
-              </a:solidFill>
-              <a:effectLst/>
-              <a:latin typeface="Arial" panose="020B0604020202020204" pitchFamily="34" charset="0"/>
-            </a:endParaRPr>
           </a:p>
         </p:txBody>
       </p:sp>
@@ -36014,14 +34033,6 @@
           </a:bodyPr>
           <a:lstStyle/>
           <a:p>
-            <a:pPr lvl="0" algn="ctr" eaLnBrk="0" fontAlgn="base" hangingPunct="0">
-              <a:spcBef>
-                <a:spcPct val="0"/>
-              </a:spcBef>
-              <a:spcAft>
-                <a:spcPct val="0"/>
-              </a:spcAft>
-            </a:pPr>
             <a:r>
               <a:rPr lang="en-US" sz="900" dirty="0">
                 <a:solidFill>
@@ -36031,9 +34042,11 @@
                 <a:ea typeface="Times New Roman"/>
                 <a:cs typeface="Times New Roman"/>
               </a:rPr>
-              <a:t>4. Permettre une croissance durable des secteurs de ressources naturelles sélectionnés en exploitant les avantages comparatifs régionaux et mondiaux</a:t>
+              <a:t>4. Permettre une croissance durable de secteurs de ressources naturelles sélectionnés en exploitant les avantages comparatifs régionaux et mondiaux
+</a:t>
             </a:r>
-            <a:br/>
+          </a:p>
+          <a:p>
             <a:r>
               <a:rPr lang="en-US" sz="900" dirty="0">
                 <a:solidFill>
@@ -36043,9 +34056,11 @@
                 <a:ea typeface="Times New Roman"/>
                 <a:cs typeface="Times New Roman"/>
               </a:rPr>
-              <a:t>5. Promouvoir la croissance de la productivité dans des industries à forte intensité de main-d'œuvre sélectionnées </a:t>
+              <a:t>5. Promouvoir la croissance de la productivité dans des industries à forte intensité de main-d'œuvre sélectionnées 
+</a:t>
             </a:r>
-            <a:br/>
+          </a:p>
+          <a:p>
             <a:r>
               <a:rPr lang="en-US" sz="900" dirty="0">
                 <a:solidFill>
@@ -36055,9 +34070,11 @@
                 <a:ea typeface="Times New Roman"/>
                 <a:cs typeface="Times New Roman"/>
               </a:rPr>
-              <a:t>6. Étendre des services accessibles, fiables et résilients au climat pour améliorer l'accès des plus défavorisés, renforcer l'urbanisation durable et l'agglomération économique</a:t>
+              <a:t>6. Étendre des services accessibles, fiables et résilients au climat afin d'améliorer l'accès des plus défavorisés, renforcer l'urbanisation durable et l'agglomération économique
+</a:t>
             </a:r>
-            <a:br/>
+          </a:p>
+          <a:p>
             <a:r>
               <a:rPr lang="en-US" sz="900" dirty="0">
                 <a:solidFill>
@@ -36069,52 +34086,6 @@
               </a:rPr>
               <a:t/>
             </a:r>
-            <a:br/>
-            <a:r>
-              <a:rPr lang="en-US" sz="900" dirty="0">
-                <a:solidFill>
-                  <a:srgbClr val="000000"/>
-                </a:solidFill>
-                <a:latin typeface="Calibri"/>
-                <a:ea typeface="Times New Roman"/>
-                <a:cs typeface="Times New Roman"/>
-              </a:rPr>
-              <a:t/>
-            </a:r>
-            <a:br/>
-            <a:r>
-              <a:rPr lang="en-US" sz="900" dirty="0">
-                <a:solidFill>
-                  <a:srgbClr val="000000"/>
-                </a:solidFill>
-                <a:latin typeface="Calibri"/>
-                <a:ea typeface="Times New Roman"/>
-                <a:cs typeface="Times New Roman"/>
-              </a:rPr>
-              <a:t/>
-            </a:r>
-            <a:br/>
-            <a:r>
-              <a:rPr lang="en-US" sz="900" dirty="0">
-                <a:solidFill>
-                  <a:srgbClr val="000000"/>
-                </a:solidFill>
-                <a:latin typeface="Calibri"/>
-                <a:ea typeface="Times New Roman"/>
-                <a:cs typeface="Times New Roman"/>
-              </a:rPr>
-              <a:t/>
-            </a:r>
-            <a:endParaRPr kumimoji="0" lang="en-US" altLang="zh-CN" sz="1800" b="0" i="0" u="none" strike="noStrike" cap="none" normalizeH="0" baseline="0" dirty="0">
-              <a:ln>
-                <a:noFill/>
-              </a:ln>
-              <a:solidFill>
-                <a:schemeClr val="tx1"/>
-              </a:solidFill>
-              <a:effectLst/>
-              <a:latin typeface="Arial" panose="020B0604020202020204" pitchFamily="34" charset="0"/>
-            </a:endParaRPr>
           </a:p>
         </p:txBody>
       </p:sp>
@@ -36159,14 +34130,6 @@
           </a:bodyPr>
           <a:lstStyle/>
           <a:p>
-            <a:pPr lvl="0" algn="ctr" eaLnBrk="0" fontAlgn="base" hangingPunct="0">
-              <a:spcBef>
-                <a:spcPct val="0"/>
-              </a:spcBef>
-              <a:spcAft>
-                <a:spcPct val="0"/>
-              </a:spcAft>
-            </a:pPr>
             <a:r>
               <a:rPr lang="en-US" sz="900" dirty="0">
                 <a:solidFill>
@@ -36176,60 +34139,21 @@
                 <a:ea typeface="Times New Roman"/>
                 <a:cs typeface="Times New Roman"/>
               </a:rPr>
-              <a:t>Le manque de transparence, un environnement des données insuffisant ainsi qu'une supervision et une responsabilisation insuffisantes de la gestion des finances publiques et des entreprises publiques compromettent l'efficience et l'efficacité des ressources publiques </a:t>
+              <a:t>Une faible transparence, un environnement de données déficient et une supervision et une responsabilité insuffisantes de la gestion des finances publiques et des entreprises publiques minent l'efficience et l'efficacité des ressources publiques.</a:t>
             </a:r>
+          </a:p>
+          <a:p>
             <a:r>
-              <a:rPr kumimoji="0" lang="pt" sz="900" b="0" i="0" u="none" strike="noStrike" cap="none" normalizeH="0" baseline="0" dirty="0">
+              <a:rPr lang="en-US" sz="900" dirty="0">
                 <a:solidFill>
                   <a:srgbClr val="000000"/>
                 </a:solidFill>
-                <a:highlight>
-                  <a:srgbClr val="000000">
-                    <a:alpha val="0"/>
-                  </a:srgbClr>
-                </a:highlight>
                 <a:latin typeface="Calibri"/>
                 <a:ea typeface="Times New Roman"/>
                 <a:cs typeface="Times New Roman"/>
               </a:rPr>
-              <a:t>.</a:t>
+              <a:t/>
             </a:r>
-            <a:endParaRPr kumimoji="0" lang="en-US" altLang="zh-CN" sz="800" b="0" i="0" u="none" strike="noStrike" cap="none" normalizeH="0" baseline="0" dirty="0">
-              <a:ln>
-                <a:noFill/>
-              </a:ln>
-              <a:solidFill>
-                <a:schemeClr val="tx1"/>
-              </a:solidFill>
-              <a:effectLst/>
-            </a:endParaRPr>
-          </a:p>
-          <a:p>
-            <a:pPr marL="0" marR="0" lvl="0" indent="0" algn="ctr" defTabSz="914400" rtl="0" eaLnBrk="0" fontAlgn="base" latinLnBrk="0" hangingPunct="0">
-              <a:lnSpc>
-                <a:spcPct val="100000"/>
-              </a:lnSpc>
-              <a:spcBef>
-                <a:spcPct val="0"/>
-              </a:spcBef>
-              <a:spcAft>
-                <a:spcPct val="0"/>
-              </a:spcAft>
-              <a:buClrTx/>
-              <a:buSzTx/>
-              <a:buFontTx/>
-              <a:buNone/>
-            </a:pPr>
-            <a:endParaRPr kumimoji="0" lang="en-US" altLang="zh-CN" sz="1800" b="0" i="0" u="none" strike="noStrike" cap="none" normalizeH="0" baseline="0" dirty="0">
-              <a:ln>
-                <a:noFill/>
-              </a:ln>
-              <a:solidFill>
-                <a:schemeClr val="tx1"/>
-              </a:solidFill>
-              <a:effectLst/>
-              <a:latin typeface="Arial" panose="020B0604020202020204" pitchFamily="34" charset="0"/>
-            </a:endParaRPr>
           </a:p>
         </p:txBody>
       </p:sp>
@@ -36274,14 +34198,6 @@
           </a:bodyPr>
           <a:lstStyle/>
           <a:p>
-            <a:pPr lvl="0" algn="ctr" eaLnBrk="0" fontAlgn="base" hangingPunct="0">
-              <a:spcBef>
-                <a:spcPct val="0"/>
-              </a:spcBef>
-              <a:spcAft>
-                <a:spcPct val="0"/>
-              </a:spcAft>
-            </a:pPr>
             <a:r>
               <a:rPr lang="en-US" sz="900" dirty="0">
                 <a:solidFill>
@@ -36291,9 +34207,11 @@
                 <a:ea typeface="Times New Roman"/>
                 <a:cs typeface="Times New Roman"/>
               </a:rPr>
-              <a:t>Les conditions de formation, de réglementation et les marchés essentiels à la croissance, la diversification et la création d'emplois du secteur privé sont sous-développés.</a:t>
+              <a:t>Les conditions de formation, de réglementation et de marché essentielles à la croissance, à la diversification et à la création d'emplois du secteur privé sont sous-développées.
+</a:t>
             </a:r>
-            <a:br/>
+          </a:p>
+          <a:p>
             <a:r>
               <a:rPr lang="en-US" sz="900" dirty="0">
                 <a:solidFill>
@@ -36305,28 +34223,6 @@
               </a:rPr>
               <a:t/>
             </a:r>
-            <a:br/>
-            <a:r>
-              <a:rPr lang="en-US" sz="900" dirty="0">
-                <a:solidFill>
-                  <a:srgbClr val="000000"/>
-                </a:solidFill>
-                <a:latin typeface="Calibri"/>
-                <a:ea typeface="Times New Roman"/>
-                <a:cs typeface="Times New Roman"/>
-              </a:rPr>
-              <a:t/>
-            </a:r>
-            <a:endParaRPr kumimoji="0" lang="en-US" altLang="zh-CN" sz="1800" b="0" i="0" u="none" strike="noStrike" cap="none" normalizeH="0" baseline="0" dirty="0">
-              <a:ln>
-                <a:noFill/>
-              </a:ln>
-              <a:solidFill>
-                <a:schemeClr val="tx1"/>
-              </a:solidFill>
-              <a:effectLst/>
-              <a:latin typeface="Arial" panose="020B0604020202020204" pitchFamily="34" charset="0"/>
-            </a:endParaRPr>
           </a:p>
         </p:txBody>
       </p:sp>
@@ -36371,14 +34267,6 @@
           </a:bodyPr>
           <a:lstStyle/>
           <a:p>
-            <a:pPr lvl="0" algn="ctr" eaLnBrk="0" fontAlgn="base" hangingPunct="0">
-              <a:spcBef>
-                <a:spcPct val="0"/>
-              </a:spcBef>
-              <a:spcAft>
-                <a:spcPct val="0"/>
-              </a:spcAft>
-            </a:pPr>
             <a:r>
               <a:rPr lang="en-US" sz="900" dirty="0">
                 <a:solidFill>
@@ -36388,60 +34276,21 @@
                 <a:ea typeface="Times New Roman"/>
                 <a:cs typeface="Times New Roman"/>
               </a:rPr>
-              <a:t>Des défaillances dans les marchés clés, dont certaines sont induites par les politiques, freinent la productivité, la commercialisation et la gestion des risques</a:t>
+              <a:t>Les défaillances de marchés clés, dont certaines sont induites par les politiques, affectent la productivité, la commercialisation et la gestion des risques.</a:t>
             </a:r>
+          </a:p>
+          <a:p>
             <a:r>
-              <a:rPr kumimoji="0" lang="pt" sz="900" b="0" i="0" u="none" strike="noStrike" cap="none" normalizeH="0" baseline="0" dirty="0">
+              <a:rPr lang="en-US" sz="900" dirty="0">
                 <a:solidFill>
                   <a:srgbClr val="000000"/>
                 </a:solidFill>
-                <a:highlight>
-                  <a:srgbClr val="000000">
-                    <a:alpha val="0"/>
-                  </a:srgbClr>
-                </a:highlight>
                 <a:latin typeface="Calibri"/>
                 <a:ea typeface="Times New Roman"/>
                 <a:cs typeface="Times New Roman"/>
               </a:rPr>
-              <a:t>.</a:t>
+              <a:t/>
             </a:r>
-            <a:endParaRPr kumimoji="0" lang="en-US" altLang="zh-CN" sz="800" b="0" i="0" u="none" strike="noStrike" cap="none" normalizeH="0" baseline="0" dirty="0">
-              <a:ln>
-                <a:noFill/>
-              </a:ln>
-              <a:solidFill>
-                <a:schemeClr val="tx1"/>
-              </a:solidFill>
-              <a:effectLst/>
-            </a:endParaRPr>
-          </a:p>
-          <a:p>
-            <a:pPr marL="0" marR="0" lvl="0" indent="0" algn="ctr" defTabSz="914400" rtl="0" eaLnBrk="0" fontAlgn="base" latinLnBrk="0" hangingPunct="0">
-              <a:lnSpc>
-                <a:spcPct val="100000"/>
-              </a:lnSpc>
-              <a:spcBef>
-                <a:spcPct val="0"/>
-              </a:spcBef>
-              <a:spcAft>
-                <a:spcPct val="0"/>
-              </a:spcAft>
-              <a:buClrTx/>
-              <a:buSzTx/>
-              <a:buFontTx/>
-              <a:buNone/>
-            </a:pPr>
-            <a:endParaRPr kumimoji="0" lang="en-US" altLang="zh-CN" sz="1800" b="0" i="0" u="none" strike="noStrike" cap="none" normalizeH="0" baseline="0" dirty="0">
-              <a:ln>
-                <a:noFill/>
-              </a:ln>
-              <a:solidFill>
-                <a:schemeClr val="tx1"/>
-              </a:solidFill>
-              <a:effectLst/>
-              <a:latin typeface="Arial" panose="020B0604020202020204" pitchFamily="34" charset="0"/>
-            </a:endParaRPr>
           </a:p>
         </p:txBody>
       </p:sp>
@@ -36486,14 +34335,6 @@
           </a:bodyPr>
           <a:lstStyle/>
           <a:p>
-            <a:pPr lvl="0" algn="ctr" eaLnBrk="0" fontAlgn="base" hangingPunct="0">
-              <a:spcBef>
-                <a:spcPct val="0"/>
-              </a:spcBef>
-              <a:spcAft>
-                <a:spcPct val="0"/>
-              </a:spcAft>
-            </a:pPr>
             <a:r>
               <a:rPr lang="en-US" sz="900" dirty="0">
                 <a:solidFill>
@@ -36503,60 +34344,21 @@
                 <a:ea typeface="Times New Roman"/>
                 <a:cs typeface="Times New Roman"/>
               </a:rPr>
-              <a:t>La faiblesse des incitations fondées sur la responsabilité et la performance, ainsi que la mauvaise coordination institutionnelle, limitent l'efficacité et l'efficience de la prestation de services et la formation du capital humain</a:t>
+              <a:t>Une responsabilité limitée et des incitations fondées sur la performance ainsi qu'une mauvaise coordination institutionnelle limitent l'efficacité et l'efficience de la prestation de services et de la formation du capital humain.</a:t>
             </a:r>
+          </a:p>
+          <a:p>
             <a:r>
-              <a:rPr kumimoji="0" lang="pt" sz="900" b="0" i="0" u="none" strike="noStrike" cap="none" normalizeH="0" baseline="0" dirty="0">
+              <a:rPr lang="en-US" sz="900" dirty="0">
                 <a:solidFill>
                   <a:srgbClr val="000000"/>
                 </a:solidFill>
-                <a:highlight>
-                  <a:srgbClr val="000000">
-                    <a:alpha val="0"/>
-                  </a:srgbClr>
-                </a:highlight>
                 <a:latin typeface="Calibri"/>
                 <a:ea typeface="Times New Roman"/>
                 <a:cs typeface="Times New Roman"/>
               </a:rPr>
-              <a:t>.</a:t>
+              <a:t/>
             </a:r>
-            <a:endParaRPr kumimoji="0" lang="en-US" altLang="zh-CN" sz="800" b="0" i="0" u="none" strike="noStrike" cap="none" normalizeH="0" baseline="0" dirty="0">
-              <a:ln>
-                <a:noFill/>
-              </a:ln>
-              <a:solidFill>
-                <a:schemeClr val="tx1"/>
-              </a:solidFill>
-              <a:effectLst/>
-            </a:endParaRPr>
-          </a:p>
-          <a:p>
-            <a:pPr marL="0" marR="0" lvl="0" indent="0" algn="ctr" defTabSz="914400" rtl="0" eaLnBrk="0" fontAlgn="base" latinLnBrk="0" hangingPunct="0">
-              <a:lnSpc>
-                <a:spcPct val="100000"/>
-              </a:lnSpc>
-              <a:spcBef>
-                <a:spcPct val="0"/>
-              </a:spcBef>
-              <a:spcAft>
-                <a:spcPct val="0"/>
-              </a:spcAft>
-              <a:buClrTx/>
-              <a:buSzTx/>
-              <a:buFontTx/>
-              <a:buNone/>
-            </a:pPr>
-            <a:endParaRPr kumimoji="0" lang="en-US" altLang="zh-CN" sz="1800" b="0" i="0" u="none" strike="noStrike" cap="none" normalizeH="0" baseline="0" dirty="0">
-              <a:ln>
-                <a:noFill/>
-              </a:ln>
-              <a:solidFill>
-                <a:schemeClr val="tx1"/>
-              </a:solidFill>
-              <a:effectLst/>
-              <a:latin typeface="Arial" panose="020B0604020202020204" pitchFamily="34" charset="0"/>
-            </a:endParaRPr>
           </a:p>
         </p:txBody>
       </p:sp>
@@ -36987,14 +34789,6 @@
           </a:bodyPr>
           <a:lstStyle/>
           <a:p>
-            <a:pPr lvl="0" algn="r" eaLnBrk="0" fontAlgn="base" hangingPunct="0">
-              <a:spcBef>
-                <a:spcPct val="0"/>
-              </a:spcBef>
-              <a:spcAft>
-                <a:spcPct val="0"/>
-              </a:spcAft>
-            </a:pPr>
             <a:r>
               <a:rPr lang="en-US" sz="2300" b="1" dirty="0">
                 <a:solidFill>
@@ -37002,21 +34796,8 @@
                 </a:solidFill>
                 <a:ea typeface="+mj-ea"/>
               </a:rPr>
-              <a:t>Programme gouvernemental, priorités du DSP et CPP 2023-2027</a:t>
+              <a:t>Programme du gouvernement, priorités du SCD et CPF 2023-2027</a:t>
             </a:r>
-            <a:endParaRPr lang="pt" sz="2300" b="1" i="0" u="none" strike="noStrike" dirty="0">
-              <a:solidFill>
-                <a:srgbClr val="2F5597"/>
-              </a:solidFill>
-              <a:highlight>
-                <a:srgbClr val="000000">
-                  <a:alpha val="0"/>
-                </a:srgbClr>
-              </a:highlight>
-              <a:latin typeface="Arial"/>
-              <a:ea typeface="+mj-ea"/>
-              <a:cs typeface="Arial"/>
-            </a:endParaRPr>
           </a:p>
         </p:txBody>
       </p:sp>
@@ -37149,9 +34930,8 @@
           <a:p>
             <a:r>
               <a:rPr lang="en-US"/>
-              <a:t>CPP 2023-2027. Version publique. Maputo, mai 2022.</a:t>
+              <a:t>CPF 2023-2027. Version publique. Maputo, mai 2022.</a:t>
             </a:r>
-            <a:endParaRPr lang="en-US" dirty="0"/>
           </a:p>
         </p:txBody>
       </p:sp>
@@ -37232,7 +35012,7 @@
                       <a:pPr algn="ctr"/>
                       <a:r>
                         <a:rPr lang="en-US" sz="900" dirty="0"/>
-                        <a:t>WBG CPF Objectives </a:t>
+                        <a:t>Objectifs CPF du GBM </a:t>
                       </a:r>
                     </a:p>
                   </a:txBody>
@@ -37296,7 +35076,7 @@
                       <a:pPr algn="ctr"/>
                       <a:r>
                         <a:rPr lang="en-US" sz="900" dirty="0"/>
-                        <a:t>WBG SCD Priorities </a:t>
+                        <a:t>Priorités SCD du GBM </a:t>
                       </a:r>
                     </a:p>
                   </a:txBody>
@@ -37398,7 +35178,7 @@
           <a:p>
             <a:r>
               <a:rPr lang="en-US" dirty="0"/>
-              <a:t>Introduction : Qu'est-ce que le CPP, pourquoi les consultations et quelles sont les attentes</a:t>
+              <a:t>Introduction : qu'est-ce que le CPF, pourquoi les consultations et quelles sont les attentes</a:t>
             </a:r>
           </a:p>
         </p:txBody>
@@ -37433,114 +35213,61 @@
           <a:p>
             <a:r>
               <a:rPr lang="en-US" dirty="0"/>
-              <a:t>Le Cadre de partenariat pays (CPP) Mozambique est l'instrument directeur du soutien du Groupe de la Banque mondiale (GBM), y compris la SFI et la MIGA, au Mozambique dans la poursuite de ses objectifs de développement.</a:t>
+              <a:t>Le Cadre de partenariat-pays (CPF) pour le Mozambique est l'instrument directeur du soutien apporté par le Groupe de la Banque mondiale (GBM), y compris l'IFC et la MIGA, au Mozambique dans la poursuite de ses objectifs de développement.</a:t>
             </a:r>
           </a:p>
           <a:p>
             <a:r>
               <a:rPr lang="en-US" dirty="0"/>
-              <a:t>Le CPP définit les objectifs et les résultats attendus du partenariat entre le GBM et le gouvernement du Mozambique sur une période donnée (4 à 5 ans).</a:t>
+              <a:t>Le CPF définit les objectifs et les résultats attendus du partenariat entre le GBM et le gouvernement du Mozambique sur une période donnée (4 à 5 ans).</a:t>
             </a:r>
           </a:p>
           <a:p>
             <a:r>
               <a:rPr lang="en-US" dirty="0"/>
-              <a:t>Le CPF repose sur les éléments suivants : (i) les priorités définies par les plans de développement du pays (PQG, ENDE, </a:t>
+              <a:t>Le CPF repose sur les éléments suivants : (i) les priorités définies par les plans de développement du pays (PQG, ENDE, etc.) ; (ii) un Diagnostic-pays systématique (SCD) de la Banque mondiale, ainsi que d'autres analyses et connaissances produites ; (iii) les enseignements tirés de la mise en œuvre des stratégies antérieures (CLR) et les avantages comparatifs de la Banque mondiale.</a:t>
             </a:r>
-            <a:r>
-              <a:rPr lang="en-US" dirty="0" err="1"/>
-              <a:t>etc</a:t>
-            </a:r>
+          </a:p>
+          <a:p>
             <a:r>
               <a:rPr lang="en-US" dirty="0"/>
-              <a:t>) ; (ii) un Diagnostic Systématique Pays (SCD) de la Banque mondiale, d'autres analyses et connaissances produites ; (iii) les enseignements tirés de la mise en œuvre des stratégies précédentes (CLR) et les avantages comparatifs de la Banque mondiale.</a:t>
+              <a:t>Le travail du GBM est axé sur l'élimination de l'extrême pauvreté et la réduction des inégalités.</a:t>
             </a:r>
           </a:p>
           <a:p>
             <a:r>
               <a:rPr lang="en-US" dirty="0"/>
-              <a:t>L'axe de travail du GBM est l'élimination de la pauvreté extrême et la réduction des inégalités.</a:t>
+              <a:t>Le GBM élabore actuellement un CPF actualisé couvrant la période des exercices budgétaires 23-27. </a:t>
             </a:r>
           </a:p>
           <a:p>
             <a:r>
               <a:rPr lang="en-US" dirty="0"/>
-              <a:t>Actuellement, le GBM prépare un CPP actualisé couvrant la période exercice budgétaire 23-27. </a:t>
+              <a:t>Le nouveau CPF expose les aspirations et objectifs préliminaires du partenariat avec le Mozambique pour les cinq prochaines années. </a:t>
             </a:r>
           </a:p>
           <a:p>
             <a:r>
               <a:rPr lang="en-US" dirty="0"/>
-              <a:t>Le nouveau CPP définit les aspirations et objectifs préliminaires du partenariat avec le Mozambique pour les 5 prochaines années. </a:t>
+              <a:t>Le présent document présente un résumé de la note de cadrage du CPF afin de recueillir des contributions sur les questions suivantes :</a:t>
             </a:r>
           </a:p>
           <a:p>
             <a:r>
               <a:rPr lang="en-US" dirty="0"/>
-              <a:t>Ce document présente un résumé de la note conceptuelle du CPP dans le but d'obtenir des contributions sur les questions suivantes :</a:t>
-            </a:r>
-          </a:p>
-          <a:p>
-            <a:pPr lvl="3">
-              <a:lnSpc>
-                <a:spcPct val="100000"/>
-              </a:lnSpc>
-              <a:spcBef>
-                <a:spcPts val="1200"/>
-              </a:spcBef>
-            </a:pPr>
-            <a:r>
-              <a:rPr lang="en-US" sz="1400" b="1" dirty="0">
-                <a:highlight>
-                  <a:srgbClr val="000000">
-                    <a:alpha val="0"/>
-                  </a:srgbClr>
-                </a:highlight>
-                <a:latin typeface="Arial"/>
-              </a:rPr>
               <a:t>Approfondir la discussion sur chaque pilier de la stratégie et ses objectifs.</a:t>
             </a:r>
           </a:p>
           <a:p>
-            <a:pPr lvl="3">
-              <a:lnSpc>
-                <a:spcPct val="100000"/>
-              </a:lnSpc>
-              <a:spcBef>
-                <a:spcPts val="1200"/>
-              </a:spcBef>
-            </a:pPr>
             <a:r>
-              <a:rPr lang="en-US" sz="1400" b="1" dirty="0">
-                <a:highlight>
-                  <a:srgbClr val="000000">
-                    <a:alpha val="0"/>
-                  </a:srgbClr>
-                </a:highlight>
-                <a:latin typeface="Arial"/>
-              </a:rPr>
-              <a:t>Définition des priorités et des instruments (y compris le financement), en tenant compte du contexte et des défis de développement spécifiques.</a:t>
+              <a:rPr lang="en-US" dirty="0"/>
+              <a:t>Définition des priorités et des instruments (y compris le financement), en tenant compte du contexte et des défis spécifiques de développement.</a:t>
             </a:r>
           </a:p>
           <a:p>
-            <a:pPr lvl="3">
-              <a:lnSpc>
-                <a:spcPct val="100000"/>
-              </a:lnSpc>
-              <a:spcBef>
-                <a:spcPts val="1200"/>
-              </a:spcBef>
-            </a:pPr>
             <a:r>
-              <a:rPr lang="en-US" sz="1400" b="1" dirty="0">
-                <a:highlight>
-                  <a:srgbClr val="000000">
-                    <a:alpha val="0"/>
-                  </a:srgbClr>
-                </a:highlight>
-                <a:latin typeface="Arial"/>
-              </a:rPr>
-              <a:t>Définition des mécanismes de suivi du CPP (indicateurs)</a:t>
+              <a:rPr lang="en-US" dirty="0"/>
+              <a:t>Définition des mécanismes de suivi du CPF (indicateurs)</a:t>
             </a:r>
           </a:p>
         </p:txBody>
@@ -37568,9 +35295,8 @@
           <a:p>
             <a:r>
               <a:rPr lang="en-US"/>
-              <a:t>CPP 2023-2027. Version publique. Maputo, mai 2022.</a:t>
+              <a:t>CPF 2023-2027. Version publique. Maputo, mai 2022.</a:t>
             </a:r>
-            <a:endParaRPr lang="en-US" dirty="0"/>
           </a:p>
         </p:txBody>
       </p:sp>
@@ -37662,38 +35388,17 @@
           </a:bodyPr>
           <a:lstStyle/>
           <a:p>
-            <a:pPr algn="ctr"/>
-            <a:br>
-              <a:rPr lang="en-US" sz="2400" dirty="0"/>
-            </a:br>
-            <a:br>
-              <a:rPr lang="en-US" sz="2400" dirty="0"/>
-            </a:br>
-            <a:br>
-              <a:rPr lang="en-US" sz="2400" dirty="0"/>
-            </a:br>
             <a:r>
               <a:rPr lang="en-US" sz="2400" dirty="0"/>
-              <a:t>Mise en œuvre du CPP 2023-2027 : Priorisation</a:t>
+              <a:t>Mise en œuvre du CPF 2023-2027 : priorisation
+</a:t>
             </a:r>
-            <a:br/>
+          </a:p>
+          <a:p>
             <a:r>
               <a:rPr lang="en-US" sz="2400" dirty="0"/>
               <a:t/>
             </a:r>
-            <a:br/>
-            <a:r>
-              <a:rPr lang="en-US" sz="2400" dirty="0"/>
-              <a:t/>
-            </a:r>
-            <a:endParaRPr lang="pt" sz="2400" b="0" i="1" u="none" strike="noStrike" dirty="0">
-              <a:highlight>
-                <a:srgbClr val="000000">
-                  <a:alpha val="0"/>
-                </a:srgbClr>
-              </a:highlight>
-              <a:latin typeface="Arial"/>
-            </a:endParaRPr>
           </a:p>
         </p:txBody>
       </p:sp>
@@ -37725,7 +35430,6 @@
           </a:bodyPr>
           <a:lstStyle/>
           <a:p>
-            <a:pPr algn="just" rtl="0"/>
             <a:r>
               <a:rPr lang="en-US" sz="1600" b="1" i="0" u="none" strike="noStrike" dirty="0">
                 <a:highlight>
@@ -37735,30 +35439,10 @@
                 </a:highlight>
                 <a:latin typeface="Arial"/>
               </a:rPr>
-              <a:t>Au cours des 12 à 24 prochains mois, le CPF donnera la priorité aux réformes et aux investissements susceptibles de protéger les perspectives de croissance du pays.</a:t>
+              <a:t>Au cours des 12 à 24 prochains mois, le CPF accordera la priorité aux réformes et investissements susceptibles de protéger les perspectives de croissance du pays. À moyen terme, le CPF privilégiera certaines réformes et investissements transformateurs susceptibles d'enclencher une croissance plus verte et plus inclusive.</a:t>
             </a:r>
-            <a:r>
-              <a:rPr lang="en-US" sz="1600" i="0" u="none" strike="noStrike" dirty="0">
-                <a:highlight>
-                  <a:srgbClr val="000000">
-                    <a:alpha val="0"/>
-                  </a:srgbClr>
-                </a:highlight>
-                <a:latin typeface="Arial"/>
-              </a:rPr>
-              <a:t> À moyen terme, le CPF donnera la priorité à certaines réformes et certains investissements transformateurs susceptibles de déclencher une croissance plus verte et plus inclusive.</a:t>
-            </a:r>
-            <a:endParaRPr lang="en-US" sz="1600" b="1" i="0" u="none" strike="noStrike" dirty="0">
-              <a:highlight>
-                <a:srgbClr val="000000">
-                  <a:alpha val="0"/>
-                </a:srgbClr>
-              </a:highlight>
-              <a:latin typeface="Arial"/>
-            </a:endParaRPr>
-          </a:p>
-          <a:p>
-            <a:pPr algn="just" rtl="0"/>
+          </a:p>
+          <a:p>
             <a:r>
               <a:rPr lang="en-US" sz="1600" b="1" i="0" u="none" strike="noStrike" dirty="0">
                 <a:highlight>
@@ -37768,30 +35452,10 @@
                 </a:highlight>
                 <a:latin typeface="Arial"/>
               </a:rPr>
-              <a:t>Pour faire face aux vents contraires d'une économie mondiale difficile, le CPF privilégiera les activités qui renforcent davantage la stabilité macroéconomique, améliorent la préparation aux chocs climatiques </a:t>
+              <a:t>Pour faire face aux vents contraires d'une économie mondiale difficile, le CPF privilégiera les activités qui préservent davantage la stabilité macroéconomique, améliorent la préparation aux chocs climatiques et garantissent la stabilité et la sécurité dans le Nord, tout en maintenant l'accent sur la prévention des crises, la réponse et la résilience, sur la base de l'Allocation pour la prévention et la résilience.</a:t>
             </a:r>
-            <a:r>
-              <a:rPr lang="en-US" sz="1600" i="0" u="none" strike="noStrike" dirty="0">
-                <a:highlight>
-                  <a:srgbClr val="000000">
-                    <a:alpha val="0"/>
-                  </a:srgbClr>
-                </a:highlight>
-                <a:latin typeface="Arial"/>
-              </a:rPr>
-              <a:t>et garantissent la stabilité et la sécurité dans le Nord, tout en maintenant un accent sur la prévention des crises, la réponse et la résilience, sur la base de l'Allocation pour la Prévention et la Résilience.</a:t>
-            </a:r>
-            <a:endParaRPr lang="en-US" sz="1600" b="1" i="0" u="none" strike="noStrike" dirty="0">
-              <a:highlight>
-                <a:srgbClr val="000000">
-                  <a:alpha val="0"/>
-                </a:srgbClr>
-              </a:highlight>
-              <a:latin typeface="Arial"/>
-            </a:endParaRPr>
-          </a:p>
-          <a:p>
-            <a:pPr algn="just" rtl="0"/>
+          </a:p>
+          <a:p>
             <a:r>
               <a:rPr lang="en-US" sz="1600" b="1" i="0" u="none" strike="noStrike" dirty="0">
                 <a:highlight>
@@ -37801,30 +35465,10 @@
                 </a:highlight>
                 <a:latin typeface="Arial"/>
               </a:rPr>
-              <a:t>Le CPF aidera également le gouvernement à débloquer des investissements privés supplémentaires </a:t>
+              <a:t>Le CPF aidera également le gouvernement à débloquer des investissements privés supplémentaires et des gains de productivité potentiels susceptibles d'accélérer la croissance économique et l'inclusion à court terme.</a:t>
             </a:r>
-            <a:r>
-              <a:rPr lang="en-US" sz="1600" i="0" u="none" strike="noStrike" dirty="0">
-                <a:highlight>
-                  <a:srgbClr val="000000">
-                    <a:alpha val="0"/>
-                  </a:srgbClr>
-                </a:highlight>
-                <a:latin typeface="Arial"/>
-              </a:rPr>
-              <a:t>et des gains de productivité potentiels susceptibles d'accélérer la croissance économique et l'inclusion à court terme.</a:t>
-            </a:r>
-            <a:endParaRPr lang="en-US" sz="1600" b="1" i="0" u="none" strike="noStrike" dirty="0">
-              <a:highlight>
-                <a:srgbClr val="000000">
-                  <a:alpha val="0"/>
-                </a:srgbClr>
-              </a:highlight>
-              <a:latin typeface="Arial"/>
-            </a:endParaRPr>
-          </a:p>
-          <a:p>
-            <a:pPr algn="just" rtl="0"/>
+          </a:p>
+          <a:p>
             <a:r>
               <a:rPr lang="en-US" sz="1600" b="1" i="0" u="none" strike="noStrike" dirty="0">
                 <a:highlight>
@@ -37834,20 +35478,8 @@
                 </a:highlight>
                 <a:latin typeface="Arial"/>
               </a:rPr>
-              <a:t>Pour libérer une croissance plus verte et plus inclusive</a:t>
+              <a:t>Pour libérer une croissance plus verte et plus inclusive, le CPF privilégiera les activités qui (i) permettent l'exploitation d'une ressource naturelle tout en renforçant la gestion des ressources naturelles – orientant progressivement le pays vers une trajectoire bas carbone (intégrant la recommandation du Rapport sur le changement climatique et le développement (à paraître prochainement)) – et (ii) accélèrent le processus de transformation structurelle (économique et spatiale), notamment par la modernisation de l'agriculture et une meilleure gestion du processus d'urbanisation.</a:t>
             </a:r>
-            <a:r>
-              <a:rPr lang="en-US" sz="1600" i="0" u="none" strike="noStrike" dirty="0">
-                <a:highlight>
-                  <a:srgbClr val="000000">
-                    <a:alpha val="0"/>
-                  </a:srgbClr>
-                </a:highlight>
-                <a:latin typeface="Arial"/>
-              </a:rPr>
-              <a:t>, le CPF donnera la priorité aux activités qui (i) permettent l'exploitation d'une ressource naturelle tout en renforçant la gestion des ressources naturelles — orientant progressivement le pays vers une trajectoire bas carbone (en intégrant les recommandations du Rapport sur le Changement Climatique et le Développement (à paraître prochainement)) et (ii) accélèrent le processus de transformation structurelle (économique et spatiale), notamment par la modernisation de l'agriculture et une meilleure gestion du processus d'urbanisation.</a:t>
-            </a:r>
-            <a:endParaRPr lang="en-US" sz="1600" dirty="0"/>
           </a:p>
         </p:txBody>
       </p:sp>
@@ -37874,9 +35506,8 @@
           <a:p>
             <a:r>
               <a:rPr lang="en-US"/>
-              <a:t>CPP 2023-2027. Version publique. Maputo, mai 2022.</a:t>
+              <a:t>CPF 2023-2027. Version publique. Maputo, mai 2022.</a:t>
             </a:r>
-            <a:endParaRPr lang="en-US" dirty="0"/>
           </a:p>
         </p:txBody>
       </p:sp>
@@ -37998,29 +35629,17 @@
           </a:bodyPr>
           <a:lstStyle/>
           <a:p>
-            <a:pPr algn="ctr"/>
             <a:r>
               <a:rPr lang="en-US" sz="2400" dirty="0"/>
-              <a:t>Mise en œuvre du CPP 2023-2027 : Priorisation</a:t>
+              <a:t>Mise en œuvre du CPF 2023-2027 : priorisation
+</a:t>
             </a:r>
-            <a:br/>
+          </a:p>
+          <a:p>
             <a:r>
               <a:rPr lang="en-US" sz="2400" dirty="0"/>
               <a:t/>
             </a:r>
-            <a:br/>
-            <a:r>
-              <a:rPr lang="en-US" sz="2400" dirty="0"/>
-              <a:t/>
-            </a:r>
-            <a:endParaRPr lang="pt" sz="2400" b="1" i="0" u="none" strike="noStrike" dirty="0">
-              <a:highlight>
-                <a:srgbClr val="000000">
-                  <a:alpha val="0"/>
-                </a:srgbClr>
-              </a:highlight>
-              <a:latin typeface="Arial"/>
-            </a:endParaRPr>
           </a:p>
         </p:txBody>
       </p:sp>
@@ -38052,7 +35671,6 @@
           </a:bodyPr>
           <a:lstStyle/>
           <a:p>
-            <a:pPr algn="just" rtl="0"/>
             <a:r>
               <a:rPr lang="en-US" sz="1600" b="0" i="0" u="none" strike="noStrike" dirty="0">
                 <a:highlight>
@@ -38062,19 +35680,10 @@
                 </a:highlight>
                 <a:latin typeface="Arial"/>
               </a:rPr>
-              <a:t>Les réformes donneront la priorité aux secteurs identifiés par l'IFC dans le cadre de sa Stratégie </a:t>
+              <a:t>Les réformes accorderont la priorité aux industries identifiées par l'IFC dans sa Stratégie EB22-26 afin de maximiser la mobilisation de capitaux privés. Les priorités finales seront toutefois choisies sur la base de consultations supplémentaires avec le gouvernement.</a:t>
             </a:r>
-            <a:r>
-              <a:rPr lang="en-US" sz="1600" dirty="0">
-                <a:highlight>
-                  <a:srgbClr val="000000">
-                    <a:alpha val="0"/>
-                  </a:srgbClr>
-                </a:highlight>
-                <a:latin typeface="Arial"/>
-              </a:rPr>
-              <a:t>EX</a:t>
-            </a:r>
+          </a:p>
+          <a:p>
             <a:r>
               <a:rPr lang="en-US" sz="1600" b="0" i="0" u="none" strike="noStrike" dirty="0">
                 <a:highlight>
@@ -38084,11 +35693,10 @@
                 </a:highlight>
                 <a:latin typeface="Arial"/>
               </a:rPr>
-              <a:t>22-26 afin de maximiser la mobilisation de capitaux privés. Toutefois, les priorités définitives seront choisies sur la base de consultations approfondies avec le gouvernement.</a:t>
+              <a:t>Les engagements du pays en matière d'objectifs et de réformes pour la prévention des conflits et de la violence (PRA) constituent l'un des fondements du prochain CPF.</a:t>
             </a:r>
           </a:p>
           <a:p>
-            <a:pPr algn="just" rtl="0"/>
             <a:r>
               <a:rPr lang="en-US" sz="1600" b="0" i="0" u="none" strike="noStrike" dirty="0">
                 <a:highlight>
@@ -38098,19 +35706,10 @@
                 </a:highlight>
                 <a:latin typeface="Arial"/>
               </a:rPr>
-              <a:t>Les engagements du pays en faveur d'objectifs et de réformes pour la </a:t>
+              <a:t>En complément du portefeuille actuel non décaissé, le pipeline proposé remettra l'accent sur l'appui budgétaire – avec une éventuelle série de trois Opérations de politique de développement (DPO) à l'étude.</a:t>
             </a:r>
-            <a:r>
-              <a:rPr lang="en-US" sz="1600" b="1" i="0" u="none" strike="noStrike" dirty="0">
-                <a:highlight>
-                  <a:srgbClr val="000000">
-                    <a:alpha val="0"/>
-                  </a:srgbClr>
-                </a:highlight>
-                <a:latin typeface="Arial"/>
-              </a:rPr>
-              <a:t>prévention des conflits et de la violence </a:t>
-            </a:r>
+          </a:p>
+          <a:p>
             <a:r>
               <a:rPr lang="en-US" sz="1600" b="0" i="0" u="none" strike="noStrike" dirty="0">
                 <a:highlight>
@@ -38120,11 +35719,10 @@
                 </a:highlight>
                 <a:latin typeface="Arial"/>
               </a:rPr>
-              <a:t>(PRA) constituent l'un des fondements du prochain CPF.</a:t>
+              <a:t>Cet accent s'appuie sur (i) l'intérêt renouvelé pour les réformes gouvernementales et (ii) le récent accord entre le FMI et le gouvernement au titre de la Facilité élargie de crédit (FEC) pour 2022-2025.</a:t>
             </a:r>
           </a:p>
           <a:p>
-            <a:pPr algn="just" rtl="0"/>
             <a:r>
               <a:rPr lang="en-US" sz="1600" b="0" i="0" u="none" strike="noStrike" dirty="0">
                 <a:highlight>
@@ -38134,11 +35732,10 @@
                 </a:highlight>
                 <a:latin typeface="Arial"/>
               </a:rPr>
-              <a:t>En complément du portefeuille actuel non décaissé, le pipeline proposé mettra à nouveau l'accent sur l'appui budgétaire — avec une série potentielle de trois Opérations de politique de développement (OPD) à l'étude.</a:t>
+              <a:t>Le nouveau CPF renforcera également les opérations définies sur une base spatiale.</a:t>
             </a:r>
           </a:p>
           <a:p>
-            <a:pPr algn="just" rtl="0"/>
             <a:r>
               <a:rPr lang="en-US" sz="1600" b="0" i="0" u="none" strike="noStrike" dirty="0">
                 <a:highlight>
@@ -38148,11 +35745,10 @@
                 </a:highlight>
                 <a:latin typeface="Arial"/>
               </a:rPr>
-              <a:t>Cet accent s'appuie sur (i) l'intérêt renouvelé du gouvernement pour la réforme et (ii) l'accord récent entre le FMI et le gouvernement dans le cadre de la Facilité de crédit élargie (FCE) pour 2022-2025.</a:t>
+              <a:t>Durant la mise en œuvre du CPF, des efforts seront déployés pour exécuter efficacement le portefeuille de la Banque mondiale.</a:t>
             </a:r>
           </a:p>
           <a:p>
-            <a:pPr algn="just" rtl="0"/>
             <a:r>
               <a:rPr lang="en-US" sz="1600" b="0" i="0" u="none" strike="noStrike" dirty="0">
                 <a:highlight>
@@ -38162,11 +35758,10 @@
                 </a:highlight>
                 <a:latin typeface="Arial"/>
               </a:rPr>
-              <a:t>Le nouveau CPP renforcera également les opérations à définition spatiale.</a:t>
+              <a:t>Le nouveau CPF s'attachera à privilégier un nombre réduit de projets, de plus grande valeur et aux objectifs multisectoriels.</a:t>
             </a:r>
           </a:p>
           <a:p>
-            <a:pPr algn="just" rtl="0"/>
             <a:r>
               <a:rPr lang="en-US" sz="1600" b="0" i="0" u="none" strike="noStrike" dirty="0">
                 <a:highlight>
@@ -38176,11 +35771,10 @@
                 </a:highlight>
                 <a:latin typeface="Arial"/>
               </a:rPr>
-              <a:t>Pendant la mise en œuvre du CPP, des efforts seront déployés pour mettre en œuvre efficacement le portefeuille de la Banque mondiale.</a:t>
+              <a:t>Les thèmes pertinents (transversaux) seront notamment le climat, le genre, l'engagement citoyen et la collaboration public-privé.</a:t>
             </a:r>
           </a:p>
           <a:p>
-            <a:pPr algn="just" rtl="0"/>
             <a:r>
               <a:rPr lang="en-US" sz="1600" b="0" i="0" u="none" strike="noStrike" dirty="0">
                 <a:highlight>
@@ -38190,55 +35784,8 @@
                 </a:highlight>
                 <a:latin typeface="Arial"/>
               </a:rPr>
-              <a:t>Le nouveau CPP visera à prioriser un nombre réduit de projets, de plus grande valeur et à objectifs multisectoriels.</a:t>
+              <a:t> Le CPF tiendra également compte des opportunités ouvertes par les accords commerciaux régionaux, en particulier la Zone de libre-échange continentale africaine.</a:t>
             </a:r>
-          </a:p>
-          <a:p>
-            <a:pPr algn="just" rtl="0"/>
-            <a:r>
-              <a:rPr lang="en-US" sz="1600" b="0" i="0" u="none" strike="noStrike" dirty="0">
-                <a:highlight>
-                  <a:srgbClr val="000000">
-                    <a:alpha val="0"/>
-                  </a:srgbClr>
-                </a:highlight>
-                <a:latin typeface="Arial"/>
-              </a:rPr>
-              <a:t>Les thèmes transversaux pertinents seront, entre autres, le climat, le genre, l'engagement citoyen et la collaboration public-privé.</a:t>
-            </a:r>
-          </a:p>
-          <a:p>
-            <a:pPr algn="just" rtl="0"/>
-            <a:r>
-              <a:rPr lang="en-US" sz="1600" b="0" i="0" u="none" strike="noStrike" dirty="0">
-                <a:highlight>
-                  <a:srgbClr val="000000">
-                    <a:alpha val="0"/>
-                  </a:srgbClr>
-                </a:highlight>
-                <a:latin typeface="Arial"/>
-              </a:rPr>
-              <a:t> Le CPF examinera également les opportunités offertes par les accords commerciaux régionaux, en particulier la </a:t>
-            </a:r>
-            <a:r>
-              <a:rPr lang="pt" sz="1600" i="1" dirty="0">
-                <a:highlight>
-                  <a:srgbClr val="000000">
-                    <a:alpha val="0"/>
-                  </a:srgbClr>
-                </a:highlight>
-                <a:latin typeface="Arial"/>
-              </a:rPr>
-              <a:t>Zone de Libre-Échange Continentale Africaine.</a:t>
-            </a:r>
-            <a:endParaRPr lang="pt" sz="1600" b="0" i="0" u="none" strike="noStrike" dirty="0">
-              <a:highlight>
-                <a:srgbClr val="000000">
-                  <a:alpha val="0"/>
-                </a:srgbClr>
-              </a:highlight>
-              <a:latin typeface="Arial"/>
-            </a:endParaRPr>
           </a:p>
         </p:txBody>
       </p:sp>
@@ -38265,9 +35812,8 @@
           <a:p>
             <a:r>
               <a:rPr lang="en-US"/>
-              <a:t>CPP 2023-2027. Version publique. Maputo, mai 2022.</a:t>
+              <a:t>CPF 2023-2027. Version publique. Maputo, mai 2022.</a:t>
             </a:r>
-            <a:endParaRPr lang="en-US" dirty="0"/>
           </a:p>
         </p:txBody>
       </p:sp>
@@ -38394,9 +35940,6 @@
           </a:bodyPr>
           <a:lstStyle/>
           <a:p>
-            <a:pPr lvl="0">
-              <a:defRPr/>
-            </a:pPr>
             <a:r>
               <a:rPr kumimoji="0" lang="en-US" sz="1100" b="0" i="1" u="none" strike="noStrike" kern="1200" cap="none" spc="0" normalizeH="0" baseline="0" noProof="0" dirty="0">
                 <a:ln>
@@ -38412,31 +35955,8 @@
                 <a:ea typeface="+mn-ea"/>
                 <a:cs typeface="+mn-cs"/>
               </a:rPr>
-              <a:t>(*) </a:t>
+              <a:t>(*) En supposant l'exécution du pipeline EB22. Valeurs approximatives </a:t>
             </a:r>
-            <a:r>
-              <a:rPr lang="en-US" sz="1100" i="1" dirty="0">
-                <a:solidFill>
-                  <a:prstClr val="black"/>
-                </a:solidFill>
-                <a:latin typeface="Calibri" panose="020F0502020204030204"/>
-              </a:rPr>
-              <a:t>Sur la base de l'exécution du pipeline AF22. Valeurs approximatives </a:t>
-            </a:r>
-            <a:endParaRPr kumimoji="0" lang="en-US" sz="1100" b="0" i="1" u="none" strike="noStrike" kern="1200" cap="none" spc="0" normalizeH="0" baseline="0" noProof="0" dirty="0">
-              <a:ln>
-                <a:noFill/>
-              </a:ln>
-              <a:solidFill>
-                <a:prstClr val="black"/>
-              </a:solidFill>
-              <a:effectLst/>
-              <a:uLnTx/>
-              <a:uFillTx/>
-              <a:latin typeface="Calibri" panose="020F0502020204030204"/>
-              <a:ea typeface="+mn-ea"/>
-              <a:cs typeface="+mn-cs"/>
-            </a:endParaRPr>
           </a:p>
         </p:txBody>
       </p:sp>
@@ -38632,9 +36152,6 @@
             </a:lvl9pPr>
           </a:lstStyle>
           <a:p>
-            <a:pPr lvl="0" algn="just">
-              <a:defRPr/>
-            </a:pPr>
             <a:r>
               <a:rPr lang="en-US" sz="1600" dirty="0">
                 <a:solidFill>
@@ -38643,20 +36160,10 @@
                 <a:latin typeface="Arial" panose="020B0604020202020204" pitchFamily="34" charset="0"/>
                 <a:cs typeface="Arial" panose="020B0604020202020204" pitchFamily="34" charset="0"/>
               </a:rPr>
-              <a:t>Le nouveau CPF héritera d'un portefeuille de 34 projets (au 22 février), totalisant environ US$4,1 milliards, dont </a:t>
+              <a:t>Le nouveau CPF héritera d'un portefeuille de 34 projets (au 22 février), totalisant environ 4,1 milliards de dollars US, dont 74 % n'avaient pas été décaissés (au 22 février).</a:t>
             </a:r>
-            <a:r>
-              <a:rPr lang="en-US" sz="1600" dirty="0">
-                <a:latin typeface="Arial" panose="020B0604020202020204" pitchFamily="34" charset="0"/>
-                <a:cs typeface="Arial" panose="020B0604020202020204" pitchFamily="34" charset="0"/>
-              </a:rPr>
-              <a:t>74 % n'avaient pas été décaissés (au 22 février).</a:t>
-            </a:r>
-          </a:p>
-          <a:p>
-            <a:pPr lvl="0" algn="just">
-              <a:defRPr/>
-            </a:pPr>
+          </a:p>
+          <a:p>
             <a:r>
               <a:rPr lang="en-US" sz="1600" dirty="0">
                 <a:solidFill>
@@ -38665,13 +36172,10 @@
                 <a:latin typeface="Arial" panose="020B0604020202020204" pitchFamily="34" charset="0"/>
                 <a:cs typeface="Arial" panose="020B0604020202020204" pitchFamily="34" charset="0"/>
               </a:rPr>
-              <a:t>15 projets (environ 30 % du portefeuille actuel, correspondant à 1,4 milliard USD) ont une date de clôture avant janvier 2025 (mi-cycle du CPP).</a:t>
+              <a:t>15 projets (environ 30 % du portefeuille actuel, correspondant à 1,4 milliard de dollars US) ont une date de fin antérieure à janvier 2025 (la moitié du cycle du CPF).</a:t>
             </a:r>
           </a:p>
           <a:p>
-            <a:pPr lvl="0" algn="just">
-              <a:defRPr/>
-            </a:pPr>
             <a:r>
               <a:rPr lang="en-US" sz="1600" dirty="0">
                 <a:solidFill>
@@ -38680,13 +36184,10 @@
                 <a:latin typeface="Arial" panose="020B0604020202020204" pitchFamily="34" charset="0"/>
                 <a:cs typeface="Arial" panose="020B0604020202020204" pitchFamily="34" charset="0"/>
               </a:rPr>
-              <a:t>Environ 66 % des fonds non décaissés totaux se trouvent dans les secteurs du Développement durable (DD) et des Infrastructures (INFRA)</a:t>
+              <a:t>Environ 66 % du total des fonds non décaissés relèvent des secteurs du Développement durable (SD) et des Infrastructures (INFRA).</a:t>
             </a:r>
           </a:p>
           <a:p>
-            <a:pPr lvl="0" algn="just">
-              <a:defRPr/>
-            </a:pPr>
             <a:r>
               <a:rPr lang="en-US" sz="1600" dirty="0">
                 <a:solidFill>
@@ -38695,13 +36196,10 @@
                 <a:latin typeface="Arial" panose="020B0604020202020204" pitchFamily="34" charset="0"/>
                 <a:cs typeface="Arial" panose="020B0604020202020204" pitchFamily="34" charset="0"/>
               </a:rPr>
-              <a:t>Nouvelle ABP IDA (estimée) : 1,7 milliard USD</a:t>
+              <a:t>Nouvelle IDA PBA (estimée) : 1,7 milliard de dollars US</a:t>
             </a:r>
           </a:p>
           <a:p>
-            <a:pPr lvl="0" algn="just">
-              <a:defRPr/>
-            </a:pPr>
             <a:r>
               <a:rPr lang="en-US" sz="1600" dirty="0">
                 <a:solidFill>
@@ -38710,13 +36208,10 @@
                 <a:latin typeface="Arial" panose="020B0604020202020204" pitchFamily="34" charset="0"/>
                 <a:cs typeface="Arial" panose="020B0604020202020204" pitchFamily="34" charset="0"/>
               </a:rPr>
-              <a:t>IDA – Fenêtre APR (potentiel) : 700 millions USD (IDA-20)</a:t>
+              <a:t>IDA – Guichet PRA (potentiel) : 700 millions de dollars US (IDA-20)</a:t>
             </a:r>
           </a:p>
           <a:p>
-            <a:pPr lvl="0" algn="just">
-              <a:defRPr/>
-            </a:pPr>
             <a:r>
               <a:rPr lang="en-US" sz="1600" dirty="0">
                 <a:solidFill>
@@ -38725,59 +36220,32 @@
                 <a:latin typeface="Arial" panose="020B0604020202020204" pitchFamily="34" charset="0"/>
                 <a:cs typeface="Arial" panose="020B0604020202020204" pitchFamily="34" charset="0"/>
               </a:rPr>
-              <a:t>Investissements SFI : La Stratégie de la SFI prévoit des investissements pouvant atteindre 923 milliards USD (scénario plus optimiste) </a:t>
+              <a:t>Investissements de l'IFC : la Stratégie de l'IFC prévoit des investissements pouvant atteindre 923 milliards de dollars US (scénario le plus optimiste) </a:t>
             </a:r>
           </a:p>
           <a:p>
-            <a:pPr marL="0" lvl="0" indent="0" algn="just">
-              <a:buNone/>
-              <a:defRPr/>
-            </a:pPr>
-            <a:endParaRPr kumimoji="0" lang="en-US" sz="1600" b="0" i="0" u="none" strike="noStrike" kern="1200" cap="none" spc="0" normalizeH="0" baseline="0" noProof="0" dirty="0">
-              <a:ln>
-                <a:noFill/>
-              </a:ln>
-              <a:solidFill>
-                <a:prstClr val="black"/>
-              </a:solidFill>
-              <a:effectLst/>
-              <a:uLnTx/>
-              <a:uFillTx/>
-              <a:latin typeface="Arial" panose="020B0604020202020204" pitchFamily="34" charset="0"/>
-              <a:cs typeface="Arial" panose="020B0604020202020204" pitchFamily="34" charset="0"/>
-            </a:endParaRPr>
-          </a:p>
-          <a:p>
-            <a:pPr marL="228600" marR="0" lvl="0" indent="-228600" algn="just" defTabSz="914400" rtl="0" eaLnBrk="1" fontAlgn="auto" latinLnBrk="0" hangingPunct="1">
-              <a:lnSpc>
-                <a:spcPct val="90000"/>
-              </a:lnSpc>
-              <a:spcBef>
-                <a:spcPts val="1000"/>
-              </a:spcBef>
-              <a:spcAft>
-                <a:spcPts val="0"/>
-              </a:spcAft>
-              <a:buClrTx/>
-              <a:buSzTx/>
-              <a:buFont typeface="Arial" panose="020B0604020202020204" pitchFamily="34" charset="0"/>
-              <a:buChar char="•"/>
-              <a:tabLst/>
-              <a:defRPr/>
-            </a:pPr>
-            <a:endParaRPr kumimoji="0" lang="en-US" sz="1600" b="0" i="0" u="none" strike="noStrike" kern="1200" cap="none" spc="0" normalizeH="0" baseline="0" noProof="0" dirty="0">
-              <a:ln>
-                <a:noFill/>
-              </a:ln>
-              <a:solidFill>
-                <a:prstClr val="black"/>
-              </a:solidFill>
-              <a:effectLst/>
-              <a:uLnTx/>
-              <a:uFillTx/>
-              <a:latin typeface="Arial" panose="020B0604020202020204" pitchFamily="34" charset="0"/>
-              <a:cs typeface="Arial" panose="020B0604020202020204" pitchFamily="34" charset="0"/>
-            </a:endParaRPr>
+            <a:r>
+              <a:rPr lang="en-US" sz="1600" dirty="0">
+                <a:solidFill>
+                  <a:prstClr val="black"/>
+                </a:solidFill>
+                <a:latin typeface="Arial" panose="020B0604020202020204" pitchFamily="34" charset="0"/>
+                <a:cs typeface="Arial" panose="020B0604020202020204" pitchFamily="34" charset="0"/>
+              </a:rPr>
+              <a:t/>
+            </a:r>
+          </a:p>
+          <a:p>
+            <a:r>
+              <a:rPr lang="en-US" sz="1600" dirty="0">
+                <a:solidFill>
+                  <a:prstClr val="black"/>
+                </a:solidFill>
+                <a:latin typeface="Arial" panose="020B0604020202020204" pitchFamily="34" charset="0"/>
+                <a:cs typeface="Arial" panose="020B0604020202020204" pitchFamily="34" charset="0"/>
+              </a:rPr>
+              <a:t/>
+            </a:r>
           </a:p>
         </p:txBody>
       </p:sp>
@@ -38809,17 +36277,13 @@
           </a:bodyPr>
           <a:lstStyle/>
           <a:p>
-            <a:pPr algn="ctr"/>
             <a:r>
               <a:rPr lang="en-US" sz="2400" dirty="0"/>
-              <a:t>Ressources potentiellement disponibles </a:t>
+              <a:t>Ressources potentiellement disponibles 
+</a:t>
             </a:r>
-            <a:br/>
-            <a:r>
-              <a:rPr lang="en-US" sz="2400" dirty="0"/>
-              <a:t/>
-            </a:r>
-            <a:br/>
+          </a:p>
+          <a:p>
             <a:r>
               <a:rPr lang="en-US" sz="2400" dirty="0"/>
               <a:t/>
@@ -38885,9 +36349,8 @@
           <a:p>
             <a:r>
               <a:rPr lang="en-US"/>
-              <a:t>CPP 2023-2027. Version publique. Maputo, mai 2022.</a:t>
+              <a:t>CPF 2023-2027. Version publique. Maputo, mai 2022.</a:t>
             </a:r>
-            <a:endParaRPr lang="en-US" dirty="0"/>
           </a:p>
         </p:txBody>
       </p:sp>
@@ -39002,22 +36465,17 @@
           <a:bodyPr/>
           <a:lstStyle/>
           <a:p>
-            <a:pPr algn="ctr"/>
             <a:r>
               <a:rPr lang="en-US" dirty="0"/>
-              <a:t>OHN 1 : Des institutions plus inclusives</a:t>
+              <a:t>HLO 1 : Des institutions plus inclusives
+</a:t>
             </a:r>
-            <a:br/>
+          </a:p>
+          <a:p>
             <a:r>
               <a:rPr lang="en-US" dirty="0"/>
               <a:t/>
             </a:r>
-            <a:br/>
-            <a:r>
-              <a:rPr lang="en-US" dirty="0"/>
-              <a:t/>
-            </a:r>
-            <a:endParaRPr lang="pt-BR" dirty="0"/>
           </a:p>
         </p:txBody>
       </p:sp>
@@ -39049,18 +36507,6 @@
           </a:bodyPr>
           <a:lstStyle/>
           <a:p>
-            <a:pPr marL="0" marR="0" indent="0" algn="just">
-              <a:lnSpc>
-                <a:spcPct val="107000"/>
-              </a:lnSpc>
-              <a:spcBef>
-                <a:spcPts val="600"/>
-              </a:spcBef>
-              <a:spcAft>
-                <a:spcPts val="0"/>
-              </a:spcAft>
-              <a:buNone/>
-            </a:pPr>
             <a:r>
               <a:rPr lang="en-US" sz="1600" b="1" kern="1200" dirty="0">
                 <a:solidFill>
@@ -39071,53 +36517,10 @@
                 <a:effectLst/>
                 <a:ea typeface="Times New Roman" panose="02020603050405020304" pitchFamily="18" charset="0"/>
               </a:rPr>
-              <a:t>Objectif 1 : Améliorer la gestion macroéconomique </a:t>
+              <a:t>Objectif 1 : Améliorer la gestion macroéconomique afin de faciliter une création d'emplois résiliente et durable, d'accroître la capacité d'investissement productif (public et privé) et de réduire le risque souverain.</a:t>
             </a:r>
-            <a:r>
-              <a:rPr lang="en-US" sz="1600" kern="1200" dirty="0">
-                <a:solidFill>
-                  <a:srgbClr val="000000"/>
-                </a:solidFill>
-                <a:effectLst/>
-                <a:ea typeface="Times New Roman" panose="02020603050405020304" pitchFamily="18" charset="0"/>
-              </a:rPr>
-              <a:t>afin de faciliter la création d'emplois résilients et durables, d'accroître la capacité d'investissement productif (public et privé) et de réduire le risque souverain.</a:t>
-            </a:r>
-          </a:p>
-          <a:p>
-            <a:pPr marL="0" marR="0" indent="0" algn="just">
-              <a:lnSpc>
-                <a:spcPct val="107000"/>
-              </a:lnSpc>
-              <a:spcBef>
-                <a:spcPts val="600"/>
-              </a:spcBef>
-              <a:spcAft>
-                <a:spcPts val="0"/>
-              </a:spcAft>
-              <a:buNone/>
-            </a:pPr>
-            <a:endParaRPr lang="en-US" sz="1600" kern="1200" dirty="0">
-              <a:solidFill>
-                <a:srgbClr val="000000"/>
-              </a:solidFill>
-              <a:effectLst/>
-              <a:ea typeface="Times New Roman" panose="02020603050405020304" pitchFamily="18" charset="0"/>
-            </a:endParaRPr>
-          </a:p>
-          <a:p>
-            <a:pPr marL="0" marR="0" indent="0" algn="just">
-              <a:lnSpc>
-                <a:spcPct val="107000"/>
-              </a:lnSpc>
-              <a:spcBef>
-                <a:spcPts val="600"/>
-              </a:spcBef>
-              <a:spcAft>
-                <a:spcPts val="0"/>
-              </a:spcAft>
-              <a:buNone/>
-            </a:pPr>
+          </a:p>
+          <a:p>
             <a:r>
               <a:rPr lang="en-US" sz="1600" b="1" kern="1200" dirty="0">
                 <a:solidFill>
@@ -39128,145 +36531,10 @@
                 <a:effectLst/>
                 <a:ea typeface="Times New Roman" panose="02020603050405020304" pitchFamily="18" charset="0"/>
               </a:rPr>
-              <a:t>Objectif 2 : Renforcer l'efficacité du secteur public pour améliorer la qualité, la durabilité et l'équité des politiques publiques. </a:t>
+              <a:t/>
             </a:r>
-            <a:r>
-              <a:rPr lang="en-US" sz="1600" b="1" kern="1200" dirty="0">
-                <a:solidFill>
-                  <a:srgbClr val="000000"/>
-                </a:solidFill>
-                <a:effectLst/>
-                <a:ea typeface="Times New Roman" panose="02020603050405020304" pitchFamily="18" charset="0"/>
-              </a:rPr>
-              <a:t>Axé sur :</a:t>
-            </a:r>
-          </a:p>
-          <a:p>
-            <a:pPr algn="just">
-              <a:lnSpc>
-                <a:spcPct val="107000"/>
-              </a:lnSpc>
-              <a:spcBef>
-                <a:spcPts val="600"/>
-              </a:spcBef>
-            </a:pPr>
-            <a:r>
-              <a:rPr lang="en-US" sz="1600" kern="1200" dirty="0">
-                <a:solidFill>
-                  <a:srgbClr val="000000"/>
-                </a:solidFill>
-                <a:effectLst/>
-                <a:ea typeface="Times New Roman" panose="02020603050405020304" pitchFamily="18" charset="0"/>
-              </a:rPr>
-              <a:t>Les fonctions régaliennes de l'État — telles que l'amélioration de la gestion des finances publiques (GFP) et de la passation de marchés publics ;</a:t>
-            </a:r>
-          </a:p>
-          <a:p>
-            <a:pPr algn="just">
-              <a:lnSpc>
-                <a:spcPct val="107000"/>
-              </a:lnSpc>
-              <a:spcBef>
-                <a:spcPts val="600"/>
-              </a:spcBef>
-            </a:pPr>
-            <a:r>
-              <a:rPr lang="en-US" sz="1600" kern="1200" dirty="0">
-                <a:solidFill>
-                  <a:srgbClr val="000000"/>
-                </a:solidFill>
-                <a:effectLst/>
-                <a:ea typeface="Times New Roman" panose="02020603050405020304" pitchFamily="18" charset="0"/>
-              </a:rPr>
-              <a:t>Renforcer la participation citoyenne et le contrôle externe ;</a:t>
-            </a:r>
-          </a:p>
-          <a:p>
-            <a:pPr algn="just">
-              <a:lnSpc>
-                <a:spcPct val="107000"/>
-              </a:lnSpc>
-              <a:spcBef>
-                <a:spcPts val="600"/>
-              </a:spcBef>
-            </a:pPr>
-            <a:r>
-              <a:rPr lang="en-US" sz="1600" kern="1200" dirty="0">
-                <a:solidFill>
-                  <a:srgbClr val="000000"/>
-                </a:solidFill>
-                <a:effectLst/>
-                <a:ea typeface="Times New Roman" panose="02020603050405020304" pitchFamily="18" charset="0"/>
-              </a:rPr>
-              <a:t>La décentralisation opérationnelle des dépenses de santé et d'éducation.</a:t>
-            </a:r>
-          </a:p>
-          <a:p>
-            <a:pPr algn="just">
-              <a:lnSpc>
-                <a:spcPct val="107000"/>
-              </a:lnSpc>
-              <a:spcBef>
-                <a:spcPts val="600"/>
-              </a:spcBef>
-            </a:pPr>
-            <a:r>
-              <a:rPr lang="en-US" sz="1600" kern="1200" dirty="0">
-                <a:solidFill>
-                  <a:srgbClr val="000000"/>
-                </a:solidFill>
-                <a:effectLst/>
-                <a:ea typeface="Times New Roman" panose="02020603050405020304" pitchFamily="18" charset="0"/>
-              </a:rPr>
-              <a:t>L'accent sera également mis sur l'amélioration de la transparence et de l'accès à l'information.</a:t>
-            </a:r>
-          </a:p>
-          <a:p>
-            <a:pPr marL="0" marR="0" indent="0" algn="just">
-              <a:lnSpc>
-                <a:spcPct val="107000"/>
-              </a:lnSpc>
-              <a:spcBef>
-                <a:spcPts val="600"/>
-              </a:spcBef>
-              <a:spcAft>
-                <a:spcPts val="0"/>
-              </a:spcAft>
-              <a:buNone/>
-            </a:pPr>
-            <a:endParaRPr lang="en-US" sz="1600" b="1" dirty="0">
-              <a:solidFill>
-                <a:schemeClr val="accent1">
-                  <a:lumMod val="50000"/>
-                </a:schemeClr>
-              </a:solidFill>
-              <a:ea typeface="Times New Roman" panose="02020603050405020304" pitchFamily="18" charset="0"/>
-            </a:endParaRPr>
-          </a:p>
-          <a:p>
-            <a:pPr marL="0" marR="0" indent="0" algn="just">
-              <a:lnSpc>
-                <a:spcPct val="107000"/>
-              </a:lnSpc>
-              <a:spcBef>
-                <a:spcPts val="600"/>
-              </a:spcBef>
-              <a:spcAft>
-                <a:spcPts val="0"/>
-              </a:spcAft>
-              <a:buNone/>
-            </a:pPr>
-            <a:r>
-              <a:rPr lang="en-US" sz="1600" b="1" dirty="0">
-                <a:solidFill>
-                  <a:schemeClr val="accent1">
-                    <a:lumMod val="50000"/>
-                  </a:schemeClr>
-                </a:solidFill>
-                <a:ea typeface="Times New Roman" panose="02020603050405020304" pitchFamily="18" charset="0"/>
-              </a:rPr>
-              <a:t>Objectif 3</a:t>
-            </a:r>
+          </a:p>
+          <a:p>
             <a:r>
               <a:rPr lang="en-US" sz="1600" b="1" kern="1200" dirty="0">
                 <a:solidFill>
@@ -39277,96 +36545,162 @@
                 <a:effectLst/>
                 <a:ea typeface="Times New Roman" panose="02020603050405020304" pitchFamily="18" charset="0"/>
               </a:rPr>
-              <a:t> : Renforcer la coordination des politiques et les capacités de préparation et de réponse du gouvernement face aux catastrophes naturelles et autres chocs multidimensionnels. </a:t>
+              <a:t>Objectif 2 : Accroître l'efficacité du secteur public afin d'améliorer la qualité, la durabilité et l'équité des politiques publiques. Accent sur :</a:t>
             </a:r>
+          </a:p>
+          <a:p>
             <a:r>
-              <a:rPr lang="en-US" sz="1600" kern="1200" dirty="0">
+              <a:rPr lang="en-US" sz="1600" b="1" kern="1200" dirty="0">
                 <a:solidFill>
-                  <a:srgbClr val="000000"/>
+                  <a:schemeClr val="accent1">
+                    <a:lumMod val="50000"/>
+                  </a:schemeClr>
                 </a:solidFill>
                 <a:effectLst/>
                 <a:ea typeface="Times New Roman" panose="02020603050405020304" pitchFamily="18" charset="0"/>
               </a:rPr>
-              <a:t>La gestion des risques de catastrophe (GRC) était un domaine avec des résultats exemplaires dans le CPF précédent. Un accent accru sur la prévention/préparation est proposé, en particulier en ce qui concerne les risques de conflits et de violence.</a:t>
+              <a:t>les fonctions essentielles de l'État – telles que l'amélioration de la gestion des finances publiques (PFM) et de la commande publique ;</a:t>
             </a:r>
-            <a:endParaRPr lang="pt-BR" sz="1600" kern="1200" dirty="0">
-              <a:solidFill>
-                <a:srgbClr val="000000"/>
-              </a:solidFill>
-              <a:effectLst/>
-              <a:ea typeface="Times New Roman" panose="02020603050405020304" pitchFamily="18" charset="0"/>
-            </a:endParaRPr>
-          </a:p>
-          <a:p>
-            <a:pPr marL="0" marR="0" indent="0">
-              <a:lnSpc>
-                <a:spcPct val="107000"/>
-              </a:lnSpc>
-              <a:spcBef>
-                <a:spcPts val="0"/>
-              </a:spcBef>
-              <a:spcAft>
-                <a:spcPts val="800"/>
-              </a:spcAft>
-              <a:buNone/>
-            </a:pPr>
-            <a:endParaRPr lang="pt-BR" sz="1600" kern="1200" dirty="0">
-              <a:solidFill>
-                <a:srgbClr val="000000"/>
-              </a:solidFill>
-              <a:effectLst/>
-              <a:ea typeface="Times New Roman" panose="02020603050405020304" pitchFamily="18" charset="0"/>
-            </a:endParaRPr>
-          </a:p>
-          <a:p>
-            <a:pPr marL="0" marR="0" indent="0">
-              <a:lnSpc>
-                <a:spcPct val="107000"/>
-              </a:lnSpc>
-              <a:spcBef>
-                <a:spcPts val="0"/>
-              </a:spcBef>
-              <a:spcAft>
-                <a:spcPts val="800"/>
-              </a:spcAft>
-              <a:buNone/>
-            </a:pPr>
-            <a:endParaRPr lang="pt-BR" sz="1600" dirty="0">
-              <a:solidFill>
-                <a:srgbClr val="000000"/>
-              </a:solidFill>
-              <a:ea typeface="Calibri" panose="020F0502020204030204" pitchFamily="34" charset="0"/>
-            </a:endParaRPr>
-          </a:p>
-          <a:p>
-            <a:pPr marL="0" marR="0" indent="0">
-              <a:lnSpc>
-                <a:spcPct val="107000"/>
-              </a:lnSpc>
-              <a:spcBef>
-                <a:spcPts val="0"/>
-              </a:spcBef>
-              <a:spcAft>
-                <a:spcPts val="800"/>
-              </a:spcAft>
-              <a:buNone/>
-            </a:pPr>
-            <a:endParaRPr lang="en-US" sz="1600" dirty="0">
-              <a:effectLst/>
-              <a:ea typeface="Calibri" panose="020F0502020204030204" pitchFamily="34" charset="0"/>
-            </a:endParaRPr>
-          </a:p>
-          <a:p>
-            <a:pPr marL="0" indent="0" algn="just">
-              <a:lnSpc>
-                <a:spcPct val="100000"/>
-              </a:lnSpc>
-              <a:buNone/>
-            </a:pPr>
-            <a:endParaRPr lang="en-US" sz="1600" dirty="0"/>
-          </a:p>
-          <a:p>
-            <a:endParaRPr lang="pt-BR" sz="1600" dirty="0"/>
+          </a:p>
+          <a:p>
+            <a:r>
+              <a:rPr lang="en-US" sz="1600" b="1" kern="1200" dirty="0">
+                <a:solidFill>
+                  <a:schemeClr val="accent1">
+                    <a:lumMod val="50000"/>
+                  </a:schemeClr>
+                </a:solidFill>
+                <a:effectLst/>
+                <a:ea typeface="Times New Roman" panose="02020603050405020304" pitchFamily="18" charset="0"/>
+              </a:rPr>
+              <a:t>le renforcement de la participation citoyenne et du contrôle externe ;</a:t>
+            </a:r>
+          </a:p>
+          <a:p>
+            <a:r>
+              <a:rPr lang="en-US" sz="1600" b="1" kern="1200" dirty="0">
+                <a:solidFill>
+                  <a:schemeClr val="accent1">
+                    <a:lumMod val="50000"/>
+                  </a:schemeClr>
+                </a:solidFill>
+                <a:effectLst/>
+                <a:ea typeface="Times New Roman" panose="02020603050405020304" pitchFamily="18" charset="0"/>
+              </a:rPr>
+              <a:t>la décentralisation opérationnelle des dépenses de santé et d'éducation.</a:t>
+            </a:r>
+          </a:p>
+          <a:p>
+            <a:r>
+              <a:rPr lang="en-US" sz="1600" b="1" kern="1200" dirty="0">
+                <a:solidFill>
+                  <a:schemeClr val="accent1">
+                    <a:lumMod val="50000"/>
+                  </a:schemeClr>
+                </a:solidFill>
+                <a:effectLst/>
+                <a:ea typeface="Times New Roman" panose="02020603050405020304" pitchFamily="18" charset="0"/>
+              </a:rPr>
+              <a:t>L'accent sera également mis sur l'accroissement de la transparence et de l'accès à l'information.</a:t>
+            </a:r>
+          </a:p>
+          <a:p>
+            <a:r>
+              <a:rPr lang="en-US" sz="1600" b="1" kern="1200" dirty="0">
+                <a:solidFill>
+                  <a:schemeClr val="accent1">
+                    <a:lumMod val="50000"/>
+                  </a:schemeClr>
+                </a:solidFill>
+                <a:effectLst/>
+                <a:ea typeface="Times New Roman" panose="02020603050405020304" pitchFamily="18" charset="0"/>
+              </a:rPr>
+              <a:t/>
+            </a:r>
+          </a:p>
+          <a:p>
+            <a:r>
+              <a:rPr lang="en-US" sz="1600" b="1" kern="1200" dirty="0">
+                <a:solidFill>
+                  <a:schemeClr val="accent1">
+                    <a:lumMod val="50000"/>
+                  </a:schemeClr>
+                </a:solidFill>
+                <a:effectLst/>
+                <a:ea typeface="Times New Roman" panose="02020603050405020304" pitchFamily="18" charset="0"/>
+              </a:rPr>
+              <a:t>Objectif 3 : Renforcer la coordination des politiques ainsi que la capacité de préparation et de réponse du gouvernement aux catastrophes naturelles et à d'autres chocs multidimensionnels. La gestion des risques de catastrophe (DRM) a été un domaine aux résultats exemplaires dans le CPF précédent. Un accent accru sur la prévention/préparation est proposé, en particulier en ce qui concerne les risques de conflit et de violence.</a:t>
+            </a:r>
+          </a:p>
+          <a:p>
+            <a:r>
+              <a:rPr lang="en-US" sz="1600" b="1" kern="1200" dirty="0">
+                <a:solidFill>
+                  <a:schemeClr val="accent1">
+                    <a:lumMod val="50000"/>
+                  </a:schemeClr>
+                </a:solidFill>
+                <a:effectLst/>
+                <a:ea typeface="Times New Roman" panose="02020603050405020304" pitchFamily="18" charset="0"/>
+              </a:rPr>
+              <a:t/>
+            </a:r>
+          </a:p>
+          <a:p>
+            <a:r>
+              <a:rPr lang="en-US" sz="1600" b="1" kern="1200" dirty="0">
+                <a:solidFill>
+                  <a:schemeClr val="accent1">
+                    <a:lumMod val="50000"/>
+                  </a:schemeClr>
+                </a:solidFill>
+                <a:effectLst/>
+                <a:ea typeface="Times New Roman" panose="02020603050405020304" pitchFamily="18" charset="0"/>
+              </a:rPr>
+              <a:t/>
+            </a:r>
+          </a:p>
+          <a:p>
+            <a:r>
+              <a:rPr lang="en-US" sz="1600" b="1" kern="1200" dirty="0">
+                <a:solidFill>
+                  <a:schemeClr val="accent1">
+                    <a:lumMod val="50000"/>
+                  </a:schemeClr>
+                </a:solidFill>
+                <a:effectLst/>
+                <a:ea typeface="Times New Roman" panose="02020603050405020304" pitchFamily="18" charset="0"/>
+              </a:rPr>
+              <a:t/>
+            </a:r>
+          </a:p>
+          <a:p>
+            <a:r>
+              <a:rPr lang="en-US" sz="1600" b="1" kern="1200" dirty="0">
+                <a:solidFill>
+                  <a:schemeClr val="accent1">
+                    <a:lumMod val="50000"/>
+                  </a:schemeClr>
+                </a:solidFill>
+                <a:effectLst/>
+                <a:ea typeface="Times New Roman" panose="02020603050405020304" pitchFamily="18" charset="0"/>
+              </a:rPr>
+              <a:t/>
+            </a:r>
+          </a:p>
+          <a:p>
+            <a:r>
+              <a:rPr lang="en-US" sz="1600" b="1" kern="1200" dirty="0">
+                <a:solidFill>
+                  <a:schemeClr val="accent1">
+                    <a:lumMod val="50000"/>
+                  </a:schemeClr>
+                </a:solidFill>
+                <a:effectLst/>
+                <a:ea typeface="Times New Roman" panose="02020603050405020304" pitchFamily="18" charset="0"/>
+              </a:rPr>
+              <a:t/>
+            </a:r>
           </a:p>
         </p:txBody>
       </p:sp>
@@ -39393,9 +36727,8 @@
           <a:p>
             <a:r>
               <a:rPr lang="en-US"/>
-              <a:t>CPP 2023-2027. Version publique. Maputo, mai 2022.</a:t>
+              <a:t>CPF 2023-2027. Version publique. Maputo, mai 2022.</a:t>
             </a:r>
-            <a:endParaRPr lang="en-US" dirty="0"/>
           </a:p>
         </p:txBody>
       </p:sp>
@@ -39515,15 +36848,10 @@
           <a:bodyPr/>
           <a:lstStyle/>
           <a:p>
-            <a:pPr algn="ctr"/>
             <a:r>
               <a:rPr lang="en-US" dirty="0"/>
-              <a:t>OHN 2 : Augmentation de la création d'emplois inclusifs</a:t>
+              <a:t>HLO 2 : Accroître la création inclusive d'emplois</a:t>
             </a:r>
-            <a:br>
-              <a:rPr lang="pt-BR" dirty="0"/>
-            </a:br>
-            <a:endParaRPr lang="pt-BR" dirty="0"/>
           </a:p>
         </p:txBody>
       </p:sp>
@@ -39555,32 +36883,6 @@
           </a:bodyPr>
           <a:lstStyle/>
           <a:p>
-            <a:pPr>
-              <a:lnSpc>
-                <a:spcPct val="100000"/>
-              </a:lnSpc>
-              <a:spcBef>
-                <a:spcPts val="0"/>
-              </a:spcBef>
-              <a:tabLst>
-                <a:tab pos="581660" algn="l"/>
-                <a:tab pos="1163320" algn="l"/>
-                <a:tab pos="1744980" algn="l"/>
-                <a:tab pos="2326640" algn="l"/>
-                <a:tab pos="2908300" algn="l"/>
-                <a:tab pos="3489960" algn="l"/>
-                <a:tab pos="4071620" algn="l"/>
-                <a:tab pos="4653280" algn="l"/>
-                <a:tab pos="5234940" algn="l"/>
-                <a:tab pos="5816600" algn="l"/>
-                <a:tab pos="6398260" algn="l"/>
-                <a:tab pos="6979920" algn="l"/>
-                <a:tab pos="7561580" algn="l"/>
-                <a:tab pos="8143240" algn="l"/>
-                <a:tab pos="8724900" algn="l"/>
-                <a:tab pos="9306560" algn="l"/>
-              </a:tabLst>
-            </a:pPr>
             <a:r>
               <a:rPr lang="en-US" sz="1600" b="1" dirty="0">
                 <a:solidFill>
@@ -39591,134 +36893,11 @@
                 <a:latin typeface="+mn-lt"/>
                 <a:cs typeface="Calibri" panose="020F0502020204030204" pitchFamily="34" charset="0"/>
               </a:rPr>
-              <a:t>Objectif 4 : Favoriser la croissance durable de secteurs de ressources naturelles sélectionnés, en exploitant les avantages comparatifs régionaux et mondiaux. Trois objectifs intermédiaires : </a:t>
-            </a:r>
-            <a:r>
-              <a:rPr lang="en-US" sz="1600" dirty="0">
-                <a:solidFill>
-                  <a:schemeClr val="accent1">
-                    <a:lumMod val="75000"/>
-                  </a:schemeClr>
-                </a:solidFill>
-                <a:latin typeface="+mn-lt"/>
-                <a:cs typeface="Calibri" panose="020F0502020204030204" pitchFamily="34" charset="0"/>
-              </a:rPr>
-              <a:t>
+              <a:t>Objectif 4 : Permettre la croissance durable de secteurs de ressources naturelles sélectionnés, en exploitant les avantages comparatifs régionaux et mondiaux. Trois objectifs intermédiaires : 
 </a:t>
             </a:r>
-            <a:r>
-              <a:rPr lang="en-US" sz="1600" dirty="0">
-                <a:latin typeface="+mn-lt"/>
-                <a:cs typeface="Calibri" panose="020F0502020204030204" pitchFamily="34" charset="0"/>
-              </a:rPr>
-              <a:t>Renforcer la durabilité des investissements dans les secteurs du gaz naturel et des mines en traitant les externalités négatives du secteur et en exploitant les retombées positives</a:t>
-            </a:r>
-            <a:br/>
-            <a:r>
-              <a:rPr lang="en-US" sz="1600" dirty="0">
-                <a:latin typeface="+mn-lt"/>
-                <a:cs typeface="Calibri" panose="020F0502020204030204" pitchFamily="34" charset="0"/>
-              </a:rPr>
-              <a:t>Augmentation de la productivité agricole </a:t>
-            </a:r>
-            <a:br/>
-            <a:r>
-              <a:rPr lang="en-US" sz="1600" dirty="0">
-                <a:latin typeface="+mn-lt"/>
-                <a:cs typeface="Calibri" panose="020F0502020204030204" pitchFamily="34" charset="0"/>
-              </a:rPr>
-              <a:t>Renforcement de la gestion des ressources naturelles et libération des investissements privés dans le secteur vert, notamment l'écotourisme, la pêche et la foresterie</a:t>
-            </a:r>
-            <a:br/>
-            <a:r>
-              <a:rPr lang="en-US" sz="1600" dirty="0">
-                <a:latin typeface="+mn-lt"/>
-                <a:cs typeface="Calibri" panose="020F0502020204030204" pitchFamily="34" charset="0"/>
-              </a:rPr>
-              <a:t/>
-            </a:r>
-            <a:br/>
-            <a:r>
-              <a:rPr lang="en-US" sz="1600" dirty="0">
-                <a:latin typeface="+mn-lt"/>
-                <a:cs typeface="Calibri" panose="020F0502020204030204" pitchFamily="34" charset="0"/>
-              </a:rPr>
-              <a:t/>
-            </a:r>
-            <a:endParaRPr lang="en-US" sz="1600" b="1" dirty="0">
-              <a:solidFill>
-                <a:schemeClr val="accent1">
-                  <a:lumMod val="75000"/>
-                </a:schemeClr>
-              </a:solidFill>
-              <a:latin typeface="+mn-lt"/>
-              <a:cs typeface="Calibri" panose="020F0502020204030204" pitchFamily="34" charset="0"/>
-            </a:endParaRPr>
-          </a:p>
-          <a:p>
-            <a:pPr marL="0" indent="0">
-              <a:lnSpc>
-                <a:spcPct val="100000"/>
-              </a:lnSpc>
-              <a:spcBef>
-                <a:spcPts val="0"/>
-              </a:spcBef>
-              <a:buNone/>
-              <a:tabLst>
-                <a:tab pos="581660" algn="l"/>
-                <a:tab pos="1163320" algn="l"/>
-                <a:tab pos="1744980" algn="l"/>
-                <a:tab pos="2326640" algn="l"/>
-                <a:tab pos="2908300" algn="l"/>
-                <a:tab pos="3489960" algn="l"/>
-                <a:tab pos="4071620" algn="l"/>
-                <a:tab pos="4653280" algn="l"/>
-                <a:tab pos="5234940" algn="l"/>
-                <a:tab pos="5816600" algn="l"/>
-                <a:tab pos="6398260" algn="l"/>
-                <a:tab pos="6979920" algn="l"/>
-                <a:tab pos="7561580" algn="l"/>
-                <a:tab pos="8143240" algn="l"/>
-                <a:tab pos="8724900" algn="l"/>
-                <a:tab pos="9306560" algn="l"/>
-              </a:tabLst>
-            </a:pPr>
-            <a:endParaRPr lang="en-US" sz="1600" dirty="0">
-              <a:solidFill>
-                <a:srgbClr val="202124"/>
-              </a:solidFill>
-              <a:latin typeface="+mn-lt"/>
-              <a:cs typeface="Calibri" panose="020F0502020204030204" pitchFamily="34" charset="0"/>
-            </a:endParaRPr>
-          </a:p>
-          <a:p>
-            <a:pPr marL="0" indent="0">
-              <a:lnSpc>
-                <a:spcPct val="100000"/>
-              </a:lnSpc>
-              <a:spcBef>
-                <a:spcPts val="0"/>
-              </a:spcBef>
-              <a:buNone/>
-              <a:tabLst>
-                <a:tab pos="581660" algn="l"/>
-                <a:tab pos="1163320" algn="l"/>
-                <a:tab pos="1744980" algn="l"/>
-                <a:tab pos="2326640" algn="l"/>
-                <a:tab pos="2908300" algn="l"/>
-                <a:tab pos="3489960" algn="l"/>
-                <a:tab pos="4071620" algn="l"/>
-                <a:tab pos="4653280" algn="l"/>
-                <a:tab pos="5234940" algn="l"/>
-                <a:tab pos="5816600" algn="l"/>
-                <a:tab pos="6398260" algn="l"/>
-                <a:tab pos="6979920" algn="l"/>
-                <a:tab pos="7561580" algn="l"/>
-                <a:tab pos="8143240" algn="l"/>
-                <a:tab pos="8724900" algn="l"/>
-                <a:tab pos="9306560" algn="l"/>
-              </a:tabLst>
-            </a:pPr>
+          </a:p>
+          <a:p>
             <a:r>
               <a:rPr lang="en-US" sz="1600" b="1" dirty="0">
                 <a:solidFill>
@@ -39729,44 +36908,40 @@
                 <a:latin typeface="+mn-lt"/>
                 <a:cs typeface="Calibri" panose="020F0502020204030204" pitchFamily="34" charset="0"/>
               </a:rPr>
-              <a:t>Objectif 5 : Promouvoir la croissance de la productivité dans certaines industries à forte intensité de main-d'œuvre. </a:t>
+              <a:t>Renforcer la durabilité des investissements dans les secteurs du gaz naturel et des mines en remédiant aux externalités négatives du secteur et en exploitant les retombées positives
+</a:t>
             </a:r>
+          </a:p>
+          <a:p>
             <a:r>
-              <a:rPr lang="en-US" sz="1600" dirty="0">
+              <a:rPr lang="en-US" sz="1600" b="1" dirty="0">
+                <a:solidFill>
+                  <a:schemeClr val="accent1">
+                    <a:lumMod val="75000"/>
+                  </a:schemeClr>
+                </a:solidFill>
                 <a:latin typeface="+mn-lt"/>
                 <a:cs typeface="Calibri" panose="020F0502020204030204" pitchFamily="34" charset="0"/>
               </a:rPr>
-              <a:t>Comment ? Services, PME, économies verte et bleue ; orientation sectorielle et territoriale ; maximiser les retombées des grands projets, notamment autour des corridors de transport et de l'informalité (expérimentation de politiques et évaluation d'impact).</a:t>
+              <a:t>Accroître la productivité agricole 
+</a:t>
             </a:r>
           </a:p>
           <a:p>
-            <a:pPr marL="0" indent="0">
-              <a:lnSpc>
-                <a:spcPct val="100000"/>
-              </a:lnSpc>
-              <a:spcBef>
-                <a:spcPts val="0"/>
-              </a:spcBef>
-              <a:buNone/>
-              <a:tabLst>
-                <a:tab pos="581660" algn="l"/>
-                <a:tab pos="1163320" algn="l"/>
-                <a:tab pos="1744980" algn="l"/>
-                <a:tab pos="2326640" algn="l"/>
-                <a:tab pos="2908300" algn="l"/>
-                <a:tab pos="3489960" algn="l"/>
-                <a:tab pos="4071620" algn="l"/>
-                <a:tab pos="4653280" algn="l"/>
-                <a:tab pos="5234940" algn="l"/>
-                <a:tab pos="5816600" algn="l"/>
-                <a:tab pos="6398260" algn="l"/>
-                <a:tab pos="6979920" algn="l"/>
-                <a:tab pos="7561580" algn="l"/>
-                <a:tab pos="8143240" algn="l"/>
-                <a:tab pos="8724900" algn="l"/>
-                <a:tab pos="9306560" algn="l"/>
-              </a:tabLst>
-            </a:pPr>
+            <a:r>
+              <a:rPr lang="en-US" sz="1600" b="1" dirty="0">
+                <a:solidFill>
+                  <a:schemeClr val="accent1">
+                    <a:lumMod val="75000"/>
+                  </a:schemeClr>
+                </a:solidFill>
+                <a:latin typeface="+mn-lt"/>
+                <a:cs typeface="Calibri" panose="020F0502020204030204" pitchFamily="34" charset="0"/>
+              </a:rPr>
+              <a:t>Renforcer la gestion des ressources naturelles et libérer les investissements privés dans le secteur vert, y compris l'écotourisme, la pêche et la sylviculture</a:t>
+            </a:r>
+          </a:p>
+          <a:p>
             <a:r>
               <a:rPr lang="en-US" sz="1600" b="1" dirty="0">
                 <a:solidFill>
@@ -39779,7 +36954,8 @@
               </a:rPr>
               <a:t/>
             </a:r>
-            <a:br/>
+          </a:p>
+          <a:p>
             <a:r>
               <a:rPr lang="en-US" sz="1600" b="1" dirty="0">
                 <a:solidFill>
@@ -39790,9 +36966,55 @@
                 <a:latin typeface="+mn-lt"/>
                 <a:cs typeface="Calibri" panose="020F0502020204030204" pitchFamily="34" charset="0"/>
               </a:rPr>
-              <a:t>Alors que le portefeuille existant continue de financer des investissements dans les infrastructures en milieu rural, les nouvelles activités mettront l'accent sur les investissements dans les infrastructures susceptibles de soutenir la croissance, notamment dans les domaines de l'économie numérique et des routes. </a:t>
+              <a:t>Objectif 5 : Promouvoir la croissance de la productivité dans des industries à forte intensité de main-d'œuvre sélectionnées. Comment ? Services, PME, économies verte et bleue ; ciblage sectoriel et territorial ; maximiser les retombées des grands projets, notamment autour des corridors de transport, et informalité (expérimentation des politiques et évaluation d'impact).</a:t>
             </a:r>
-            <a:br/>
+          </a:p>
+          <a:p>
+            <a:r>
+              <a:rPr lang="en-US" sz="1600" b="1" dirty="0">
+                <a:solidFill>
+                  <a:schemeClr val="accent1">
+                    <a:lumMod val="75000"/>
+                  </a:schemeClr>
+                </a:solidFill>
+                <a:latin typeface="+mn-lt"/>
+                <a:cs typeface="Calibri" panose="020F0502020204030204" pitchFamily="34" charset="0"/>
+              </a:rPr>
+              <a:t>
+</a:t>
+            </a:r>
+          </a:p>
+          <a:p>
+            <a:r>
+              <a:rPr lang="en-US" sz="1600" b="1" dirty="0">
+                <a:solidFill>
+                  <a:schemeClr val="accent1">
+                    <a:lumMod val="75000"/>
+                  </a:schemeClr>
+                </a:solidFill>
+                <a:latin typeface="+mn-lt"/>
+                <a:cs typeface="Calibri" panose="020F0502020204030204" pitchFamily="34" charset="0"/>
+              </a:rPr>
+              <a:t>Objectif 6 : Étendre des services abordables, fiables et résilients au climat afin d'améliorer l'accès des pauvres et de renforcer l'urbanisation durable et l'agglomération économique. 
+</a:t>
+            </a:r>
+          </a:p>
+          <a:p>
+            <a:r>
+              <a:rPr lang="en-US" sz="1600" b="1" dirty="0">
+                <a:solidFill>
+                  <a:schemeClr val="accent1">
+                    <a:lumMod val="75000"/>
+                  </a:schemeClr>
+                </a:solidFill>
+                <a:latin typeface="+mn-lt"/>
+                <a:cs typeface="Calibri" panose="020F0502020204030204" pitchFamily="34" charset="0"/>
+              </a:rPr>
+              <a:t>Alors que le portefeuille existant continue de financer des investissements d'infrastructure en zone rurale, les nouvelles activités mettront l'accent sur des investissements d'infrastructure susceptibles de soutenir la croissance, notamment dans les domaines de l'économie numérique et des routes. 
+</a:t>
+            </a:r>
+          </a:p>
+          <a:p>
             <a:r>
               <a:rPr lang="en-US" sz="1600" b="1" dirty="0">
                 <a:solidFill>
@@ -39805,7 +37027,8 @@
               </a:rPr>
               <a:t/>
             </a:r>
-            <a:br/>
+          </a:p>
+          <a:p>
             <a:r>
               <a:rPr lang="en-US" sz="1600" b="1" dirty="0">
                 <a:solidFill>
@@ -39816,123 +37039,8 @@
                 <a:latin typeface="+mn-lt"/>
                 <a:cs typeface="Calibri" panose="020F0502020204030204" pitchFamily="34" charset="0"/>
               </a:rPr>
-              <a:t/>
+              <a:t>Le prochain CPF accordera la priorité à la capacité du gouvernement à gérer le processus d'urbanisation tout en permettant la migration des zones rurales vers les zones urbaines. Malgré quelques réalisations positives lors du cycle précédent du CPF, le SCD a estimé que le processus de gestion de l'urbanisation est au point mort. </a:t>
             </a:r>
-            <a:br/>
-            <a:r>
-              <a:rPr lang="en-US" sz="1600" b="1" dirty="0">
-                <a:solidFill>
-                  <a:schemeClr val="accent1">
-                    <a:lumMod val="75000"/>
-                  </a:schemeClr>
-                </a:solidFill>
-                <a:latin typeface="+mn-lt"/>
-                <a:cs typeface="Calibri" panose="020F0502020204030204" pitchFamily="34" charset="0"/>
-              </a:rPr>
-              <a:t/>
-            </a:r>
-            <a:br/>
-            <a:r>
-              <a:rPr lang="en-US" sz="1600" b="1" dirty="0">
-                <a:solidFill>
-                  <a:schemeClr val="accent1">
-                    <a:lumMod val="75000"/>
-                  </a:schemeClr>
-                </a:solidFill>
-                <a:latin typeface="+mn-lt"/>
-                <a:cs typeface="Calibri" panose="020F0502020204030204" pitchFamily="34" charset="0"/>
-              </a:rPr>
-              <a:t/>
-            </a:r>
-            <a:br/>
-            <a:r>
-              <a:rPr lang="en-US" sz="1600" b="1" dirty="0">
-                <a:solidFill>
-                  <a:schemeClr val="accent1">
-                    <a:lumMod val="75000"/>
-                  </a:schemeClr>
-                </a:solidFill>
-                <a:latin typeface="+mn-lt"/>
-                <a:cs typeface="Calibri" panose="020F0502020204030204" pitchFamily="34" charset="0"/>
-              </a:rPr>
-              <a:t/>
-            </a:r>
-            <a:r>
-              <a:rPr lang="en-US" sz="1600" dirty="0">
-                <a:solidFill>
-                  <a:srgbClr val="202124"/>
-                </a:solidFill>
-                <a:latin typeface="+mn-lt"/>
-                <a:cs typeface="Calibri" panose="020F0502020204030204" pitchFamily="34" charset="0"/>
-              </a:rPr>
-              <a:t>While the existing portfolio continues to finance infrastructure investments in rural areas, new activities will emphasize infrastructure investments that can support growth, including in the areas of the digital economy and roads. 
-</a:t>
-            </a:r>
-          </a:p>
-          <a:p>
-            <a:pPr>
-              <a:lnSpc>
-                <a:spcPct val="100000"/>
-              </a:lnSpc>
-              <a:spcBef>
-                <a:spcPts val="0"/>
-              </a:spcBef>
-              <a:tabLst>
-                <a:tab pos="581660" algn="l"/>
-                <a:tab pos="1163320" algn="l"/>
-                <a:tab pos="1744980" algn="l"/>
-                <a:tab pos="2326640" algn="l"/>
-                <a:tab pos="2908300" algn="l"/>
-                <a:tab pos="3489960" algn="l"/>
-                <a:tab pos="4071620" algn="l"/>
-                <a:tab pos="4653280" algn="l"/>
-                <a:tab pos="5234940" algn="l"/>
-                <a:tab pos="5816600" algn="l"/>
-                <a:tab pos="6398260" algn="l"/>
-                <a:tab pos="6979920" algn="l"/>
-                <a:tab pos="7561580" algn="l"/>
-                <a:tab pos="8143240" algn="l"/>
-                <a:tab pos="8724900" algn="l"/>
-                <a:tab pos="9306560" algn="l"/>
-              </a:tabLst>
-            </a:pPr>
-            <a:r>
-              <a:rPr lang="en-US" sz="1600" dirty="0">
-                <a:solidFill>
-                  <a:srgbClr val="202124"/>
-                </a:solidFill>
-                <a:latin typeface="+mn-lt"/>
-                <a:cs typeface="Calibri" panose="020F0502020204030204" pitchFamily="34" charset="0"/>
-              </a:rPr>
-              <a:t>Le prochain CPF accordera la priorité à la capacité du gouvernement à gérer le processus d'urbanisation de manière à permettre la migration rural-urbain. Malgré quelques réalisations positives au cours du cycle </a:t>
-            </a:r>
-            <a:r>
-              <a:rPr lang="en-US" sz="1600" dirty="0" err="1">
-                <a:solidFill>
-                  <a:srgbClr val="202124"/>
-                </a:solidFill>
-                <a:latin typeface="+mn-lt"/>
-                <a:cs typeface="Calibri" panose="020F0502020204030204" pitchFamily="34" charset="0"/>
-              </a:rPr>
-              <a:t>cpf</a:t>
-            </a:r>
-            <a:r>
-              <a:rPr lang="en-US" sz="1600" dirty="0">
-                <a:solidFill>
-                  <a:srgbClr val="202124"/>
-                </a:solidFill>
-                <a:latin typeface="+mn-lt"/>
-                <a:cs typeface="Calibri" panose="020F0502020204030204" pitchFamily="34" charset="0"/>
-              </a:rPr>
-              <a:t> précédent, le SCD a estimé que le processus de gestion de l'urbanisation est en stagnation. </a:t>
-            </a:r>
-            <a:endParaRPr lang="pt-BR" sz="1600" dirty="0">
-              <a:solidFill>
-                <a:srgbClr val="202124"/>
-              </a:solidFill>
-              <a:latin typeface="+mn-lt"/>
-              <a:cs typeface="Calibri" panose="020F0502020204030204" pitchFamily="34" charset="0"/>
-            </a:endParaRPr>
           </a:p>
         </p:txBody>
       </p:sp>
@@ -39959,9 +37067,8 @@
           <a:p>
             <a:r>
               <a:rPr lang="en-US"/>
-              <a:t>CPP 2023-2027. Version publique. Maputo, mai 2022.</a:t>
+              <a:t>CPF 2023-2027. Version publique. Maputo, mai 2022.</a:t>
             </a:r>
-            <a:endParaRPr lang="en-US" dirty="0"/>
           </a:p>
         </p:txBody>
       </p:sp>
@@ -40076,15 +37183,10 @@
           <a:bodyPr/>
           <a:lstStyle/>
           <a:p>
-            <a:pPr algn="ctr"/>
             <a:r>
               <a:rPr lang="en-US" dirty="0"/>
-              <a:t>OHN 3 : Améliorer le capital humain et l'autonomisation des femmes</a:t>
+              <a:t>HLO 3 : Améliorer le capital humain et l'autonomisation des femmes </a:t>
             </a:r>
-            <a:br>
-              <a:rPr lang="pt-BR" dirty="0"/>
-            </a:br>
-            <a:endParaRPr lang="pt-BR" dirty="0"/>
           </a:p>
         </p:txBody>
       </p:sp>
@@ -40116,7 +37218,6 @@
           </a:bodyPr>
           <a:lstStyle/>
           <a:p>
-            <a:pPr algn="just"/>
             <a:r>
               <a:rPr lang="en-US" sz="1600" b="1" dirty="0">
                 <a:solidFill>
@@ -40127,18 +37228,10 @@
                 <a:latin typeface="+mn-lt"/>
                 <a:cs typeface="Calibri" panose="020F0502020204030204" pitchFamily="34" charset="0"/>
               </a:rPr>
-              <a:t>Objectif 7 : Améliorer les principaux résultats en matière d'éducation et de santé. </a:t>
+              <a:t>Objectif 7 : Améliorer les principaux résultats en matière d'éducation et de santé. Promouvoir des investissements budgétairement soutenables dans le capital humain, en mettant l'accent sur l'amélioration du rapport coût-bénéfice des dépenses publiques afin d'améliorer les principaux résultats en santé et en éducation. Un processus de décentralisation limité nuit à l'efficacité de la prestation des services de santé et d'éducation.</a:t>
             </a:r>
-            <a:r>
-              <a:rPr lang="en-US" sz="1600" dirty="0">
-                <a:latin typeface="+mn-lt"/>
-                <a:cs typeface="Calibri" panose="020F0502020204030204" pitchFamily="34" charset="0"/>
-              </a:rPr>
-              <a:t>Promouvoir des investissements dans le capital humain qui soient budgétairement durables, en mettant l'accent sur l'amélioration du rapport coût-efficacité des dépenses publiques pour améliorer les principaux résultats en matière de santé et d'éducation. Un processus de décentralisation limité affecte l'efficacité de la prestation des services de santé et d'éducation.</a:t>
-            </a:r>
-          </a:p>
-          <a:p>
-            <a:pPr algn="just"/>
+          </a:p>
+          <a:p>
             <a:r>
               <a:rPr lang="en-US" sz="1600" b="1" dirty="0">
                 <a:solidFill>
@@ -40149,9 +37242,11 @@
                 <a:latin typeface="+mn-lt"/>
                 <a:cs typeface="Calibri" panose="020F0502020204030204" pitchFamily="34" charset="0"/>
               </a:rPr>
-              <a:t>Objectif 8 : Accroître l'efficience des dépenses et la couverture effective des services sociaux intégrés. </a:t>
+              <a:t>Objectif 8 : Accroître l'efficacité des dépenses et la couverture effective des services sociaux intégrés. 
+</a:t>
             </a:r>
-            <a:br/>
+          </a:p>
+          <a:p>
             <a:r>
               <a:rPr lang="en-US" sz="1600" b="1" dirty="0">
                 <a:solidFill>
@@ -40162,9 +37257,11 @@
                 <a:latin typeface="+mn-lt"/>
                 <a:cs typeface="Calibri" panose="020F0502020204030204" pitchFamily="34" charset="0"/>
               </a:rPr>
-              <a:t>La prochaine Commission de Sécurité Sociale renforcera le ciblage des programmes de Protection Sociale pour améliorer le rapport coût-efficacité, notamment en encourageant la consolidation des politiques sociales, en garantissant des mécanismes de graduation et des liens avec l'emploi et la participation à la population active, et en soutenant une stratégie nationale de protection sociale sensible aux chocs. </a:t>
+              <a:t>La prochaine Commission de la sécurité sociale renforcera le ciblage des programmes de protection sociale afin d'améliorer le rapport coût-bénéfice, notamment en encourageant la consolidation des politiques sociales, en assurant des mécanismes de premier niveau et des liens avec l'emploi et la participation à la population active, et en soutenant une stratégie nationale de protection sociale sensible aux chocs. 
+</a:t>
             </a:r>
-            <a:br/>
+          </a:p>
+          <a:p>
             <a:r>
               <a:rPr lang="en-US" sz="1600" b="1" dirty="0">
                 <a:solidFill>
@@ -40175,9 +37272,11 @@
                 <a:latin typeface="+mn-lt"/>
                 <a:cs typeface="Calibri" panose="020F0502020204030204" pitchFamily="34" charset="0"/>
               </a:rPr>
-              <a:t/>
+              <a:t>L'objectif principal est de créer une structure budgétairement soutenable pour l'intégration des politiques sociales en faveur de l'accumulation du capital humain et de la réduction de l'extrême pauvreté, tout en autonomisant les femmes et en garantissant la résilience aux chocs.
+</a:t>
             </a:r>
-            <a:br/>
+          </a:p>
+          <a:p>
             <a:r>
               <a:rPr lang="en-US" sz="1600" b="1" dirty="0">
                 <a:solidFill>
@@ -40188,9 +37287,11 @@
                 <a:latin typeface="+mn-lt"/>
                 <a:cs typeface="Calibri" panose="020F0502020204030204" pitchFamily="34" charset="0"/>
               </a:rPr>
-              <a:t>Le Mozambique affiche le quatrième taux de fécondité adolescente le plus élevé et le dixième taux de mariage d'enfants le plus élevé au monde, et ces taux augmentent au lieu de diminuer, contribuant à la faiblesse des compétences et de la productivité des femmes sur le marché du </a:t>
+              <a:t>Objectif 9 : Améliorer l'accès aux services de prévention des grossesses chez les adolescentes et de promotion de la participation économique des femmes.
+</a:t>
             </a:r>
-            <a:br/>
+          </a:p>
+          <a:p>
             <a:r>
               <a:rPr lang="en-US" sz="1600" b="1" dirty="0">
                 <a:solidFill>
@@ -40201,126 +37302,8 @@
                 <a:latin typeface="+mn-lt"/>
                 <a:cs typeface="Calibri" panose="020F0502020204030204" pitchFamily="34" charset="0"/>
               </a:rPr>
-              <a:t>travail</a:t>
+              <a:t>Le Mozambique présente le quatrième taux de fécondité le plus élevé chez les adolescentes et le dixième taux le plus élevé de mariage d'enfants au monde, et ces taux augmentent au lieu de diminuer, ce qui contribue au faible niveau de qualification et à la faible productivité des femmes dans </a:t>
             </a:r>
-            <a:br/>
-            <a:r>
-              <a:rPr lang="en-US" sz="1600" b="1" dirty="0">
-                <a:solidFill>
-                  <a:schemeClr val="accent1">
-                    <a:lumMod val="75000"/>
-                  </a:schemeClr>
-                </a:solidFill>
-                <a:latin typeface="+mn-lt"/>
-                <a:cs typeface="Calibri" panose="020F0502020204030204" pitchFamily="34" charset="0"/>
-              </a:rPr>
-              <a:t>.</a:t>
-            </a:r>
-            <a:br/>
-            <a:r>
-              <a:rPr lang="en-US" sz="1600" b="1" dirty="0">
-                <a:solidFill>
-                  <a:schemeClr val="accent1">
-                    <a:lumMod val="75000"/>
-                  </a:schemeClr>
-                </a:solidFill>
-                <a:latin typeface="+mn-lt"/>
-                <a:cs typeface="Calibri" panose="020F0502020204030204" pitchFamily="34" charset="0"/>
-              </a:rPr>
-              <a:t/>
-            </a:r>
-            <a:br/>
-            <a:r>
-              <a:rPr lang="en-US" sz="1600" b="1" dirty="0">
-                <a:solidFill>
-                  <a:schemeClr val="accent1">
-                    <a:lumMod val="75000"/>
-                  </a:schemeClr>
-                </a:solidFill>
-                <a:latin typeface="+mn-lt"/>
-                <a:cs typeface="Calibri" panose="020F0502020204030204" pitchFamily="34" charset="0"/>
-              </a:rPr>
-              <a:t>Le CPF se concentrera sur les questions de mariage d'enfants, de grossesse précoce et de satisfaction des besoins non satisfaits en matière de planification familiale, de scolarisation des filles au lycée et de transition vers le marché du travail — entre autres. </a:t>
-            </a:r>
-            <a:br/>
-            <a:r>
-              <a:rPr lang="en-US" sz="1600" b="1" dirty="0">
-                <a:solidFill>
-                  <a:schemeClr val="accent1">
-                    <a:lumMod val="75000"/>
-                  </a:schemeClr>
-                </a:solidFill>
-                <a:latin typeface="+mn-lt"/>
-                <a:cs typeface="Calibri" panose="020F0502020204030204" pitchFamily="34" charset="0"/>
-              </a:rPr>
-              <a:t/>
-            </a:r>
-            <a:r>
-              <a:rPr lang="en-US" sz="1600" dirty="0">
-                <a:latin typeface="+mn-lt"/>
-                <a:cs typeface="Calibri" panose="020F0502020204030204" pitchFamily="34" charset="0"/>
-              </a:rPr>
-              <a:t>The next Social Security Commission will increase the focus of Social Protection programs to improve cost-benefit ratio, including encouraging the consolidation of social policies, ensuring undergraduate mechanisms and employment ties and participation in the workforce, and supporting a national shock-sensitive social protection strategy. 
-The main objective is to create a fiscally sustainable structure for the integration of social policies for the accumulation of human capital and reduction of extreme poverty, while empowering women and ensuring resilience to shocks</a:t>
-            </a:r>
-            <a:r>
-              <a:rPr lang="en-US" sz="1600" b="1" dirty="0">
-                <a:solidFill>
-                  <a:schemeClr val="accent1">
-                    <a:lumMod val="75000"/>
-                  </a:schemeClr>
-                </a:solidFill>
-                <a:latin typeface="+mn-lt"/>
-                <a:cs typeface="Calibri" panose="020F0502020204030204" pitchFamily="34" charset="0"/>
-              </a:rPr>
-              <a:t>
-Objective 9: To improve access to services to prevent teenage pregnancy and promote women's economic participation.
-</a:t>
-            </a:r>
-            <a:r>
-              <a:rPr lang="en-US" sz="1600" dirty="0">
-                <a:latin typeface="+mn-lt"/>
-                <a:cs typeface="Calibri" panose="020F0502020204030204" pitchFamily="34" charset="0"/>
-              </a:rPr>
-              <a:t>Mozambique has the fourth highest fertility rate in adolescence and the tenth highest rate of child marriage in the world and these rates are increasing and not decreasing, contributing to women's low skills and low productivity in the </a:t>
-            </a:r>
-            <a:r>
-              <a:rPr lang="en-US" sz="1600" dirty="0" err="1">
-                <a:latin typeface="+mn-lt"/>
-                <a:cs typeface="Calibri" panose="020F0502020204030204" pitchFamily="34" charset="0"/>
-              </a:rPr>
-              <a:t>labour</a:t>
-            </a:r>
-            <a:r>
-              <a:rPr lang="en-US" sz="1600" dirty="0">
-                <a:latin typeface="+mn-lt"/>
-                <a:cs typeface="Calibri" panose="020F0502020204030204" pitchFamily="34" charset="0"/>
-              </a:rPr>
-              <a:t> market.</a:t>
-            </a:r>
-            <a:r>
-              <a:rPr lang="en-US" sz="1600" b="1" dirty="0">
-                <a:solidFill>
-                  <a:schemeClr val="accent1">
-                    <a:lumMod val="75000"/>
-                  </a:schemeClr>
-                </a:solidFill>
-                <a:latin typeface="+mn-lt"/>
-                <a:cs typeface="Calibri" panose="020F0502020204030204" pitchFamily="34" charset="0"/>
-              </a:rPr>
-              <a:t>
-</a:t>
-            </a:r>
-            <a:r>
-              <a:rPr lang="en-US" sz="1600" dirty="0">
-                <a:latin typeface="+mn-lt"/>
-                <a:cs typeface="Calibri" panose="020F0502020204030204" pitchFamily="34" charset="0"/>
-              </a:rPr>
-              <a:t>The CPF will focus on issues of child marriage, teenage pregnancy and meeting unmet needs of family planning, girls' high school and the transition from the labor market – among others. </a:t>
-            </a:r>
-            <a:endParaRPr lang="pt-BR" sz="1600" dirty="0">
-              <a:latin typeface="+mn-lt"/>
-            </a:endParaRPr>
           </a:p>
         </p:txBody>
       </p:sp>
@@ -40352,9 +37335,8 @@
           <a:p>
             <a:r>
               <a:rPr lang="en-US"/>
-              <a:t>CPP 2023-2027. Version publique. Maputo, mai 2022.</a:t>
+              <a:t>CPF 2023-2027. Version publique. Maputo, mai 2022.</a:t>
             </a:r>
-            <a:endParaRPr lang="en-US" dirty="0"/>
           </a:p>
         </p:txBody>
       </p:sp>
@@ -40480,28 +37462,6 @@
               </a:rPr>
               <a:t>Merci !</a:t>
             </a:r>
-            <a:br>
-              <a:rPr lang="pt" sz="3200" b="1" i="0" u="none" strike="noStrike" dirty="0">
-                <a:solidFill>
-                  <a:srgbClr val="203864"/>
-                </a:solidFill>
-                <a:highlight>
-                  <a:srgbClr val="000000">
-                    <a:alpha val="0"/>
-                  </a:srgbClr>
-                </a:highlight>
-                <a:latin typeface="Arial"/>
-              </a:rPr>
-            </a:br>
-            <a:endParaRPr lang="en-US" sz="3600" b="1" dirty="0">
-              <a:solidFill>
-                <a:schemeClr val="accent1">
-                  <a:lumMod val="50000"/>
-                </a:schemeClr>
-              </a:solidFill>
-              <a:latin typeface="Arial" panose="020B0604020202020204" pitchFamily="34" charset="0"/>
-              <a:cs typeface="Arial" panose="020B0604020202020204" pitchFamily="34" charset="0"/>
-            </a:endParaRPr>
           </a:p>
         </p:txBody>
       </p:sp>
@@ -40528,9 +37488,8 @@
           <a:p>
             <a:r>
               <a:rPr lang="en-US"/>
-              <a:t>CPP 2023-2027. Version publique. Maputo, mai 2022.</a:t>
+              <a:t>CPF 2023-2027. Version publique. Maputo, mai 2022.</a:t>
             </a:r>
-            <a:endParaRPr lang="en-US" dirty="0"/>
           </a:p>
         </p:txBody>
       </p:sp>
@@ -40622,29 +37581,17 @@
           </a:bodyPr>
           <a:lstStyle/>
           <a:p>
-            <a:pPr algn="ctr"/>
             <a:r>
               <a:rPr lang="en-US" sz="4000" dirty="0"/>
-              <a:t>Structure de la présentation</a:t>
+              <a:t>Structure de la présentation
+</a:t>
             </a:r>
-            <a:br/>
+          </a:p>
+          <a:p>
             <a:r>
               <a:rPr lang="en-US" sz="4000" dirty="0"/>
               <a:t/>
             </a:r>
-            <a:br/>
-            <a:r>
-              <a:rPr lang="en-US" sz="4000" dirty="0"/>
-              <a:t/>
-            </a:r>
-            <a:endParaRPr lang="pt" sz="4000" b="0" i="1" u="none" strike="noStrike" dirty="0">
-              <a:highlight>
-                <a:srgbClr val="000000">
-                  <a:alpha val="0"/>
-                </a:srgbClr>
-              </a:highlight>
-              <a:latin typeface="Arial"/>
-            </a:endParaRPr>
           </a:p>
         </p:txBody>
       </p:sp>
@@ -40676,51 +37623,24 @@
           </a:bodyPr>
           <a:lstStyle/>
           <a:p>
-            <a:pPr marL="1371600" lvl="3" indent="-571500">
-              <a:lnSpc>
-                <a:spcPct val="100000"/>
-              </a:lnSpc>
-              <a:spcBef>
-                <a:spcPts val="1200"/>
-              </a:spcBef>
-              <a:spcAft>
-                <a:spcPts val="1200"/>
-              </a:spcAft>
-              <a:buFont typeface="+mj-lt"/>
-              <a:buAutoNum type="romanUcPeriod"/>
-            </a:pPr>
             <a:r>
               <a:rPr lang="en-US" sz="3200" b="1" dirty="0"/>
-              <a:t>Vision du Groupe de la Banque mondiale sur les principaux défis stratégiques du pays   </a:t>
+              <a:t>Vision du Groupe de la Banque mondiale sur les principaux défis stratégiques du pays   
+</a:t>
             </a:r>
-            <a:br/>
+          </a:p>
+          <a:p>
             <a:r>
               <a:rPr lang="en-US" sz="3200" b="1" dirty="0"/>
-              <a:t>Principales leçons du CPP précédent (2017-2021)</a:t>
+              <a:t>Principaux enseignements du CPF précédent (2017-2021)
+</a:t>
             </a:r>
-            <a:br/>
+          </a:p>
+          <a:p>
             <a:r>
               <a:rPr lang="en-US" sz="3200" b="1" dirty="0"/>
-              <a:t>Proposition initiale pour le CPP 2023-2027</a:t>
+              <a:t>Proposition initiale pour le CPF 2023-2027</a:t>
             </a:r>
-            <a:br/>
-            <a:r>
-              <a:rPr lang="en-US" sz="3200" b="1" dirty="0"/>
-              <a:t/>
-            </a:r>
-            <a:br/>
-            <a:r>
-              <a:rPr lang="en-US" sz="3200" b="1" dirty="0"/>
-              <a:t/>
-            </a:r>
-            <a:endParaRPr lang="pt" sz="3200" b="1" i="0" u="none" strike="noStrike" dirty="0">
-              <a:highlight>
-                <a:srgbClr val="000000">
-                  <a:alpha val="0"/>
-                </a:srgbClr>
-              </a:highlight>
-              <a:latin typeface="Arial"/>
-            </a:endParaRPr>
           </a:p>
         </p:txBody>
       </p:sp>
@@ -40747,9 +37667,8 @@
           <a:p>
             <a:r>
               <a:rPr lang="en-US"/>
-              <a:t>CPP 2023-2027. Version publique. Maputo, mai 2022.</a:t>
+              <a:t>CPF 2023-2027. Version publique. Maputo, mai 2022.</a:t>
             </a:r>
-            <a:endParaRPr lang="en-US" dirty="0"/>
           </a:p>
         </p:txBody>
       </p:sp>
@@ -40871,29 +37790,17 @@
           </a:bodyPr>
           <a:lstStyle/>
           <a:p>
-            <a:pPr algn="ctr"/>
             <a:r>
               <a:rPr lang="en-US" sz="4000" dirty="0"/>
-              <a:t>Structure de la présentation</a:t>
+              <a:t>Structure de la présentation
+</a:t>
             </a:r>
-            <a:br/>
+          </a:p>
+          <a:p>
             <a:r>
               <a:rPr lang="en-US" sz="4000" dirty="0"/>
               <a:t/>
             </a:r>
-            <a:br/>
-            <a:r>
-              <a:rPr lang="en-US" sz="4000" dirty="0"/>
-              <a:t/>
-            </a:r>
-            <a:endParaRPr lang="pt" sz="4000" b="0" i="1" u="none" strike="noStrike" dirty="0">
-              <a:highlight>
-                <a:srgbClr val="000000">
-                  <a:alpha val="0"/>
-                </a:srgbClr>
-              </a:highlight>
-              <a:latin typeface="Arial"/>
-            </a:endParaRPr>
           </a:p>
         </p:txBody>
       </p:sp>
@@ -40925,67 +37832,24 @@
           </a:bodyPr>
           <a:lstStyle/>
           <a:p>
-            <a:pPr marL="1371600" lvl="3" indent="-571500">
-              <a:lnSpc>
-                <a:spcPct val="100000"/>
-              </a:lnSpc>
-              <a:spcBef>
-                <a:spcPts val="1200"/>
-              </a:spcBef>
-              <a:spcAft>
-                <a:spcPts val="1200"/>
-              </a:spcAft>
-              <a:buFont typeface="+mj-lt"/>
-              <a:buAutoNum type="romanUcPeriod"/>
-            </a:pPr>
             <a:r>
               <a:rPr lang="en-US" sz="3200" b="1" dirty="0"/>
-              <a:t>Vision du Groupe de la Banque mondiale sur les principaux défis stratégiques du pays   </a:t>
+              <a:t>Vision du Groupe de la Banque mondiale sur les principaux défis stratégiques du pays   
+</a:t>
             </a:r>
-            <a:br/>
+          </a:p>
+          <a:p>
             <a:r>
               <a:rPr lang="en-US" sz="3200" b="1" dirty="0"/>
-              <a:t>Principaux enseignements du CPF précédent (2017-2021) </a:t>
+              <a:t>Principaux enseignements du CPF précédent (2017-2021) 
+</a:t>
             </a:r>
-            <a:br/>
+          </a:p>
+          <a:p>
             <a:r>
               <a:rPr lang="en-US" sz="3200" b="1" dirty="0"/>
               <a:t>Proposition initiale pour le CPF 2023-2027</a:t>
             </a:r>
-            <a:br/>
-            <a:r>
-              <a:rPr lang="en-US" sz="3200" b="1" dirty="0"/>
-              <a:t/>
-            </a:r>
-            <a:br/>
-            <a:r>
-              <a:rPr lang="en-US" sz="3200" b="1" dirty="0"/>
-              <a:t/>
-            </a:r>
-            <a:r>
-              <a:rPr lang="en-US" sz="3200" b="1" dirty="0">
-                <a:solidFill>
-                  <a:schemeClr val="bg2">
-                    <a:lumMod val="75000"/>
-                  </a:schemeClr>
-                </a:solidFill>
-              </a:rPr>
-              <a:t>Main lessons from the previous CPF (2017-2021) 
-Initial Proposal for CPF 2023-2027</a:t>
-            </a:r>
-            <a:endParaRPr lang="pt" sz="3200" b="1" i="0" u="none" strike="noStrike" dirty="0">
-              <a:solidFill>
-                <a:schemeClr val="bg2">
-                  <a:lumMod val="75000"/>
-                </a:schemeClr>
-              </a:solidFill>
-              <a:highlight>
-                <a:srgbClr val="000000">
-                  <a:alpha val="0"/>
-                </a:srgbClr>
-              </a:highlight>
-              <a:latin typeface="Arial"/>
-            </a:endParaRPr>
           </a:p>
         </p:txBody>
       </p:sp>
@@ -41012,9 +37876,8 @@
           <a:p>
             <a:r>
               <a:rPr lang="en-US"/>
-              <a:t>CPP 2023-2027. Version publique. Maputo, mai 2022.</a:t>
+              <a:t>CPF 2023-2027. Version publique. Maputo, mai 2022.</a:t>
             </a:r>
-            <a:endParaRPr lang="en-US" dirty="0"/>
           </a:p>
         </p:txBody>
       </p:sp>
@@ -41136,17 +37999,6 @@
           </a:bodyPr>
           <a:lstStyle/>
           <a:p>
-            <a:pPr rtl="0"/>
-            <a:br>
-              <a:rPr lang="pt" sz="2400" b="1" i="0" u="none" strike="noStrike" dirty="0">
-                <a:highlight>
-                  <a:srgbClr val="000000">
-                    <a:alpha val="0"/>
-                  </a:srgbClr>
-                </a:highlight>
-                <a:latin typeface="Arial"/>
-              </a:rPr>
-            </a:br>
             <a:r>
               <a:rPr lang="pt" sz="2400" b="1" i="0" u="none" strike="noStrike" dirty="0">
                 <a:highlight>
@@ -41156,20 +38008,8 @@
                 </a:highlight>
                 <a:latin typeface="Arial"/>
               </a:rPr>
-              <a:t>Contexte pays : </a:t>
+              <a:t>Contexte national : défis et opportunités de développement</a:t>
             </a:r>
-            <a:r>
-              <a:rPr lang="pt" sz="2400" b="0" i="1" u="none" strike="noStrike" dirty="0">
-                <a:highlight>
-                  <a:srgbClr val="000000">
-                    <a:alpha val="0"/>
-                  </a:srgbClr>
-                </a:highlight>
-                <a:latin typeface="Arial"/>
-              </a:rPr>
-              <a:t>Défis et opportunités de développement</a:t>
-            </a:r>
-            <a:endParaRPr lang="en-US" sz="2400" b="0" i="1" dirty="0"/>
           </a:p>
         </p:txBody>
       </p:sp>
@@ -41201,44 +38041,6 @@
           </a:bodyPr>
           <a:lstStyle/>
           <a:p>
-            <a:pPr marL="342900" indent="-342900" algn="just" rtl="0">
-              <a:lnSpc>
-                <a:spcPct val="100000"/>
-              </a:lnSpc>
-              <a:spcBef>
-                <a:spcPct val="0"/>
-              </a:spcBef>
-              <a:spcAft>
-                <a:spcPts val="600"/>
-              </a:spcAft>
-              <a:buFont typeface="+mj-lt"/>
-              <a:buAutoNum type="arabicPeriod"/>
-            </a:pPr>
-            <a:endParaRPr lang="en-US" sz="1600" b="1" i="0" u="none" strike="noStrike" dirty="0">
-              <a:highlight>
-                <a:srgbClr val="000000">
-                  <a:alpha val="0"/>
-                </a:srgbClr>
-              </a:highlight>
-              <a:latin typeface="Arial"/>
-              <a:ea typeface="Calibri"/>
-              <a:cs typeface="Times New Roman"/>
-            </a:endParaRPr>
-          </a:p>
-          <a:p>
-            <a:pPr marL="342900" indent="-342900" algn="just" rtl="0">
-              <a:lnSpc>
-                <a:spcPct val="100000"/>
-              </a:lnSpc>
-              <a:spcBef>
-                <a:spcPct val="0"/>
-              </a:spcBef>
-              <a:spcAft>
-                <a:spcPts val="600"/>
-              </a:spcAft>
-              <a:buFont typeface="+mj-lt"/>
-              <a:buAutoNum type="arabicPeriod"/>
-            </a:pPr>
             <a:r>
               <a:rPr lang="en-US" sz="1600" b="1" i="0" u="none" strike="noStrike" dirty="0">
                 <a:highlight>
@@ -41250,21 +38052,10 @@
                 <a:ea typeface="Calibri"/>
                 <a:cs typeface="Times New Roman"/>
               </a:rPr>
-              <a:t>Contexte de développement</a:t>
+              <a:t/>
             </a:r>
-            <a:r>
-              <a:rPr lang="en-US" sz="1600" b="0" i="0" u="none" strike="noStrike" dirty="0">
-                <a:highlight>
-                  <a:srgbClr val="000000">
-                    <a:alpha val="0"/>
-                  </a:srgbClr>
-                </a:highlight>
-                <a:latin typeface="Arial"/>
-                <a:ea typeface="Calibri"/>
-                <a:cs typeface="Times New Roman"/>
-              </a:rPr>
-              <a:t>. Le Mozambique est encore un pays à faible revenu (PFR) malgré ses vastes ressources naturelles et sa situation géographique favorable. </a:t>
-            </a:r>
+          </a:p>
+          <a:p>
             <a:r>
               <a:rPr lang="en-US" sz="1600" b="1" i="0" u="none" strike="noStrike" dirty="0">
                 <a:highlight>
@@ -41276,61 +38067,10 @@
                 <a:ea typeface="Calibri"/>
                 <a:cs typeface="Times New Roman"/>
               </a:rPr>
-              <a:t>La majeure partie de la population vit dans une pauvreté extrême, les inégalités sont élevées</a:t>
+              <a:t>Contexte de développement. Le Mozambique demeure un pays à faible revenu (LIC) malgré ses vastes ressources naturelles et sa situation géographique favorable. La majeure partie de la population vit dans l'extrême pauvreté, les inégalités sont élevées, l'Indice du capital humain figure parmi les plus faibles au monde et les taux de fécondité sont comparativement élevés. </a:t>
             </a:r>
-            <a:r>
-              <a:rPr lang="en-US" sz="1600" b="0" i="0" u="none" strike="noStrike" dirty="0">
-                <a:highlight>
-                  <a:srgbClr val="000000">
-                    <a:alpha val="0"/>
-                  </a:srgbClr>
-                </a:highlight>
-                <a:latin typeface="Arial"/>
-                <a:ea typeface="Calibri"/>
-                <a:cs typeface="Times New Roman"/>
-              </a:rPr>
-              <a:t>, l'Indice de capital humain figure parmi les plus bas au monde et les taux de fécondité sont comparativement élevés. </a:t>
-            </a:r>
-          </a:p>
-          <a:p>
-            <a:pPr lvl="3" algn="just">
-              <a:lnSpc>
-                <a:spcPct val="100000"/>
-              </a:lnSpc>
-              <a:spcBef>
-                <a:spcPct val="0"/>
-              </a:spcBef>
-              <a:spcAft>
-                <a:spcPts val="1200"/>
-              </a:spcAft>
-            </a:pPr>
-            <a:r>
-              <a:rPr lang="en-US" sz="1600" dirty="0">
-                <a:highlight>
-                  <a:srgbClr val="000000">
-                    <a:alpha val="0"/>
-                  </a:srgbClr>
-                </a:highlight>
-                <a:latin typeface="Arial"/>
-                <a:cs typeface="Times New Roman"/>
-              </a:rPr>
-              <a:t>Ces défis de développement sont aggravés par la fragilité structurelle et une forte exposition aux risques climatiques et sanitaires — notamment deux cyclones majeurs en 2019 et la pandémie de Covid-19.</a:t>
-            </a:r>
-          </a:p>
-          <a:p>
-            <a:pPr marL="342900" indent="-342900" algn="just" rtl="0">
-              <a:lnSpc>
-                <a:spcPct val="100000"/>
-              </a:lnSpc>
-              <a:spcBef>
-                <a:spcPct val="0"/>
-              </a:spcBef>
-              <a:spcAft>
-                <a:spcPts val="600"/>
-              </a:spcAft>
-              <a:buFont typeface="+mj-lt"/>
-              <a:buAutoNum type="arabicPeriod"/>
-            </a:pPr>
+          </a:p>
+          <a:p>
             <a:r>
               <a:rPr lang="en-US" sz="1600" b="1" i="0" u="none" strike="noStrike" dirty="0">
                 <a:highlight>
@@ -41342,10 +38082,12 @@
                 <a:ea typeface="Calibri"/>
                 <a:cs typeface="Times New Roman"/>
               </a:rPr>
-              <a:t>Fragilité structurelle. </a:t>
+              <a:t>Ces défis de développement sont aggravés par une fragilité structurelle et une forte exposition aux risques climatiques et sanitaires – dont, plus récemment, deux cyclones majeurs en 2019 et la pandémie de Covid-19.</a:t>
             </a:r>
+          </a:p>
+          <a:p>
             <a:r>
-              <a:rPr lang="en-US" sz="1600" b="0" i="0" u="none" strike="noStrike" dirty="0">
+              <a:rPr lang="en-US" sz="1600" b="1" i="0" u="none" strike="noStrike" dirty="0">
                 <a:highlight>
                   <a:srgbClr val="000000">
                     <a:alpha val="0"/>
@@ -41355,37 +38097,23 @@
                 <a:ea typeface="Calibri"/>
                 <a:cs typeface="Times New Roman"/>
               </a:rPr>
-              <a:t>La fragilité profondément enracinée du Mozambique découle de la faiblesse de ses institutions, qui remonte à des causes historiques et géographiques, et s'est manifestée dans des cycles récurrents de conflits et de violence. Les inégalités et la pauvreté renforcent la fragilité et en sont renforcées. L'insurrection au Cabo Delgado est la manifestation la plus récente de cette fragilité.</a:t>
+              <a:t>Fragilité structurelle. La fragilité profondément enracinée du Mozambique découle de la faiblesse de ses institutions, qui remonte à des causes historiques et géographiques et s'est manifestée par des cycles récurrents de conflit et de violence. Les inégalités et la pauvreté renforcent la fragilité et sont renforcées par elle. L'insurrection à Cabo Delgado en est la manifestation la plus récente.</a:t>
             </a:r>
-            <a:endParaRPr lang="pt" sz="1600" b="0" i="0" u="none" strike="noStrike" dirty="0">
-              <a:highlight>
-                <a:srgbClr val="000000">
-                  <a:alpha val="0"/>
-                </a:srgbClr>
-              </a:highlight>
-              <a:latin typeface="Arial"/>
-              <a:ea typeface="Calibri"/>
-              <a:cs typeface="Times New Roman"/>
-            </a:endParaRPr>
-          </a:p>
-          <a:p>
-            <a:pPr marL="0" indent="0" algn="just">
-              <a:lnSpc>
-                <a:spcPct val="100000"/>
-              </a:lnSpc>
-              <a:spcBef>
-                <a:spcPct val="0"/>
-              </a:spcBef>
-              <a:spcAft>
-                <a:spcPts val="600"/>
-              </a:spcAft>
-              <a:buNone/>
-            </a:pPr>
-            <a:endParaRPr lang="en-US" sz="1100" dirty="0">
-              <a:latin typeface="+mn-lt"/>
-              <a:ea typeface="Calibri" panose="020F0502020204030204" pitchFamily="34" charset="0"/>
-              <a:cs typeface="Times New Roman"/>
-            </a:endParaRPr>
+          </a:p>
+          <a:p>
+            <a:r>
+              <a:rPr lang="en-US" sz="1600" b="1" i="0" u="none" strike="noStrike" dirty="0">
+                <a:highlight>
+                  <a:srgbClr val="000000">
+                    <a:alpha val="0"/>
+                  </a:srgbClr>
+                </a:highlight>
+                <a:latin typeface="Arial"/>
+                <a:ea typeface="Calibri"/>
+                <a:cs typeface="Times New Roman"/>
+              </a:rPr>
+              <a:t/>
+            </a:r>
           </a:p>
         </p:txBody>
       </p:sp>
@@ -41579,9 +38307,8 @@
           <a:p>
             <a:r>
               <a:rPr lang="en-US"/>
-              <a:t>CPP 2023-2027. Version publique. Maputo, mai 2022.</a:t>
+              <a:t>CPF 2023-2027. Version publique. Maputo, mai 2022.</a:t>
             </a:r>
-            <a:endParaRPr lang="en-US" dirty="0"/>
           </a:p>
         </p:txBody>
       </p:sp>
@@ -41712,9 +38439,8 @@
                 </a:highlight>
                 <a:latin typeface="Arial"/>
               </a:rPr>
-              <a:t>Contexte pays : Défis et opportunités de développement</a:t>
+              <a:t>Contexte national : défis et opportunités de développement</a:t>
             </a:r>
-            <a:endParaRPr lang="en-US" sz="2400" dirty="0"/>
           </a:p>
         </p:txBody>
       </p:sp>
@@ -41746,58 +38472,22 @@
           </a:bodyPr>
           <a:lstStyle/>
           <a:p>
-            <a:pPr marL="342900" indent="-342900" algn="just">
-              <a:lnSpc>
-                <a:spcPct val="100000"/>
-              </a:lnSpc>
-              <a:spcBef>
-                <a:spcPts val="600"/>
-              </a:spcBef>
-              <a:spcAft>
-                <a:spcPts val="600"/>
-              </a:spcAft>
-              <a:buFont typeface="+mj-lt"/>
-              <a:buAutoNum type="arabicPeriod" startAt="3"/>
-            </a:pPr>
             <a:r>
               <a:rPr lang="en-US" sz="1500" b="1" dirty="0">
                 <a:latin typeface="Arial"/>
                 <a:cs typeface="Times New Roman"/>
               </a:rPr>
-              <a:t>Transformation économique et spatiale très limitée au cours des dernières décennies</a:t>
+              <a:t>Transformation économique et spatiale très limitée au cours des dernières décennies. Jusqu'en 2019, environ 70,1 % de la main-d'œuvre travaillait encore dans l'agriculture (de subsistance). La transformation spatiale s'est récemment accentuée, mais près de 60 % de la population vit toujours en zone rurale – signe d'un processus de migration lent malgré l'écart de revenu important entre les zones rurales et urbaines.</a:t>
             </a:r>
+          </a:p>
+          <a:p>
             <a:r>
-              <a:rPr lang="en-US" sz="1500" dirty="0">
+              <a:rPr lang="en-US" sz="1500" b="1" dirty="0">
                 <a:latin typeface="Arial"/>
                 <a:cs typeface="Times New Roman"/>
               </a:rPr>
-              <a:t>. Jusqu'en 2019, environ 70,1 % de la main-d'œuvre travaillait encore dans l'agriculture (de subsistance). La transformation spatiale s'est accélérée récemment, mais environ 60 % de la population vit encore dans les zones rurales – ce qui indique un processus de migration lent malgré l'écart de revenu rural-urbain significatif.</a:t>
+              <a:t/>
             </a:r>
-            <a:endParaRPr lang="pt-BR" sz="1500" i="0" u="none" strike="noStrike" dirty="0">
-              <a:latin typeface="Arial"/>
-              <a:ea typeface="Calibri"/>
-              <a:cs typeface="Times New Roman"/>
-            </a:endParaRPr>
-          </a:p>
-          <a:p>
-            <a:pPr marL="342900" indent="-342900" algn="just">
-              <a:lnSpc>
-                <a:spcPct val="100000"/>
-              </a:lnSpc>
-              <a:spcBef>
-                <a:spcPts val="600"/>
-              </a:spcBef>
-              <a:spcAft>
-                <a:spcPts val="600"/>
-              </a:spcAft>
-              <a:buFont typeface="+mj-lt"/>
-              <a:buAutoNum type="arabicPeriod" startAt="3"/>
-            </a:pPr>
-            <a:endParaRPr lang="pt-BR" sz="1500" b="1" dirty="0">
-              <a:latin typeface="Arial"/>
-              <a:ea typeface="Calibri"/>
-              <a:cs typeface="Times New Roman"/>
-            </a:endParaRPr>
           </a:p>
         </p:txBody>
       </p:sp>
@@ -42083,19 +38773,6 @@
             </a:lvl9pPr>
           </a:lstStyle>
           <a:p>
-            <a:pPr marL="342900" indent="-342900" algn="just">
-              <a:lnSpc>
-                <a:spcPct val="100000"/>
-              </a:lnSpc>
-              <a:spcBef>
-                <a:spcPts val="600"/>
-              </a:spcBef>
-              <a:spcAft>
-                <a:spcPts val="600"/>
-              </a:spcAft>
-              <a:buFont typeface="+mj-lt"/>
-              <a:buAutoNum type="arabicPeriod" startAt="4"/>
-            </a:pPr>
             <a:r>
               <a:rPr lang="en-US" sz="1500" b="1" dirty="0">
                 <a:highlight>
@@ -42107,22 +38784,8 @@
                 <a:ea typeface="Calibri"/>
                 <a:cs typeface="Times New Roman"/>
               </a:rPr>
-              <a:t>L'avènement du gaz naturel offre une opportunité de transformation économique, mais celle-ci ne sera pas automatique. </a:t>
+              <a:t>L'arrivée du gaz naturel offre une occasion de transformation économique, mais celle-ci ne sera pas automatique. Le PIB réel pourrait être 1,63 fois plus élevé d'ici 2033 dans un scénario optimiste, et même en cas de retard dans la mise en œuvre du projet Mamba, le PIB réel serait supérieur de 60 % à ce qu'il serait sans production de GNL. Cela porterait le PIB par habitant à près de 1 000 USD d'ici 2033 (contre 485 USD estimés pour 2020).</a:t>
             </a:r>
-            <a:r>
-              <a:rPr lang="en-US" sz="1500" dirty="0">
-                <a:highlight>
-                  <a:srgbClr val="000000">
-                    <a:alpha val="0"/>
-                  </a:srgbClr>
-                </a:highlight>
-                <a:latin typeface="Arial"/>
-                <a:ea typeface="Calibri"/>
-                <a:cs typeface="Times New Roman"/>
-              </a:rPr>
-              <a:t>Le PIB réel pourrait être 1,63 fois plus élevé d'ici 2033 dans un scénario optimiste, et même avec le retard dans la mise en œuvre du projet Mamba, le PIB réel serait 60 % plus élevé que sans production de GNL. Cela porterait le PIB par habitant à près de USD 1 000 d'ici 2033 (contre USD 485 estimé pour 2020).</a:t>
-            </a:r>
-            <a:endParaRPr lang="pt-BR" sz="1500" dirty="0"/>
           </a:p>
         </p:txBody>
       </p:sp>
@@ -42177,9 +38840,8 @@
           <a:p>
             <a:r>
               <a:rPr lang="en-US"/>
-              <a:t>CPP 2023-2027. Version publique. Maputo, mai 2022.</a:t>
+              <a:t>CPF 2023-2027. Version publique. Maputo, mai 2022.</a:t>
             </a:r>
-            <a:endParaRPr lang="en-US" dirty="0"/>
           </a:p>
         </p:txBody>
       </p:sp>
@@ -42301,7 +38963,6 @@
           </a:bodyPr>
           <a:lstStyle/>
           <a:p>
-            <a:pPr rtl="0"/>
             <a:r>
               <a:rPr lang="en-US" sz="2400" b="1" i="0" u="none" strike="noStrike" dirty="0">
                 <a:highlight>
@@ -42311,9 +38972,8 @@
                 </a:highlight>
                 <a:latin typeface="Arial"/>
               </a:rPr>
-              <a:t>Contexte pays : Défis et opportunités de développement</a:t>
+              <a:t>Contexte national : défis et opportunités de développement</a:t>
             </a:r>
-            <a:endParaRPr lang="en-US" sz="2400" dirty="0"/>
           </a:p>
         </p:txBody>
       </p:sp>
@@ -42345,19 +39005,6 @@
           </a:bodyPr>
           <a:lstStyle/>
           <a:p>
-            <a:pPr marL="342900" indent="-342900" algn="just" rtl="0">
-              <a:lnSpc>
-                <a:spcPct val="100000"/>
-              </a:lnSpc>
-              <a:spcBef>
-                <a:spcPct val="0"/>
-              </a:spcBef>
-              <a:spcAft>
-                <a:spcPts val="600"/>
-              </a:spcAft>
-              <a:buFont typeface="+mj-lt"/>
-              <a:buAutoNum type="arabicPeriod" startAt="5"/>
-            </a:pPr>
             <a:r>
               <a:rPr lang="en-US" sz="1600" b="1" i="0" u="none" strike="noStrike" dirty="0">
                 <a:highlight>
@@ -42369,35 +39016,10 @@
                 <a:ea typeface="Calibri"/>
                 <a:cs typeface="Times New Roman"/>
               </a:rPr>
-              <a:t>Évolutions économiques récentes. </a:t>
+              <a:t>Évolutions économiques récentes. La situation macroéconomique à court terme est stable, mais la croissance a stagné ces dernières années. Le pays présente un risque élevé de surendettement, mais la dette est jugée soutenable dans une perspective prospective, compte tenu des recettes potentielles du GNL.</a:t>
             </a:r>
-            <a:r>
-              <a:rPr lang="en-US" sz="1600" i="0" u="none" strike="noStrike" dirty="0">
-                <a:highlight>
-                  <a:srgbClr val="000000">
-                    <a:alpha val="0"/>
-                  </a:srgbClr>
-                </a:highlight>
-                <a:latin typeface="Arial"/>
-                <a:ea typeface="Calibri"/>
-                <a:cs typeface="Times New Roman"/>
-              </a:rPr>
-              <a:t>La situation macroéconomique à court terme est stable, mais la croissance a stagné ces dernières années. Le pays présente un risque élevé de surendettement, mais la dette est évaluée comme soutenable dans une perspective prospective, en tenant compte des recettes potentielles du GNL.</a:t>
-            </a:r>
-          </a:p>
-          <a:p>
-            <a:pPr marL="0" indent="0" algn="just" rtl="0">
-              <a:lnSpc>
-                <a:spcPct val="100000"/>
-              </a:lnSpc>
-              <a:spcBef>
-                <a:spcPct val="0"/>
-              </a:spcBef>
-              <a:spcAft>
-                <a:spcPts val="600"/>
-              </a:spcAft>
-              <a:buNone/>
-            </a:pPr>
+          </a:p>
+          <a:p>
             <a:r>
               <a:rPr lang="en-US" sz="1600" b="1" i="0" u="none" strike="noStrike" dirty="0">
                 <a:highlight>
@@ -42409,48 +39031,10 @@
                 <a:ea typeface="Calibri"/>
                 <a:cs typeface="Times New Roman"/>
               </a:rPr>
-              <a:t>	Les perspectives de croissance à moyen et long terme sont positives mais soumises à des risques considérables</a:t>
+              <a:t>	Les perspectives de croissance à moyen et long terme sont positives, mais soumises à des risques considérables, notamment une nouvelle 	vague de Covid-19, de nouveaux chocs climatiques, la résurgence du conflit dans le Nord et les effets de la guerre en 	Ukraine.</a:t>
             </a:r>
-            <a:r>
-              <a:rPr lang="en-US" sz="1600" i="0" u="none" strike="noStrike" dirty="0">
-                <a:highlight>
-                  <a:srgbClr val="000000">
-                    <a:alpha val="0"/>
-                  </a:srgbClr>
-                </a:highlight>
-                <a:latin typeface="Arial"/>
-                <a:ea typeface="Calibri"/>
-                <a:cs typeface="Times New Roman"/>
-              </a:rPr>
-              <a:t>, notamment une nouvelle 	vague de Covid-19 ; de nouveaux chocs climatiques, la résurgence des conflits dans le Nord et les effets de la guerre en 	Ukraine.</a:t>
-            </a:r>
-          </a:p>
-          <a:p>
-            <a:pPr marL="0" indent="0" algn="just" rtl="0">
-              <a:lnSpc>
-                <a:spcPct val="100000"/>
-              </a:lnSpc>
-              <a:spcBef>
-                <a:spcPct val="0"/>
-              </a:spcBef>
-              <a:spcAft>
-                <a:spcPts val="600"/>
-              </a:spcAft>
-              <a:buNone/>
-            </a:pPr>
-            <a:r>
-              <a:rPr lang="en-US" sz="1600" i="0" u="none" strike="noStrike" dirty="0">
-                <a:highlight>
-                  <a:srgbClr val="000000">
-                    <a:alpha val="0"/>
-                  </a:srgbClr>
-                </a:highlight>
-                <a:latin typeface="Arial"/>
-                <a:ea typeface="Calibri"/>
-                <a:cs typeface="Times New Roman"/>
-              </a:rPr>
-              <a:t>	</a:t>
-            </a:r>
+          </a:p>
+          <a:p>
             <a:r>
               <a:rPr lang="en-US" sz="1600" b="1" i="0" u="none" strike="noStrike" dirty="0">
                 <a:highlight>
@@ -42462,10 +39046,12 @@
                 <a:ea typeface="Calibri"/>
                 <a:cs typeface="Times New Roman"/>
               </a:rPr>
-              <a:t>Les risques macroéconomiques et l'impact sur la pauvreté sont considérables </a:t>
+              <a:t>	Les risques macroéconomiques et leur incidence sur la pauvreté sont considérables (inflation, taux d'intérêt, pression budgétaire et 	aggravation du déficit de la balance commerciale). Les effets sur la pauvreté seront directs (prix des denrées alimentaires et des carburants) et indirects 	(création d'emplois), mais devraient se manifester différemment dans les zones urbaines et rurales et selon 	les différents niveaux de pauvreté.	</a:t>
             </a:r>
+          </a:p>
+          <a:p>
             <a:r>
-              <a:rPr lang="en-US" sz="1600" i="0" u="none" strike="noStrike" dirty="0">
+              <a:rPr lang="en-US" sz="1600" b="1" i="0" u="none" strike="noStrike" dirty="0">
                 <a:highlight>
                   <a:srgbClr val="000000">
                     <a:alpha val="0"/>
@@ -42475,48 +39061,8 @@
                 <a:ea typeface="Calibri"/>
                 <a:cs typeface="Times New Roman"/>
               </a:rPr>
-              <a:t>(inflation, taux d'intérêt, pression budgétaire et 	augmentation du déficit de la balance commerciale). Les impacts sur la pauvreté seront directs (prix alimentaires et énergétiques) et indirects 	(création d'emplois), mais ils devraient avoir des effets différents selon les zones urbaines et rurales et selon 	les différents niveaux de pauvreté.</a:t>
+              <a:t/>
             </a:r>
-            <a:r>
-              <a:rPr lang="pt" sz="1600" dirty="0">
-                <a:highlight>
-                  <a:srgbClr val="000000">
-                    <a:alpha val="0"/>
-                  </a:srgbClr>
-                </a:highlight>
-                <a:latin typeface="Arial"/>
-                <a:cs typeface="Times New Roman"/>
-              </a:rPr>
-              <a:t>	</a:t>
-            </a:r>
-            <a:endParaRPr lang="en-US" sz="1600" dirty="0">
-              <a:highlight>
-                <a:srgbClr val="000000">
-                  <a:alpha val="0"/>
-                </a:srgbClr>
-              </a:highlight>
-              <a:latin typeface="Arial"/>
-              <a:cs typeface="Times New Roman"/>
-            </a:endParaRPr>
-          </a:p>
-          <a:p>
-            <a:pPr marL="0" indent="0" algn="just">
-              <a:lnSpc>
-                <a:spcPct val="100000"/>
-              </a:lnSpc>
-              <a:spcBef>
-                <a:spcPct val="0"/>
-              </a:spcBef>
-              <a:spcAft>
-                <a:spcPts val="600"/>
-              </a:spcAft>
-              <a:buNone/>
-            </a:pPr>
-            <a:endParaRPr lang="en-US" sz="1100" dirty="0">
-              <a:latin typeface="+mn-lt"/>
-              <a:ea typeface="Calibri" panose="020F0502020204030204" pitchFamily="34" charset="0"/>
-              <a:cs typeface="Times New Roman"/>
-            </a:endParaRPr>
           </a:p>
         </p:txBody>
       </p:sp>
@@ -42631,9 +39177,8 @@
           <a:p>
             <a:r>
               <a:rPr lang="en-US"/>
-              <a:t>CPP 2023-2027. Version publique. Maputo, mai 2022.</a:t>
+              <a:t>CPF 2023-2027. Version publique. Maputo, mai 2022.</a:t>
             </a:r>
-            <a:endParaRPr lang="en-US" dirty="0"/>
           </a:p>
         </p:txBody>
       </p:sp>
@@ -42764,9 +39309,8 @@
                 </a:highlight>
                 <a:latin typeface="Arial"/>
               </a:rPr>
-              <a:t>Diagnostic systématique pays (DSP) de la Banque mondiale et recommandations - Résumé</a:t>
+              <a:t>Diagnostic-pays systématique (SCD) de la Banque mondiale et recommandations – Résumé</a:t>
             </a:r>
-            <a:endParaRPr lang="en-US" dirty="0"/>
           </a:p>
         </p:txBody>
       </p:sp>
@@ -42798,7 +39342,6 @@
           </a:bodyPr>
           <a:lstStyle/>
           <a:p>
-            <a:pPr algn="just" rtl="0"/>
             <a:r>
               <a:rPr lang="en-US" sz="1700" b="0" i="0" u="none" strike="noStrike" dirty="0">
                 <a:highlight>
@@ -42808,11 +39351,10 @@
                 </a:highlight>
                 <a:latin typeface="Arial"/>
               </a:rPr>
-              <a:t>La mise à jour du DSP du Mozambique a conclu que, dans l'ensemble, les principaux défis du pays demeurent inchangés par rapport au diagnostic précédent (2016).</a:t>
+              <a:t>L'actualisation du SCD du Mozambique a conclu que, dans l'ensemble, les principaux défis du pays demeurent inchangés par rapport au diagnostic précédent (2016).</a:t>
             </a:r>
           </a:p>
           <a:p>
-            <a:pPr algn="just" rtl="0"/>
             <a:r>
               <a:rPr lang="en-US" sz="1700" b="0" i="0" u="none" strike="noStrike" dirty="0">
                 <a:highlight>
@@ -42822,22 +39364,10 @@
                 </a:highlight>
                 <a:latin typeface="Arial"/>
               </a:rPr>
-              <a:t>Pour accélérer le développement, le Mozambique doit engager une transition vers une trajectoire de développement plus inclusive, durable et résiliente (GRID).</a:t>
+              <a:t>Pour accélérer le développement, le Mozambique doit s'engager sur une trajectoire de développement plus inclusive, durable et résiliente (GRID).</a:t>
             </a:r>
           </a:p>
           <a:p>
-            <a:pPr algn="just" rtl="0"/>
-            <a:r>
-              <a:rPr lang="en-US" sz="1700" b="1" i="0" u="none" strike="noStrike" dirty="0">
-                <a:highlight>
-                  <a:srgbClr val="000000">
-                    <a:alpha val="0"/>
-                  </a:srgbClr>
-                </a:highlight>
-                <a:latin typeface="Arial"/>
-              </a:rPr>
-              <a:t>Une croissance accélérée est importante, mais il est nécessaire de revoir le modèle pour le rendre plus inclusif</a:t>
-            </a:r>
             <a:r>
               <a:rPr lang="en-US" sz="1700" b="0" i="0" u="none" strike="noStrike" dirty="0">
                 <a:highlight>
@@ -42847,11 +39377,10 @@
                 </a:highlight>
                 <a:latin typeface="Arial"/>
               </a:rPr>
-              <a:t>. Cela nécessitera une transformation structurelle accélérée, des investissements plus importants et de meilleure qualité dans sa population, ainsi qu'une réforme des institutions centrales pour améliorer l'efficacité de l'État et la gouvernance — renforçant la capacité du pays à faire face aux risques climatiques et sanitaires et à la prévention des conflits et de la violence.</a:t>
+              <a:t>Une croissance accélérée est importante, mais il est nécessaire de revoir le modèle pour le rendre plus inclusif. Cela exigera une transformation structurelle accélérée, des investissements accrus et de meilleure qualité dans la population, ainsi qu'une réforme des institutions centrales afin d'améliorer l'efficacité de l'État et la gouvernance – renforçant la capacité du pays à faire face aux risques climatiques et sanitaires et à prévenir les conflits et la violence.</a:t>
             </a:r>
           </a:p>
           <a:p>
-            <a:pPr algn="just" rtl="0"/>
             <a:r>
               <a:rPr lang="en-US" sz="1700" b="0" i="0" u="none" strike="noStrike" dirty="0">
                 <a:highlight>
@@ -42861,9 +39390,8 @@
                 </a:highlight>
                 <a:latin typeface="Arial"/>
               </a:rPr>
-              <a:t>Les réformes et politiques nécessaires pour atteindre ces objectifs ont été identifiées dans la mise à jour du DSP à partir des études récentes du GBM.</a:t>
+              <a:t>Les réformes et politiques nécessaires pour atteindre ces objectifs ont été recensées dans l'actualisation du SCD à partir d'études récentes du GBM.</a:t>
             </a:r>
-            <a:endParaRPr lang="en-US" sz="1700" dirty="0"/>
           </a:p>
         </p:txBody>
       </p:sp>
@@ -42958,19 +39486,15 @@
           <a:p>
             <a:r>
               <a:rPr lang="en-US" sz="1050" dirty="0"/>
-              <a:t>Diagnostic systématique pays (DSP) de la Banque mondiale selon les objectifs identifiés en 2016</a:t>
+              <a:t>Diagnostic-pays systématique (SCD) de la Banque mondiale selon les objectifs définis en 2016
+</a:t>
             </a:r>
-            <a:br/>
+          </a:p>
+          <a:p>
             <a:r>
               <a:rPr lang="en-US" sz="1050" dirty="0"/>
               <a:t/>
             </a:r>
-            <a:br/>
-            <a:r>
-              <a:rPr lang="en-US" sz="1050" dirty="0"/>
-              <a:t/>
-            </a:r>
-            <a:endParaRPr lang="pt-BR" sz="1050" dirty="0"/>
           </a:p>
         </p:txBody>
       </p:sp>
@@ -42997,9 +39521,8 @@
           <a:p>
             <a:r>
               <a:rPr lang="en-US"/>
-              <a:t>CPP 2023-2027. Version publique. Maputo, mai 2022.</a:t>
+              <a:t>CPF 2023-2027. Version publique. Maputo, mai 2022.</a:t>
             </a:r>
-            <a:endParaRPr lang="en-US" dirty="0"/>
           </a:p>
         </p:txBody>
       </p:sp>
@@ -43121,29 +39644,17 @@
           </a:bodyPr>
           <a:lstStyle/>
           <a:p>
-            <a:pPr algn="ctr"/>
             <a:r>
               <a:rPr lang="en-US" sz="4000" dirty="0"/>
-              <a:t>Structure de la présentation</a:t>
+              <a:t>Structure de la présentation
+</a:t>
             </a:r>
-            <a:br/>
+          </a:p>
+          <a:p>
             <a:r>
               <a:rPr lang="en-US" sz="4000" dirty="0"/>
               <a:t/>
             </a:r>
-            <a:br/>
-            <a:r>
-              <a:rPr lang="en-US" sz="4000" dirty="0"/>
-              <a:t/>
-            </a:r>
-            <a:endParaRPr lang="pt" sz="4000" b="0" i="1" u="none" strike="noStrike" dirty="0">
-              <a:highlight>
-                <a:srgbClr val="000000">
-                  <a:alpha val="0"/>
-                </a:srgbClr>
-              </a:highlight>
-              <a:latin typeface="Arial"/>
-            </a:endParaRPr>
           </a:p>
         </p:txBody>
       </p:sp>
@@ -43175,19 +39686,6 @@
           </a:bodyPr>
           <a:lstStyle/>
           <a:p>
-            <a:pPr marL="1371600" lvl="3" indent="-571500">
-              <a:lnSpc>
-                <a:spcPct val="100000"/>
-              </a:lnSpc>
-              <a:spcBef>
-                <a:spcPts val="1200"/>
-              </a:spcBef>
-              <a:spcAft>
-                <a:spcPts val="1200"/>
-              </a:spcAft>
-              <a:buFont typeface="+mj-lt"/>
-              <a:buAutoNum type="romanUcPeriod"/>
-            </a:pPr>
             <a:r>
               <a:rPr lang="en-US" sz="3200" b="1" dirty="0">
                 <a:solidFill>
@@ -43196,9 +39694,11 @@
                   </a:schemeClr>
                 </a:solidFill>
               </a:rPr>
-              <a:t>Vision du Groupe de la Banque mondiale sur les principaux défis stratégiques du pays   </a:t>
+              <a:t>Vision du Groupe de la Banque mondiale sur les principaux défis stratégiques du pays   
+</a:t>
             </a:r>
-            <a:br/>
+          </a:p>
+          <a:p>
             <a:r>
               <a:rPr lang="en-US" sz="3200" b="1" dirty="0">
                 <a:solidFill>
@@ -43209,7 +39709,8 @@
               </a:rPr>
               <a:t>Principaux enseignements du CPF précédent (2017-2021)</a:t>
             </a:r>
-            <a:br/>
+          </a:p>
+          <a:p>
             <a:r>
               <a:rPr lang="en-US" sz="3200" b="1" dirty="0">
                 <a:solidFill>
@@ -43220,7 +39721,8 @@
               </a:rPr>
               <a:t>Proposition initiale pour le CPF 2023-2027</a:t>
             </a:r>
-            <a:br/>
+          </a:p>
+          <a:p>
             <a:r>
               <a:rPr lang="en-US" sz="3200" b="1" dirty="0">
                 <a:solidFill>
@@ -43231,64 +39733,6 @@
               </a:rPr>
               <a:t/>
             </a:r>
-            <a:br/>
-            <a:r>
-              <a:rPr lang="en-US" sz="3200" b="1" dirty="0">
-                <a:solidFill>
-                  <a:schemeClr val="bg2">
-                    <a:lumMod val="90000"/>
-                  </a:schemeClr>
-                </a:solidFill>
-              </a:rPr>
-              <a:t/>
-            </a:r>
-            <a:r>
-              <a:rPr lang="en-US" sz="3200" b="1" dirty="0"/>
-              <a:t>Main lessons from the previous CPF (2017-2021)
-</a:t>
-            </a:r>
-            <a:r>
-              <a:rPr lang="en-US" sz="3200" b="1" dirty="0">
-                <a:solidFill>
-                  <a:schemeClr val="bg2">
-                    <a:lumMod val="90000"/>
-                  </a:schemeClr>
-                </a:solidFill>
-              </a:rPr>
-              <a:t>Initial Proposal for CPF 2023-2027</a:t>
-            </a:r>
-            <a:endParaRPr lang="pt-BR" sz="3200" b="1" i="0" u="none" strike="noStrike" dirty="0">
-              <a:solidFill>
-                <a:schemeClr val="bg2">
-                  <a:lumMod val="90000"/>
-                </a:schemeClr>
-              </a:solidFill>
-              <a:highlight>
-                <a:srgbClr val="000000">
-                  <a:alpha val="0"/>
-                </a:srgbClr>
-              </a:highlight>
-              <a:latin typeface="Arial"/>
-            </a:endParaRPr>
-          </a:p>
-          <a:p>
-            <a:pPr marL="1143000" lvl="3" indent="0">
-              <a:lnSpc>
-                <a:spcPct val="100000"/>
-              </a:lnSpc>
-              <a:spcBef>
-                <a:spcPts val="1200"/>
-              </a:spcBef>
-              <a:buNone/>
-            </a:pPr>
-            <a:endParaRPr lang="pt" sz="3200" b="1" i="0" u="none" strike="noStrike" dirty="0">
-              <a:highlight>
-                <a:srgbClr val="000000">
-                  <a:alpha val="0"/>
-                </a:srgbClr>
-              </a:highlight>
-              <a:latin typeface="Arial"/>
-            </a:endParaRPr>
           </a:p>
         </p:txBody>
       </p:sp>
@@ -43315,9 +39759,8 @@
           <a:p>
             <a:r>
               <a:rPr lang="en-US"/>
-              <a:t>CPP 2023-2027. Version publique. Maputo, mai 2022.</a:t>
+              <a:t>CPF 2023-2027. Version publique. Maputo, mai 2022.</a:t>
             </a:r>
-            <a:endParaRPr lang="en-US" dirty="0"/>
           </a:p>
         </p:txBody>
       </p:sp>
